--- a/blocks/E_autonomy_logic/M18_obstacle_perception/M18_LiDAR_장애물_감지와_Perception_결합.pptx
+++ b/blocks/E_autonomy_logic/M18_obstacle_perception/M18_LiDAR_장애물_감지와_Perception_결합.pptx
@@ -6115,8 +6115,8 @@
         </p:nvSpPr>
         <p:spPr>
           <a:xfrm>
-            <a:off x="658368" y="1682496"/>
-            <a:ext cx="10972800" cy="347472"/>
+            <a:off x="658368" y="1627632"/>
+            <a:ext cx="10972800" cy="256032"/>
           </a:xfrm>
           <a:prstGeom prst="rect">
             <a:avLst/>
@@ -6133,7 +6133,7 @@
               <a:spcAft>
                 <a:spcPts val="0"/>
               </a:spcAft>
-              <a:defRPr sz="1700" b="1">
+              <a:defRPr sz="1500" b="1">
                 <a:solidFill>
                   <a:srgbClr val="122C4E"/>
                 </a:solidFill>
@@ -6154,8 +6154,8 @@
         </p:nvSpPr>
         <p:spPr>
           <a:xfrm>
-            <a:off x="658368" y="2103120"/>
-            <a:ext cx="10972800" cy="493776"/>
+            <a:off x="658368" y="1956816"/>
+            <a:ext cx="10972800" cy="603504"/>
           </a:xfrm>
           <a:prstGeom prst="rect">
             <a:avLst/>
@@ -6199,7 +6199,11 @@
               </a:defRPr>
             </a:pPr>
             <a:r>
-              <a:t>파일 생성/열기: mkdir -p ~/agv_ws/src/agv_sensors/agv_sensors    &amp;&amp;    nano ~/agv_ws/src/agv_sensors/agv_sensors/lidar_processor.py</a:t>
+              <a:t>파일 생성: mkdir -p ~/agv_ws/src/agv_sensors/agv_sensors</a:t>
+            </a:r>
+            <a:br/>
+            <a:r>
+              <a:t>파일 열기: nano ~/agv_ws/src/agv_sensors/agv_sensors/lidar_processor.py</a:t>
             </a:r>
           </a:p>
         </p:txBody>
@@ -6212,8 +6216,8 @@
         </p:nvSpPr>
         <p:spPr>
           <a:xfrm>
-            <a:off x="658368" y="2761488"/>
-            <a:ext cx="10972800" cy="3383280"/>
+            <a:off x="658368" y="2706624"/>
+            <a:ext cx="10972800" cy="3364992"/>
           </a:xfrm>
           <a:prstGeom prst="rect">
             <a:avLst/>
@@ -6257,6 +6261,14 @@
               </a:defRPr>
             </a:pPr>
             <a:r>
+              <a:t>        self.subscription = self.create_subscription(LaserScan, '/scan', self.callback,</a:t>
+            </a:r>
+            <a:br/>
+            <a:r>
+              <a:t>            qos_profile_sensor_data)</a:t>
+            </a:r>
+            <a:br/>
+            <a:r>
               <a:t>        self.publisher = self.create_publisher(Float32, '/obstacle_distance', 10)</a:t>
             </a:r>
             <a:br/>
@@ -6289,22 +6301,6 @@
             <a:r>
               <a:t>def main():</a:t>
             </a:r>
-            <a:br/>
-            <a:r>
-              <a:t>    rclpy.init()</a:t>
-            </a:r>
-            <a:br/>
-            <a:r>
-              <a:t>    node = LidarProcessor()</a:t>
-            </a:r>
-            <a:br/>
-            <a:r>
-              <a:t>    try:</a:t>
-            </a:r>
-            <a:br/>
-            <a:r>
-              <a:t>        rclpy.spin(node)</a:t>
-            </a:r>
           </a:p>
         </p:txBody>
       </p:sp>
@@ -6316,7 +6312,7 @@
         </p:nvSpPr>
         <p:spPr>
           <a:xfrm>
-            <a:off x="749808" y="6199632"/>
+            <a:off x="749808" y="6181344"/>
             <a:ext cx="10789920" cy="201168"/>
           </a:xfrm>
           <a:prstGeom prst="rect">
@@ -6587,8 +6583,8 @@
         </p:nvSpPr>
         <p:spPr>
           <a:xfrm>
-            <a:off x="658368" y="1682496"/>
-            <a:ext cx="10972800" cy="347472"/>
+            <a:off x="658368" y="1627632"/>
+            <a:ext cx="10972800" cy="256032"/>
           </a:xfrm>
           <a:prstGeom prst="rect">
             <a:avLst/>
@@ -6605,7 +6601,7 @@
               <a:spcAft>
                 <a:spcPts val="0"/>
               </a:spcAft>
-              <a:defRPr sz="1700" b="1">
+              <a:defRPr sz="1500" b="1">
                 <a:solidFill>
                   <a:srgbClr val="122C4E"/>
                 </a:solidFill>
@@ -6626,8 +6622,8 @@
         </p:nvSpPr>
         <p:spPr>
           <a:xfrm>
-            <a:off x="658368" y="2103120"/>
-            <a:ext cx="10972800" cy="493776"/>
+            <a:off x="658368" y="1956816"/>
+            <a:ext cx="10972800" cy="603504"/>
           </a:xfrm>
           <a:prstGeom prst="rect">
             <a:avLst/>
@@ -6671,7 +6667,11 @@
               </a:defRPr>
             </a:pPr>
             <a:r>
-              <a:t>파일 생성/열기: mkdir -p ~/agv_ws/src/agv_sensors/agv_sensors    &amp;&amp;    nano ~/agv_ws/src/agv_sensors/agv_sensors/lidar_processor.py</a:t>
+              <a:t>파일 생성: mkdir -p ~/agv_ws/src/agv_sensors/agv_sensors</a:t>
+            </a:r>
+            <a:br/>
+            <a:r>
+              <a:t>파일 열기: nano ~/agv_ws/src/agv_sensors/agv_sensors/lidar_processor.py</a:t>
             </a:r>
           </a:p>
         </p:txBody>
@@ -6684,8 +6684,8 @@
         </p:nvSpPr>
         <p:spPr>
           <a:xfrm>
-            <a:off x="658368" y="2761488"/>
-            <a:ext cx="10972800" cy="3383280"/>
+            <a:off x="658368" y="2706624"/>
+            <a:ext cx="10972800" cy="3364992"/>
           </a:xfrm>
           <a:prstGeom prst="rect">
             <a:avLst/>
@@ -6729,6 +6729,22 @@
               </a:defRPr>
             </a:pPr>
             <a:r>
+              <a:t>    rclpy.init()</a:t>
+            </a:r>
+            <a:br/>
+            <a:r>
+              <a:t>    node = LidarProcessor()</a:t>
+            </a:r>
+            <a:br/>
+            <a:r>
+              <a:t>    try:</a:t>
+            </a:r>
+            <a:br/>
+            <a:r>
+              <a:t>        rclpy.spin(node)</a:t>
+            </a:r>
+            <a:br/>
+            <a:r>
               <a:t>    except KeyboardInterrupt:</a:t>
             </a:r>
             <a:br/>
@@ -6762,7 +6778,7 @@
         </p:nvSpPr>
         <p:spPr>
           <a:xfrm>
-            <a:off x="749808" y="6199632"/>
+            <a:off x="749808" y="6181344"/>
             <a:ext cx="10789920" cy="201168"/>
           </a:xfrm>
           <a:prstGeom prst="rect">
@@ -7033,8 +7049,8 @@
         </p:nvSpPr>
         <p:spPr>
           <a:xfrm>
-            <a:off x="658368" y="1682496"/>
-            <a:ext cx="10972800" cy="347472"/>
+            <a:off x="658368" y="1627632"/>
+            <a:ext cx="10972800" cy="256032"/>
           </a:xfrm>
           <a:prstGeom prst="rect">
             <a:avLst/>
@@ -7051,7 +7067,7 @@
               <a:spcAft>
                 <a:spcPts val="0"/>
               </a:spcAft>
-              <a:defRPr sz="1700" b="1">
+              <a:defRPr sz="1500" b="1">
                 <a:solidFill>
                   <a:srgbClr val="122C4E"/>
                 </a:solidFill>
@@ -7072,8 +7088,8 @@
         </p:nvSpPr>
         <p:spPr>
           <a:xfrm>
-            <a:off x="658368" y="2103120"/>
-            <a:ext cx="10972800" cy="493776"/>
+            <a:off x="658368" y="1956816"/>
+            <a:ext cx="10972800" cy="603504"/>
           </a:xfrm>
           <a:prstGeom prst="rect">
             <a:avLst/>
@@ -7117,7 +7133,11 @@
               </a:defRPr>
             </a:pPr>
             <a:r>
-              <a:t>파일 생성/열기: mkdir -p ~/agv_ws/src/agv_control/agv_control    &amp;&amp;    nano ~/agv_ws/src/agv_control/agv_control/safety_controller.py</a:t>
+              <a:t>파일 생성: mkdir -p ~/agv_ws/src/agv_control/agv_control</a:t>
+            </a:r>
+            <a:br/>
+            <a:r>
+              <a:t>파일 열기: nano ~/agv_ws/src/agv_control/agv_control/safety_controller.py</a:t>
             </a:r>
           </a:p>
         </p:txBody>
@@ -7130,8 +7150,8 @@
         </p:nvSpPr>
         <p:spPr>
           <a:xfrm>
-            <a:off x="658368" y="2761488"/>
-            <a:ext cx="10972800" cy="3383280"/>
+            <a:off x="658368" y="2706624"/>
+            <a:ext cx="10972800" cy="3364992"/>
           </a:xfrm>
           <a:prstGeom prst="rect">
             <a:avLst/>
@@ -7215,14 +7235,6 @@
             <a:r>
               <a:t>        self.declare_parameter('stop_distance', 0.5)</a:t>
             </a:r>
-            <a:br/>
-            <a:r>
-              <a:t>        self.declare_parameter('front_half_angle_deg', 15.0)</a:t>
-            </a:r>
-            <a:br/>
-            <a:r>
-              <a:t>        self.obstacle_distance = math.inf</a:t>
-            </a:r>
           </a:p>
         </p:txBody>
       </p:sp>
@@ -7234,7 +7246,7 @@
         </p:nvSpPr>
         <p:spPr>
           <a:xfrm>
-            <a:off x="749808" y="6199632"/>
+            <a:off x="749808" y="6181344"/>
             <a:ext cx="10789920" cy="201168"/>
           </a:xfrm>
           <a:prstGeom prst="rect">
@@ -7505,8 +7517,8 @@
         </p:nvSpPr>
         <p:spPr>
           <a:xfrm>
-            <a:off x="658368" y="1682496"/>
-            <a:ext cx="10972800" cy="347472"/>
+            <a:off x="658368" y="1627632"/>
+            <a:ext cx="10972800" cy="256032"/>
           </a:xfrm>
           <a:prstGeom prst="rect">
             <a:avLst/>
@@ -7523,7 +7535,7 @@
               <a:spcAft>
                 <a:spcPts val="0"/>
               </a:spcAft>
-              <a:defRPr sz="1700" b="1">
+              <a:defRPr sz="1500" b="1">
                 <a:solidFill>
                   <a:srgbClr val="122C4E"/>
                 </a:solidFill>
@@ -7544,8 +7556,8 @@
         </p:nvSpPr>
         <p:spPr>
           <a:xfrm>
-            <a:off x="658368" y="2103120"/>
-            <a:ext cx="10972800" cy="493776"/>
+            <a:off x="658368" y="1956816"/>
+            <a:ext cx="10972800" cy="603504"/>
           </a:xfrm>
           <a:prstGeom prst="rect">
             <a:avLst/>
@@ -7589,7 +7601,11 @@
               </a:defRPr>
             </a:pPr>
             <a:r>
-              <a:t>파일 생성/열기: mkdir -p ~/agv_ws/src/agv_control/agv_control    &amp;&amp;    nano ~/agv_ws/src/agv_control/agv_control/safety_controller.py</a:t>
+              <a:t>파일 생성: mkdir -p ~/agv_ws/src/agv_control/agv_control</a:t>
+            </a:r>
+            <a:br/>
+            <a:r>
+              <a:t>파일 열기: nano ~/agv_ws/src/agv_control/agv_control/safety_controller.py</a:t>
             </a:r>
           </a:p>
         </p:txBody>
@@ -7602,8 +7618,8 @@
         </p:nvSpPr>
         <p:spPr>
           <a:xfrm>
-            <a:off x="658368" y="2761488"/>
-            <a:ext cx="10972800" cy="3383280"/>
+            <a:off x="658368" y="2706624"/>
+            <a:ext cx="10972800" cy="3364992"/>
           </a:xfrm>
           <a:prstGeom prst="rect">
             <a:avLst/>
@@ -7647,6 +7663,14 @@
               </a:defRPr>
             </a:pPr>
             <a:r>
+              <a:t>        self.declare_parameter('front_half_angle_deg', 15.0)</a:t>
+            </a:r>
+            <a:br/>
+            <a:r>
+              <a:t>        self.obstacle_distance = math.inf</a:t>
+            </a:r>
+            <a:br/>
+            <a:r>
               <a:t>        self.create_subscription(LaserScan, '/scan', self.scan_callback, 10)</a:t>
             </a:r>
             <a:br/>
@@ -7679,22 +7703,6 @@
               <a:t>        self.obstacle_distance = min(readings) if readings else math.inf</a:t>
             </a:r>
             <a:br/>
-            <a:br/>
-            <a:r>
-              <a:t>    def command_callback(self, command):</a:t>
-            </a:r>
-            <a:br/>
-            <a:r>
-              <a:t>        safe = Twist()</a:t>
-            </a:r>
-            <a:br/>
-            <a:r>
-              <a:t>        if self.obstacle_distance &gt;= self.get_parameter('stop_distance').value or command.linear.x &lt;= 0.0:</a:t>
-            </a:r>
-            <a:br/>
-            <a:r>
-              <a:t>            safe = command</a:t>
-            </a:r>
           </a:p>
         </p:txBody>
       </p:sp>
@@ -7706,7 +7714,7 @@
         </p:nvSpPr>
         <p:spPr>
           <a:xfrm>
-            <a:off x="749808" y="6199632"/>
+            <a:off x="749808" y="6181344"/>
             <a:ext cx="10789920" cy="201168"/>
           </a:xfrm>
           <a:prstGeom prst="rect">
@@ -7977,8 +7985,8 @@
         </p:nvSpPr>
         <p:spPr>
           <a:xfrm>
-            <a:off x="658368" y="1682496"/>
-            <a:ext cx="10972800" cy="347472"/>
+            <a:off x="658368" y="1627632"/>
+            <a:ext cx="10972800" cy="256032"/>
           </a:xfrm>
           <a:prstGeom prst="rect">
             <a:avLst/>
@@ -7995,7 +8003,7 @@
               <a:spcAft>
                 <a:spcPts val="0"/>
               </a:spcAft>
-              <a:defRPr sz="1700" b="1">
+              <a:defRPr sz="1500" b="1">
                 <a:solidFill>
                   <a:srgbClr val="122C4E"/>
                 </a:solidFill>
@@ -8016,8 +8024,8 @@
         </p:nvSpPr>
         <p:spPr>
           <a:xfrm>
-            <a:off x="658368" y="2103120"/>
-            <a:ext cx="10972800" cy="493776"/>
+            <a:off x="658368" y="1956816"/>
+            <a:ext cx="10972800" cy="603504"/>
           </a:xfrm>
           <a:prstGeom prst="rect">
             <a:avLst/>
@@ -8061,7 +8069,11 @@
               </a:defRPr>
             </a:pPr>
             <a:r>
-              <a:t>파일 생성/열기: mkdir -p ~/agv_ws/src/agv_control/agv_control    &amp;&amp;    nano ~/agv_ws/src/agv_control/agv_control/safety_controller.py</a:t>
+              <a:t>파일 생성: mkdir -p ~/agv_ws/src/agv_control/agv_control</a:t>
+            </a:r>
+            <a:br/>
+            <a:r>
+              <a:t>파일 열기: nano ~/agv_ws/src/agv_control/agv_control/safety_controller.py</a:t>
             </a:r>
           </a:p>
         </p:txBody>
@@ -8074,8 +8086,8 @@
         </p:nvSpPr>
         <p:spPr>
           <a:xfrm>
-            <a:off x="658368" y="2761488"/>
-            <a:ext cx="10972800" cy="3383280"/>
+            <a:off x="658368" y="2706624"/>
+            <a:ext cx="10972800" cy="3364992"/>
           </a:xfrm>
           <a:prstGeom prst="rect">
             <a:avLst/>
@@ -8119,6 +8131,22 @@
               </a:defRPr>
             </a:pPr>
             <a:r>
+              <a:t>    def command_callback(self, command):</a:t>
+            </a:r>
+            <a:br/>
+            <a:r>
+              <a:t>        safe = Twist()</a:t>
+            </a:r>
+            <a:br/>
+            <a:r>
+              <a:t>        if self.obstacle_distance &gt;= self.get_parameter('stop_distance').value or command.linear.x &lt;= 0.0:</a:t>
+            </a:r>
+            <a:br/>
+            <a:r>
+              <a:t>            safe = command</a:t>
+            </a:r>
+            <a:br/>
+            <a:r>
               <a:t>        else:</a:t>
             </a:r>
             <a:br/>
@@ -8146,30 +8174,6 @@
             <a:r>
               <a:t>    try:</a:t>
             </a:r>
-            <a:br/>
-            <a:r>
-              <a:t>        rclpy.spin(node)</a:t>
-            </a:r>
-            <a:br/>
-            <a:r>
-              <a:t>    except KeyboardInterrupt:</a:t>
-            </a:r>
-            <a:br/>
-            <a:r>
-              <a:t>        pass</a:t>
-            </a:r>
-            <a:br/>
-            <a:r>
-              <a:t>    finally:</a:t>
-            </a:r>
-            <a:br/>
-            <a:r>
-              <a:t>        node.destroy_node()</a:t>
-            </a:r>
-            <a:br/>
-            <a:r>
-              <a:t>        if rclpy.ok():</a:t>
-            </a:r>
           </a:p>
         </p:txBody>
       </p:sp>
@@ -8181,7 +8185,7 @@
         </p:nvSpPr>
         <p:spPr>
           <a:xfrm>
-            <a:off x="749808" y="6199632"/>
+            <a:off x="749808" y="6181344"/>
             <a:ext cx="10789920" cy="201168"/>
           </a:xfrm>
           <a:prstGeom prst="rect">
@@ -8452,8 +8456,8 @@
         </p:nvSpPr>
         <p:spPr>
           <a:xfrm>
-            <a:off x="658368" y="1682496"/>
-            <a:ext cx="10972800" cy="347472"/>
+            <a:off x="658368" y="1627632"/>
+            <a:ext cx="10972800" cy="256032"/>
           </a:xfrm>
           <a:prstGeom prst="rect">
             <a:avLst/>
@@ -8470,7 +8474,7 @@
               <a:spcAft>
                 <a:spcPts val="0"/>
               </a:spcAft>
-              <a:defRPr sz="1700" b="1">
+              <a:defRPr sz="1500" b="1">
                 <a:solidFill>
                   <a:srgbClr val="122C4E"/>
                 </a:solidFill>
@@ -8491,8 +8495,8 @@
         </p:nvSpPr>
         <p:spPr>
           <a:xfrm>
-            <a:off x="658368" y="2103120"/>
-            <a:ext cx="10972800" cy="493776"/>
+            <a:off x="658368" y="1956816"/>
+            <a:ext cx="10972800" cy="603504"/>
           </a:xfrm>
           <a:prstGeom prst="rect">
             <a:avLst/>
@@ -8536,7 +8540,11 @@
               </a:defRPr>
             </a:pPr>
             <a:r>
-              <a:t>파일 생성/열기: mkdir -p ~/agv_ws/src/agv_control/agv_control    &amp;&amp;    nano ~/agv_ws/src/agv_control/agv_control/safety_controller.py</a:t>
+              <a:t>파일 생성: mkdir -p ~/agv_ws/src/agv_control/agv_control</a:t>
+            </a:r>
+            <a:br/>
+            <a:r>
+              <a:t>파일 열기: nano ~/agv_ws/src/agv_control/agv_control/safety_controller.py</a:t>
             </a:r>
           </a:p>
         </p:txBody>
@@ -8549,8 +8557,8 @@
         </p:nvSpPr>
         <p:spPr>
           <a:xfrm>
-            <a:off x="658368" y="2761488"/>
-            <a:ext cx="10972800" cy="3383280"/>
+            <a:off x="658368" y="2706624"/>
+            <a:ext cx="10972800" cy="3364992"/>
           </a:xfrm>
           <a:prstGeom prst="rect">
             <a:avLst/>
@@ -8594,6 +8602,30 @@
               </a:defRPr>
             </a:pPr>
             <a:r>
+              <a:t>        rclpy.spin(node)</a:t>
+            </a:r>
+            <a:br/>
+            <a:r>
+              <a:t>    except KeyboardInterrupt:</a:t>
+            </a:r>
+            <a:br/>
+            <a:r>
+              <a:t>        pass</a:t>
+            </a:r>
+            <a:br/>
+            <a:r>
+              <a:t>    finally:</a:t>
+            </a:r>
+            <a:br/>
+            <a:r>
+              <a:t>        node.destroy_node()</a:t>
+            </a:r>
+            <a:br/>
+            <a:r>
+              <a:t>        if rclpy.ok():</a:t>
+            </a:r>
+            <a:br/>
+            <a:r>
               <a:t>            rclpy.shutdown()</a:t>
             </a:r>
           </a:p>
@@ -8607,7 +8639,7 @@
         </p:nvSpPr>
         <p:spPr>
           <a:xfrm>
-            <a:off x="749808" y="6199632"/>
+            <a:off x="749808" y="6181344"/>
             <a:ext cx="10789920" cy="201168"/>
           </a:xfrm>
           <a:prstGeom prst="rect">
@@ -8878,8 +8910,8 @@
         </p:nvSpPr>
         <p:spPr>
           <a:xfrm>
-            <a:off x="658368" y="1682496"/>
-            <a:ext cx="10972800" cy="347472"/>
+            <a:off x="658368" y="1627632"/>
+            <a:ext cx="10972800" cy="256032"/>
           </a:xfrm>
           <a:prstGeom prst="rect">
             <a:avLst/>
@@ -8896,7 +8928,7 @@
               <a:spcAft>
                 <a:spcPts val="0"/>
               </a:spcAft>
-              <a:defRPr sz="1700" b="1">
+              <a:defRPr sz="1500" b="1">
                 <a:solidFill>
                   <a:srgbClr val="122C4E"/>
                 </a:solidFill>
@@ -8917,8 +8949,8 @@
         </p:nvSpPr>
         <p:spPr>
           <a:xfrm>
-            <a:off x="658368" y="2103120"/>
-            <a:ext cx="10972800" cy="493776"/>
+            <a:off x="658368" y="1956816"/>
+            <a:ext cx="10972800" cy="603504"/>
           </a:xfrm>
           <a:prstGeom prst="rect">
             <a:avLst/>
@@ -8962,7 +8994,11 @@
               </a:defRPr>
             </a:pPr>
             <a:r>
-              <a:t>파일 생성/열기: mkdir -p ~/agv_ws/src/agv_bringup/config    &amp;&amp;    nano ~/agv_ws/src/agv_bringup/config/mission.yaml</a:t>
+              <a:t>파일 생성: mkdir -p ~/agv_ws/src/agv_bringup/config</a:t>
+            </a:r>
+            <a:br/>
+            <a:r>
+              <a:t>파일 열기: nano ~/agv_ws/src/agv_bringup/config/mission.yaml</a:t>
             </a:r>
           </a:p>
         </p:txBody>
@@ -8975,8 +9011,8 @@
         </p:nvSpPr>
         <p:spPr>
           <a:xfrm>
-            <a:off x="658368" y="2761488"/>
-            <a:ext cx="10972800" cy="3383280"/>
+            <a:off x="658368" y="2706624"/>
+            <a:ext cx="10972800" cy="3364992"/>
           </a:xfrm>
           <a:prstGeom prst="rect">
             <a:avLst/>
@@ -9077,7 +9113,7 @@
         </p:nvSpPr>
         <p:spPr>
           <a:xfrm>
-            <a:off x="749808" y="6199632"/>
+            <a:off x="749808" y="6181344"/>
             <a:ext cx="10789920" cy="201168"/>
           </a:xfrm>
           <a:prstGeom prst="rect">
@@ -12085,7 +12121,7 @@
         </p:nvSpPr>
         <p:spPr>
           <a:xfrm>
-            <a:off x="914400" y="1810512"/>
+            <a:off x="914400" y="1773936"/>
             <a:ext cx="3840480" cy="256032"/>
           </a:xfrm>
           <a:prstGeom prst="rect">
@@ -12124,8 +12160,8 @@
         </p:nvSpPr>
         <p:spPr>
           <a:xfrm>
-            <a:off x="914400" y="2121408"/>
-            <a:ext cx="9966960" cy="256032"/>
+            <a:off x="914400" y="2048255"/>
+            <a:ext cx="9966960" cy="475488"/>
           </a:xfrm>
           <a:prstGeom prst="rect">
             <a:avLst/>
@@ -12142,7 +12178,7 @@
               <a:spcAft>
                 <a:spcPts val="0"/>
               </a:spcAft>
-              <a:defRPr sz="1200" b="0">
+              <a:defRPr sz="1000" b="0">
                 <a:solidFill>
                   <a:srgbClr val="225B9B"/>
                 </a:solidFill>
@@ -12163,7 +12199,7 @@
         </p:nvSpPr>
         <p:spPr>
           <a:xfrm>
-            <a:off x="914400" y="2816352"/>
+            <a:off x="914400" y="2852928"/>
             <a:ext cx="3840480" cy="256032"/>
           </a:xfrm>
           <a:prstGeom prst="rect">
@@ -12203,7 +12239,7 @@
         <p:spPr>
           <a:xfrm>
             <a:off x="914400" y="3127248"/>
-            <a:ext cx="9966960" cy="256032"/>
+            <a:ext cx="9966960" cy="475488"/>
           </a:xfrm>
           <a:prstGeom prst="rect">
             <a:avLst/>
@@ -12220,7 +12256,7 @@
               <a:spcAft>
                 <a:spcPts val="0"/>
               </a:spcAft>
-              <a:defRPr sz="1200" b="0">
+              <a:defRPr sz="1000" b="0">
                 <a:solidFill>
                   <a:srgbClr val="225B9B"/>
                 </a:solidFill>
@@ -12241,7 +12277,7 @@
         </p:nvSpPr>
         <p:spPr>
           <a:xfrm>
-            <a:off x="914400" y="3822191"/>
+            <a:off x="914400" y="3931920"/>
             <a:ext cx="3840480" cy="256032"/>
           </a:xfrm>
           <a:prstGeom prst="rect">
@@ -12280,8 +12316,8 @@
         </p:nvSpPr>
         <p:spPr>
           <a:xfrm>
-            <a:off x="914400" y="4133087"/>
-            <a:ext cx="9966960" cy="256032"/>
+            <a:off x="914400" y="4206240"/>
+            <a:ext cx="9966960" cy="475488"/>
           </a:xfrm>
           <a:prstGeom prst="rect">
             <a:avLst/>
@@ -12298,7 +12334,7 @@
               <a:spcAft>
                 <a:spcPts val="0"/>
               </a:spcAft>
-              <a:defRPr sz="1200" b="0">
+              <a:defRPr sz="1000" b="0">
                 <a:solidFill>
                   <a:srgbClr val="225B9B"/>
                 </a:solidFill>
@@ -12319,7 +12355,7 @@
         </p:nvSpPr>
         <p:spPr>
           <a:xfrm>
-            <a:off x="914400" y="4828032"/>
+            <a:off x="914400" y="5010912"/>
             <a:ext cx="3840480" cy="256032"/>
           </a:xfrm>
           <a:prstGeom prst="rect">
@@ -12358,8 +12394,8 @@
         </p:nvSpPr>
         <p:spPr>
           <a:xfrm>
-            <a:off x="914400" y="5138928"/>
-            <a:ext cx="9966960" cy="256032"/>
+            <a:off x="914400" y="5285232"/>
+            <a:ext cx="9966960" cy="475488"/>
           </a:xfrm>
           <a:prstGeom prst="rect">
             <a:avLst/>
@@ -12376,7 +12412,7 @@
               <a:spcAft>
                 <a:spcPts val="0"/>
               </a:spcAft>
-              <a:defRPr sz="1200" b="0">
+              <a:defRPr sz="1000" b="0">
                 <a:solidFill>
                   <a:srgbClr val="225B9B"/>
                 </a:solidFill>
@@ -15122,8 +15158,8 @@
         </p:nvSpPr>
         <p:spPr>
           <a:xfrm>
-            <a:off x="658368" y="1682496"/>
-            <a:ext cx="10972800" cy="347472"/>
+            <a:off x="658368" y="1627632"/>
+            <a:ext cx="10972800" cy="256032"/>
           </a:xfrm>
           <a:prstGeom prst="rect">
             <a:avLst/>
@@ -15140,7 +15176,7 @@
               <a:spcAft>
                 <a:spcPts val="0"/>
               </a:spcAft>
-              <a:defRPr sz="1700" b="1">
+              <a:defRPr sz="1500" b="1">
                 <a:solidFill>
                   <a:srgbClr val="122C4E"/>
                 </a:solidFill>
@@ -15161,8 +15197,8 @@
         </p:nvSpPr>
         <p:spPr>
           <a:xfrm>
-            <a:off x="658368" y="2103120"/>
-            <a:ext cx="10972800" cy="493776"/>
+            <a:off x="658368" y="1956816"/>
+            <a:ext cx="10972800" cy="603504"/>
           </a:xfrm>
           <a:prstGeom prst="rect">
             <a:avLst/>
@@ -15206,7 +15242,11 @@
               </a:defRPr>
             </a:pPr>
             <a:r>
-              <a:t>파일 생성/열기: mkdir -p ~/agv_ws/src/agv_sensors/agv_sensors    &amp;&amp;    nano ~/agv_ws/src/agv_sensors/agv_sensors/lidar_processor.py</a:t>
+              <a:t>파일 생성: mkdir -p ~/agv_ws/src/agv_sensors/agv_sensors</a:t>
+            </a:r>
+            <a:br/>
+            <a:r>
+              <a:t>파일 열기: nano ~/agv_ws/src/agv_sensors/agv_sensors/lidar_processor.py</a:t>
             </a:r>
           </a:p>
         </p:txBody>
@@ -15219,8 +15259,8 @@
         </p:nvSpPr>
         <p:spPr>
           <a:xfrm>
-            <a:off x="658368" y="2761488"/>
-            <a:ext cx="10972800" cy="3383280"/>
+            <a:off x="658368" y="2706624"/>
+            <a:ext cx="10972800" cy="3364992"/>
           </a:xfrm>
           <a:prstGeom prst="rect">
             <a:avLst/>
@@ -15304,14 +15344,6 @@
             <a:r>
               <a:t>        self.declare_parameter('front_half_angle_deg', 15.0)</a:t>
             </a:r>
-            <a:br/>
-            <a:r>
-              <a:t>        self.subscription = self.create_subscription(LaserScan, '/scan', self.callback,</a:t>
-            </a:r>
-            <a:br/>
-            <a:r>
-              <a:t>            qos_profile_sensor_data)</a:t>
-            </a:r>
           </a:p>
         </p:txBody>
       </p:sp>
@@ -15323,7 +15355,7 @@
         </p:nvSpPr>
         <p:spPr>
           <a:xfrm>
-            <a:off x="749808" y="6199632"/>
+            <a:off x="749808" y="6181344"/>
             <a:ext cx="10789920" cy="201168"/>
           </a:xfrm>
           <a:prstGeom prst="rect">

--- a/blocks/E_autonomy_logic/M18_obstacle_perception/M18_LiDAR_장애물_감지와_Perception_결합.pptx
+++ b/blocks/E_autonomy_logic/M18_obstacle_perception/M18_LiDAR_장애물_감지와_Perception_결합.pptx
@@ -28,6 +28,8 @@
     <p:sldId id="276" r:id="rId28"/>
     <p:sldId id="277" r:id="rId29"/>
     <p:sldId id="278" r:id="rId30"/>
+    <p:sldId id="279" r:id="rId31"/>
+    <p:sldId id="280" r:id="rId32"/>
   </p:sldIdLst>
   <p:sldSz cx="12191999" cy="6858000" type="screen4x3"/>
   <p:notesSz cx="6858000" cy="9144000"/>
@@ -614,12 +616,12 @@
           <a:lstStyle/>
           <a:p>
             <a:r>
-              <a:t>[설명] ~/agv_ws/src/agv_sensors/agv_sensors/lidar_processor.py의 전체 파일을 2/3 구간으로 작성한다.</a:t>
-            </a:r>
-          </a:p>
-          <a:p>
-            <a:r>
-              <a:t>[실행] nano ~/agv_ws/src/agv_sensors/agv_sensors/lidar_processor.py</a:t>
+              <a:t>[설명] ~/ros2_curri/agv_ws/src/agv_sensors/agv_sensors/lidar_processor.py의 전체 파일을 2/3 구간으로 작성한다.</a:t>
+            </a:r>
+          </a:p>
+          <a:p>
+            <a:r>
+              <a:t>[실행] nano ~/ros2_curri/agv_ws/src/agv_sensors/agv_sensors/lidar_processor.py</a:t>
             </a:r>
           </a:p>
           <a:p>
@@ -704,12 +706,12 @@
           <a:lstStyle/>
           <a:p>
             <a:r>
-              <a:t>[설명] ~/agv_ws/src/agv_sensors/agv_sensors/lidar_processor.py의 전체 파일을 3/3 구간으로 작성한다.</a:t>
-            </a:r>
-          </a:p>
-          <a:p>
-            <a:r>
-              <a:t>[실행] nano ~/agv_ws/src/agv_sensors/agv_sensors/lidar_processor.py</a:t>
+              <a:t>[설명] ~/ros2_curri/agv_ws/src/agv_sensors/agv_sensors/lidar_processor.py의 전체 파일을 3/3 구간으로 작성한다.</a:t>
+            </a:r>
+          </a:p>
+          <a:p>
+            <a:r>
+              <a:t>[실행] nano ~/ros2_curri/agv_ws/src/agv_sensors/agv_sensors/lidar_processor.py</a:t>
             </a:r>
           </a:p>
           <a:p>
@@ -794,12 +796,12 @@
           <a:lstStyle/>
           <a:p>
             <a:r>
-              <a:t>[설명] ~/agv_ws/src/agv_control/agv_control/safety_controller.py의 전체 파일을 1/4 구간으로 작성한다.</a:t>
-            </a:r>
-          </a:p>
-          <a:p>
-            <a:r>
-              <a:t>[실행] nano ~/agv_ws/src/agv_control/agv_control/safety_controller.py</a:t>
+              <a:t>[설명] ~/ros2_curri/agv_ws/src/agv_control/agv_control/safety_controller.py의 전체 파일을 1/4 구간으로 작성한다.</a:t>
+            </a:r>
+          </a:p>
+          <a:p>
+            <a:r>
+              <a:t>[실행] nano ~/ros2_curri/agv_ws/src/agv_control/agv_control/safety_controller.py</a:t>
             </a:r>
           </a:p>
           <a:p>
@@ -884,12 +886,12 @@
           <a:lstStyle/>
           <a:p>
             <a:r>
-              <a:t>[설명] ~/agv_ws/src/agv_control/agv_control/safety_controller.py의 전체 파일을 2/4 구간으로 작성한다.</a:t>
-            </a:r>
-          </a:p>
-          <a:p>
-            <a:r>
-              <a:t>[실행] nano ~/agv_ws/src/agv_control/agv_control/safety_controller.py</a:t>
+              <a:t>[설명] ~/ros2_curri/agv_ws/src/agv_control/agv_control/safety_controller.py의 전체 파일을 2/4 구간으로 작성한다.</a:t>
+            </a:r>
+          </a:p>
+          <a:p>
+            <a:r>
+              <a:t>[실행] nano ~/ros2_curri/agv_ws/src/agv_control/agv_control/safety_controller.py</a:t>
             </a:r>
           </a:p>
           <a:p>
@@ -974,12 +976,12 @@
           <a:lstStyle/>
           <a:p>
             <a:r>
-              <a:t>[설명] ~/agv_ws/src/agv_control/agv_control/safety_controller.py의 전체 파일을 3/4 구간으로 작성한다.</a:t>
-            </a:r>
-          </a:p>
-          <a:p>
-            <a:r>
-              <a:t>[실행] nano ~/agv_ws/src/agv_control/agv_control/safety_controller.py</a:t>
+              <a:t>[설명] ~/ros2_curri/agv_ws/src/agv_control/agv_control/safety_controller.py의 전체 파일을 3/4 구간으로 작성한다.</a:t>
+            </a:r>
+          </a:p>
+          <a:p>
+            <a:r>
+              <a:t>[실행] nano ~/ros2_curri/agv_ws/src/agv_control/agv_control/safety_controller.py</a:t>
             </a:r>
           </a:p>
           <a:p>
@@ -1064,12 +1066,12 @@
           <a:lstStyle/>
           <a:p>
             <a:r>
-              <a:t>[설명] ~/agv_ws/src/agv_control/agv_control/safety_controller.py의 전체 파일을 4/4 구간으로 작성한다.</a:t>
-            </a:r>
-          </a:p>
-          <a:p>
-            <a:r>
-              <a:t>[실행] nano ~/agv_ws/src/agv_control/agv_control/safety_controller.py</a:t>
+              <a:t>[설명] ~/ros2_curri/agv_ws/src/agv_control/agv_control/safety_controller.py의 전체 파일을 4/4 구간으로 작성한다.</a:t>
+            </a:r>
+          </a:p>
+          <a:p>
+            <a:r>
+              <a:t>[실행] nano ~/ros2_curri/agv_ws/src/agv_control/agv_control/safety_controller.py</a:t>
             </a:r>
           </a:p>
           <a:p>
@@ -1154,12 +1156,12 @@
           <a:lstStyle/>
           <a:p>
             <a:r>
-              <a:t>[설명] ~/agv_ws/src/agv_bringup/config/mission.yaml의 전체 파일을 1/1 구간으로 작성한다.</a:t>
-            </a:r>
-          </a:p>
-          <a:p>
-            <a:r>
-              <a:t>[실행] nano ~/agv_ws/src/agv_bringup/config/mission.yaml</a:t>
+              <a:t>[설명] ~/ros2_curri/agv_ws/src/agv_bringup/config/mission.yaml의 전체 파일을 1/2 구간으로 작성한다.</a:t>
+            </a:r>
+          </a:p>
+          <a:p>
+            <a:r>
+              <a:t>[실행] nano ~/ros2_curri/agv_ws/src/agv_bringup/config/mission.yaml</a:t>
             </a:r>
           </a:p>
           <a:p>
@@ -1244,22 +1246,17 @@
           <a:lstStyle/>
           <a:p>
             <a:r>
-              <a:t>[설명] build/source/run을 생략 없이 실행한다.</a:t>
-            </a:r>
-          </a:p>
-          <a:p>
-            <a:r>
-              <a:t>[실행] source ~/agv_ws/install/setup.bash</a:t>
-            </a:r>
-          </a:p>
-          <a:p>
-            <a:r>
-              <a:t>ros2 run agv_control safety_controller --ros-args -p stop_distance:=0.5</a:t>
-            </a:r>
-          </a:p>
-          <a:p>
-            <a:r>
-              <a:t>[확인] 0.5 m 안 장애물에서 forward cmd_vel이 zero Twist로 바뀌는 조건을 설명한다.</a:t>
+              <a:t>[설명] ~/ros2_curri/agv_ws/src/agv_bringup/config/mission.yaml의 전체 파일을 2/2 구간으로 작성한다.</a:t>
+            </a:r>
+          </a:p>
+          <a:p>
+            <a:r>
+              <a:t>[실행] nano ~/ros2_curri/agv_ws/src/agv_bringup/config/mission.yaml</a:t>
+            </a:r>
+          </a:p>
+          <a:p>
+            <a:r>
+              <a:t>[확인] 코드를 저장하고 다음 코드 슬라이드 또는 build 단계로 이동한다.</a:t>
             </a:r>
           </a:p>
           <a:p>
@@ -1269,7 +1266,7 @@
           </a:p>
           <a:p>
             <a:r>
-              <a:t>[오류] 오류가 나면 현재 폴더, source, 파일 경로를 먼저 확인한다.</a:t>
+              <a:t>[오류] 들여쓰기·XML 태그·따옴표가 슬라이드와 정확히 같은지 확인한다.</a:t>
             </a:r>
           </a:p>
         </p:txBody>
@@ -1339,17 +1336,22 @@
           <a:lstStyle/>
           <a:p>
             <a:r>
-              <a:t>[설명] 실제 Ubuntu/ROS 2 환경에서 생성한 검증 화면이다.</a:t>
-            </a:r>
-          </a:p>
-          <a:p>
-            <a:r>
-              <a:t>[실행] 슬라이드의 명령 또는 파일 작성 단계를 진행한다.</a:t>
-            </a:r>
-          </a:p>
-          <a:p>
-            <a:r>
-              <a:t>[확인] 캡처의 명령과 다음 슬라이드의 검증 명령을 비교한다.</a:t>
+              <a:t>[설명] build/source/run을 생략 없이 실행한다.</a:t>
+            </a:r>
+          </a:p>
+          <a:p>
+            <a:r>
+              <a:t>[실행] source ~/ros2_curri/agv_ws/install/setup.bash</a:t>
+            </a:r>
+          </a:p>
+          <a:p>
+            <a:r>
+              <a:t>ros2 run agv_control safety_controller --ros-args -p stop_distance:=0.5</a:t>
+            </a:r>
+          </a:p>
+          <a:p>
+            <a:r>
+              <a:t>[확인] 0.5 m 안 장애물에서 forward cmd_vel이 zero Twist로 바뀌는 조건을 설명한다.</a:t>
             </a:r>
           </a:p>
           <a:p>
@@ -1429,27 +1431,17 @@
           <a:lstStyle/>
           <a:p>
             <a:r>
-              <a:t>[설명] 검증 명령은 GUI 결과와 별도로 실행해 재현 가능한 완료 기준을 만든다.</a:t>
-            </a:r>
-          </a:p>
-          <a:p>
-            <a:r>
-              <a:t>[실행] ros2 topic info /cmd_vel_raw</a:t>
-            </a:r>
-          </a:p>
-          <a:p>
-            <a:r>
-              <a:t>ros2 topic info /cmd_vel</a:t>
-            </a:r>
-          </a:p>
-          <a:p>
-            <a:r>
-              <a:t>ros2 param get /safety_controller stop_distance</a:t>
-            </a:r>
-          </a:p>
-          <a:p>
-            <a:r>
-              <a:t>[확인] 0.5 m 안 장애물에서 forward cmd_vel이 zero Twist로 바뀌는 조건을 설명한다.</a:t>
+              <a:t>[설명] 실제 Ubuntu/ROS 2 환경에서 생성한 검증 화면이다.</a:t>
+            </a:r>
+          </a:p>
+          <a:p>
+            <a:r>
+              <a:t>[실행] 슬라이드의 명령 또는 파일 작성 단계를 진행한다.</a:t>
+            </a:r>
+          </a:p>
+          <a:p>
+            <a:r>
+              <a:t>[확인] 캡처의 명령과 다음 슬라이드의 검증 명령을 비교한다.</a:t>
             </a:r>
           </a:p>
           <a:p>
@@ -1619,7 +1611,7 @@
           <a:lstStyle/>
           <a:p>
             <a:r>
-              <a:t>[설명] 오류를 대신 해결하지 말고 증상부터 우선 확인 순서대로 교육생이 실행하게 한다.</a:t>
+              <a:t>[설명] 실제 Ubuntu/ROS 2 환경에서 생성한 검증 화면이다.</a:t>
             </a:r>
           </a:p>
           <a:p>
@@ -1629,7 +1621,7 @@
           </a:p>
           <a:p>
             <a:r>
-              <a:t>[확인] 수정 뒤 첫 검증 명령을 다시 실행한다.</a:t>
+              <a:t>[확인] 캡처의 명령과 다음 슬라이드의 검증 명령을 비교한다.</a:t>
             </a:r>
           </a:p>
           <a:p>
@@ -1639,7 +1631,7 @@
           </a:p>
           <a:p>
             <a:r>
-              <a:t>[오류] 슬라이드의 두 대표 오류를 먼저 사용한다.</a:t>
+              <a:t>[오류] 오류가 나면 현재 폴더, source, 파일 경로를 먼저 확인한다.</a:t>
             </a:r>
           </a:p>
         </p:txBody>
@@ -1709,17 +1701,27 @@
           <a:lstStyle/>
           <a:p>
             <a:r>
-              <a:t>[설명] 교육생이 직접 한 값만 바꿔 원인과 결과를 연결하게 한다.</a:t>
-            </a:r>
-          </a:p>
-          <a:p>
-            <a:r>
-              <a:t>[실행] 슬라이드의 명령 또는 파일 작성 단계를 진행한다.</a:t>
-            </a:r>
-          </a:p>
-          <a:p>
-            <a:r>
-              <a:t>[확인] 원래 값과 변경 값을 모두 기록한다.</a:t>
+              <a:t>[설명] 검증 명령은 GUI 결과와 별도로 실행해 재현 가능한 완료 기준을 만든다.</a:t>
+            </a:r>
+          </a:p>
+          <a:p>
+            <a:r>
+              <a:t>[실행] ros2 topic info /cmd_vel_raw</a:t>
+            </a:r>
+          </a:p>
+          <a:p>
+            <a:r>
+              <a:t>ros2 topic info /cmd_vel</a:t>
+            </a:r>
+          </a:p>
+          <a:p>
+            <a:r>
+              <a:t>ros2 param get /safety_controller stop_distance</a:t>
+            </a:r>
+          </a:p>
+          <a:p>
+            <a:r>
+              <a:t>[확인] 0.5 m 안 장애물에서 forward cmd_vel이 zero Twist로 바뀌는 조건을 설명한다.</a:t>
             </a:r>
           </a:p>
           <a:p>
@@ -1799,7 +1801,7 @@
           <a:lstStyle/>
           <a:p>
             <a:r>
-              <a:t>[설명] 교육생이 Complete·캡처·로그를 저장했는지 확인하고 다음 모듈의 시작 상태를 읽는다.</a:t>
+              <a:t>[설명] 오류를 대신 해결하지 말고 증상부터 우선 확인 순서대로 교육생이 실행하게 한다.</a:t>
             </a:r>
           </a:p>
           <a:p>
@@ -1809,7 +1811,7 @@
           </a:p>
           <a:p>
             <a:r>
-              <a:t>[확인] M19 FSM 시작 조건을 말할 수 있다.</a:t>
+              <a:t>[확인] 수정 뒤 첫 검증 명령을 다시 실행한다.</a:t>
             </a:r>
           </a:p>
           <a:p>
@@ -1819,7 +1821,7 @@
           </a:p>
           <a:p>
             <a:r>
-              <a:t>[오류] 오류가 나면 현재 폴더, source, 파일 경로를 먼저 확인한다.</a:t>
+              <a:t>[오류] 슬라이드의 두 대표 오류를 먼저 사용한다.</a:t>
             </a:r>
           </a:p>
         </p:txBody>
@@ -1889,6 +1891,186 @@
           <a:lstStyle/>
           <a:p>
             <a:r>
+              <a:t>[설명] 교육생이 직접 한 값만 바꿔 원인과 결과를 연결하게 한다.</a:t>
+            </a:r>
+          </a:p>
+          <a:p>
+            <a:r>
+              <a:t>[실행] 슬라이드의 명령 또는 파일 작성 단계를 진행한다.</a:t>
+            </a:r>
+          </a:p>
+          <a:p>
+            <a:r>
+              <a:t>[확인] 원래 값과 변경 값을 모두 기록한다.</a:t>
+            </a:r>
+          </a:p>
+          <a:p>
+            <a:r>
+              <a:t>[멈춤] 교육생이 현재 체크포인트를 통과할 때까지 기다린다.</a:t>
+            </a:r>
+          </a:p>
+          <a:p>
+            <a:r>
+              <a:t>[오류] 오류가 나면 현재 폴더, source, 파일 경로를 먼저 확인한다.</a:t>
+            </a:r>
+          </a:p>
+        </p:txBody>
+      </p:sp>
+      <p:sp>
+        <p:nvSpPr>
+          <p:cNvPr id="4" name="Slide Number Placeholder 3"/>
+          <p:cNvSpPr>
+            <a:spLocks noGrp="1"/>
+          </p:cNvSpPr>
+          <p:nvPr>
+            <p:ph type="sldNum" idx="5" sz="quarter"/>
+          </p:nvPr>
+        </p:nvSpPr>
+        <p:spPr/>
+      </p:sp>
+    </p:spTree>
+  </p:cSld>
+  <p:clrMapOvr>
+    <a:masterClrMapping/>
+  </p:clrMapOvr>
+</p:notes>
+</file>
+
+<file path=ppt/notesSlides/notesSlide24.xml><?xml version="1.0" encoding="utf-8"?>
+<p:notes xmlns:a="http://schemas.openxmlformats.org/drawingml/2006/main" xmlns:p="http://schemas.openxmlformats.org/presentationml/2006/main" xmlns:r="http://schemas.openxmlformats.org/officeDocument/2006/relationships">
+  <p:cSld>
+    <p:spTree>
+      <p:nvGrpSpPr>
+        <p:cNvPr id="1" name=""/>
+        <p:cNvGrpSpPr/>
+        <p:nvPr/>
+      </p:nvGrpSpPr>
+      <p:grpSpPr>
+        <a:xfrm>
+          <a:off x="0" y="0"/>
+          <a:ext cx="0" cy="0"/>
+          <a:chOff x="0" y="0"/>
+          <a:chExt cx="0" cy="0"/>
+        </a:xfrm>
+      </p:grpSpPr>
+      <p:sp>
+        <p:nvSpPr>
+          <p:cNvPr id="2" name="Slide Image Placeholder 1"/>
+          <p:cNvSpPr>
+            <a:spLocks noGrp="1"/>
+          </p:cNvSpPr>
+          <p:nvPr>
+            <p:ph type="sldImg" idx="2"/>
+          </p:nvPr>
+        </p:nvSpPr>
+        <p:spPr/>
+      </p:sp>
+      <p:sp>
+        <p:nvSpPr>
+          <p:cNvPr id="3" name="Notes Placeholder 2"/>
+          <p:cNvSpPr>
+            <a:spLocks noGrp="1"/>
+          </p:cNvSpPr>
+          <p:nvPr>
+            <p:ph type="body" idx="3" sz="quarter"/>
+          </p:nvPr>
+        </p:nvSpPr>
+        <p:spPr/>
+        <p:txBody>
+          <a:bodyPr/>
+          <a:lstStyle/>
+          <a:p>
+            <a:r>
+              <a:t>[설명] 교육생이 Complete·캡처·로그를 저장했는지 확인하고 다음 모듈의 시작 상태를 읽는다.</a:t>
+            </a:r>
+          </a:p>
+          <a:p>
+            <a:r>
+              <a:t>[실행] 슬라이드의 명령 또는 파일 작성 단계를 진행한다.</a:t>
+            </a:r>
+          </a:p>
+          <a:p>
+            <a:r>
+              <a:t>[확인] M19 FSM 시작 조건을 말할 수 있다.</a:t>
+            </a:r>
+          </a:p>
+          <a:p>
+            <a:r>
+              <a:t>[멈춤] 교육생이 현재 체크포인트를 통과할 때까지 기다린다.</a:t>
+            </a:r>
+          </a:p>
+          <a:p>
+            <a:r>
+              <a:t>[오류] 오류가 나면 현재 폴더, source, 파일 경로를 먼저 확인한다.</a:t>
+            </a:r>
+          </a:p>
+        </p:txBody>
+      </p:sp>
+      <p:sp>
+        <p:nvSpPr>
+          <p:cNvPr id="4" name="Slide Number Placeholder 3"/>
+          <p:cNvSpPr>
+            <a:spLocks noGrp="1"/>
+          </p:cNvSpPr>
+          <p:nvPr>
+            <p:ph type="sldNum" idx="5" sz="quarter"/>
+          </p:nvPr>
+        </p:nvSpPr>
+        <p:spPr/>
+      </p:sp>
+    </p:spTree>
+  </p:cSld>
+  <p:clrMapOvr>
+    <a:masterClrMapping/>
+  </p:clrMapOvr>
+</p:notes>
+</file>
+
+<file path=ppt/notesSlides/notesSlide25.xml><?xml version="1.0" encoding="utf-8"?>
+<p:notes xmlns:a="http://schemas.openxmlformats.org/drawingml/2006/main" xmlns:p="http://schemas.openxmlformats.org/presentationml/2006/main" xmlns:r="http://schemas.openxmlformats.org/officeDocument/2006/relationships">
+  <p:cSld>
+    <p:spTree>
+      <p:nvGrpSpPr>
+        <p:cNvPr id="1" name=""/>
+        <p:cNvGrpSpPr/>
+        <p:nvPr/>
+      </p:nvGrpSpPr>
+      <p:grpSpPr>
+        <a:xfrm>
+          <a:off x="0" y="0"/>
+          <a:ext cx="0" cy="0"/>
+          <a:chOff x="0" y="0"/>
+          <a:chExt cx="0" cy="0"/>
+        </a:xfrm>
+      </p:grpSpPr>
+      <p:sp>
+        <p:nvSpPr>
+          <p:cNvPr id="2" name="Slide Image Placeholder 1"/>
+          <p:cNvSpPr>
+            <a:spLocks noGrp="1"/>
+          </p:cNvSpPr>
+          <p:nvPr>
+            <p:ph type="sldImg" idx="2"/>
+          </p:nvPr>
+        </p:nvSpPr>
+        <p:spPr/>
+      </p:sp>
+      <p:sp>
+        <p:nvSpPr>
+          <p:cNvPr id="3" name="Notes Placeholder 2"/>
+          <p:cNvSpPr>
+            <a:spLocks noGrp="1"/>
+          </p:cNvSpPr>
+          <p:nvPr>
+            <p:ph type="body" idx="3" sz="quarter"/>
+          </p:nvPr>
+        </p:nvSpPr>
+        <p:spPr/>
+        <p:txBody>
+          <a:bodyPr/>
+          <a:lstStyle/>
+          <a:p>
+            <a:r>
               <a:t>[설명] 공식 문서는 버전 차이와 확장 학습을 확인할 때 사용한다.</a:t>
             </a:r>
           </a:p>
@@ -1984,7 +2166,7 @@
           </a:p>
           <a:p>
             <a:r>
-              <a:t>[실행] pwd; source /opt/ros/jazzy/setup.bash; source ~/agv_ws/install/setup.bash</a:t>
+              <a:t>[실행] pwd; source /opt/ros/jazzy/setup.bash; source ~/ros2_curri/agv_ws/install/setup.bash</a:t>
             </a:r>
           </a:p>
           <a:p>
@@ -2534,12 +2716,12 @@
           <a:lstStyle/>
           <a:p>
             <a:r>
-              <a:t>[설명] ~/agv_ws/src/agv_sensors/agv_sensors/lidar_processor.py의 전체 파일을 1/3 구간으로 작성한다.</a:t>
-            </a:r>
-          </a:p>
-          <a:p>
-            <a:r>
-              <a:t>[실행] nano ~/agv_ws/src/agv_sensors/agv_sensors/lidar_processor.py</a:t>
+              <a:t>[설명] ~/ros2_curri/agv_ws/src/agv_sensors/agv_sensors/lidar_processor.py의 전체 파일을 1/3 구간으로 작성한다.</a:t>
+            </a:r>
+          </a:p>
+          <a:p>
+            <a:r>
+              <a:t>[실행] nano ~/ros2_curri/agv_ws/src/agv_sensors/agv_sensors/lidar_processor.py</a:t>
             </a:r>
           </a:p>
           <a:p>
@@ -5966,7 +6148,7 @@
               </a:defRPr>
             </a:pPr>
             <a:r>
-              <a:t>~/agv_ws/src/agv_sensors/agv_sensors/lidar_processor.py</a:t>
+              <a:t>~/ros2_curri/agv_ws/src/agv_sensors/agv_sensors/lidar_processor.py</a:t>
             </a:r>
           </a:p>
         </p:txBody>
@@ -6102,7 +6284,7 @@
               </a:defRPr>
             </a:pPr>
             <a:r>
-              <a:t>현재 단계 4/6    |    현재 폴더 ~/agv_ws    |    현재 터미널</a:t>
+              <a:t>현재 단계 4/6    |    현재 폴더 ~/ros2_curri/agv_ws    |    현재 터미널</a:t>
             </a:r>
           </a:p>
         </p:txBody>
@@ -6199,11 +6381,11 @@
               </a:defRPr>
             </a:pPr>
             <a:r>
-              <a:t>파일 생성: mkdir -p ~/agv_ws/src/agv_sensors/agv_sensors</a:t>
+              <a:t>파일 생성: mkdir -p ~/ros2_curri/agv_ws/src/agv_sensors/agv_sensors</a:t>
             </a:r>
             <a:br/>
             <a:r>
-              <a:t>파일 열기: nano ~/agv_ws/src/agv_sensors/agv_sensors/lidar_processor.py</a:t>
+              <a:t>파일 열기: nano ~/ros2_curri/agv_ws/src/agv_sensors/agv_sensors/lidar_processor.py</a:t>
             </a:r>
           </a:p>
         </p:txBody>
@@ -6434,7 +6616,7 @@
               </a:defRPr>
             </a:pPr>
             <a:r>
-              <a:t>~/agv_ws/src/agv_sensors/agv_sensors/lidar_processor.py</a:t>
+              <a:t>~/ros2_curri/agv_ws/src/agv_sensors/agv_sensors/lidar_processor.py</a:t>
             </a:r>
           </a:p>
         </p:txBody>
@@ -6570,7 +6752,7 @@
               </a:defRPr>
             </a:pPr>
             <a:r>
-              <a:t>현재 단계 5/6    |    현재 폴더 ~/agv_ws    |    현재 터미널</a:t>
+              <a:t>현재 단계 5/6    |    현재 폴더 ~/ros2_curri/agv_ws    |    현재 터미널</a:t>
             </a:r>
           </a:p>
         </p:txBody>
@@ -6667,11 +6849,11 @@
               </a:defRPr>
             </a:pPr>
             <a:r>
-              <a:t>파일 생성: mkdir -p ~/agv_ws/src/agv_sensors/agv_sensors</a:t>
+              <a:t>파일 생성: mkdir -p ~/ros2_curri/agv_ws/src/agv_sensors/agv_sensors</a:t>
             </a:r>
             <a:br/>
             <a:r>
-              <a:t>파일 열기: nano ~/agv_ws/src/agv_sensors/agv_sensors/lidar_processor.py</a:t>
+              <a:t>파일 열기: nano ~/ros2_curri/agv_ws/src/agv_sensors/agv_sensors/lidar_processor.py</a:t>
             </a:r>
           </a:p>
         </p:txBody>
@@ -6900,7 +7082,7 @@
               </a:defRPr>
             </a:pPr>
             <a:r>
-              <a:t>~/agv_ws/src/agv_control/agv_control/safety_controller.py</a:t>
+              <a:t>~/ros2_curri/agv_ws/src/agv_control/agv_control/safety_controller.py</a:t>
             </a:r>
           </a:p>
         </p:txBody>
@@ -7036,7 +7218,7 @@
               </a:defRPr>
             </a:pPr>
             <a:r>
-              <a:t>현재 단계 6/10    |    현재 폴더 ~/agv_ws    |    현재 터미널</a:t>
+              <a:t>현재 단계 6/10    |    현재 폴더 ~/ros2_curri/agv_ws    |    현재 터미널</a:t>
             </a:r>
           </a:p>
         </p:txBody>
@@ -7133,11 +7315,11 @@
               </a:defRPr>
             </a:pPr>
             <a:r>
-              <a:t>파일 생성: mkdir -p ~/agv_ws/src/agv_control/agv_control</a:t>
+              <a:t>파일 생성: mkdir -p ~/ros2_curri/agv_ws/src/agv_control/agv_control</a:t>
             </a:r>
             <a:br/>
             <a:r>
-              <a:t>파일 열기: nano ~/agv_ws/src/agv_control/agv_control/safety_controller.py</a:t>
+              <a:t>파일 열기: nano ~/ros2_curri/agv_ws/src/agv_control/agv_control/safety_controller.py</a:t>
             </a:r>
           </a:p>
         </p:txBody>
@@ -7368,7 +7550,7 @@
               </a:defRPr>
             </a:pPr>
             <a:r>
-              <a:t>~/agv_ws/src/agv_control/agv_control/safety_controller.py</a:t>
+              <a:t>~/ros2_curri/agv_ws/src/agv_control/agv_control/safety_controller.py</a:t>
             </a:r>
           </a:p>
         </p:txBody>
@@ -7504,7 +7686,7 @@
               </a:defRPr>
             </a:pPr>
             <a:r>
-              <a:t>현재 단계 7/10    |    현재 폴더 ~/agv_ws    |    현재 터미널</a:t>
+              <a:t>현재 단계 7/10    |    현재 폴더 ~/ros2_curri/agv_ws    |    현재 터미널</a:t>
             </a:r>
           </a:p>
         </p:txBody>
@@ -7601,11 +7783,11 @@
               </a:defRPr>
             </a:pPr>
             <a:r>
-              <a:t>파일 생성: mkdir -p ~/agv_ws/src/agv_control/agv_control</a:t>
+              <a:t>파일 생성: mkdir -p ~/ros2_curri/agv_ws/src/agv_control/agv_control</a:t>
             </a:r>
             <a:br/>
             <a:r>
-              <a:t>파일 열기: nano ~/agv_ws/src/agv_control/agv_control/safety_controller.py</a:t>
+              <a:t>파일 열기: nano ~/ros2_curri/agv_ws/src/agv_control/agv_control/safety_controller.py</a:t>
             </a:r>
           </a:p>
         </p:txBody>
@@ -7836,7 +8018,7 @@
               </a:defRPr>
             </a:pPr>
             <a:r>
-              <a:t>~/agv_ws/src/agv_control/agv_control/safety_controller.py</a:t>
+              <a:t>~/ros2_curri/agv_ws/src/agv_control/agv_control/safety_controller.py</a:t>
             </a:r>
           </a:p>
         </p:txBody>
@@ -7972,7 +8154,7 @@
               </a:defRPr>
             </a:pPr>
             <a:r>
-              <a:t>현재 단계 8/10    |    현재 폴더 ~/agv_ws    |    현재 터미널</a:t>
+              <a:t>현재 단계 8/10    |    현재 폴더 ~/ros2_curri/agv_ws    |    현재 터미널</a:t>
             </a:r>
           </a:p>
         </p:txBody>
@@ -8069,11 +8251,11 @@
               </a:defRPr>
             </a:pPr>
             <a:r>
-              <a:t>파일 생성: mkdir -p ~/agv_ws/src/agv_control/agv_control</a:t>
+              <a:t>파일 생성: mkdir -p ~/ros2_curri/agv_ws/src/agv_control/agv_control</a:t>
             </a:r>
             <a:br/>
             <a:r>
-              <a:t>파일 열기: nano ~/agv_ws/src/agv_control/agv_control/safety_controller.py</a:t>
+              <a:t>파일 열기: nano ~/ros2_curri/agv_ws/src/agv_control/agv_control/safety_controller.py</a:t>
             </a:r>
           </a:p>
         </p:txBody>
@@ -8307,7 +8489,7 @@
               </a:defRPr>
             </a:pPr>
             <a:r>
-              <a:t>~/agv_ws/src/agv_control/agv_control/safety_controller.py</a:t>
+              <a:t>~/ros2_curri/agv_ws/src/agv_control/agv_control/safety_controller.py</a:t>
             </a:r>
           </a:p>
         </p:txBody>
@@ -8443,7 +8625,7 @@
               </a:defRPr>
             </a:pPr>
             <a:r>
-              <a:t>현재 단계 9/10    |    현재 폴더 ~/agv_ws    |    현재 터미널</a:t>
+              <a:t>현재 단계 9/10    |    현재 폴더 ~/ros2_curri/agv_ws    |    현재 터미널</a:t>
             </a:r>
           </a:p>
         </p:txBody>
@@ -8540,11 +8722,11 @@
               </a:defRPr>
             </a:pPr>
             <a:r>
-              <a:t>파일 생성: mkdir -p ~/agv_ws/src/agv_control/agv_control</a:t>
+              <a:t>파일 생성: mkdir -p ~/ros2_curri/agv_ws/src/agv_control/agv_control</a:t>
             </a:r>
             <a:br/>
             <a:r>
-              <a:t>파일 열기: nano ~/agv_ws/src/agv_control/agv_control/safety_controller.py</a:t>
+              <a:t>파일 열기: nano ~/ros2_curri/agv_ws/src/agv_control/agv_control/safety_controller.py</a:t>
             </a:r>
           </a:p>
         </p:txBody>
@@ -8722,7 +8904,7 @@
               </a:defRPr>
             </a:pPr>
             <a:r>
-              <a:t>파일을 새로 만들고 저장한다 (1/1)</a:t>
+              <a:t>파일을 새로 만들고 저장한다 (1/2)</a:t>
             </a:r>
           </a:p>
         </p:txBody>
@@ -8761,7 +8943,7 @@
               </a:defRPr>
             </a:pPr>
             <a:r>
-              <a:t>~/agv_ws/src/agv_bringup/config/mission.yaml</a:t>
+              <a:t>~/ros2_curri/agv_ws/src/agv_bringup/config/mission.yaml</a:t>
             </a:r>
           </a:p>
         </p:txBody>
@@ -8897,7 +9079,7 @@
               </a:defRPr>
             </a:pPr>
             <a:r>
-              <a:t>현재 단계 10/11    |    현재 폴더 ~/agv_ws    |    현재 터미널</a:t>
+              <a:t>현재 단계 10/12    |    현재 폴더 ~/ros2_curri/agv_ws    |    현재 터미널</a:t>
             </a:r>
           </a:p>
         </p:txBody>
@@ -8994,11 +9176,11 @@
               </a:defRPr>
             </a:pPr>
             <a:r>
-              <a:t>파일 생성: mkdir -p ~/agv_ws/src/agv_bringup/config</a:t>
+              <a:t>파일 생성: mkdir -p ~/ros2_curri/agv_ws/src/agv_bringup/config</a:t>
             </a:r>
             <a:br/>
             <a:r>
-              <a:t>파일 열기: nano ~/agv_ws/src/agv_bringup/config/mission.yaml</a:t>
+              <a:t>파일 열기: nano ~/ros2_curri/agv_ws/src/agv_bringup/config/mission.yaml</a:t>
             </a:r>
           </a:p>
         </p:txBody>
@@ -9084,6 +9266,10 @@
             </a:r>
             <a:br/>
             <a:r>
+              <a:t>    target_timeout_sec: 0.70</a:t>
+            </a:r>
+            <a:br/>
+            <a:r>
               <a:t>safety_controller:</a:t>
             </a:r>
             <a:br/>
@@ -9097,10 +9283,6 @@
             <a:br/>
             <a:r>
               <a:t>    stop_distance: 0.50</a:t>
-            </a:r>
-            <a:br/>
-            <a:r>
-              <a:t>    front_half_angle_deg: 15.0</a:t>
             </a:r>
           </a:p>
         </p:txBody>
@@ -9139,7 +9321,7 @@
               </a:defRPr>
             </a:pPr>
             <a:r>
-              <a:t>파일 전체 1/1 · 이 슬라이드 다음에 같은 파일의 나머지 줄이 이어집니다.</a:t>
+              <a:t>파일 전체 1/2 · 이 슬라이드 다음에 같은 파일의 나머지 줄이 이어집니다.</a:t>
             </a:r>
           </a:p>
         </p:txBody>
@@ -9196,7 +9378,7 @@
               </a:defRPr>
             </a:pPr>
             <a:r>
-              <a:t>build → source → run 순서로 실행한다</a:t>
+              <a:t>파일을 계속 작성하고 저장한다 (2/2)</a:t>
             </a:r>
           </a:p>
         </p:txBody>
@@ -9235,7 +9417,7 @@
               </a:defRPr>
             </a:pPr>
             <a:r>
-              <a:t>새 파일 또는 수정 파일은 build와 source 뒤에만 실행 이름·설정에 반영됩니다.</a:t>
+              <a:t>~/ros2_curri/agv_ws/src/agv_bringup/config/mission.yaml</a:t>
             </a:r>
           </a:p>
         </p:txBody>
@@ -9371,23 +9553,124 @@
               </a:defRPr>
             </a:pPr>
             <a:r>
-              <a:t>현재 단계 실행    |    현재 폴더 ~/agv_ws    |    현재 터미널</a:t>
-            </a:r>
-          </a:p>
-        </p:txBody>
-      </p:sp>
-      <p:sp>
-        <p:nvSpPr>
-          <p:cNvPr id="7" name="Rounded Rectangle 6"/>
+              <a:t>현재 단계 11/12    |    현재 폴더 ~/ros2_curri/agv_ws    |    현재 터미널</a:t>
+            </a:r>
+          </a:p>
+        </p:txBody>
+      </p:sp>
+      <p:sp>
+        <p:nvSpPr>
+          <p:cNvPr id="7" name="TextBox 6"/>
+          <p:cNvSpPr txBox="1"/>
+          <p:nvPr/>
+        </p:nvSpPr>
+        <p:spPr>
+          <a:xfrm>
+            <a:off x="658368" y="1627632"/>
+            <a:ext cx="10972800" cy="256032"/>
+          </a:xfrm>
+          <a:prstGeom prst="rect">
+            <a:avLst/>
+          </a:prstGeom>
+          <a:noFill/>
+        </p:spPr>
+        <p:txBody>
+          <a:bodyPr wrap="square" lIns="73152" rIns="73152" tIns="36576" bIns="36576">
+            <a:spAutoFit/>
+          </a:bodyPr>
+          <a:lstStyle/>
+          <a:p>
+            <a:pPr algn="l">
+              <a:spcAft>
+                <a:spcPts val="0"/>
+              </a:spcAft>
+              <a:defRPr sz="1500" b="1">
+                <a:solidFill>
+                  <a:srgbClr val="122C4E"/>
+                </a:solidFill>
+                <a:latin typeface="Noto Sans CJK KR"/>
+              </a:defRPr>
+            </a:pPr>
+            <a:r>
+              <a:t>이번 단계: 파일의 전체 내용을 중간 생략 없이 작성합니다. 아래 줄 범위를 끝까지 입력하세요.</a:t>
+            </a:r>
+          </a:p>
+        </p:txBody>
+      </p:sp>
+      <p:sp>
+        <p:nvSpPr>
+          <p:cNvPr id="8" name="Rectangle 7"/>
           <p:cNvSpPr/>
           <p:nvPr/>
         </p:nvSpPr>
         <p:spPr>
           <a:xfrm>
-            <a:off x="658368" y="1700784"/>
-            <a:ext cx="10972800" cy="3182112"/>
-          </a:xfrm>
-          <a:prstGeom prst="roundRect">
+            <a:off x="658368" y="1956816"/>
+            <a:ext cx="10972800" cy="603504"/>
+          </a:xfrm>
+          <a:prstGeom prst="rect">
+            <a:avLst/>
+          </a:prstGeom>
+          <a:solidFill>
+            <a:srgbClr val="F4F7FB"/>
+          </a:solidFill>
+          <a:ln>
+            <a:solidFill>
+              <a:srgbClr val="F4F7FB"/>
+            </a:solidFill>
+          </a:ln>
+        </p:spPr>
+        <p:style>
+          <a:lnRef idx="1">
+            <a:schemeClr val="accent1"/>
+          </a:lnRef>
+          <a:fillRef idx="3">
+            <a:schemeClr val="accent1"/>
+          </a:fillRef>
+          <a:effectRef idx="2">
+            <a:schemeClr val="accent1"/>
+          </a:effectRef>
+          <a:fontRef idx="minor">
+            <a:schemeClr val="lt1"/>
+          </a:fontRef>
+        </p:style>
+        <p:txBody>
+          <a:bodyPr rtlCol="0" anchor="ctr" wrap="square" lIns="73152" rIns="73152" tIns="36576" bIns="36576"/>
+          <a:lstStyle/>
+          <a:p>
+            <a:pPr algn="l">
+              <a:spcAft>
+                <a:spcPts val="0"/>
+              </a:spcAft>
+              <a:defRPr sz="1400" b="0">
+                <a:solidFill>
+                  <a:srgbClr val="122C4E"/>
+                </a:solidFill>
+                <a:latin typeface="DejaVu Sans Mono"/>
+              </a:defRPr>
+            </a:pPr>
+            <a:r>
+              <a:t>파일 생성: mkdir -p ~/ros2_curri/agv_ws/src/agv_bringup/config</a:t>
+            </a:r>
+            <a:br/>
+            <a:r>
+              <a:t>파일 열기: nano ~/ros2_curri/agv_ws/src/agv_bringup/config/mission.yaml</a:t>
+            </a:r>
+          </a:p>
+        </p:txBody>
+      </p:sp>
+      <p:sp>
+        <p:nvSpPr>
+          <p:cNvPr id="9" name="Rectangle 8"/>
+          <p:cNvSpPr/>
+          <p:nvPr/>
+        </p:nvSpPr>
+        <p:spPr>
+          <a:xfrm>
+            <a:off x="658368" y="2706624"/>
+            <a:ext cx="10972800" cy="3364992"/>
+          </a:xfrm>
+          <a:prstGeom prst="rect">
             <a:avLst/>
           </a:prstGeom>
           <a:solidFill>
@@ -9414,14 +9697,14 @@
           </a:fontRef>
         </p:style>
         <p:txBody>
-          <a:bodyPr rtlCol="0" anchor="ctr" wrap="square" lIns="73152" rIns="73152" tIns="36576" bIns="36576"/>
+          <a:bodyPr rtlCol="0" anchor="ctr" wrap="square" lIns="164592" rIns="164592" tIns="109728" bIns="36576"/>
           <a:lstStyle/>
           <a:p>
             <a:pPr algn="l">
               <a:spcAft>
                 <a:spcPts val="0"/>
               </a:spcAft>
-              <a:defRPr sz="1600" b="0">
+              <a:defRPr sz="1400" b="0">
                 <a:solidFill>
                   <a:srgbClr val="FFFFFF"/>
                 </a:solidFill>
@@ -9429,25 +9712,21 @@
               </a:defRPr>
             </a:pPr>
             <a:r>
-              <a:t>source ~/agv_ws/install/setup.bash</a:t>
-            </a:r>
-            <a:br/>
-            <a:r>
-              <a:t>ros2 run agv_control safety_controller --ros-args -p stop_distance:=0.5</a:t>
-            </a:r>
-          </a:p>
-        </p:txBody>
-      </p:sp>
-      <p:sp>
-        <p:nvSpPr>
-          <p:cNvPr id="8" name="TextBox 7"/>
+              <a:t>    front_half_angle_deg: 15.0</a:t>
+            </a:r>
+          </a:p>
+        </p:txBody>
+      </p:sp>
+      <p:sp>
+        <p:nvSpPr>
+          <p:cNvPr id="10" name="TextBox 9"/>
           <p:cNvSpPr txBox="1"/>
           <p:nvPr/>
         </p:nvSpPr>
         <p:spPr>
           <a:xfrm>
-            <a:off x="786384" y="5239512"/>
-            <a:ext cx="1261872" cy="237744"/>
+            <a:off x="749808" y="6181344"/>
+            <a:ext cx="10789920" cy="201168"/>
           </a:xfrm>
           <a:prstGeom prst="rect">
             <a:avLst/>
@@ -9464,54 +9743,15 @@
               <a:spcAft>
                 <a:spcPts val="0"/>
               </a:spcAft>
-              <a:defRPr sz="1800" b="1">
-                <a:solidFill>
-                  <a:srgbClr val="2A8B5A"/>
-                </a:solidFill>
-                <a:latin typeface="Noto Sans CJK KR"/>
-              </a:defRPr>
-            </a:pPr>
-            <a:r>
-              <a:t>확인 기준</a:t>
-            </a:r>
-          </a:p>
-        </p:txBody>
-      </p:sp>
-      <p:sp>
-        <p:nvSpPr>
-          <p:cNvPr id="9" name="TextBox 8"/>
-          <p:cNvSpPr txBox="1"/>
-          <p:nvPr/>
-        </p:nvSpPr>
-        <p:spPr>
-          <a:xfrm>
-            <a:off x="786384" y="5532120"/>
-            <a:ext cx="10469880" cy="420624"/>
-          </a:xfrm>
-          <a:prstGeom prst="rect">
-            <a:avLst/>
-          </a:prstGeom>
-          <a:noFill/>
-        </p:spPr>
-        <p:txBody>
-          <a:bodyPr wrap="square" lIns="73152" rIns="73152" tIns="36576" bIns="36576">
-            <a:spAutoFit/>
-          </a:bodyPr>
-          <a:lstStyle/>
-          <a:p>
-            <a:pPr algn="l">
-              <a:spcAft>
-                <a:spcPts val="0"/>
-              </a:spcAft>
-              <a:defRPr sz="1800" b="0">
-                <a:solidFill>
-                  <a:srgbClr val="122C4E"/>
-                </a:solidFill>
-                <a:latin typeface="Noto Sans CJK KR"/>
-              </a:defRPr>
-            </a:pPr>
-            <a:r>
-              <a:t>0.5 m 안 장애물에서 forward cmd_vel이 zero Twist로 바뀌는 조건을 설명한다.</a:t>
+              <a:defRPr sz="1000" b="0">
+                <a:solidFill>
+                  <a:srgbClr val="5C6672"/>
+                </a:solidFill>
+                <a:latin typeface="Noto Sans CJK KR"/>
+              </a:defRPr>
+            </a:pPr>
+            <a:r>
+              <a:t>파일 전체 2/2 · 이 슬라이드 다음에 같은 파일의 나머지 줄이 이어집니다.</a:t>
             </a:r>
           </a:p>
         </p:txBody>
@@ -9568,7 +9808,7 @@
               </a:defRPr>
             </a:pPr>
             <a:r>
-              <a:t>정상 결과: 실제 환경에서 확인한 출력</a:t>
+              <a:t>build → source → run 순서로 실행한다</a:t>
             </a:r>
           </a:p>
         </p:txBody>
@@ -9607,7 +9847,7 @@
               </a:defRPr>
             </a:pPr>
             <a:r>
-              <a:t>실제 ROS 2 환경의 파일·패키지·구성 검증 로그</a:t>
+              <a:t>새 파일 또는 수정 파일은 build와 source 뒤에만 실행 이름·설정에 반영됩니다.</a:t>
             </a:r>
           </a:p>
         </p:txBody>
@@ -9690,40 +9930,136 @@
           </a:p>
         </p:txBody>
       </p:sp>
-      <p:pic>
-        <p:nvPicPr>
-          <p:cNvPr id="6" name="Picture 5" descr="validation_terminal.png"/>
-          <p:cNvPicPr>
-            <a:picLocks noChangeAspect="1"/>
-          </p:cNvPicPr>
-          <p:nvPr/>
-        </p:nvPicPr>
-        <p:blipFill>
-          <a:blip r:embed="rId2"/>
-          <a:stretch>
-            <a:fillRect/>
-          </a:stretch>
-        </p:blipFill>
-        <p:spPr>
-          <a:xfrm>
-            <a:off x="790956" y="1562649"/>
-            <a:ext cx="10607040" cy="4381924"/>
-          </a:xfrm>
-          <a:prstGeom prst="rect">
-            <a:avLst/>
-          </a:prstGeom>
-        </p:spPr>
-      </p:pic>
-      <p:sp>
-        <p:nvSpPr>
-          <p:cNvPr id="7" name="TextBox 6"/>
+      <p:sp>
+        <p:nvSpPr>
+          <p:cNvPr id="6" name="Rectangle 5"/>
+          <p:cNvSpPr/>
+          <p:nvPr/>
+        </p:nvSpPr>
+        <p:spPr>
+          <a:xfrm>
+            <a:off x="566928" y="1188720"/>
+            <a:ext cx="11064240" cy="347472"/>
+          </a:xfrm>
+          <a:prstGeom prst="rect">
+            <a:avLst/>
+          </a:prstGeom>
+          <a:solidFill>
+            <a:srgbClr val="F4F7FB"/>
+          </a:solidFill>
+          <a:ln>
+            <a:solidFill>
+              <a:srgbClr val="F4F7FB"/>
+            </a:solidFill>
+          </a:ln>
+        </p:spPr>
+        <p:style>
+          <a:lnRef idx="1">
+            <a:schemeClr val="accent1"/>
+          </a:lnRef>
+          <a:fillRef idx="3">
+            <a:schemeClr val="accent1"/>
+          </a:fillRef>
+          <a:effectRef idx="2">
+            <a:schemeClr val="accent1"/>
+          </a:effectRef>
+          <a:fontRef idx="minor">
+            <a:schemeClr val="lt1"/>
+          </a:fontRef>
+        </p:style>
+        <p:txBody>
+          <a:bodyPr rtlCol="0" anchor="ctr" wrap="square" lIns="73152" rIns="73152" tIns="36576" bIns="36576"/>
+          <a:lstStyle/>
+          <a:p>
+            <a:pPr algn="l">
+              <a:spcAft>
+                <a:spcPts val="0"/>
+              </a:spcAft>
+              <a:defRPr sz="1300" b="1">
+                <a:solidFill>
+                  <a:srgbClr val="122C4E"/>
+                </a:solidFill>
+                <a:latin typeface="Noto Sans CJK KR"/>
+              </a:defRPr>
+            </a:pPr>
+            <a:r>
+              <a:t>현재 단계 실행    |    현재 폴더 ~/ros2_curri/agv_ws    |    현재 터미널</a:t>
+            </a:r>
+          </a:p>
+        </p:txBody>
+      </p:sp>
+      <p:sp>
+        <p:nvSpPr>
+          <p:cNvPr id="7" name="Rounded Rectangle 6"/>
+          <p:cNvSpPr/>
+          <p:nvPr/>
+        </p:nvSpPr>
+        <p:spPr>
+          <a:xfrm>
+            <a:off x="658368" y="1700784"/>
+            <a:ext cx="10972800" cy="3182112"/>
+          </a:xfrm>
+          <a:prstGeom prst="roundRect">
+            <a:avLst/>
+          </a:prstGeom>
+          <a:solidFill>
+            <a:srgbClr val="1D232D"/>
+          </a:solidFill>
+          <a:ln>
+            <a:solidFill>
+              <a:srgbClr val="1D232D"/>
+            </a:solidFill>
+          </a:ln>
+        </p:spPr>
+        <p:style>
+          <a:lnRef idx="1">
+            <a:schemeClr val="accent1"/>
+          </a:lnRef>
+          <a:fillRef idx="3">
+            <a:schemeClr val="accent1"/>
+          </a:fillRef>
+          <a:effectRef idx="2">
+            <a:schemeClr val="accent1"/>
+          </a:effectRef>
+          <a:fontRef idx="minor">
+            <a:schemeClr val="lt1"/>
+          </a:fontRef>
+        </p:style>
+        <p:txBody>
+          <a:bodyPr rtlCol="0" anchor="ctr" wrap="square" lIns="73152" rIns="73152" tIns="36576" bIns="36576"/>
+          <a:lstStyle/>
+          <a:p>
+            <a:pPr algn="l">
+              <a:spcAft>
+                <a:spcPts val="0"/>
+              </a:spcAft>
+              <a:defRPr sz="1600" b="0">
+                <a:solidFill>
+                  <a:srgbClr val="FFFFFF"/>
+                </a:solidFill>
+                <a:latin typeface="DejaVu Sans Mono"/>
+              </a:defRPr>
+            </a:pPr>
+            <a:r>
+              <a:t>source ~/ros2_curri/agv_ws/install/setup.bash</a:t>
+            </a:r>
+            <a:br/>
+            <a:r>
+              <a:t>ros2 run agv_control safety_controller --ros-args -p stop_distance:=0.5</a:t>
+            </a:r>
+          </a:p>
+        </p:txBody>
+      </p:sp>
+      <p:sp>
+        <p:nvSpPr>
+          <p:cNvPr id="8" name="TextBox 7"/>
           <p:cNvSpPr txBox="1"/>
           <p:nvPr/>
         </p:nvSpPr>
         <p:spPr>
           <a:xfrm>
-            <a:off x="777240" y="6217920"/>
-            <a:ext cx="10607040" cy="182880"/>
+            <a:off x="786384" y="5239512"/>
+            <a:ext cx="1261872" cy="237744"/>
           </a:xfrm>
           <a:prstGeom prst="rect">
             <a:avLst/>
@@ -9736,11 +10072,11 @@
           </a:bodyPr>
           <a:lstStyle/>
           <a:p>
-            <a:pPr algn="ctr">
-              <a:spcAft>
-                <a:spcPts val="0"/>
-              </a:spcAft>
-              <a:defRPr sz="1100" b="1">
+            <a:pPr algn="l">
+              <a:spcAft>
+                <a:spcPts val="0"/>
+              </a:spcAft>
+              <a:defRPr sz="1800" b="1">
                 <a:solidFill>
                   <a:srgbClr val="2A8B5A"/>
                 </a:solidFill>
@@ -9748,7 +10084,46 @@
               </a:defRPr>
             </a:pPr>
             <a:r>
-              <a:t>① 명령/설정  ② 정상 출력 또는 화면  ③ 다음 검증 명령으로 재확인</a:t>
+              <a:t>확인 기준</a:t>
+            </a:r>
+          </a:p>
+        </p:txBody>
+      </p:sp>
+      <p:sp>
+        <p:nvSpPr>
+          <p:cNvPr id="9" name="TextBox 8"/>
+          <p:cNvSpPr txBox="1"/>
+          <p:nvPr/>
+        </p:nvSpPr>
+        <p:spPr>
+          <a:xfrm>
+            <a:off x="786384" y="5532120"/>
+            <a:ext cx="10469880" cy="420624"/>
+          </a:xfrm>
+          <a:prstGeom prst="rect">
+            <a:avLst/>
+          </a:prstGeom>
+          <a:noFill/>
+        </p:spPr>
+        <p:txBody>
+          <a:bodyPr wrap="square" lIns="73152" rIns="73152" tIns="36576" bIns="36576">
+            <a:spAutoFit/>
+          </a:bodyPr>
+          <a:lstStyle/>
+          <a:p>
+            <a:pPr algn="l">
+              <a:spcAft>
+                <a:spcPts val="0"/>
+              </a:spcAft>
+              <a:defRPr sz="1800" b="0">
+                <a:solidFill>
+                  <a:srgbClr val="122C4E"/>
+                </a:solidFill>
+                <a:latin typeface="Noto Sans CJK KR"/>
+              </a:defRPr>
+            </a:pPr>
+            <a:r>
+              <a:t>0.5 m 안 장애물에서 forward cmd_vel이 zero Twist로 바뀌는 조건을 설명한다.</a:t>
             </a:r>
           </a:p>
         </p:txBody>
@@ -9805,7 +10180,7 @@
               </a:defRPr>
             </a:pPr>
             <a:r>
-              <a:t>객관적 검증 명령으로 완료를 확인한다</a:t>
+              <a:t>정상 결과: 실제 환경에서 확인한 출력</a:t>
             </a:r>
           </a:p>
         </p:txBody>
@@ -9844,7 +10219,7 @@
               </a:defRPr>
             </a:pPr>
             <a:r>
-              <a:t>화면만 보지 말고 topic·frame·파일·parameter를 다시 확인합니다.</a:t>
+              <a:t>실제 ROS 2 환경의 파일·패키지·구성 검증 로그</a:t>
             </a:r>
           </a:p>
         </p:txBody>
@@ -9927,210 +10302,40 @@
           </a:p>
         </p:txBody>
       </p:sp>
-      <p:sp>
-        <p:nvSpPr>
-          <p:cNvPr id="6" name="Rectangle 5"/>
-          <p:cNvSpPr/>
-          <p:nvPr/>
-        </p:nvSpPr>
-        <p:spPr>
-          <a:xfrm>
-            <a:off x="566928" y="1188720"/>
-            <a:ext cx="11064240" cy="347472"/>
-          </a:xfrm>
-          <a:prstGeom prst="rect">
-            <a:avLst/>
-          </a:prstGeom>
-          <a:solidFill>
-            <a:srgbClr val="F4F7FB"/>
-          </a:solidFill>
-          <a:ln>
-            <a:solidFill>
-              <a:srgbClr val="F4F7FB"/>
-            </a:solidFill>
-          </a:ln>
-        </p:spPr>
-        <p:style>
-          <a:lnRef idx="1">
-            <a:schemeClr val="accent1"/>
-          </a:lnRef>
-          <a:fillRef idx="3">
-            <a:schemeClr val="accent1"/>
-          </a:fillRef>
-          <a:effectRef idx="2">
-            <a:schemeClr val="accent1"/>
-          </a:effectRef>
-          <a:fontRef idx="minor">
-            <a:schemeClr val="lt1"/>
-          </a:fontRef>
-        </p:style>
-        <p:txBody>
-          <a:bodyPr rtlCol="0" anchor="ctr" wrap="square" lIns="73152" rIns="73152" tIns="36576" bIns="36576"/>
-          <a:lstStyle/>
-          <a:p>
-            <a:pPr algn="l">
-              <a:spcAft>
-                <a:spcPts val="0"/>
-              </a:spcAft>
-              <a:defRPr sz="1300" b="1">
-                <a:solidFill>
-                  <a:srgbClr val="122C4E"/>
-                </a:solidFill>
-                <a:latin typeface="Noto Sans CJK KR"/>
-              </a:defRPr>
-            </a:pPr>
-            <a:r>
-              <a:t>현재 단계 검증    |    현재 폴더 ~/agv_ws    |    현재 터미널</a:t>
-            </a:r>
-          </a:p>
-        </p:txBody>
-      </p:sp>
-      <p:sp>
-        <p:nvSpPr>
-          <p:cNvPr id="7" name="Rounded Rectangle 6"/>
-          <p:cNvSpPr/>
-          <p:nvPr/>
-        </p:nvSpPr>
-        <p:spPr>
-          <a:xfrm>
-            <a:off x="658368" y="1755648"/>
-            <a:ext cx="10972800" cy="2148840"/>
-          </a:xfrm>
-          <a:prstGeom prst="roundRect">
-            <a:avLst/>
-          </a:prstGeom>
-          <a:solidFill>
-            <a:srgbClr val="1D232D"/>
-          </a:solidFill>
-          <a:ln>
-            <a:solidFill>
-              <a:srgbClr val="1D232D"/>
-            </a:solidFill>
-          </a:ln>
-        </p:spPr>
-        <p:style>
-          <a:lnRef idx="1">
-            <a:schemeClr val="accent1"/>
-          </a:lnRef>
-          <a:fillRef idx="3">
-            <a:schemeClr val="accent1"/>
-          </a:fillRef>
-          <a:effectRef idx="2">
-            <a:schemeClr val="accent1"/>
-          </a:effectRef>
-          <a:fontRef idx="minor">
-            <a:schemeClr val="lt1"/>
-          </a:fontRef>
-        </p:style>
-        <p:txBody>
-          <a:bodyPr rtlCol="0" anchor="ctr" wrap="square" lIns="73152" rIns="73152" tIns="36576" bIns="36576"/>
-          <a:lstStyle/>
-          <a:p>
-            <a:pPr algn="l">
-              <a:spcAft>
-                <a:spcPts val="0"/>
-              </a:spcAft>
-              <a:defRPr sz="1600" b="0">
-                <a:solidFill>
-                  <a:srgbClr val="FFFFFF"/>
-                </a:solidFill>
-                <a:latin typeface="DejaVu Sans Mono"/>
-              </a:defRPr>
-            </a:pPr>
-            <a:r>
-              <a:t>ros2 topic info /cmd_vel_raw</a:t>
-            </a:r>
-            <a:br/>
-            <a:r>
-              <a:t>ros2 topic info /cmd_vel</a:t>
-            </a:r>
-            <a:br/>
-            <a:r>
-              <a:t>ros2 param get /safety_controller stop_distance</a:t>
-            </a:r>
-          </a:p>
-        </p:txBody>
-      </p:sp>
-      <p:sp>
-        <p:nvSpPr>
-          <p:cNvPr id="8" name="Rounded Rectangle 7"/>
-          <p:cNvSpPr/>
-          <p:nvPr/>
-        </p:nvSpPr>
-        <p:spPr>
-          <a:xfrm>
-            <a:off x="658368" y="4206240"/>
-            <a:ext cx="10972800" cy="1554480"/>
-          </a:xfrm>
-          <a:prstGeom prst="roundRect">
-            <a:avLst/>
-          </a:prstGeom>
-          <a:solidFill>
-            <a:srgbClr val="F4F7FB"/>
-          </a:solidFill>
-          <a:ln>
-            <a:solidFill>
-              <a:srgbClr val="D1DFD5"/>
-            </a:solidFill>
-          </a:ln>
-        </p:spPr>
-        <p:style>
-          <a:lnRef idx="1">
-            <a:schemeClr val="accent1"/>
-          </a:lnRef>
-          <a:fillRef idx="3">
-            <a:schemeClr val="accent1"/>
-          </a:fillRef>
-          <a:effectRef idx="2">
-            <a:schemeClr val="accent1"/>
-          </a:effectRef>
-          <a:fontRef idx="minor">
-            <a:schemeClr val="lt1"/>
-          </a:fontRef>
-        </p:style>
-        <p:txBody>
-          <a:bodyPr rtlCol="0" anchor="ctr" wrap="square" lIns="73152" rIns="73152" tIns="36576" bIns="36576"/>
-          <a:lstStyle/>
-          <a:p>
-            <a:pPr algn="l">
-              <a:spcAft>
-                <a:spcPts val="0"/>
-              </a:spcAft>
-              <a:defRPr sz="1800" b="1">
-                <a:solidFill>
-                  <a:srgbClr val="2A8B5A"/>
-                </a:solidFill>
-                <a:latin typeface="Noto Sans CJK KR"/>
-              </a:defRPr>
-            </a:pPr>
-            <a:r>
-              <a:t>완료 체크</a:t>
-            </a:r>
-            <a:br/>
-            <a:r>
-              <a:t>□ 명령이 오류 없이 실행된다.</a:t>
-            </a:r>
-            <a:br/>
-            <a:r>
-              <a:t>□ 기대한 파일·topic·frame·parameter 이름이 보인다.</a:t>
-            </a:r>
-            <a:br/>
-            <a:r>
-              <a:t>□ 값의 단위와 방향을 한 문장으로 설명할 수 있다.</a:t>
-            </a:r>
-          </a:p>
-        </p:txBody>
-      </p:sp>
-      <p:sp>
-        <p:nvSpPr>
-          <p:cNvPr id="9" name="TextBox 8"/>
+      <p:pic>
+        <p:nvPicPr>
+          <p:cNvPr id="6" name="Picture 5" descr="validation_terminal.png"/>
+          <p:cNvPicPr>
+            <a:picLocks noChangeAspect="1"/>
+          </p:cNvPicPr>
+          <p:nvPr/>
+        </p:nvPicPr>
+        <p:blipFill>
+          <a:blip r:embed="rId2"/>
+          <a:stretch>
+            <a:fillRect/>
+          </a:stretch>
+        </p:blipFill>
+        <p:spPr>
+          <a:xfrm>
+            <a:off x="790956" y="1562649"/>
+            <a:ext cx="10607040" cy="4381924"/>
+          </a:xfrm>
+          <a:prstGeom prst="rect">
+            <a:avLst/>
+          </a:prstGeom>
+        </p:spPr>
+      </p:pic>
+      <p:sp>
+        <p:nvSpPr>
+          <p:cNvPr id="7" name="TextBox 6"/>
           <p:cNvSpPr txBox="1"/>
           <p:nvPr/>
         </p:nvSpPr>
         <p:spPr>
           <a:xfrm>
-            <a:off x="731520" y="5989320"/>
-            <a:ext cx="10789920" cy="237744"/>
+            <a:off x="777240" y="6217920"/>
+            <a:ext cx="10607040" cy="182880"/>
           </a:xfrm>
           <a:prstGeom prst="rect">
             <a:avLst/>
@@ -10143,19 +10348,19 @@
           </a:bodyPr>
           <a:lstStyle/>
           <a:p>
-            <a:pPr algn="l">
-              <a:spcAft>
-                <a:spcPts val="0"/>
-              </a:spcAft>
-              <a:defRPr sz="1500" b="1">
-                <a:solidFill>
-                  <a:srgbClr val="122C4E"/>
-                </a:solidFill>
-                <a:latin typeface="Noto Sans CJK KR"/>
-              </a:defRPr>
-            </a:pPr>
-            <a:r>
-              <a:t>완료 조건: 0.5 m 안 장애물에서 forward cmd_vel이 zero Twist로 바뀌는 조건을 설명한다.</a:t>
+            <a:pPr algn="ctr">
+              <a:spcAft>
+                <a:spcPts val="0"/>
+              </a:spcAft>
+              <a:defRPr sz="1100" b="1">
+                <a:solidFill>
+                  <a:srgbClr val="2A8B5A"/>
+                </a:solidFill>
+                <a:latin typeface="Noto Sans CJK KR"/>
+              </a:defRPr>
+            </a:pPr>
+            <a:r>
+              <a:t>① 명령/설정  ② 정상 출력 또는 화면  ③ 다음 검증 명령으로 재확인</a:t>
             </a:r>
           </a:p>
         </p:txBody>
@@ -10673,7 +10878,7 @@
               </a:defRPr>
             </a:pPr>
             <a:r>
-              <a:t>막히면: 증상 → 우선 확인 → 재검증</a:t>
+              <a:t>정상 결과: 실제 환경에서 확인한 출력</a:t>
             </a:r>
           </a:p>
         </p:txBody>
@@ -10712,7 +10917,7 @@
               </a:defRPr>
             </a:pPr>
             <a:r>
-              <a:t>오류 메시지를 숨기지 않고 같은 순서로 점검합니다.</a:t>
+              <a:t>실제 RViz2: safety sector Marker와 Path를 추가해 확인하는 통합 display</a:t>
             </a:r>
           </a:p>
         </p:txBody>
@@ -10795,119 +11000,40 @@
           </a:p>
         </p:txBody>
       </p:sp>
-      <p:sp>
-        <p:nvSpPr>
-          <p:cNvPr id="6" name="Rectangle 5"/>
-          <p:cNvSpPr/>
-          <p:nvPr/>
-        </p:nvSpPr>
-        <p:spPr>
-          <a:xfrm>
-            <a:off x="566928" y="1188720"/>
-            <a:ext cx="11064240" cy="347472"/>
-          </a:xfrm>
-          <a:prstGeom prst="rect">
-            <a:avLst/>
-          </a:prstGeom>
-          <a:solidFill>
-            <a:srgbClr val="F4F7FB"/>
-          </a:solidFill>
-          <a:ln>
-            <a:solidFill>
-              <a:srgbClr val="F4F7FB"/>
-            </a:solidFill>
-          </a:ln>
-        </p:spPr>
-        <p:style>
-          <a:lnRef idx="1">
-            <a:schemeClr val="accent1"/>
-          </a:lnRef>
-          <a:fillRef idx="3">
-            <a:schemeClr val="accent1"/>
-          </a:fillRef>
-          <a:effectRef idx="2">
-            <a:schemeClr val="accent1"/>
-          </a:effectRef>
-          <a:fontRef idx="minor">
-            <a:schemeClr val="lt1"/>
-          </a:fontRef>
-        </p:style>
-        <p:txBody>
-          <a:bodyPr rtlCol="0" anchor="ctr" wrap="square" lIns="73152" rIns="73152" tIns="36576" bIns="36576"/>
-          <a:lstStyle/>
-          <a:p>
-            <a:pPr algn="l">
-              <a:spcAft>
-                <a:spcPts val="0"/>
-              </a:spcAft>
-              <a:defRPr sz="1300" b="1">
-                <a:solidFill>
-                  <a:srgbClr val="122C4E"/>
-                </a:solidFill>
-                <a:latin typeface="Noto Sans CJK KR"/>
-              </a:defRPr>
-            </a:pPr>
-            <a:r>
-              <a:t>현재 단계 오류 대응    |    현재 폴더 ~/agv_ws    |    현재 터미널</a:t>
-            </a:r>
-          </a:p>
-        </p:txBody>
-      </p:sp>
-      <p:sp>
-        <p:nvSpPr>
-          <p:cNvPr id="7" name="Rounded Rectangle 6"/>
-          <p:cNvSpPr/>
-          <p:nvPr/>
-        </p:nvSpPr>
-        <p:spPr>
-          <a:xfrm>
-            <a:off x="694944" y="1755648"/>
-            <a:ext cx="10972800" cy="1115568"/>
-          </a:xfrm>
-          <a:prstGeom prst="roundRect">
-            <a:avLst/>
-          </a:prstGeom>
-          <a:solidFill>
-            <a:srgbClr val="FFF7F4"/>
-          </a:solidFill>
-          <a:ln>
-            <a:solidFill>
-              <a:srgbClr val="EDBEB4"/>
-            </a:solidFill>
-          </a:ln>
-        </p:spPr>
-        <p:style>
-          <a:lnRef idx="1">
-            <a:schemeClr val="accent1"/>
-          </a:lnRef>
-          <a:fillRef idx="3">
-            <a:schemeClr val="accent1"/>
-          </a:fillRef>
-          <a:effectRef idx="2">
-            <a:schemeClr val="accent1"/>
-          </a:effectRef>
-          <a:fontRef idx="minor">
-            <a:schemeClr val="lt1"/>
-          </a:fontRef>
-        </p:style>
-        <p:txBody>
-          <a:bodyPr rtlCol="0" anchor="ctr"/>
-          <a:lstStyle/>
-          <a:p>
-            <a:pPr algn="ctr"/>
-          </a:p>
-        </p:txBody>
-      </p:sp>
-      <p:sp>
-        <p:nvSpPr>
-          <p:cNvPr id="8" name="TextBox 7"/>
+      <p:pic>
+        <p:nvPicPr>
+          <p:cNvPr id="6" name="Picture 5" descr="02_rviz_marker_path_actual.png"/>
+          <p:cNvPicPr>
+            <a:picLocks noChangeAspect="1"/>
+          </p:cNvPicPr>
+          <p:nvPr/>
+        </p:nvPicPr>
+        <p:blipFill>
+          <a:blip r:embed="rId2"/>
+          <a:stretch>
+            <a:fillRect/>
+          </a:stretch>
+        </p:blipFill>
+        <p:spPr>
+          <a:xfrm>
+            <a:off x="2971409" y="1353312"/>
+            <a:ext cx="6246133" cy="4800600"/>
+          </a:xfrm>
+          <a:prstGeom prst="rect">
+            <a:avLst/>
+          </a:prstGeom>
+        </p:spPr>
+      </p:pic>
+      <p:sp>
+        <p:nvSpPr>
+          <p:cNvPr id="7" name="TextBox 6"/>
           <p:cNvSpPr txBox="1"/>
           <p:nvPr/>
         </p:nvSpPr>
         <p:spPr>
           <a:xfrm>
-            <a:off x="896112" y="1901952"/>
-            <a:ext cx="2926080" cy="274320"/>
+            <a:off x="777240" y="6217920"/>
+            <a:ext cx="10607040" cy="182880"/>
           </a:xfrm>
           <a:prstGeom prst="rect">
             <a:avLst/>
@@ -10920,228 +11046,19 @@
           </a:bodyPr>
           <a:lstStyle/>
           <a:p>
-            <a:pPr algn="l">
-              <a:spcAft>
-                <a:spcPts val="0"/>
-              </a:spcAft>
-              <a:defRPr sz="1800" b="1">
-                <a:solidFill>
-                  <a:srgbClr val="BE3B3B"/>
-                </a:solidFill>
-                <a:latin typeface="Noto Sans CJK KR"/>
-              </a:defRPr>
-            </a:pPr>
-            <a:r>
-              <a:t>증상 1: 장애물이 있는데 멈추지 않음</a:t>
-            </a:r>
-          </a:p>
-        </p:txBody>
-      </p:sp>
-      <p:sp>
-        <p:nvSpPr>
-          <p:cNvPr id="9" name="TextBox 8"/>
-          <p:cNvSpPr txBox="1"/>
-          <p:nvPr/>
-        </p:nvSpPr>
-        <p:spPr>
-          <a:xfrm>
-            <a:off x="3794760" y="1883664"/>
-            <a:ext cx="7543800" cy="621792"/>
-          </a:xfrm>
-          <a:prstGeom prst="rect">
-            <a:avLst/>
-          </a:prstGeom>
-          <a:noFill/>
-        </p:spPr>
-        <p:txBody>
-          <a:bodyPr wrap="square" lIns="73152" rIns="73152" tIns="36576" bIns="36576">
-            <a:spAutoFit/>
-          </a:bodyPr>
-          <a:lstStyle/>
-          <a:p>
-            <a:pPr algn="l">
-              <a:spcAft>
-                <a:spcPts val="0"/>
-              </a:spcAft>
-              <a:defRPr sz="1600" b="0">
-                <a:solidFill>
-                  <a:srgbClr val="122C4E"/>
-                </a:solidFill>
-                <a:latin typeface="Noto Sans CJK KR"/>
-              </a:defRPr>
-            </a:pPr>
-            <a:r>
-              <a:t>우선 확인: sector 각도·finite range·threshold m 단위를 확인한다.</a:t>
-            </a:r>
-            <a:br/>
-            <a:r>
-              <a:t>수정 후: ros2 topic info /cmd_vel_raw</a:t>
-            </a:r>
-          </a:p>
-        </p:txBody>
-      </p:sp>
-      <p:sp>
-        <p:nvSpPr>
-          <p:cNvPr id="10" name="Rounded Rectangle 9"/>
-          <p:cNvSpPr/>
-          <p:nvPr/>
-        </p:nvSpPr>
-        <p:spPr>
-          <a:xfrm>
-            <a:off x="694944" y="3172968"/>
-            <a:ext cx="10972800" cy="1115568"/>
-          </a:xfrm>
-          <a:prstGeom prst="roundRect">
-            <a:avLst/>
-          </a:prstGeom>
-          <a:solidFill>
-            <a:srgbClr val="FFF7F4"/>
-          </a:solidFill>
-          <a:ln>
-            <a:solidFill>
-              <a:srgbClr val="EDBEB4"/>
-            </a:solidFill>
-          </a:ln>
-        </p:spPr>
-        <p:style>
-          <a:lnRef idx="1">
-            <a:schemeClr val="accent1"/>
-          </a:lnRef>
-          <a:fillRef idx="3">
-            <a:schemeClr val="accent1"/>
-          </a:fillRef>
-          <a:effectRef idx="2">
-            <a:schemeClr val="accent1"/>
-          </a:effectRef>
-          <a:fontRef idx="minor">
-            <a:schemeClr val="lt1"/>
-          </a:fontRef>
-        </p:style>
-        <p:txBody>
-          <a:bodyPr rtlCol="0" anchor="ctr"/>
-          <a:lstStyle/>
-          <a:p>
-            <a:pPr algn="ctr"/>
-          </a:p>
-        </p:txBody>
-      </p:sp>
-      <p:sp>
-        <p:nvSpPr>
-          <p:cNvPr id="11" name="TextBox 10"/>
-          <p:cNvSpPr txBox="1"/>
-          <p:nvPr/>
-        </p:nvSpPr>
-        <p:spPr>
-          <a:xfrm>
-            <a:off x="896112" y="3319272"/>
-            <a:ext cx="2926080" cy="274320"/>
-          </a:xfrm>
-          <a:prstGeom prst="rect">
-            <a:avLst/>
-          </a:prstGeom>
-          <a:noFill/>
-        </p:spPr>
-        <p:txBody>
-          <a:bodyPr wrap="square" lIns="73152" rIns="73152" tIns="36576" bIns="36576">
-            <a:spAutoFit/>
-          </a:bodyPr>
-          <a:lstStyle/>
-          <a:p>
-            <a:pPr algn="l">
-              <a:spcAft>
-                <a:spcPts val="0"/>
-              </a:spcAft>
-              <a:defRPr sz="1800" b="1">
-                <a:solidFill>
-                  <a:srgbClr val="BE3B3B"/>
-                </a:solidFill>
-                <a:latin typeface="Noto Sans CJK KR"/>
-              </a:defRPr>
-            </a:pPr>
-            <a:r>
-              <a:t>증상 2: 항상 STOP</a:t>
-            </a:r>
-          </a:p>
-        </p:txBody>
-      </p:sp>
-      <p:sp>
-        <p:nvSpPr>
-          <p:cNvPr id="12" name="TextBox 11"/>
-          <p:cNvSpPr txBox="1"/>
-          <p:nvPr/>
-        </p:nvSpPr>
-        <p:spPr>
-          <a:xfrm>
-            <a:off x="3794760" y="3300984"/>
-            <a:ext cx="7543800" cy="621792"/>
-          </a:xfrm>
-          <a:prstGeom prst="rect">
-            <a:avLst/>
-          </a:prstGeom>
-          <a:noFill/>
-        </p:spPr>
-        <p:txBody>
-          <a:bodyPr wrap="square" lIns="73152" rIns="73152" tIns="36576" bIns="36576">
-            <a:spAutoFit/>
-          </a:bodyPr>
-          <a:lstStyle/>
-          <a:p>
-            <a:pPr algn="l">
-              <a:spcAft>
-                <a:spcPts val="0"/>
-              </a:spcAft>
-              <a:defRPr sz="1600" b="0">
-                <a:solidFill>
-                  <a:srgbClr val="122C4E"/>
-                </a:solidFill>
-                <a:latin typeface="Noto Sans CJK KR"/>
-              </a:defRPr>
-            </a:pPr>
-            <a:r>
-              <a:t>우선 확인: inf/NaN 처리와 lidar frame 전방 방향을 확인한다.</a:t>
-            </a:r>
-            <a:br/>
-            <a:r>
-              <a:t>수정 후: ros2 topic info /cmd_vel_raw</a:t>
-            </a:r>
-          </a:p>
-        </p:txBody>
-      </p:sp>
-      <p:sp>
-        <p:nvSpPr>
-          <p:cNvPr id="13" name="TextBox 12"/>
-          <p:cNvSpPr txBox="1"/>
-          <p:nvPr/>
-        </p:nvSpPr>
-        <p:spPr>
-          <a:xfrm>
-            <a:off x="822960" y="5102352"/>
-            <a:ext cx="10607040" cy="402336"/>
-          </a:xfrm>
-          <a:prstGeom prst="rect">
-            <a:avLst/>
-          </a:prstGeom>
-          <a:noFill/>
-        </p:spPr>
-        <p:txBody>
-          <a:bodyPr wrap="square" lIns="73152" rIns="73152" tIns="36576" bIns="36576">
-            <a:spAutoFit/>
-          </a:bodyPr>
-          <a:lstStyle/>
-          <a:p>
             <a:pPr algn="ctr">
               <a:spcAft>
                 <a:spcPts val="0"/>
               </a:spcAft>
-              <a:defRPr sz="1800" b="1">
-                <a:solidFill>
-                  <a:srgbClr val="DB7E22"/>
-                </a:solidFill>
-                <a:latin typeface="Noto Sans CJK KR"/>
-              </a:defRPr>
-            </a:pPr>
-            <a:r>
-              <a:t>공통 순서: ① 현재 폴더 ② source ③ 파일 경로 ④ 이름/타입/단위 ⑤ build·source 후 재실행</a:t>
+              <a:defRPr sz="1100" b="1">
+                <a:solidFill>
+                  <a:srgbClr val="2A8B5A"/>
+                </a:solidFill>
+                <a:latin typeface="Noto Sans CJK KR"/>
+              </a:defRPr>
+            </a:pPr>
+            <a:r>
+              <a:t>① 명령/설정  ② 정상 출력 또는 화면  ③ 다음 검증 명령으로 재확인</a:t>
             </a:r>
           </a:p>
         </p:txBody>
@@ -11198,7 +11115,7 @@
               </a:defRPr>
             </a:pPr>
             <a:r>
-              <a:t>미니 실습: 값 하나를 바꾸고 결과를 비교한다</a:t>
+              <a:t>객관적 검증 명령으로 완료를 확인한다</a:t>
             </a:r>
           </a:p>
         </p:txBody>
@@ -11237,7 +11154,7 @@
               </a:defRPr>
             </a:pPr>
             <a:r>
-              <a:t>정상 결과를 만든 뒤에는 한 번에 하나의 값만 바꿉니다.</a:t>
+              <a:t>화면만 보지 말고 topic·frame·파일·parameter를 다시 확인합니다.</a:t>
             </a:r>
           </a:p>
         </p:txBody>
@@ -11373,7 +11290,7 @@
               </a:defRPr>
             </a:pPr>
             <a:r>
-              <a:t>현재 단계 미니 실습    |    현재 폴더 ~/agv_ws    |    현재 터미널</a:t>
+              <a:t>현재 단계 검증    |    현재 폴더 ~/ros2_curri/agv_ws    |    현재 터미널</a:t>
             </a:r>
           </a:p>
         </p:txBody>
@@ -11386,18 +11303,18 @@
         </p:nvSpPr>
         <p:spPr>
           <a:xfrm>
-            <a:off x="749808" y="1874519"/>
-            <a:ext cx="10652760" cy="1993392"/>
+            <a:off x="658368" y="1755648"/>
+            <a:ext cx="10972800" cy="2148840"/>
           </a:xfrm>
           <a:prstGeom prst="roundRect">
             <a:avLst/>
           </a:prstGeom>
           <a:solidFill>
-            <a:srgbClr val="FFF8EB"/>
+            <a:srgbClr val="1D232D"/>
           </a:solidFill>
           <a:ln>
             <a:solidFill>
-              <a:srgbClr val="ECC680"/>
+              <a:srgbClr val="1D232D"/>
             </a:solidFill>
           </a:ln>
         </p:spPr>
@@ -11419,33 +11336,111 @@
           <a:bodyPr rtlCol="0" anchor="ctr" wrap="square" lIns="73152" rIns="73152" tIns="36576" bIns="36576"/>
           <a:lstStyle/>
           <a:p>
-            <a:pPr algn="ctr">
-              <a:spcAft>
-                <a:spcPts val="0"/>
-              </a:spcAft>
-              <a:defRPr sz="2300" b="1">
-                <a:solidFill>
-                  <a:srgbClr val="122C4E"/>
-                </a:solidFill>
-                <a:latin typeface="Noto Sans CJK KR"/>
-              </a:defRPr>
-            </a:pPr>
-            <a:r>
-              <a:t>stop_distance 0.50→0.80 m로 바꾸면 어떤 상황에서 더 일찍 멈추는지 /cmd_vel 로그 기준으로 작성한다.</a:t>
-            </a:r>
-          </a:p>
-        </p:txBody>
-      </p:sp>
-      <p:sp>
-        <p:nvSpPr>
-          <p:cNvPr id="8" name="TextBox 7"/>
+            <a:pPr algn="l">
+              <a:spcAft>
+                <a:spcPts val="0"/>
+              </a:spcAft>
+              <a:defRPr sz="1600" b="0">
+                <a:solidFill>
+                  <a:srgbClr val="FFFFFF"/>
+                </a:solidFill>
+                <a:latin typeface="DejaVu Sans Mono"/>
+              </a:defRPr>
+            </a:pPr>
+            <a:r>
+              <a:t>ros2 topic info /cmd_vel_raw</a:t>
+            </a:r>
+            <a:br/>
+            <a:r>
+              <a:t>ros2 topic info /cmd_vel</a:t>
+            </a:r>
+            <a:br/>
+            <a:r>
+              <a:t>ros2 param get /safety_controller stop_distance</a:t>
+            </a:r>
+          </a:p>
+        </p:txBody>
+      </p:sp>
+      <p:sp>
+        <p:nvSpPr>
+          <p:cNvPr id="8" name="Rounded Rectangle 7"/>
+          <p:cNvSpPr/>
+          <p:nvPr/>
+        </p:nvSpPr>
+        <p:spPr>
+          <a:xfrm>
+            <a:off x="658368" y="4206240"/>
+            <a:ext cx="10972800" cy="1554480"/>
+          </a:xfrm>
+          <a:prstGeom prst="roundRect">
+            <a:avLst/>
+          </a:prstGeom>
+          <a:solidFill>
+            <a:srgbClr val="F4F7FB"/>
+          </a:solidFill>
+          <a:ln>
+            <a:solidFill>
+              <a:srgbClr val="D1DFD5"/>
+            </a:solidFill>
+          </a:ln>
+        </p:spPr>
+        <p:style>
+          <a:lnRef idx="1">
+            <a:schemeClr val="accent1"/>
+          </a:lnRef>
+          <a:fillRef idx="3">
+            <a:schemeClr val="accent1"/>
+          </a:fillRef>
+          <a:effectRef idx="2">
+            <a:schemeClr val="accent1"/>
+          </a:effectRef>
+          <a:fontRef idx="minor">
+            <a:schemeClr val="lt1"/>
+          </a:fontRef>
+        </p:style>
+        <p:txBody>
+          <a:bodyPr rtlCol="0" anchor="ctr" wrap="square" lIns="73152" rIns="73152" tIns="36576" bIns="36576"/>
+          <a:lstStyle/>
+          <a:p>
+            <a:pPr algn="l">
+              <a:spcAft>
+                <a:spcPts val="0"/>
+              </a:spcAft>
+              <a:defRPr sz="1800" b="1">
+                <a:solidFill>
+                  <a:srgbClr val="2A8B5A"/>
+                </a:solidFill>
+                <a:latin typeface="Noto Sans CJK KR"/>
+              </a:defRPr>
+            </a:pPr>
+            <a:r>
+              <a:t>완료 체크</a:t>
+            </a:r>
+            <a:br/>
+            <a:r>
+              <a:t>□ 명령이 오류 없이 실행된다.</a:t>
+            </a:r>
+            <a:br/>
+            <a:r>
+              <a:t>□ 기대한 파일·topic·frame·parameter 이름이 보인다.</a:t>
+            </a:r>
+            <a:br/>
+            <a:r>
+              <a:t>□ 값의 단위와 방향을 한 문장으로 설명할 수 있다.</a:t>
+            </a:r>
+          </a:p>
+        </p:txBody>
+      </p:sp>
+      <p:sp>
+        <p:nvSpPr>
+          <p:cNvPr id="9" name="TextBox 8"/>
           <p:cNvSpPr txBox="1"/>
           <p:nvPr/>
         </p:nvSpPr>
         <p:spPr>
           <a:xfrm>
-            <a:off x="877824" y="4590288"/>
-            <a:ext cx="10241280" cy="594360"/>
+            <a:off x="731520" y="5989320"/>
+            <a:ext cx="10789920" cy="237744"/>
           </a:xfrm>
           <a:prstGeom prst="rect">
             <a:avLst/>
@@ -11458,19 +11453,19 @@
           </a:bodyPr>
           <a:lstStyle/>
           <a:p>
-            <a:pPr algn="ctr">
-              <a:spcAft>
-                <a:spcPts val="0"/>
-              </a:spcAft>
-              <a:defRPr sz="1900" b="1">
-                <a:solidFill>
-                  <a:srgbClr val="DB7E22"/>
-                </a:solidFill>
-                <a:latin typeface="Noto Sans CJK KR"/>
-              </a:defRPr>
-            </a:pPr>
-            <a:r>
-              <a:t>기록할 것: 바꾼 값(단위) · 기대한 변화 · 실제 출력/화면 · 원래 값으로 되돌린 결과</a:t>
+            <a:pPr algn="l">
+              <a:spcAft>
+                <a:spcPts val="0"/>
+              </a:spcAft>
+              <a:defRPr sz="1500" b="1">
+                <a:solidFill>
+                  <a:srgbClr val="122C4E"/>
+                </a:solidFill>
+                <a:latin typeface="Noto Sans CJK KR"/>
+              </a:defRPr>
+            </a:pPr>
+            <a:r>
+              <a:t>완료 조건: 0.5 m 안 장애물에서 forward cmd_vel이 zero Twist로 바뀌는 조건을 설명한다.</a:t>
             </a:r>
           </a:p>
         </p:txBody>
@@ -11527,7 +11522,7 @@
               </a:defRPr>
             </a:pPr>
             <a:r>
-              <a:t>체크포인트를 저장하고 다음 모듈로 넘긴다</a:t>
+              <a:t>막히면: 증상 → 우선 확인 → 재검증</a:t>
             </a:r>
           </a:p>
         </p:txBody>
@@ -11566,7 +11561,7 @@
               </a:defRPr>
             </a:pPr>
             <a:r>
-              <a:t>현재 Complete는 다음 Starter의 기준선입니다.</a:t>
+              <a:t>오류 메시지를 숨기지 않고 같은 순서로 점검합니다.</a:t>
             </a:r>
           </a:p>
         </p:txBody>
@@ -11702,7 +11697,7 @@
               </a:defRPr>
             </a:pPr>
             <a:r>
-              <a:t>현재 단계 체크포인트    |    현재 폴더 ~/agv_ws    |    현재 터미널</a:t>
+              <a:t>현재 단계 오류 대응    |    현재 폴더 ~/ros2_curri/agv_ws    |    현재 터미널</a:t>
             </a:r>
           </a:p>
         </p:txBody>
@@ -11715,18 +11710,18 @@
         </p:nvSpPr>
         <p:spPr>
           <a:xfrm>
-            <a:off x="685800" y="1737360"/>
-            <a:ext cx="10972800" cy="3611880"/>
+            <a:off x="694944" y="1755648"/>
+            <a:ext cx="10972800" cy="1115568"/>
           </a:xfrm>
           <a:prstGeom prst="roundRect">
             <a:avLst/>
           </a:prstGeom>
           <a:solidFill>
-            <a:srgbClr val="F4F7FB"/>
+            <a:srgbClr val="FFF7F4"/>
           </a:solidFill>
           <a:ln>
             <a:solidFill>
-              <a:srgbClr val="D2DCE8"/>
+              <a:srgbClr val="EDBEB4"/>
             </a:solidFill>
           </a:ln>
         </p:spPr>
@@ -11760,111 +11755,8 @@
         </p:nvSpPr>
         <p:spPr>
           <a:xfrm>
-            <a:off x="896112" y="1993392"/>
-            <a:ext cx="10332720" cy="2971800"/>
-          </a:xfrm>
-          <a:prstGeom prst="rect">
-            <a:avLst/>
-          </a:prstGeom>
-          <a:noFill/>
-        </p:spPr>
-        <p:txBody>
-          <a:bodyPr wrap="square" lIns="109728" rIns="109728">
-            <a:spAutoFit/>
-          </a:bodyPr>
-          <a:lstStyle/>
-          <a:p>
-            <a:pPr>
-              <a:spcAft>
-                <a:spcPts val="800"/>
-              </a:spcAft>
-              <a:defRPr sz="1800">
-                <a:solidFill>
-                  <a:srgbClr val="122C4E"/>
-                </a:solidFill>
-                <a:latin typeface="Noto Sans CJK KR"/>
-              </a:defRPr>
-            </a:pPr>
-            <a:r>
-              <a:t>• □ 완료 화면: 0.5 m 안 장애물에서 forward cmd_vel이 zero Twist로 바뀌는 조건을 설명한다.</a:t>
-            </a:r>
-          </a:p>
-          <a:p>
-            <a:pPr>
-              <a:spcAft>
-                <a:spcPts val="800"/>
-              </a:spcAft>
-              <a:defRPr sz="1800">
-                <a:solidFill>
-                  <a:srgbClr val="122C4E"/>
-                </a:solidFill>
-                <a:latin typeface="Noto Sans CJK KR"/>
-              </a:defRPr>
-            </a:pPr>
-            <a:r>
-              <a:t>• □ Complete 파일: blocks/E_autonomy_logic/M18_obstacle_perception/complete/</a:t>
-            </a:r>
-          </a:p>
-          <a:p>
-            <a:pPr>
-              <a:spcAft>
-                <a:spcPts val="800"/>
-              </a:spcAft>
-              <a:defRPr sz="1800">
-                <a:solidFill>
-                  <a:srgbClr val="122C4E"/>
-                </a:solidFill>
-                <a:latin typeface="Noto Sans CJK KR"/>
-              </a:defRPr>
-            </a:pPr>
-            <a:r>
-              <a:t>• □ 정상 로그·캡처: logs/validation.log, screenshots/validation_terminal.png</a:t>
-            </a:r>
-          </a:p>
-          <a:p>
-            <a:pPr>
-              <a:spcAft>
-                <a:spcPts val="800"/>
-              </a:spcAft>
-              <a:defRPr sz="1800">
-                <a:solidFill>
-                  <a:srgbClr val="122C4E"/>
-                </a:solidFill>
-                <a:latin typeface="Noto Sans CJK KR"/>
-              </a:defRPr>
-            </a:pPr>
-            <a:r>
-              <a:t>• □ 버전 식별: CHECKSUM_or_TAG.txt의 SHA-256 manifest</a:t>
-            </a:r>
-          </a:p>
-          <a:p>
-            <a:pPr>
-              <a:spcAft>
-                <a:spcPts val="800"/>
-              </a:spcAft>
-              <a:defRPr sz="1800">
-                <a:solidFill>
-                  <a:srgbClr val="122C4E"/>
-                </a:solidFill>
-                <a:latin typeface="Noto Sans CJK KR"/>
-              </a:defRPr>
-            </a:pPr>
-            <a:r>
-              <a:t>• □ 다음 시작 조건: M19 FSM</a:t>
-            </a:r>
-          </a:p>
-        </p:txBody>
-      </p:sp>
-      <p:sp>
-        <p:nvSpPr>
-          <p:cNvPr id="9" name="TextBox 8"/>
-          <p:cNvSpPr txBox="1"/>
-          <p:nvPr/>
-        </p:nvSpPr>
-        <p:spPr>
-          <a:xfrm>
-            <a:off x="868680" y="5596128"/>
-            <a:ext cx="10515600" cy="338328"/>
+            <a:off x="896112" y="1901952"/>
+            <a:ext cx="2926080" cy="274320"/>
           </a:xfrm>
           <a:prstGeom prst="rect">
             <a:avLst/>
@@ -11877,19 +11769,228 @@
           </a:bodyPr>
           <a:lstStyle/>
           <a:p>
+            <a:pPr algn="l">
+              <a:spcAft>
+                <a:spcPts val="0"/>
+              </a:spcAft>
+              <a:defRPr sz="1800" b="1">
+                <a:solidFill>
+                  <a:srgbClr val="BE3B3B"/>
+                </a:solidFill>
+                <a:latin typeface="Noto Sans CJK KR"/>
+              </a:defRPr>
+            </a:pPr>
+            <a:r>
+              <a:t>증상 1: 장애물이 있는데 멈추지 않음</a:t>
+            </a:r>
+          </a:p>
+        </p:txBody>
+      </p:sp>
+      <p:sp>
+        <p:nvSpPr>
+          <p:cNvPr id="9" name="TextBox 8"/>
+          <p:cNvSpPr txBox="1"/>
+          <p:nvPr/>
+        </p:nvSpPr>
+        <p:spPr>
+          <a:xfrm>
+            <a:off x="3794760" y="1883664"/>
+            <a:ext cx="7543800" cy="621792"/>
+          </a:xfrm>
+          <a:prstGeom prst="rect">
+            <a:avLst/>
+          </a:prstGeom>
+          <a:noFill/>
+        </p:spPr>
+        <p:txBody>
+          <a:bodyPr wrap="square" lIns="73152" rIns="73152" tIns="36576" bIns="36576">
+            <a:spAutoFit/>
+          </a:bodyPr>
+          <a:lstStyle/>
+          <a:p>
+            <a:pPr algn="l">
+              <a:spcAft>
+                <a:spcPts val="0"/>
+              </a:spcAft>
+              <a:defRPr sz="1600" b="0">
+                <a:solidFill>
+                  <a:srgbClr val="122C4E"/>
+                </a:solidFill>
+                <a:latin typeface="Noto Sans CJK KR"/>
+              </a:defRPr>
+            </a:pPr>
+            <a:r>
+              <a:t>우선 확인: sector 각도·finite range·threshold m 단위를 확인한다.</a:t>
+            </a:r>
+            <a:br/>
+            <a:r>
+              <a:t>수정 후: ros2 topic info /cmd_vel_raw</a:t>
+            </a:r>
+          </a:p>
+        </p:txBody>
+      </p:sp>
+      <p:sp>
+        <p:nvSpPr>
+          <p:cNvPr id="10" name="Rounded Rectangle 9"/>
+          <p:cNvSpPr/>
+          <p:nvPr/>
+        </p:nvSpPr>
+        <p:spPr>
+          <a:xfrm>
+            <a:off x="694944" y="3172968"/>
+            <a:ext cx="10972800" cy="1115568"/>
+          </a:xfrm>
+          <a:prstGeom prst="roundRect">
+            <a:avLst/>
+          </a:prstGeom>
+          <a:solidFill>
+            <a:srgbClr val="FFF7F4"/>
+          </a:solidFill>
+          <a:ln>
+            <a:solidFill>
+              <a:srgbClr val="EDBEB4"/>
+            </a:solidFill>
+          </a:ln>
+        </p:spPr>
+        <p:style>
+          <a:lnRef idx="1">
+            <a:schemeClr val="accent1"/>
+          </a:lnRef>
+          <a:fillRef idx="3">
+            <a:schemeClr val="accent1"/>
+          </a:fillRef>
+          <a:effectRef idx="2">
+            <a:schemeClr val="accent1"/>
+          </a:effectRef>
+          <a:fontRef idx="minor">
+            <a:schemeClr val="lt1"/>
+          </a:fontRef>
+        </p:style>
+        <p:txBody>
+          <a:bodyPr rtlCol="0" anchor="ctr"/>
+          <a:lstStyle/>
+          <a:p>
+            <a:pPr algn="ctr"/>
+          </a:p>
+        </p:txBody>
+      </p:sp>
+      <p:sp>
+        <p:nvSpPr>
+          <p:cNvPr id="11" name="TextBox 10"/>
+          <p:cNvSpPr txBox="1"/>
+          <p:nvPr/>
+        </p:nvSpPr>
+        <p:spPr>
+          <a:xfrm>
+            <a:off x="896112" y="3319272"/>
+            <a:ext cx="2926080" cy="274320"/>
+          </a:xfrm>
+          <a:prstGeom prst="rect">
+            <a:avLst/>
+          </a:prstGeom>
+          <a:noFill/>
+        </p:spPr>
+        <p:txBody>
+          <a:bodyPr wrap="square" lIns="73152" rIns="73152" tIns="36576" bIns="36576">
+            <a:spAutoFit/>
+          </a:bodyPr>
+          <a:lstStyle/>
+          <a:p>
+            <a:pPr algn="l">
+              <a:spcAft>
+                <a:spcPts val="0"/>
+              </a:spcAft>
+              <a:defRPr sz="1800" b="1">
+                <a:solidFill>
+                  <a:srgbClr val="BE3B3B"/>
+                </a:solidFill>
+                <a:latin typeface="Noto Sans CJK KR"/>
+              </a:defRPr>
+            </a:pPr>
+            <a:r>
+              <a:t>증상 2: 항상 STOP</a:t>
+            </a:r>
+          </a:p>
+        </p:txBody>
+      </p:sp>
+      <p:sp>
+        <p:nvSpPr>
+          <p:cNvPr id="12" name="TextBox 11"/>
+          <p:cNvSpPr txBox="1"/>
+          <p:nvPr/>
+        </p:nvSpPr>
+        <p:spPr>
+          <a:xfrm>
+            <a:off x="3794760" y="3300984"/>
+            <a:ext cx="7543800" cy="621792"/>
+          </a:xfrm>
+          <a:prstGeom prst="rect">
+            <a:avLst/>
+          </a:prstGeom>
+          <a:noFill/>
+        </p:spPr>
+        <p:txBody>
+          <a:bodyPr wrap="square" lIns="73152" rIns="73152" tIns="36576" bIns="36576">
+            <a:spAutoFit/>
+          </a:bodyPr>
+          <a:lstStyle/>
+          <a:p>
+            <a:pPr algn="l">
+              <a:spcAft>
+                <a:spcPts val="0"/>
+              </a:spcAft>
+              <a:defRPr sz="1600" b="0">
+                <a:solidFill>
+                  <a:srgbClr val="122C4E"/>
+                </a:solidFill>
+                <a:latin typeface="Noto Sans CJK KR"/>
+              </a:defRPr>
+            </a:pPr>
+            <a:r>
+              <a:t>우선 확인: inf/NaN 처리와 lidar frame 전방 방향을 확인한다.</a:t>
+            </a:r>
+            <a:br/>
+            <a:r>
+              <a:t>수정 후: ros2 topic info /cmd_vel_raw</a:t>
+            </a:r>
+          </a:p>
+        </p:txBody>
+      </p:sp>
+      <p:sp>
+        <p:nvSpPr>
+          <p:cNvPr id="13" name="TextBox 12"/>
+          <p:cNvSpPr txBox="1"/>
+          <p:nvPr/>
+        </p:nvSpPr>
+        <p:spPr>
+          <a:xfrm>
+            <a:off x="822960" y="5102352"/>
+            <a:ext cx="10607040" cy="402336"/>
+          </a:xfrm>
+          <a:prstGeom prst="rect">
+            <a:avLst/>
+          </a:prstGeom>
+          <a:noFill/>
+        </p:spPr>
+        <p:txBody>
+          <a:bodyPr wrap="square" lIns="73152" rIns="73152" tIns="36576" bIns="36576">
+            <a:spAutoFit/>
+          </a:bodyPr>
+          <a:lstStyle/>
+          <a:p>
             <a:pPr algn="ctr">
               <a:spcAft>
                 <a:spcPts val="0"/>
               </a:spcAft>
-              <a:defRPr sz="1700" b="1">
-                <a:solidFill>
-                  <a:srgbClr val="2A8B5A"/>
-                </a:solidFill>
-                <a:latin typeface="Noto Sans CJK KR"/>
-              </a:defRPr>
-            </a:pPr>
-            <a:r>
-              <a:t>다음 모듈을 시작하기 전, 이 슬라이드의 Complete와 다음 모듈의 Starter를 비교합니다.</a:t>
+              <a:defRPr sz="1800" b="1">
+                <a:solidFill>
+                  <a:srgbClr val="DB7E22"/>
+                </a:solidFill>
+                <a:latin typeface="Noto Sans CJK KR"/>
+              </a:defRPr>
+            </a:pPr>
+            <a:r>
+              <a:t>공통 순서: ① 현재 폴더 ② source ③ 파일 경로 ④ 이름/타입/단위 ⑤ build·source 후 재실행</a:t>
             </a:r>
           </a:p>
         </p:txBody>
@@ -11946,6 +12047,754 @@
               </a:defRPr>
             </a:pPr>
             <a:r>
+              <a:t>미니 실습: 값 하나를 바꾸고 결과를 비교한다</a:t>
+            </a:r>
+          </a:p>
+        </p:txBody>
+      </p:sp>
+      <p:sp>
+        <p:nvSpPr>
+          <p:cNvPr id="3" name="TextBox 2"/>
+          <p:cNvSpPr txBox="1"/>
+          <p:nvPr/>
+        </p:nvSpPr>
+        <p:spPr>
+          <a:xfrm>
+            <a:off x="603504" y="859536"/>
+            <a:ext cx="10698480" cy="292608"/>
+          </a:xfrm>
+          <a:prstGeom prst="rect">
+            <a:avLst/>
+          </a:prstGeom>
+          <a:noFill/>
+        </p:spPr>
+        <p:txBody>
+          <a:bodyPr wrap="square" lIns="73152" rIns="73152" tIns="36576" bIns="36576">
+            <a:spAutoFit/>
+          </a:bodyPr>
+          <a:lstStyle/>
+          <a:p>
+            <a:pPr algn="l">
+              <a:spcAft>
+                <a:spcPts val="0"/>
+              </a:spcAft>
+              <a:defRPr sz="1700" b="0">
+                <a:solidFill>
+                  <a:srgbClr val="5C6672"/>
+                </a:solidFill>
+                <a:latin typeface="Noto Sans CJK KR"/>
+              </a:defRPr>
+            </a:pPr>
+            <a:r>
+              <a:t>정상 결과를 만든 뒤에는 한 번에 하나의 값만 바꿉니다.</a:t>
+            </a:r>
+          </a:p>
+        </p:txBody>
+      </p:sp>
+      <p:sp>
+        <p:nvSpPr>
+          <p:cNvPr id="4" name="TextBox 3"/>
+          <p:cNvSpPr txBox="1"/>
+          <p:nvPr/>
+        </p:nvSpPr>
+        <p:spPr>
+          <a:xfrm>
+            <a:off x="530352" y="6510528"/>
+            <a:ext cx="7772400" cy="201168"/>
+          </a:xfrm>
+          <a:prstGeom prst="rect">
+            <a:avLst/>
+          </a:prstGeom>
+          <a:noFill/>
+        </p:spPr>
+        <p:txBody>
+          <a:bodyPr wrap="square" lIns="73152" rIns="73152" tIns="36576" bIns="36576">
+            <a:spAutoFit/>
+          </a:bodyPr>
+          <a:lstStyle/>
+          <a:p>
+            <a:pPr algn="l">
+              <a:spcAft>
+                <a:spcPts val="0"/>
+              </a:spcAft>
+              <a:defRPr sz="1000" b="0">
+                <a:solidFill>
+                  <a:srgbClr val="5C6672"/>
+                </a:solidFill>
+                <a:latin typeface="Noto Sans CJK KR"/>
+              </a:defRPr>
+            </a:pPr>
+            <a:r>
+              <a:t>ROS 2 Jazzy · Gazebo Harmonic · M18 · 따라 하기형 AGV 실습</a:t>
+            </a:r>
+          </a:p>
+        </p:txBody>
+      </p:sp>
+      <p:sp>
+        <p:nvSpPr>
+          <p:cNvPr id="5" name="TextBox 4"/>
+          <p:cNvSpPr txBox="1"/>
+          <p:nvPr/>
+        </p:nvSpPr>
+        <p:spPr>
+          <a:xfrm>
+            <a:off x="9144000" y="6510528"/>
+            <a:ext cx="2468880" cy="201168"/>
+          </a:xfrm>
+          <a:prstGeom prst="rect">
+            <a:avLst/>
+          </a:prstGeom>
+          <a:noFill/>
+        </p:spPr>
+        <p:txBody>
+          <a:bodyPr wrap="square" lIns="73152" rIns="73152" tIns="36576" bIns="36576">
+            <a:spAutoFit/>
+          </a:bodyPr>
+          <a:lstStyle/>
+          <a:p>
+            <a:pPr algn="r">
+              <a:spcAft>
+                <a:spcPts val="0"/>
+              </a:spcAft>
+              <a:defRPr sz="1000" b="0">
+                <a:solidFill>
+                  <a:srgbClr val="5C6672"/>
+                </a:solidFill>
+                <a:latin typeface="Noto Sans CJK KR"/>
+              </a:defRPr>
+            </a:pPr>
+            <a:r>
+              <a:t>명령·파일 경로는 슬라이드에서 복사 가능</a:t>
+            </a:r>
+          </a:p>
+        </p:txBody>
+      </p:sp>
+      <p:sp>
+        <p:nvSpPr>
+          <p:cNvPr id="6" name="Rectangle 5"/>
+          <p:cNvSpPr/>
+          <p:nvPr/>
+        </p:nvSpPr>
+        <p:spPr>
+          <a:xfrm>
+            <a:off x="566928" y="1188720"/>
+            <a:ext cx="11064240" cy="347472"/>
+          </a:xfrm>
+          <a:prstGeom prst="rect">
+            <a:avLst/>
+          </a:prstGeom>
+          <a:solidFill>
+            <a:srgbClr val="F4F7FB"/>
+          </a:solidFill>
+          <a:ln>
+            <a:solidFill>
+              <a:srgbClr val="F4F7FB"/>
+            </a:solidFill>
+          </a:ln>
+        </p:spPr>
+        <p:style>
+          <a:lnRef idx="1">
+            <a:schemeClr val="accent1"/>
+          </a:lnRef>
+          <a:fillRef idx="3">
+            <a:schemeClr val="accent1"/>
+          </a:fillRef>
+          <a:effectRef idx="2">
+            <a:schemeClr val="accent1"/>
+          </a:effectRef>
+          <a:fontRef idx="minor">
+            <a:schemeClr val="lt1"/>
+          </a:fontRef>
+        </p:style>
+        <p:txBody>
+          <a:bodyPr rtlCol="0" anchor="ctr" wrap="square" lIns="73152" rIns="73152" tIns="36576" bIns="36576"/>
+          <a:lstStyle/>
+          <a:p>
+            <a:pPr algn="l">
+              <a:spcAft>
+                <a:spcPts val="0"/>
+              </a:spcAft>
+              <a:defRPr sz="1300" b="1">
+                <a:solidFill>
+                  <a:srgbClr val="122C4E"/>
+                </a:solidFill>
+                <a:latin typeface="Noto Sans CJK KR"/>
+              </a:defRPr>
+            </a:pPr>
+            <a:r>
+              <a:t>현재 단계 미니 실습    |    현재 폴더 ~/ros2_curri/agv_ws    |    현재 터미널</a:t>
+            </a:r>
+          </a:p>
+        </p:txBody>
+      </p:sp>
+      <p:sp>
+        <p:nvSpPr>
+          <p:cNvPr id="7" name="Rounded Rectangle 6"/>
+          <p:cNvSpPr/>
+          <p:nvPr/>
+        </p:nvSpPr>
+        <p:spPr>
+          <a:xfrm>
+            <a:off x="749808" y="1874519"/>
+            <a:ext cx="10652760" cy="1993392"/>
+          </a:xfrm>
+          <a:prstGeom prst="roundRect">
+            <a:avLst/>
+          </a:prstGeom>
+          <a:solidFill>
+            <a:srgbClr val="FFF8EB"/>
+          </a:solidFill>
+          <a:ln>
+            <a:solidFill>
+              <a:srgbClr val="ECC680"/>
+            </a:solidFill>
+          </a:ln>
+        </p:spPr>
+        <p:style>
+          <a:lnRef idx="1">
+            <a:schemeClr val="accent1"/>
+          </a:lnRef>
+          <a:fillRef idx="3">
+            <a:schemeClr val="accent1"/>
+          </a:fillRef>
+          <a:effectRef idx="2">
+            <a:schemeClr val="accent1"/>
+          </a:effectRef>
+          <a:fontRef idx="minor">
+            <a:schemeClr val="lt1"/>
+          </a:fontRef>
+        </p:style>
+        <p:txBody>
+          <a:bodyPr rtlCol="0" anchor="ctr" wrap="square" lIns="73152" rIns="73152" tIns="36576" bIns="36576"/>
+          <a:lstStyle/>
+          <a:p>
+            <a:pPr algn="ctr">
+              <a:spcAft>
+                <a:spcPts val="0"/>
+              </a:spcAft>
+              <a:defRPr sz="2300" b="1">
+                <a:solidFill>
+                  <a:srgbClr val="122C4E"/>
+                </a:solidFill>
+                <a:latin typeface="Noto Sans CJK KR"/>
+              </a:defRPr>
+            </a:pPr>
+            <a:r>
+              <a:t>stop_distance 0.50→0.80 m로 바꾸면 어떤 상황에서 더 일찍 멈추는지 /cmd_vel 로그 기준으로 작성한다.</a:t>
+            </a:r>
+          </a:p>
+        </p:txBody>
+      </p:sp>
+      <p:sp>
+        <p:nvSpPr>
+          <p:cNvPr id="8" name="TextBox 7"/>
+          <p:cNvSpPr txBox="1"/>
+          <p:nvPr/>
+        </p:nvSpPr>
+        <p:spPr>
+          <a:xfrm>
+            <a:off x="877824" y="4590288"/>
+            <a:ext cx="10241280" cy="594360"/>
+          </a:xfrm>
+          <a:prstGeom prst="rect">
+            <a:avLst/>
+          </a:prstGeom>
+          <a:noFill/>
+        </p:spPr>
+        <p:txBody>
+          <a:bodyPr wrap="square" lIns="73152" rIns="73152" tIns="36576" bIns="36576">
+            <a:spAutoFit/>
+          </a:bodyPr>
+          <a:lstStyle/>
+          <a:p>
+            <a:pPr algn="ctr">
+              <a:spcAft>
+                <a:spcPts val="0"/>
+              </a:spcAft>
+              <a:defRPr sz="1900" b="1">
+                <a:solidFill>
+                  <a:srgbClr val="DB7E22"/>
+                </a:solidFill>
+                <a:latin typeface="Noto Sans CJK KR"/>
+              </a:defRPr>
+            </a:pPr>
+            <a:r>
+              <a:t>기록할 것: 바꾼 값(단위) · 기대한 변화 · 실제 출력/화면 · 원래 값으로 되돌린 결과</a:t>
+            </a:r>
+          </a:p>
+        </p:txBody>
+      </p:sp>
+    </p:spTree>
+  </p:cSld>
+  <p:clrMapOvr>
+    <a:masterClrMapping/>
+  </p:clrMapOvr>
+</p:sld>
+</file>
+
+<file path=ppt/slides/slide24.xml><?xml version="1.0" encoding="utf-8"?>
+<p:sld xmlns:a="http://schemas.openxmlformats.org/drawingml/2006/main" xmlns:p="http://schemas.openxmlformats.org/presentationml/2006/main" xmlns:r="http://schemas.openxmlformats.org/officeDocument/2006/relationships">
+  <p:cSld>
+    <p:spTree>
+      <p:nvGrpSpPr>
+        <p:cNvPr id="1" name=""/>
+        <p:cNvGrpSpPr/>
+        <p:nvPr/>
+      </p:nvGrpSpPr>
+      <p:grpSpPr/>
+      <p:sp>
+        <p:nvSpPr>
+          <p:cNvPr id="2" name="TextBox 1"/>
+          <p:cNvSpPr txBox="1"/>
+          <p:nvPr/>
+        </p:nvSpPr>
+        <p:spPr>
+          <a:xfrm>
+            <a:off x="566928" y="347472"/>
+            <a:ext cx="10881360" cy="438912"/>
+          </a:xfrm>
+          <a:prstGeom prst="rect">
+            <a:avLst/>
+          </a:prstGeom>
+          <a:noFill/>
+        </p:spPr>
+        <p:txBody>
+          <a:bodyPr wrap="square" lIns="73152" rIns="73152" tIns="36576" bIns="36576">
+            <a:spAutoFit/>
+          </a:bodyPr>
+          <a:lstStyle/>
+          <a:p>
+            <a:pPr algn="l">
+              <a:spcAft>
+                <a:spcPts val="0"/>
+              </a:spcAft>
+              <a:defRPr sz="3200" b="1">
+                <a:solidFill>
+                  <a:srgbClr val="122C4E"/>
+                </a:solidFill>
+                <a:latin typeface="Noto Sans CJK KR"/>
+              </a:defRPr>
+            </a:pPr>
+            <a:r>
+              <a:t>체크포인트를 저장하고 다음 모듈로 넘긴다</a:t>
+            </a:r>
+          </a:p>
+        </p:txBody>
+      </p:sp>
+      <p:sp>
+        <p:nvSpPr>
+          <p:cNvPr id="3" name="TextBox 2"/>
+          <p:cNvSpPr txBox="1"/>
+          <p:nvPr/>
+        </p:nvSpPr>
+        <p:spPr>
+          <a:xfrm>
+            <a:off x="603504" y="859536"/>
+            <a:ext cx="10698480" cy="292608"/>
+          </a:xfrm>
+          <a:prstGeom prst="rect">
+            <a:avLst/>
+          </a:prstGeom>
+          <a:noFill/>
+        </p:spPr>
+        <p:txBody>
+          <a:bodyPr wrap="square" lIns="73152" rIns="73152" tIns="36576" bIns="36576">
+            <a:spAutoFit/>
+          </a:bodyPr>
+          <a:lstStyle/>
+          <a:p>
+            <a:pPr algn="l">
+              <a:spcAft>
+                <a:spcPts val="0"/>
+              </a:spcAft>
+              <a:defRPr sz="1700" b="0">
+                <a:solidFill>
+                  <a:srgbClr val="5C6672"/>
+                </a:solidFill>
+                <a:latin typeface="Noto Sans CJK KR"/>
+              </a:defRPr>
+            </a:pPr>
+            <a:r>
+              <a:t>현재 Complete는 다음 Starter의 기준선입니다.</a:t>
+            </a:r>
+          </a:p>
+        </p:txBody>
+      </p:sp>
+      <p:sp>
+        <p:nvSpPr>
+          <p:cNvPr id="4" name="TextBox 3"/>
+          <p:cNvSpPr txBox="1"/>
+          <p:nvPr/>
+        </p:nvSpPr>
+        <p:spPr>
+          <a:xfrm>
+            <a:off x="530352" y="6510528"/>
+            <a:ext cx="7772400" cy="201168"/>
+          </a:xfrm>
+          <a:prstGeom prst="rect">
+            <a:avLst/>
+          </a:prstGeom>
+          <a:noFill/>
+        </p:spPr>
+        <p:txBody>
+          <a:bodyPr wrap="square" lIns="73152" rIns="73152" tIns="36576" bIns="36576">
+            <a:spAutoFit/>
+          </a:bodyPr>
+          <a:lstStyle/>
+          <a:p>
+            <a:pPr algn="l">
+              <a:spcAft>
+                <a:spcPts val="0"/>
+              </a:spcAft>
+              <a:defRPr sz="1000" b="0">
+                <a:solidFill>
+                  <a:srgbClr val="5C6672"/>
+                </a:solidFill>
+                <a:latin typeface="Noto Sans CJK KR"/>
+              </a:defRPr>
+            </a:pPr>
+            <a:r>
+              <a:t>ROS 2 Jazzy · Gazebo Harmonic · M18 · 따라 하기형 AGV 실습</a:t>
+            </a:r>
+          </a:p>
+        </p:txBody>
+      </p:sp>
+      <p:sp>
+        <p:nvSpPr>
+          <p:cNvPr id="5" name="TextBox 4"/>
+          <p:cNvSpPr txBox="1"/>
+          <p:nvPr/>
+        </p:nvSpPr>
+        <p:spPr>
+          <a:xfrm>
+            <a:off x="9144000" y="6510528"/>
+            <a:ext cx="2468880" cy="201168"/>
+          </a:xfrm>
+          <a:prstGeom prst="rect">
+            <a:avLst/>
+          </a:prstGeom>
+          <a:noFill/>
+        </p:spPr>
+        <p:txBody>
+          <a:bodyPr wrap="square" lIns="73152" rIns="73152" tIns="36576" bIns="36576">
+            <a:spAutoFit/>
+          </a:bodyPr>
+          <a:lstStyle/>
+          <a:p>
+            <a:pPr algn="r">
+              <a:spcAft>
+                <a:spcPts val="0"/>
+              </a:spcAft>
+              <a:defRPr sz="1000" b="0">
+                <a:solidFill>
+                  <a:srgbClr val="5C6672"/>
+                </a:solidFill>
+                <a:latin typeface="Noto Sans CJK KR"/>
+              </a:defRPr>
+            </a:pPr>
+            <a:r>
+              <a:t>명령·파일 경로는 슬라이드에서 복사 가능</a:t>
+            </a:r>
+          </a:p>
+        </p:txBody>
+      </p:sp>
+      <p:sp>
+        <p:nvSpPr>
+          <p:cNvPr id="6" name="Rectangle 5"/>
+          <p:cNvSpPr/>
+          <p:nvPr/>
+        </p:nvSpPr>
+        <p:spPr>
+          <a:xfrm>
+            <a:off x="566928" y="1188720"/>
+            <a:ext cx="11064240" cy="347472"/>
+          </a:xfrm>
+          <a:prstGeom prst="rect">
+            <a:avLst/>
+          </a:prstGeom>
+          <a:solidFill>
+            <a:srgbClr val="F4F7FB"/>
+          </a:solidFill>
+          <a:ln>
+            <a:solidFill>
+              <a:srgbClr val="F4F7FB"/>
+            </a:solidFill>
+          </a:ln>
+        </p:spPr>
+        <p:style>
+          <a:lnRef idx="1">
+            <a:schemeClr val="accent1"/>
+          </a:lnRef>
+          <a:fillRef idx="3">
+            <a:schemeClr val="accent1"/>
+          </a:fillRef>
+          <a:effectRef idx="2">
+            <a:schemeClr val="accent1"/>
+          </a:effectRef>
+          <a:fontRef idx="minor">
+            <a:schemeClr val="lt1"/>
+          </a:fontRef>
+        </p:style>
+        <p:txBody>
+          <a:bodyPr rtlCol="0" anchor="ctr" wrap="square" lIns="73152" rIns="73152" tIns="36576" bIns="36576"/>
+          <a:lstStyle/>
+          <a:p>
+            <a:pPr algn="l">
+              <a:spcAft>
+                <a:spcPts val="0"/>
+              </a:spcAft>
+              <a:defRPr sz="1300" b="1">
+                <a:solidFill>
+                  <a:srgbClr val="122C4E"/>
+                </a:solidFill>
+                <a:latin typeface="Noto Sans CJK KR"/>
+              </a:defRPr>
+            </a:pPr>
+            <a:r>
+              <a:t>현재 단계 체크포인트    |    현재 폴더 ~/ros2_curri/agv_ws    |    현재 터미널</a:t>
+            </a:r>
+          </a:p>
+        </p:txBody>
+      </p:sp>
+      <p:sp>
+        <p:nvSpPr>
+          <p:cNvPr id="7" name="Rounded Rectangle 6"/>
+          <p:cNvSpPr/>
+          <p:nvPr/>
+        </p:nvSpPr>
+        <p:spPr>
+          <a:xfrm>
+            <a:off x="685800" y="1737360"/>
+            <a:ext cx="10972800" cy="3611880"/>
+          </a:xfrm>
+          <a:prstGeom prst="roundRect">
+            <a:avLst/>
+          </a:prstGeom>
+          <a:solidFill>
+            <a:srgbClr val="F4F7FB"/>
+          </a:solidFill>
+          <a:ln>
+            <a:solidFill>
+              <a:srgbClr val="D2DCE8"/>
+            </a:solidFill>
+          </a:ln>
+        </p:spPr>
+        <p:style>
+          <a:lnRef idx="1">
+            <a:schemeClr val="accent1"/>
+          </a:lnRef>
+          <a:fillRef idx="3">
+            <a:schemeClr val="accent1"/>
+          </a:fillRef>
+          <a:effectRef idx="2">
+            <a:schemeClr val="accent1"/>
+          </a:effectRef>
+          <a:fontRef idx="minor">
+            <a:schemeClr val="lt1"/>
+          </a:fontRef>
+        </p:style>
+        <p:txBody>
+          <a:bodyPr rtlCol="0" anchor="ctr"/>
+          <a:lstStyle/>
+          <a:p>
+            <a:pPr algn="ctr"/>
+          </a:p>
+        </p:txBody>
+      </p:sp>
+      <p:sp>
+        <p:nvSpPr>
+          <p:cNvPr id="8" name="TextBox 7"/>
+          <p:cNvSpPr txBox="1"/>
+          <p:nvPr/>
+        </p:nvSpPr>
+        <p:spPr>
+          <a:xfrm>
+            <a:off x="896112" y="1993392"/>
+            <a:ext cx="10332720" cy="2971800"/>
+          </a:xfrm>
+          <a:prstGeom prst="rect">
+            <a:avLst/>
+          </a:prstGeom>
+          <a:noFill/>
+        </p:spPr>
+        <p:txBody>
+          <a:bodyPr wrap="square" lIns="109728" rIns="109728">
+            <a:spAutoFit/>
+          </a:bodyPr>
+          <a:lstStyle/>
+          <a:p>
+            <a:pPr>
+              <a:spcAft>
+                <a:spcPts val="800"/>
+              </a:spcAft>
+              <a:defRPr sz="1800">
+                <a:solidFill>
+                  <a:srgbClr val="122C4E"/>
+                </a:solidFill>
+                <a:latin typeface="Noto Sans CJK KR"/>
+              </a:defRPr>
+            </a:pPr>
+            <a:r>
+              <a:t>• □ 완료 화면: 0.5 m 안 장애물에서 forward cmd_vel이 zero Twist로 바뀌는 조건을 설명한다.</a:t>
+            </a:r>
+          </a:p>
+          <a:p>
+            <a:pPr>
+              <a:spcAft>
+                <a:spcPts val="800"/>
+              </a:spcAft>
+              <a:defRPr sz="1800">
+                <a:solidFill>
+                  <a:srgbClr val="122C4E"/>
+                </a:solidFill>
+                <a:latin typeface="Noto Sans CJK KR"/>
+              </a:defRPr>
+            </a:pPr>
+            <a:r>
+              <a:t>• □ Complete 파일: blocks/E_autonomy_logic/M18_obstacle_perception/complete/</a:t>
+            </a:r>
+          </a:p>
+          <a:p>
+            <a:pPr>
+              <a:spcAft>
+                <a:spcPts val="800"/>
+              </a:spcAft>
+              <a:defRPr sz="1800">
+                <a:solidFill>
+                  <a:srgbClr val="122C4E"/>
+                </a:solidFill>
+                <a:latin typeface="Noto Sans CJK KR"/>
+              </a:defRPr>
+            </a:pPr>
+            <a:r>
+              <a:t>• □ 정상 로그·캡처: logs/validation.log, screenshots/validation_terminal.png</a:t>
+            </a:r>
+          </a:p>
+          <a:p>
+            <a:pPr>
+              <a:spcAft>
+                <a:spcPts val="800"/>
+              </a:spcAft>
+              <a:defRPr sz="1800">
+                <a:solidFill>
+                  <a:srgbClr val="122C4E"/>
+                </a:solidFill>
+                <a:latin typeface="Noto Sans CJK KR"/>
+              </a:defRPr>
+            </a:pPr>
+            <a:r>
+              <a:t>• □ 버전 식별: CHECKSUM_or_TAG.txt의 SHA-256 manifest</a:t>
+            </a:r>
+          </a:p>
+          <a:p>
+            <a:pPr>
+              <a:spcAft>
+                <a:spcPts val="800"/>
+              </a:spcAft>
+              <a:defRPr sz="1800">
+                <a:solidFill>
+                  <a:srgbClr val="122C4E"/>
+                </a:solidFill>
+                <a:latin typeface="Noto Sans CJK KR"/>
+              </a:defRPr>
+            </a:pPr>
+            <a:r>
+              <a:t>• □ 다음 시작 조건: M19 FSM</a:t>
+            </a:r>
+          </a:p>
+        </p:txBody>
+      </p:sp>
+      <p:sp>
+        <p:nvSpPr>
+          <p:cNvPr id="9" name="TextBox 8"/>
+          <p:cNvSpPr txBox="1"/>
+          <p:nvPr/>
+        </p:nvSpPr>
+        <p:spPr>
+          <a:xfrm>
+            <a:off x="868680" y="5596128"/>
+            <a:ext cx="10515600" cy="338328"/>
+          </a:xfrm>
+          <a:prstGeom prst="rect">
+            <a:avLst/>
+          </a:prstGeom>
+          <a:noFill/>
+        </p:spPr>
+        <p:txBody>
+          <a:bodyPr wrap="square" lIns="73152" rIns="73152" tIns="36576" bIns="36576">
+            <a:spAutoFit/>
+          </a:bodyPr>
+          <a:lstStyle/>
+          <a:p>
+            <a:pPr algn="ctr">
+              <a:spcAft>
+                <a:spcPts val="0"/>
+              </a:spcAft>
+              <a:defRPr sz="1700" b="1">
+                <a:solidFill>
+                  <a:srgbClr val="2A8B5A"/>
+                </a:solidFill>
+                <a:latin typeface="Noto Sans CJK KR"/>
+              </a:defRPr>
+            </a:pPr>
+            <a:r>
+              <a:t>다음 모듈을 시작하기 전, 이 슬라이드의 Complete와 다음 모듈의 Starter를 비교합니다.</a:t>
+            </a:r>
+          </a:p>
+        </p:txBody>
+      </p:sp>
+    </p:spTree>
+  </p:cSld>
+  <p:clrMapOvr>
+    <a:masterClrMapping/>
+  </p:clrMapOvr>
+</p:sld>
+</file>
+
+<file path=ppt/slides/slide25.xml><?xml version="1.0" encoding="utf-8"?>
+<p:sld xmlns:a="http://schemas.openxmlformats.org/drawingml/2006/main" xmlns:p="http://schemas.openxmlformats.org/presentationml/2006/main" xmlns:r="http://schemas.openxmlformats.org/officeDocument/2006/relationships">
+  <p:cSld>
+    <p:spTree>
+      <p:nvGrpSpPr>
+        <p:cNvPr id="1" name=""/>
+        <p:cNvGrpSpPr/>
+        <p:nvPr/>
+      </p:nvGrpSpPr>
+      <p:grpSpPr/>
+      <p:sp>
+        <p:nvSpPr>
+          <p:cNvPr id="2" name="TextBox 1"/>
+          <p:cNvSpPr txBox="1"/>
+          <p:nvPr/>
+        </p:nvSpPr>
+        <p:spPr>
+          <a:xfrm>
+            <a:off x="566928" y="347472"/>
+            <a:ext cx="10881360" cy="438912"/>
+          </a:xfrm>
+          <a:prstGeom prst="rect">
+            <a:avLst/>
+          </a:prstGeom>
+          <a:noFill/>
+        </p:spPr>
+        <p:txBody>
+          <a:bodyPr wrap="square" lIns="73152" rIns="73152" tIns="36576" bIns="36576">
+            <a:spAutoFit/>
+          </a:bodyPr>
+          <a:lstStyle/>
+          <a:p>
+            <a:pPr algn="l">
+              <a:spcAft>
+                <a:spcPts val="0"/>
+              </a:spcAft>
+              <a:defRPr sz="3200" b="1">
+                <a:solidFill>
+                  <a:srgbClr val="122C4E"/>
+                </a:solidFill>
+                <a:latin typeface="Noto Sans CJK KR"/>
+              </a:defRPr>
+            </a:pPr>
+            <a:r>
               <a:t>공식 참고 자료</a:t>
             </a:r>
           </a:p>
@@ -12652,7 +13501,7 @@
               </a:defRPr>
             </a:pPr>
             <a:r>
-              <a:t>현재 단계 시작    |    현재 폴더 ~/agv_ws    |    현재 터미널</a:t>
+              <a:t>현재 단계 시작    |    현재 폴더 ~/ros2_curri/agv_ws    |    현재 터미널</a:t>
             </a:r>
           </a:p>
         </p:txBody>
@@ -12768,7 +13617,7 @@
               </a:defRPr>
             </a:pPr>
             <a:r>
-              <a:t>• 현재 폴더: ~/agv_ws</a:t>
+              <a:t>• 현재 폴더: ~/ros2_curri/agv_ws</a:t>
             </a:r>
           </a:p>
           <a:p>
@@ -12839,7 +13688,7 @@
               </a:defRPr>
             </a:pPr>
             <a:r>
-              <a:t>확인: pwd가 ~/agv_ws이고, 이전 모듈의 완료 조건을 한 문장으로 설명할 수 있으면 시작합니다.</a:t>
+              <a:t>확인: pwd가 ~/ros2_curri/agv_ws이고, 이전 모듈의 완료 조건을 한 문장으로 설명할 수 있으면 시작합니다.</a:t>
             </a:r>
           </a:p>
         </p:txBody>
@@ -13958,7 +14807,7 @@
               </a:defRPr>
             </a:pPr>
             <a:r>
-              <a:t>~/agv_ws/src/</a:t>
+              <a:t>~/ros2_curri/agv_ws/src/</a:t>
             </a:r>
             <a:br/>
             <a:r>
@@ -14241,7 +15090,7 @@
               </a:defRPr>
             </a:pPr>
             <a:r>
-              <a:t>현재 단계 1/2    |    현재 폴더 ~/agv_ws    |    현재 터미널</a:t>
+              <a:t>현재 단계 1/2    |    현재 폴더 ~/ros2_curri/agv_ws    |    현재 터미널</a:t>
             </a:r>
           </a:p>
         </p:txBody>
@@ -14691,7 +15540,7 @@
               </a:defRPr>
             </a:pPr>
             <a:r>
-              <a:t>현재 단계 2/2    |    현재 폴더 ~/agv_ws    |    현재 터미널</a:t>
+              <a:t>현재 단계 2/2    |    현재 폴더 ~/ros2_curri/agv_ws    |    현재 터미널</a:t>
             </a:r>
           </a:p>
         </p:txBody>
@@ -15009,7 +15858,7 @@
               </a:defRPr>
             </a:pPr>
             <a:r>
-              <a:t>~/agv_ws/src/agv_sensors/agv_sensors/lidar_processor.py</a:t>
+              <a:t>~/ros2_curri/agv_ws/src/agv_sensors/agv_sensors/lidar_processor.py</a:t>
             </a:r>
           </a:p>
         </p:txBody>
@@ -15145,7 +15994,7 @@
               </a:defRPr>
             </a:pPr>
             <a:r>
-              <a:t>현재 단계 3/6    |    현재 폴더 ~/agv_ws    |    현재 터미널</a:t>
+              <a:t>현재 단계 3/6    |    현재 폴더 ~/ros2_curri/agv_ws    |    현재 터미널</a:t>
             </a:r>
           </a:p>
         </p:txBody>
@@ -15242,11 +16091,11 @@
               </a:defRPr>
             </a:pPr>
             <a:r>
-              <a:t>파일 생성: mkdir -p ~/agv_ws/src/agv_sensors/agv_sensors</a:t>
+              <a:t>파일 생성: mkdir -p ~/ros2_curri/agv_ws/src/agv_sensors/agv_sensors</a:t>
             </a:r>
             <a:br/>
             <a:r>
-              <a:t>파일 열기: nano ~/agv_ws/src/agv_sensors/agv_sensors/lidar_processor.py</a:t>
+              <a:t>파일 열기: nano ~/ros2_curri/agv_ws/src/agv_sensors/agv_sensors/lidar_processor.py</a:t>
             </a:r>
           </a:p>
         </p:txBody>

--- a/blocks/E_autonomy_logic/M18_obstacle_perception/M18_LiDAR_장애물_감지와_Perception_결합.pptx
+++ b/blocks/E_autonomy_logic/M18_obstacle_perception/M18_LiDAR_장애물_감지와_Perception_결합.pptx
@@ -30,6 +30,8 @@
     <p:sldId id="278" r:id="rId30"/>
     <p:sldId id="279" r:id="rId31"/>
     <p:sldId id="280" r:id="rId32"/>
+    <p:sldId id="281" r:id="rId33"/>
+    <p:sldId id="282" r:id="rId34"/>
   </p:sldIdLst>
   <p:sldSz cx="12191999" cy="6858000" type="screen4x3"/>
   <p:notesSz cx="6858000" cy="9144000"/>
@@ -616,17 +618,27 @@
           <a:lstStyle/>
           <a:p>
             <a:r>
-              <a:t>[설명] ~/ros2_curri/agv_ws/src/agv_sensors/agv_sensors/lidar_processor.py의 전체 파일을 2/3 구간으로 작성한다.</a:t>
-            </a:r>
-          </a:p>
-          <a:p>
-            <a:r>
-              <a:t>[실행] nano ~/ros2_curri/agv_ws/src/agv_sensors/agv_sensors/lidar_processor.py</a:t>
-            </a:r>
-          </a:p>
-          <a:p>
-            <a:r>
-              <a:t>[확인] 코드를 저장하고 다음 코드 슬라이드 또는 build 단계로 이동한다.</a:t>
+              <a:t>[설명] mission은 /cmd_vel_raw, 안전 필터만 /cmd_vel을 발행한다.</a:t>
+            </a:r>
+          </a:p>
+          <a:p>
+            <a:r>
+              <a:t>[실행] ros2 topic echo /cmd_vel_raw</a:t>
+            </a:r>
+          </a:p>
+          <a:p>
+            <a:r>
+              <a:t>ros2 topic echo /cmd_vel</a:t>
+            </a:r>
+          </a:p>
+          <a:p>
+            <a:r>
+              <a:t>ros2 topic echo /scan --once</a:t>
+            </a:r>
+          </a:p>
+          <a:p>
+            <a:r>
+              <a:t>[확인] 명령 출력에서 슬라이드의 확인 항목을 찾는다.</a:t>
             </a:r>
           </a:p>
           <a:p>
@@ -636,7 +648,7 @@
           </a:p>
           <a:p>
             <a:r>
-              <a:t>[오류] 들여쓰기·XML 태그·따옴표가 슬라이드와 정확히 같은지 확인한다.</a:t>
+              <a:t>[오류] 오류가 나면 현재 폴더, source, 파일 경로를 먼저 확인한다.</a:t>
             </a:r>
           </a:p>
         </p:txBody>
@@ -706,7 +718,7 @@
           <a:lstStyle/>
           <a:p>
             <a:r>
-              <a:t>[설명] ~/ros2_curri/agv_ws/src/agv_sensors/agv_sensors/lidar_processor.py의 전체 파일을 3/3 구간으로 작성한다.</a:t>
+              <a:t>[설명] ~/ros2_curri/agv_ws/src/agv_sensors/agv_sensors/lidar_processor.py의 전체 파일을 1/3 구간으로 작성한다.</a:t>
             </a:r>
           </a:p>
           <a:p>
@@ -796,12 +808,12 @@
           <a:lstStyle/>
           <a:p>
             <a:r>
-              <a:t>[설명] ~/ros2_curri/agv_ws/src/agv_control/agv_control/safety_controller.py의 전체 파일을 1/4 구간으로 작성한다.</a:t>
-            </a:r>
-          </a:p>
-          <a:p>
-            <a:r>
-              <a:t>[실행] nano ~/ros2_curri/agv_ws/src/agv_control/agv_control/safety_controller.py</a:t>
+              <a:t>[설명] ~/ros2_curri/agv_ws/src/agv_sensors/agv_sensors/lidar_processor.py의 전체 파일을 2/3 구간으로 작성한다.</a:t>
+            </a:r>
+          </a:p>
+          <a:p>
+            <a:r>
+              <a:t>[실행] nano ~/ros2_curri/agv_ws/src/agv_sensors/agv_sensors/lidar_processor.py</a:t>
             </a:r>
           </a:p>
           <a:p>
@@ -886,12 +898,12 @@
           <a:lstStyle/>
           <a:p>
             <a:r>
-              <a:t>[설명] ~/ros2_curri/agv_ws/src/agv_control/agv_control/safety_controller.py의 전체 파일을 2/4 구간으로 작성한다.</a:t>
-            </a:r>
-          </a:p>
-          <a:p>
-            <a:r>
-              <a:t>[실행] nano ~/ros2_curri/agv_ws/src/agv_control/agv_control/safety_controller.py</a:t>
+              <a:t>[설명] ~/ros2_curri/agv_ws/src/agv_sensors/agv_sensors/lidar_processor.py의 전체 파일을 3/3 구간으로 작성한다.</a:t>
+            </a:r>
+          </a:p>
+          <a:p>
+            <a:r>
+              <a:t>[실행] nano ~/ros2_curri/agv_ws/src/agv_sensors/agv_sensors/lidar_processor.py</a:t>
             </a:r>
           </a:p>
           <a:p>
@@ -976,7 +988,7 @@
           <a:lstStyle/>
           <a:p>
             <a:r>
-              <a:t>[설명] ~/ros2_curri/agv_ws/src/agv_control/agv_control/safety_controller.py의 전체 파일을 3/4 구간으로 작성한다.</a:t>
+              <a:t>[설명] ~/ros2_curri/agv_ws/src/agv_control/agv_control/safety_controller.py의 전체 파일을 1/4 구간으로 작성한다.</a:t>
             </a:r>
           </a:p>
           <a:p>
@@ -1066,7 +1078,7 @@
           <a:lstStyle/>
           <a:p>
             <a:r>
-              <a:t>[설명] ~/ros2_curri/agv_ws/src/agv_control/agv_control/safety_controller.py의 전체 파일을 4/4 구간으로 작성한다.</a:t>
+              <a:t>[설명] ~/ros2_curri/agv_ws/src/agv_control/agv_control/safety_controller.py의 전체 파일을 2/4 구간으로 작성한다.</a:t>
             </a:r>
           </a:p>
           <a:p>
@@ -1156,12 +1168,12 @@
           <a:lstStyle/>
           <a:p>
             <a:r>
-              <a:t>[설명] ~/ros2_curri/agv_ws/src/agv_bringup/config/mission.yaml의 전체 파일을 1/2 구간으로 작성한다.</a:t>
-            </a:r>
-          </a:p>
-          <a:p>
-            <a:r>
-              <a:t>[실행] nano ~/ros2_curri/agv_ws/src/agv_bringup/config/mission.yaml</a:t>
+              <a:t>[설명] ~/ros2_curri/agv_ws/src/agv_control/agv_control/safety_controller.py의 전체 파일을 3/4 구간으로 작성한다.</a:t>
+            </a:r>
+          </a:p>
+          <a:p>
+            <a:r>
+              <a:t>[실행] nano ~/ros2_curri/agv_ws/src/agv_control/agv_control/safety_controller.py</a:t>
             </a:r>
           </a:p>
           <a:p>
@@ -1246,12 +1258,12 @@
           <a:lstStyle/>
           <a:p>
             <a:r>
-              <a:t>[설명] ~/ros2_curri/agv_ws/src/agv_bringup/config/mission.yaml의 전체 파일을 2/2 구간으로 작성한다.</a:t>
-            </a:r>
-          </a:p>
-          <a:p>
-            <a:r>
-              <a:t>[실행] nano ~/ros2_curri/agv_ws/src/agv_bringup/config/mission.yaml</a:t>
+              <a:t>[설명] ~/ros2_curri/agv_ws/src/agv_control/agv_control/safety_controller.py의 전체 파일을 4/4 구간으로 작성한다.</a:t>
+            </a:r>
+          </a:p>
+          <a:p>
+            <a:r>
+              <a:t>[실행] nano ~/ros2_curri/agv_ws/src/agv_control/agv_control/safety_controller.py</a:t>
             </a:r>
           </a:p>
           <a:p>
@@ -1336,22 +1348,17 @@
           <a:lstStyle/>
           <a:p>
             <a:r>
-              <a:t>[설명] build/source/run을 생략 없이 실행한다.</a:t>
-            </a:r>
-          </a:p>
-          <a:p>
-            <a:r>
-              <a:t>[실행] source ~/ros2_curri/agv_ws/install/setup.bash</a:t>
-            </a:r>
-          </a:p>
-          <a:p>
-            <a:r>
-              <a:t>ros2 run agv_control safety_controller --ros-args -p stop_distance:=0.5</a:t>
-            </a:r>
-          </a:p>
-          <a:p>
-            <a:r>
-              <a:t>[확인] 0.5 m 안 장애물에서 forward cmd_vel이 zero Twist로 바뀌는 조건을 설명한다.</a:t>
+              <a:t>[설명] ~/ros2_curri/agv_ws/src/agv_bringup/config/mission.yaml의 전체 파일을 1/2 구간으로 작성한다.</a:t>
+            </a:r>
+          </a:p>
+          <a:p>
+            <a:r>
+              <a:t>[실행] nano ~/ros2_curri/agv_ws/src/agv_bringup/config/mission.yaml</a:t>
+            </a:r>
+          </a:p>
+          <a:p>
+            <a:r>
+              <a:t>[확인] 코드를 저장하고 다음 코드 슬라이드 또는 build 단계로 이동한다.</a:t>
             </a:r>
           </a:p>
           <a:p>
@@ -1361,7 +1368,7 @@
           </a:p>
           <a:p>
             <a:r>
-              <a:t>[오류] 오류가 나면 현재 폴더, source, 파일 경로를 먼저 확인한다.</a:t>
+              <a:t>[오류] 들여쓰기·XML 태그·따옴표가 슬라이드와 정확히 같은지 확인한다.</a:t>
             </a:r>
           </a:p>
         </p:txBody>
@@ -1431,17 +1438,17 @@
           <a:lstStyle/>
           <a:p>
             <a:r>
-              <a:t>[설명] 실제 Ubuntu/ROS 2 환경에서 생성한 검증 화면이다.</a:t>
-            </a:r>
-          </a:p>
-          <a:p>
-            <a:r>
-              <a:t>[실행] 슬라이드의 명령 또는 파일 작성 단계를 진행한다.</a:t>
-            </a:r>
-          </a:p>
-          <a:p>
-            <a:r>
-              <a:t>[확인] 캡처의 명령과 다음 슬라이드의 검증 명령을 비교한다.</a:t>
+              <a:t>[설명] ~/ros2_curri/agv_ws/src/agv_bringup/config/mission.yaml의 전체 파일을 2/2 구간으로 작성한다.</a:t>
+            </a:r>
+          </a:p>
+          <a:p>
+            <a:r>
+              <a:t>[실행] nano ~/ros2_curri/agv_ws/src/agv_bringup/config/mission.yaml</a:t>
+            </a:r>
+          </a:p>
+          <a:p>
+            <a:r>
+              <a:t>[확인] 코드를 저장하고 다음 코드 슬라이드 또는 build 단계로 이동한다.</a:t>
             </a:r>
           </a:p>
           <a:p>
@@ -1451,7 +1458,7 @@
           </a:p>
           <a:p>
             <a:r>
-              <a:t>[오류] 오류가 나면 현재 폴더, source, 파일 경로를 먼저 확인한다.</a:t>
+              <a:t>[오류] 들여쓰기·XML 태그·따옴표가 슬라이드와 정확히 같은지 확인한다.</a:t>
             </a:r>
           </a:p>
         </p:txBody>
@@ -1611,17 +1618,22 @@
           <a:lstStyle/>
           <a:p>
             <a:r>
-              <a:t>[설명] 실제 Ubuntu/ROS 2 환경에서 생성한 검증 화면이다.</a:t>
-            </a:r>
-          </a:p>
-          <a:p>
-            <a:r>
-              <a:t>[실행] 슬라이드의 명령 또는 파일 작성 단계를 진행한다.</a:t>
-            </a:r>
-          </a:p>
-          <a:p>
-            <a:r>
-              <a:t>[확인] 캡처의 명령과 다음 슬라이드의 검증 명령을 비교한다.</a:t>
+              <a:t>[설명] build/source/run을 생략 없이 실행한다.</a:t>
+            </a:r>
+          </a:p>
+          <a:p>
+            <a:r>
+              <a:t>[실행] source ~/ros2_curri/agv_ws/install/setup.bash</a:t>
+            </a:r>
+          </a:p>
+          <a:p>
+            <a:r>
+              <a:t>ros2 run agv_control safety_controller --ros-args -p stop_distance:=0.5</a:t>
+            </a:r>
+          </a:p>
+          <a:p>
+            <a:r>
+              <a:t>[확인] 0.5 m 안 장애물에서 forward cmd_vel이 zero Twist로 바뀌는 조건을 설명한다.</a:t>
             </a:r>
           </a:p>
           <a:p>
@@ -1701,27 +1713,17 @@
           <a:lstStyle/>
           <a:p>
             <a:r>
-              <a:t>[설명] 검증 명령은 GUI 결과와 별도로 실행해 재현 가능한 완료 기준을 만든다.</a:t>
-            </a:r>
-          </a:p>
-          <a:p>
-            <a:r>
-              <a:t>[실행] ros2 topic info /cmd_vel_raw</a:t>
-            </a:r>
-          </a:p>
-          <a:p>
-            <a:r>
-              <a:t>ros2 topic info /cmd_vel</a:t>
-            </a:r>
-          </a:p>
-          <a:p>
-            <a:r>
-              <a:t>ros2 param get /safety_controller stop_distance</a:t>
-            </a:r>
-          </a:p>
-          <a:p>
-            <a:r>
-              <a:t>[확인] 0.5 m 안 장애물에서 forward cmd_vel이 zero Twist로 바뀌는 조건을 설명한다.</a:t>
+              <a:t>[설명] 실제 Ubuntu/ROS 2 환경에서 생성한 검증 화면이다.</a:t>
+            </a:r>
+          </a:p>
+          <a:p>
+            <a:r>
+              <a:t>[실행] 슬라이드의 명령 또는 파일 작성 단계를 진행한다.</a:t>
+            </a:r>
+          </a:p>
+          <a:p>
+            <a:r>
+              <a:t>[확인] ① 명령/설정  ② 정상 출력 또는 화면  ③ 다음 검증 명령으로 재확인</a:t>
             </a:r>
           </a:p>
           <a:p>
@@ -1801,7 +1803,7 @@
           <a:lstStyle/>
           <a:p>
             <a:r>
-              <a:t>[설명] 오류를 대신 해결하지 말고 증상부터 우선 확인 순서대로 교육생이 실행하게 한다.</a:t>
+              <a:t>[설명] 실제 Ubuntu/ROS 2 환경에서 생성한 검증 화면이다.</a:t>
             </a:r>
           </a:p>
           <a:p>
@@ -1811,7 +1813,7 @@
           </a:p>
           <a:p>
             <a:r>
-              <a:t>[확인] 수정 뒤 첫 검증 명령을 다시 실행한다.</a:t>
+              <a:t>[확인] 명령·설정과 화면의 topic·frame·결과 이름을 대조합니다.</a:t>
             </a:r>
           </a:p>
           <a:p>
@@ -1821,7 +1823,7 @@
           </a:p>
           <a:p>
             <a:r>
-              <a:t>[오류] 슬라이드의 두 대표 오류를 먼저 사용한다.</a:t>
+              <a:t>[오류] 오류가 나면 현재 폴더, source, 파일 경로를 먼저 확인한다.</a:t>
             </a:r>
           </a:p>
         </p:txBody>
@@ -1891,17 +1893,27 @@
           <a:lstStyle/>
           <a:p>
             <a:r>
-              <a:t>[설명] 교육생이 직접 한 값만 바꿔 원인과 결과를 연결하게 한다.</a:t>
-            </a:r>
-          </a:p>
-          <a:p>
-            <a:r>
-              <a:t>[실행] 슬라이드의 명령 또는 파일 작성 단계를 진행한다.</a:t>
-            </a:r>
-          </a:p>
-          <a:p>
-            <a:r>
-              <a:t>[확인] 원래 값과 변경 값을 모두 기록한다.</a:t>
+              <a:t>[설명] 검증 명령은 GUI 결과와 별도로 실행해 재현 가능한 완료 기준을 만든다.</a:t>
+            </a:r>
+          </a:p>
+          <a:p>
+            <a:r>
+              <a:t>[실행] ros2 topic info /cmd_vel_raw</a:t>
+            </a:r>
+          </a:p>
+          <a:p>
+            <a:r>
+              <a:t>ros2 topic info /cmd_vel</a:t>
+            </a:r>
+          </a:p>
+          <a:p>
+            <a:r>
+              <a:t>ros2 param get /safety_controller stop_distance</a:t>
+            </a:r>
+          </a:p>
+          <a:p>
+            <a:r>
+              <a:t>[확인] 0.5 m 안 장애물에서 forward cmd_vel이 zero Twist로 바뀌는 조건을 설명한다.</a:t>
             </a:r>
           </a:p>
           <a:p>
@@ -1981,7 +1993,7 @@
           <a:lstStyle/>
           <a:p>
             <a:r>
-              <a:t>[설명] 교육생이 Complete·캡처·로그를 저장했는지 확인하고 다음 모듈의 시작 상태를 읽는다.</a:t>
+              <a:t>[설명] 오류를 대신 해결하지 말고 증상부터 우선 확인 순서대로 교육생이 실행하게 한다.</a:t>
             </a:r>
           </a:p>
           <a:p>
@@ -1991,7 +2003,7 @@
           </a:p>
           <a:p>
             <a:r>
-              <a:t>[확인] M19 FSM 시작 조건을 말할 수 있다.</a:t>
+              <a:t>[확인] 수정 뒤 첫 검증 명령을 다시 실행한다.</a:t>
             </a:r>
           </a:p>
           <a:p>
@@ -2001,7 +2013,7 @@
           </a:p>
           <a:p>
             <a:r>
-              <a:t>[오류] 오류가 나면 현재 폴더, source, 파일 경로를 먼저 확인한다.</a:t>
+              <a:t>[오류] 슬라이드의 두 대표 오류를 먼저 사용한다.</a:t>
             </a:r>
           </a:p>
         </p:txBody>
@@ -2071,6 +2083,186 @@
           <a:lstStyle/>
           <a:p>
             <a:r>
+              <a:t>[설명] 교육생이 직접 한 값만 바꿔 원인과 결과를 연결하게 한다.</a:t>
+            </a:r>
+          </a:p>
+          <a:p>
+            <a:r>
+              <a:t>[실행] 슬라이드의 명령 또는 파일 작성 단계를 진행한다.</a:t>
+            </a:r>
+          </a:p>
+          <a:p>
+            <a:r>
+              <a:t>[확인] 원래 값과 변경 값을 모두 기록한다.</a:t>
+            </a:r>
+          </a:p>
+          <a:p>
+            <a:r>
+              <a:t>[멈춤] 교육생이 현재 체크포인트를 통과할 때까지 기다린다.</a:t>
+            </a:r>
+          </a:p>
+          <a:p>
+            <a:r>
+              <a:t>[오류] 오류가 나면 현재 폴더, source, 파일 경로를 먼저 확인한다.</a:t>
+            </a:r>
+          </a:p>
+        </p:txBody>
+      </p:sp>
+      <p:sp>
+        <p:nvSpPr>
+          <p:cNvPr id="4" name="Slide Number Placeholder 3"/>
+          <p:cNvSpPr>
+            <a:spLocks noGrp="1"/>
+          </p:cNvSpPr>
+          <p:nvPr>
+            <p:ph type="sldNum" idx="5" sz="quarter"/>
+          </p:nvPr>
+        </p:nvSpPr>
+        <p:spPr/>
+      </p:sp>
+    </p:spTree>
+  </p:cSld>
+  <p:clrMapOvr>
+    <a:masterClrMapping/>
+  </p:clrMapOvr>
+</p:notes>
+</file>
+
+<file path=ppt/notesSlides/notesSlide26.xml><?xml version="1.0" encoding="utf-8"?>
+<p:notes xmlns:a="http://schemas.openxmlformats.org/drawingml/2006/main" xmlns:p="http://schemas.openxmlformats.org/presentationml/2006/main" xmlns:r="http://schemas.openxmlformats.org/officeDocument/2006/relationships">
+  <p:cSld>
+    <p:spTree>
+      <p:nvGrpSpPr>
+        <p:cNvPr id="1" name=""/>
+        <p:cNvGrpSpPr/>
+        <p:nvPr/>
+      </p:nvGrpSpPr>
+      <p:grpSpPr>
+        <a:xfrm>
+          <a:off x="0" y="0"/>
+          <a:ext cx="0" cy="0"/>
+          <a:chOff x="0" y="0"/>
+          <a:chExt cx="0" cy="0"/>
+        </a:xfrm>
+      </p:grpSpPr>
+      <p:sp>
+        <p:nvSpPr>
+          <p:cNvPr id="2" name="Slide Image Placeholder 1"/>
+          <p:cNvSpPr>
+            <a:spLocks noGrp="1"/>
+          </p:cNvSpPr>
+          <p:nvPr>
+            <p:ph type="sldImg" idx="2"/>
+          </p:nvPr>
+        </p:nvSpPr>
+        <p:spPr/>
+      </p:sp>
+      <p:sp>
+        <p:nvSpPr>
+          <p:cNvPr id="3" name="Notes Placeholder 2"/>
+          <p:cNvSpPr>
+            <a:spLocks noGrp="1"/>
+          </p:cNvSpPr>
+          <p:nvPr>
+            <p:ph type="body" idx="3" sz="quarter"/>
+          </p:nvPr>
+        </p:nvSpPr>
+        <p:spPr/>
+        <p:txBody>
+          <a:bodyPr/>
+          <a:lstStyle/>
+          <a:p>
+            <a:r>
+              <a:t>[설명] 교육생이 Complete·캡처·로그를 저장했는지 확인하고 다음 모듈의 시작 상태를 읽는다.</a:t>
+            </a:r>
+          </a:p>
+          <a:p>
+            <a:r>
+              <a:t>[실행] 슬라이드의 명령 또는 파일 작성 단계를 진행한다.</a:t>
+            </a:r>
+          </a:p>
+          <a:p>
+            <a:r>
+              <a:t>[확인] M19 FSM 시작 조건을 말할 수 있다.</a:t>
+            </a:r>
+          </a:p>
+          <a:p>
+            <a:r>
+              <a:t>[멈춤] 교육생이 현재 체크포인트를 통과할 때까지 기다린다.</a:t>
+            </a:r>
+          </a:p>
+          <a:p>
+            <a:r>
+              <a:t>[오류] 오류가 나면 현재 폴더, source, 파일 경로를 먼저 확인한다.</a:t>
+            </a:r>
+          </a:p>
+        </p:txBody>
+      </p:sp>
+      <p:sp>
+        <p:nvSpPr>
+          <p:cNvPr id="4" name="Slide Number Placeholder 3"/>
+          <p:cNvSpPr>
+            <a:spLocks noGrp="1"/>
+          </p:cNvSpPr>
+          <p:nvPr>
+            <p:ph type="sldNum" idx="5" sz="quarter"/>
+          </p:nvPr>
+        </p:nvSpPr>
+        <p:spPr/>
+      </p:sp>
+    </p:spTree>
+  </p:cSld>
+  <p:clrMapOvr>
+    <a:masterClrMapping/>
+  </p:clrMapOvr>
+</p:notes>
+</file>
+
+<file path=ppt/notesSlides/notesSlide27.xml><?xml version="1.0" encoding="utf-8"?>
+<p:notes xmlns:a="http://schemas.openxmlformats.org/drawingml/2006/main" xmlns:p="http://schemas.openxmlformats.org/presentationml/2006/main" xmlns:r="http://schemas.openxmlformats.org/officeDocument/2006/relationships">
+  <p:cSld>
+    <p:spTree>
+      <p:nvGrpSpPr>
+        <p:cNvPr id="1" name=""/>
+        <p:cNvGrpSpPr/>
+        <p:nvPr/>
+      </p:nvGrpSpPr>
+      <p:grpSpPr>
+        <a:xfrm>
+          <a:off x="0" y="0"/>
+          <a:ext cx="0" cy="0"/>
+          <a:chOff x="0" y="0"/>
+          <a:chExt cx="0" cy="0"/>
+        </a:xfrm>
+      </p:grpSpPr>
+      <p:sp>
+        <p:nvSpPr>
+          <p:cNvPr id="2" name="Slide Image Placeholder 1"/>
+          <p:cNvSpPr>
+            <a:spLocks noGrp="1"/>
+          </p:cNvSpPr>
+          <p:nvPr>
+            <p:ph type="sldImg" idx="2"/>
+          </p:nvPr>
+        </p:nvSpPr>
+        <p:spPr/>
+      </p:sp>
+      <p:sp>
+        <p:nvSpPr>
+          <p:cNvPr id="3" name="Notes Placeholder 2"/>
+          <p:cNvSpPr>
+            <a:spLocks noGrp="1"/>
+          </p:cNvSpPr>
+          <p:nvPr>
+            <p:ph type="body" idx="3" sz="quarter"/>
+          </p:nvPr>
+        </p:nvSpPr>
+        <p:spPr/>
+        <p:txBody>
+          <a:bodyPr/>
+          <a:lstStyle/>
+          <a:p>
+            <a:r>
               <a:t>[설명] 공식 문서는 버전 차이와 확장 학습을 확인할 때 사용한다.</a:t>
             </a:r>
           </a:p>
@@ -2521,22 +2713,17 @@
           <a:lstStyle/>
           <a:p>
             <a:r>
-              <a:t>[설명] distance는 m 단위이며 safety가 vision보다 먼저 final /cmd_vel을 결정한다.</a:t>
-            </a:r>
-          </a:p>
-          <a:p>
-            <a:r>
-              <a:t>[실행] ros2 run agv_control safety_controller --ros-args \</a:t>
-            </a:r>
-          </a:p>
-          <a:p>
-            <a:r>
-              <a:t>  -p stop_distance:=0.5 -p front_half_angle_deg:=15.0</a:t>
-            </a:r>
-          </a:p>
-          <a:p>
-            <a:r>
-              <a:t>[확인] 명령 출력에서 슬라이드의 확인 항목을 찾는다.</a:t>
+              <a:t>[설명] 파일을 코드 문법보다 먼저 역할·사용법·확인 화면으로 설명한다.</a:t>
+            </a:r>
+          </a:p>
+          <a:p>
+            <a:r>
+              <a:t>[실행] 슬라이드의 명령 또는 파일 작성 단계를 진행한다.</a:t>
+            </a:r>
+          </a:p>
+          <a:p>
+            <a:r>
+              <a:t>[확인] 교육생이 각 파일의 산출물과 확인 위치를 말할 수 있다.</a:t>
             </a:r>
           </a:p>
           <a:p>
@@ -2616,27 +2803,17 @@
           <a:lstStyle/>
           <a:p>
             <a:r>
-              <a:t>[설명] mission은 /cmd_vel_raw, 안전 필터만 /cmd_vel을 발행한다.</a:t>
-            </a:r>
-          </a:p>
-          <a:p>
-            <a:r>
-              <a:t>[실행] ros2 topic echo /cmd_vel_raw</a:t>
-            </a:r>
-          </a:p>
-          <a:p>
-            <a:r>
-              <a:t>ros2 topic echo /cmd_vel</a:t>
-            </a:r>
-          </a:p>
-          <a:p>
-            <a:r>
-              <a:t>ros2 topic echo /scan --once</a:t>
-            </a:r>
-          </a:p>
-          <a:p>
-            <a:r>
-              <a:t>[확인] 명령 출력에서 슬라이드의 확인 항목을 찾는다.</a:t>
+              <a:t>[설명] 파일을 코드 문법보다 먼저 역할·사용법·확인 화면으로 설명한다.</a:t>
+            </a:r>
+          </a:p>
+          <a:p>
+            <a:r>
+              <a:t>[실행] 슬라이드의 명령 또는 파일 작성 단계를 진행한다.</a:t>
+            </a:r>
+          </a:p>
+          <a:p>
+            <a:r>
+              <a:t>[확인] 교육생이 각 파일의 산출물과 확인 위치를 말할 수 있다.</a:t>
             </a:r>
           </a:p>
           <a:p>
@@ -2716,17 +2893,22 @@
           <a:lstStyle/>
           <a:p>
             <a:r>
-              <a:t>[설명] ~/ros2_curri/agv_ws/src/agv_sensors/agv_sensors/lidar_processor.py의 전체 파일을 1/3 구간으로 작성한다.</a:t>
-            </a:r>
-          </a:p>
-          <a:p>
-            <a:r>
-              <a:t>[실행] nano ~/ros2_curri/agv_ws/src/agv_sensors/agv_sensors/lidar_processor.py</a:t>
-            </a:r>
-          </a:p>
-          <a:p>
-            <a:r>
-              <a:t>[확인] 코드를 저장하고 다음 코드 슬라이드 또는 build 단계로 이동한다.</a:t>
+              <a:t>[설명] distance는 m 단위이며 safety가 vision보다 먼저 final /cmd_vel을 결정한다.</a:t>
+            </a:r>
+          </a:p>
+          <a:p>
+            <a:r>
+              <a:t>[실행] ros2 run agv_control safety_controller --ros-args \</a:t>
+            </a:r>
+          </a:p>
+          <a:p>
+            <a:r>
+              <a:t>  -p stop_distance:=0.5 -p front_half_angle_deg:=15.0</a:t>
+            </a:r>
+          </a:p>
+          <a:p>
+            <a:r>
+              <a:t>[확인] 명령 출력에서 슬라이드의 확인 항목을 찾는다.</a:t>
             </a:r>
           </a:p>
           <a:p>
@@ -2736,7 +2918,7 @@
           </a:p>
           <a:p>
             <a:r>
-              <a:t>[오류] 들여쓰기·XML 태그·따옴표가 슬라이드와 정확히 같은지 확인한다.</a:t>
+              <a:t>[오류] 오류가 나면 현재 폴더, source, 파일 경로를 먼저 확인한다.</a:t>
             </a:r>
           </a:p>
         </p:txBody>
@@ -6109,7 +6291,7 @@
               </a:defRPr>
             </a:pPr>
             <a:r>
-              <a:t>파일을 계속 작성하고 저장한다 (2/3)</a:t>
+              <a:t>raw와 safe command를 분리한다</a:t>
             </a:r>
           </a:p>
         </p:txBody>
@@ -6148,7 +6330,7 @@
               </a:defRPr>
             </a:pPr>
             <a:r>
-              <a:t>~/ros2_curri/agv_ws/src/agv_sensors/agv_sensors/lidar_processor.py</a:t>
+              <a:t>한 장에는 한 행동만 수행합니다.</a:t>
             </a:r>
           </a:p>
         </p:txBody>
@@ -6284,7 +6466,7 @@
               </a:defRPr>
             </a:pPr>
             <a:r>
-              <a:t>현재 단계 4/6    |    현재 폴더 ~/ros2_curri/agv_ws    |    현재 터미널</a:t>
+              <a:t>현재 단계 2/2    |    현재 폴더 ~/ros2_curri/agv_ws    |    현재 터미널</a:t>
             </a:r>
           </a:p>
         </p:txBody>
@@ -6297,8 +6479,8 @@
         </p:nvSpPr>
         <p:spPr>
           <a:xfrm>
-            <a:off x="658368" y="1627632"/>
-            <a:ext cx="10972800" cy="256032"/>
+            <a:off x="676656" y="1764792"/>
+            <a:ext cx="1828800" cy="347472"/>
           </a:xfrm>
           <a:prstGeom prst="rect">
             <a:avLst/>
@@ -6315,7 +6497,46 @@
               <a:spcAft>
                 <a:spcPts val="0"/>
               </a:spcAft>
-              <a:defRPr sz="1500" b="1">
+              <a:defRPr sz="1800" b="1">
+                <a:solidFill>
+                  <a:srgbClr val="225B9B"/>
+                </a:solidFill>
+                <a:latin typeface="Noto Sans CJK KR"/>
+              </a:defRPr>
+            </a:pPr>
+            <a:r>
+              <a:t>왜 하는가</a:t>
+            </a:r>
+          </a:p>
+        </p:txBody>
+      </p:sp>
+      <p:sp>
+        <p:nvSpPr>
+          <p:cNvPr id="8" name="TextBox 7"/>
+          <p:cNvSpPr txBox="1"/>
+          <p:nvPr/>
+        </p:nvSpPr>
+        <p:spPr>
+          <a:xfrm>
+            <a:off x="676656" y="2103120"/>
+            <a:ext cx="10789920" cy="512064"/>
+          </a:xfrm>
+          <a:prstGeom prst="rect">
+            <a:avLst/>
+          </a:prstGeom>
+          <a:noFill/>
+        </p:spPr>
+        <p:txBody>
+          <a:bodyPr wrap="square" lIns="73152" rIns="73152" tIns="36576" bIns="36576">
+            <a:spAutoFit/>
+          </a:bodyPr>
+          <a:lstStyle/>
+          <a:p>
+            <a:pPr algn="l">
+              <a:spcAft>
+                <a:spcPts val="0"/>
+              </a:spcAft>
+              <a:defRPr sz="2000" b="0">
                 <a:solidFill>
                   <a:srgbClr val="122C4E"/>
                 </a:solidFill>
@@ -6323,85 +6544,23 @@
               </a:defRPr>
             </a:pPr>
             <a:r>
-              <a:t>이번 단계: 파일의 전체 내용을 중간 생략 없이 작성합니다. 아래 줄 범위를 끝까지 입력하세요.</a:t>
-            </a:r>
-          </a:p>
-        </p:txBody>
-      </p:sp>
-      <p:sp>
-        <p:nvSpPr>
-          <p:cNvPr id="8" name="Rectangle 7"/>
+              <a:t>mission은 /cmd_vel_raw, 안전 필터만 /cmd_vel을 발행한다.</a:t>
+            </a:r>
+          </a:p>
+        </p:txBody>
+      </p:sp>
+      <p:sp>
+        <p:nvSpPr>
+          <p:cNvPr id="9" name="Rounded Rectangle 8"/>
           <p:cNvSpPr/>
           <p:nvPr/>
         </p:nvSpPr>
         <p:spPr>
           <a:xfrm>
-            <a:off x="658368" y="1956816"/>
-            <a:ext cx="10972800" cy="603504"/>
-          </a:xfrm>
-          <a:prstGeom prst="rect">
-            <a:avLst/>
-          </a:prstGeom>
-          <a:solidFill>
-            <a:srgbClr val="F4F7FB"/>
-          </a:solidFill>
-          <a:ln>
-            <a:solidFill>
-              <a:srgbClr val="F4F7FB"/>
-            </a:solidFill>
-          </a:ln>
-        </p:spPr>
-        <p:style>
-          <a:lnRef idx="1">
-            <a:schemeClr val="accent1"/>
-          </a:lnRef>
-          <a:fillRef idx="3">
-            <a:schemeClr val="accent1"/>
-          </a:fillRef>
-          <a:effectRef idx="2">
-            <a:schemeClr val="accent1"/>
-          </a:effectRef>
-          <a:fontRef idx="minor">
-            <a:schemeClr val="lt1"/>
-          </a:fontRef>
-        </p:style>
-        <p:txBody>
-          <a:bodyPr rtlCol="0" anchor="ctr" wrap="square" lIns="73152" rIns="73152" tIns="36576" bIns="36576"/>
-          <a:lstStyle/>
-          <a:p>
-            <a:pPr algn="l">
-              <a:spcAft>
-                <a:spcPts val="0"/>
-              </a:spcAft>
-              <a:defRPr sz="1400" b="0">
-                <a:solidFill>
-                  <a:srgbClr val="122C4E"/>
-                </a:solidFill>
-                <a:latin typeface="DejaVu Sans Mono"/>
-              </a:defRPr>
-            </a:pPr>
-            <a:r>
-              <a:t>파일 생성: mkdir -p ~/ros2_curri/agv_ws/src/agv_sensors/agv_sensors</a:t>
-            </a:r>
-            <a:br/>
-            <a:r>
-              <a:t>파일 열기: nano ~/ros2_curri/agv_ws/src/agv_sensors/agv_sensors/lidar_processor.py</a:t>
-            </a:r>
-          </a:p>
-        </p:txBody>
-      </p:sp>
-      <p:sp>
-        <p:nvSpPr>
-          <p:cNvPr id="9" name="Rectangle 8"/>
-          <p:cNvSpPr/>
-          <p:nvPr/>
-        </p:nvSpPr>
-        <p:spPr>
-          <a:xfrm>
-            <a:off x="658368" y="2706624"/>
-            <a:ext cx="10972800" cy="3364992"/>
-          </a:xfrm>
-          <a:prstGeom prst="rect">
+            <a:off x="676656" y="2871216"/>
+            <a:ext cx="10835640" cy="2331720"/>
+          </a:xfrm>
+          <a:prstGeom prst="roundRect">
             <a:avLst/>
           </a:prstGeom>
           <a:solidFill>
@@ -6428,14 +6587,14 @@
           </a:fontRef>
         </p:style>
         <p:txBody>
-          <a:bodyPr rtlCol="0" anchor="ctr" wrap="square" lIns="164592" rIns="164592" tIns="109728" bIns="36576"/>
+          <a:bodyPr rtlCol="0" anchor="ctr" wrap="square" lIns="73152" rIns="73152" tIns="36576" bIns="36576"/>
           <a:lstStyle/>
           <a:p>
             <a:pPr algn="l">
               <a:spcAft>
                 <a:spcPts val="0"/>
               </a:spcAft>
-              <a:defRPr sz="1400" b="0">
+              <a:defRPr sz="1600" b="0">
                 <a:solidFill>
                   <a:srgbClr val="FFFFFF"/>
                 </a:solidFill>
@@ -6443,45 +6602,15 @@
               </a:defRPr>
             </a:pPr>
             <a:r>
-              <a:t>        self.subscription = self.create_subscription(LaserScan, '/scan', self.callback,</a:t>
+              <a:t>ros2 topic echo /cmd_vel_raw</a:t>
             </a:r>
             <a:br/>
             <a:r>
-              <a:t>            qos_profile_sensor_data)</a:t>
+              <a:t>ros2 topic echo /cmd_vel</a:t>
             </a:r>
             <a:br/>
             <a:r>
-              <a:t>        self.publisher = self.create_publisher(Float32, '/obstacle_distance', 10)</a:t>
-            </a:r>
-            <a:br/>
-            <a:br/>
-            <a:r>
-              <a:t>    def callback(self, scan):</a:t>
-            </a:r>
-            <a:br/>
-            <a:r>
-              <a:t>        half_angle = math.radians(self.get_parameter('front_half_angle_deg').value)</a:t>
-            </a:r>
-            <a:br/>
-            <a:r>
-              <a:t>        front_ranges = [distance for index,</a:t>
-            </a:r>
-            <a:br/>
-            <a:r>
-              <a:t>            distance in enumerate(scan.ranges) if abs(scan.angle_min + index * scan.angle_increment) &lt;= half_angle and math.isfinite(distance)]</a:t>
-            </a:r>
-            <a:br/>
-            <a:r>
-              <a:t>        result = Float32(data=min(front_ranges) if front_ranges else float('inf'))</a:t>
-            </a:r>
-            <a:br/>
-            <a:r>
-              <a:t>        self.publisher.publish(result)</a:t>
-            </a:r>
-            <a:br/>
-            <a:br/>
-            <a:r>
-              <a:t>def main():</a:t>
+              <a:t>ros2 topic echo /scan --once</a:t>
             </a:r>
           </a:p>
         </p:txBody>
@@ -6494,8 +6623,8 @@
         </p:nvSpPr>
         <p:spPr>
           <a:xfrm>
-            <a:off x="749808" y="6181344"/>
-            <a:ext cx="10789920" cy="201168"/>
+            <a:off x="768096" y="5468112"/>
+            <a:ext cx="1143000" cy="256032"/>
           </a:xfrm>
           <a:prstGeom prst="rect">
             <a:avLst/>
@@ -6512,15 +6641,54 @@
               <a:spcAft>
                 <a:spcPts val="0"/>
               </a:spcAft>
-              <a:defRPr sz="1000" b="0">
-                <a:solidFill>
-                  <a:srgbClr val="5C6672"/>
-                </a:solidFill>
-                <a:latin typeface="Noto Sans CJK KR"/>
-              </a:defRPr>
-            </a:pPr>
-            <a:r>
-              <a:t>파일 전체 2/3 · 이 슬라이드 다음에 같은 파일의 나머지 줄이 이어집니다.</a:t>
+              <a:defRPr sz="1800" b="1">
+                <a:solidFill>
+                  <a:srgbClr val="2A8B5A"/>
+                </a:solidFill>
+                <a:latin typeface="Noto Sans CJK KR"/>
+              </a:defRPr>
+            </a:pPr>
+            <a:r>
+              <a:t>확인</a:t>
+            </a:r>
+          </a:p>
+        </p:txBody>
+      </p:sp>
+      <p:sp>
+        <p:nvSpPr>
+          <p:cNvPr id="11" name="TextBox 10"/>
+          <p:cNvSpPr txBox="1"/>
+          <p:nvPr/>
+        </p:nvSpPr>
+        <p:spPr>
+          <a:xfrm>
+            <a:off x="768096" y="5742432"/>
+            <a:ext cx="10561320" cy="347472"/>
+          </a:xfrm>
+          <a:prstGeom prst="rect">
+            <a:avLst/>
+          </a:prstGeom>
+          <a:noFill/>
+        </p:spPr>
+        <p:txBody>
+          <a:bodyPr wrap="square" lIns="73152" rIns="73152" tIns="36576" bIns="36576">
+            <a:spAutoFit/>
+          </a:bodyPr>
+          <a:lstStyle/>
+          <a:p>
+            <a:pPr algn="l">
+              <a:spcAft>
+                <a:spcPts val="0"/>
+              </a:spcAft>
+              <a:defRPr sz="1800" b="0">
+                <a:solidFill>
+                  <a:srgbClr val="122C4E"/>
+                </a:solidFill>
+                <a:latin typeface="Noto Sans CJK KR"/>
+              </a:defRPr>
+            </a:pPr>
+            <a:r>
+              <a:t>명령의 출력에서 topic·frame·파일 이름 또는 성공 메시지를 찾으면 이 단계가 완료됩니다.</a:t>
             </a:r>
           </a:p>
         </p:txBody>
@@ -6577,7 +6745,7 @@
               </a:defRPr>
             </a:pPr>
             <a:r>
-              <a:t>파일을 계속 작성하고 저장한다 (3/3)</a:t>
+              <a:t>파일을 새로 만들고 저장한다 (1/3)</a:t>
             </a:r>
           </a:p>
         </p:txBody>
@@ -6752,7 +6920,7 @@
               </a:defRPr>
             </a:pPr>
             <a:r>
-              <a:t>현재 단계 5/6    |    현재 폴더 ~/ros2_curri/agv_ws    |    현재 터미널</a:t>
+              <a:t>현재 단계 3/6    |    현재 폴더 ~/ros2_curri/agv_ws    |    현재 터미널</a:t>
             </a:r>
           </a:p>
         </p:txBody>
@@ -6911,43 +7079,45 @@
               </a:defRPr>
             </a:pPr>
             <a:r>
-              <a:t>    rclpy.init()</a:t>
+              <a:t>import math</a:t>
             </a:r>
             <a:br/>
             <a:r>
-              <a:t>    node = LidarProcessor()</a:t>
+              <a:t>import rclpy</a:t>
             </a:r>
             <a:br/>
             <a:r>
-              <a:t>    try:</a:t>
+              <a:t>from rclpy.node import Node</a:t>
             </a:r>
             <a:br/>
             <a:r>
-              <a:t>        rclpy.spin(node)</a:t>
+              <a:t>from rclpy.qos import qos_profile_sensor_data</a:t>
             </a:r>
             <a:br/>
             <a:r>
-              <a:t>    except KeyboardInterrupt:</a:t>
+              <a:t>from sensor_msgs.msg import LaserScan</a:t>
             </a:r>
             <a:br/>
             <a:r>
-              <a:t>        pass</a:t>
+              <a:t>from std_msgs.msg import Float32</a:t>
             </a:r>
             <a:br/>
-            <a:r>
-              <a:t>    finally:</a:t>
-            </a:r>
             <a:br/>
             <a:r>
-              <a:t>        node.destroy_node()</a:t>
+              <a:t>class LidarProcessor(Node):</a:t>
             </a:r>
             <a:br/>
-            <a:r>
-              <a:t>        if rclpy.ok():</a:t>
-            </a:r>
             <a:br/>
             <a:r>
-              <a:t>            rclpy.shutdown()</a:t>
+              <a:t>    def __init__(self):</a:t>
+            </a:r>
+            <a:br/>
+            <a:r>
+              <a:t>        super().__init__('lidar_processor')</a:t>
+            </a:r>
+            <a:br/>
+            <a:r>
+              <a:t>        self.declare_parameter('front_half_angle_deg', 15.0)</a:t>
             </a:r>
           </a:p>
         </p:txBody>
@@ -6986,7 +7156,7 @@
               </a:defRPr>
             </a:pPr>
             <a:r>
-              <a:t>파일 전체 3/3 · 이 슬라이드 다음에 같은 파일의 나머지 줄이 이어집니다.</a:t>
+              <a:t>파일 전체 1/3 · 이 슬라이드 다음에 같은 파일의 나머지 줄이 이어집니다.</a:t>
             </a:r>
           </a:p>
         </p:txBody>
@@ -7043,7 +7213,7 @@
               </a:defRPr>
             </a:pPr>
             <a:r>
-              <a:t>파일을 새로 만들고 저장한다 (1/4)</a:t>
+              <a:t>파일을 계속 작성하고 저장한다 (2/3)</a:t>
             </a:r>
           </a:p>
         </p:txBody>
@@ -7082,7 +7252,7 @@
               </a:defRPr>
             </a:pPr>
             <a:r>
-              <a:t>~/ros2_curri/agv_ws/src/agv_control/agv_control/safety_controller.py</a:t>
+              <a:t>~/ros2_curri/agv_ws/src/agv_sensors/agv_sensors/lidar_processor.py</a:t>
             </a:r>
           </a:p>
         </p:txBody>
@@ -7218,7 +7388,7 @@
               </a:defRPr>
             </a:pPr>
             <a:r>
-              <a:t>현재 단계 6/10    |    현재 폴더 ~/ros2_curri/agv_ws    |    현재 터미널</a:t>
+              <a:t>현재 단계 4/6    |    현재 폴더 ~/ros2_curri/agv_ws    |    현재 터미널</a:t>
             </a:r>
           </a:p>
         </p:txBody>
@@ -7315,11 +7485,11 @@
               </a:defRPr>
             </a:pPr>
             <a:r>
-              <a:t>파일 생성: mkdir -p ~/ros2_curri/agv_ws/src/agv_control/agv_control</a:t>
+              <a:t>파일 생성: mkdir -p ~/ros2_curri/agv_ws/src/agv_sensors/agv_sensors</a:t>
             </a:r>
             <a:br/>
             <a:r>
-              <a:t>파일 열기: nano ~/ros2_curri/agv_ws/src/agv_control/agv_control/safety_controller.py</a:t>
+              <a:t>파일 열기: nano ~/ros2_curri/agv_ws/src/agv_sensors/agv_sensors/lidar_processor.py</a:t>
             </a:r>
           </a:p>
         </p:txBody>
@@ -7377,45 +7547,45 @@
               </a:defRPr>
             </a:pPr>
             <a:r>
-              <a:t>import math</a:t>
+              <a:t>        self.subscription = self.create_subscription(LaserScan, '/scan', self.callback,</a:t>
             </a:r>
             <a:br/>
             <a:r>
-              <a:t>import rclpy</a:t>
+              <a:t>            qos_profile_sensor_data)</a:t>
             </a:r>
             <a:br/>
             <a:r>
-              <a:t>from rclpy.node import Node</a:t>
-            </a:r>
-            <a:br/>
-            <a:r>
-              <a:t>from geometry_msgs.msg import Twist</a:t>
-            </a:r>
-            <a:br/>
-            <a:r>
-              <a:t>from sensor_msgs.msg import LaserScan</a:t>
+              <a:t>        self.publisher = self.create_publisher(Float32, '/obstacle_distance', 10)</a:t>
             </a:r>
             <a:br/>
             <a:br/>
             <a:r>
-              <a:t>class SafetyController(Node):</a:t>
+              <a:t>    def callback(self, scan):</a:t>
             </a:r>
             <a:br/>
             <a:r>
-              <a:t>    """Pass a desired command through unless an obstacle is within stop_distance."""</a:t>
+              <a:t>        half_angle = math.radians(self.get_parameter('front_half_angle_deg').value)</a:t>
+            </a:r>
+            <a:br/>
+            <a:r>
+              <a:t>        front_ranges = [distance for index,</a:t>
+            </a:r>
+            <a:br/>
+            <a:r>
+              <a:t>            distance in enumerate(scan.ranges) if abs(scan.angle_min + index * scan.angle_increment) &lt;= half_angle and math.isfinite(distance)]</a:t>
+            </a:r>
+            <a:br/>
+            <a:r>
+              <a:t>        result = Float32(data=min(front_ranges) if front_ranges else float('inf'))</a:t>
+            </a:r>
+            <a:br/>
+            <a:r>
+              <a:t>        self.publisher.publish(result)</a:t>
             </a:r>
             <a:br/>
             <a:br/>
             <a:r>
-              <a:t>    def __init__(self):</a:t>
-            </a:r>
-            <a:br/>
-            <a:r>
-              <a:t>        super().__init__('safety_controller')</a:t>
-            </a:r>
-            <a:br/>
-            <a:r>
-              <a:t>        self.declare_parameter('stop_distance', 0.5)</a:t>
+              <a:t>def main():</a:t>
             </a:r>
           </a:p>
         </p:txBody>
@@ -7454,7 +7624,7 @@
               </a:defRPr>
             </a:pPr>
             <a:r>
-              <a:t>파일 전체 1/4 · 이 슬라이드 다음에 같은 파일의 나머지 줄이 이어집니다.</a:t>
+              <a:t>파일 전체 2/3 · 이 슬라이드 다음에 같은 파일의 나머지 줄이 이어집니다.</a:t>
             </a:r>
           </a:p>
         </p:txBody>
@@ -7511,7 +7681,7 @@
               </a:defRPr>
             </a:pPr>
             <a:r>
-              <a:t>파일을 계속 작성하고 저장한다 (2/4)</a:t>
+              <a:t>파일을 계속 작성하고 저장한다 (3/3)</a:t>
             </a:r>
           </a:p>
         </p:txBody>
@@ -7550,7 +7720,7 @@
               </a:defRPr>
             </a:pPr>
             <a:r>
-              <a:t>~/ros2_curri/agv_ws/src/agv_control/agv_control/safety_controller.py</a:t>
+              <a:t>~/ros2_curri/agv_ws/src/agv_sensors/agv_sensors/lidar_processor.py</a:t>
             </a:r>
           </a:p>
         </p:txBody>
@@ -7686,7 +7856,7 @@
               </a:defRPr>
             </a:pPr>
             <a:r>
-              <a:t>현재 단계 7/10    |    현재 폴더 ~/ros2_curri/agv_ws    |    현재 터미널</a:t>
+              <a:t>현재 단계 5/6    |    현재 폴더 ~/ros2_curri/agv_ws    |    현재 터미널</a:t>
             </a:r>
           </a:p>
         </p:txBody>
@@ -7783,11 +7953,11 @@
               </a:defRPr>
             </a:pPr>
             <a:r>
-              <a:t>파일 생성: mkdir -p ~/ros2_curri/agv_ws/src/agv_control/agv_control</a:t>
+              <a:t>파일 생성: mkdir -p ~/ros2_curri/agv_ws/src/agv_sensors/agv_sensors</a:t>
             </a:r>
             <a:br/>
             <a:r>
-              <a:t>파일 열기: nano ~/ros2_curri/agv_ws/src/agv_control/agv_control/safety_controller.py</a:t>
+              <a:t>파일 열기: nano ~/ros2_curri/agv_ws/src/agv_sensors/agv_sensors/lidar_processor.py</a:t>
             </a:r>
           </a:p>
         </p:txBody>
@@ -7845,46 +8015,44 @@
               </a:defRPr>
             </a:pPr>
             <a:r>
-              <a:t>        self.declare_parameter('front_half_angle_deg', 15.0)</a:t>
+              <a:t>    rclpy.init()</a:t>
             </a:r>
             <a:br/>
             <a:r>
-              <a:t>        self.obstacle_distance = math.inf</a:t>
+              <a:t>    node = LidarProcessor()</a:t>
             </a:r>
             <a:br/>
             <a:r>
-              <a:t>        self.create_subscription(LaserScan, '/scan', self.scan_callback, 10)</a:t>
+              <a:t>    try:</a:t>
             </a:r>
             <a:br/>
             <a:r>
-              <a:t>        self.create_subscription(Twist, '/cmd_vel_raw', self.command_callback, 10)</a:t>
+              <a:t>        rclpy.spin(node)</a:t>
             </a:r>
             <a:br/>
             <a:r>
-              <a:t>        self.publisher = self.create_publisher(Twist, '/cmd_vel', 10)</a:t>
+              <a:t>    except KeyboardInterrupt:</a:t>
             </a:r>
             <a:br/>
+            <a:r>
+              <a:t>        pass</a:t>
+            </a:r>
             <a:br/>
             <a:r>
-              <a:t>    def scan_callback(self, scan):</a:t>
+              <a:t>    finally:</a:t>
             </a:r>
             <a:br/>
             <a:r>
-              <a:t>        limit = math.radians(self.get_parameter('front_half_angle_deg').value)</a:t>
+              <a:t>        node.destroy_node()</a:t>
             </a:r>
             <a:br/>
             <a:r>
-              <a:t>        readings = [value for index,</a:t>
+              <a:t>        if rclpy.ok():</a:t>
             </a:r>
             <a:br/>
             <a:r>
-              <a:t>            value in enumerate(scan.ranges) if abs(scan.angle_min + index * scan.angle_increment) &lt;= limit and math.isfinite(value)]</a:t>
-            </a:r>
-            <a:br/>
-            <a:r>
-              <a:t>        self.obstacle_distance = min(readings) if readings else math.inf</a:t>
-            </a:r>
-            <a:br/>
+              <a:t>            rclpy.shutdown()</a:t>
+            </a:r>
           </a:p>
         </p:txBody>
       </p:sp>
@@ -7922,7 +8090,7 @@
               </a:defRPr>
             </a:pPr>
             <a:r>
-              <a:t>파일 전체 2/4 · 이 슬라이드 다음에 같은 파일의 나머지 줄이 이어집니다.</a:t>
+              <a:t>파일 전체 3/3 · 이 슬라이드 다음에 같은 파일의 나머지 줄이 이어집니다.</a:t>
             </a:r>
           </a:p>
         </p:txBody>
@@ -7979,7 +8147,7 @@
               </a:defRPr>
             </a:pPr>
             <a:r>
-              <a:t>파일을 계속 작성하고 저장한다 (3/4)</a:t>
+              <a:t>파일을 새로 만들고 저장한다 (1/4)</a:t>
             </a:r>
           </a:p>
         </p:txBody>
@@ -8154,7 +8322,7 @@
               </a:defRPr>
             </a:pPr>
             <a:r>
-              <a:t>현재 단계 8/10    |    현재 폴더 ~/ros2_curri/agv_ws    |    현재 터미널</a:t>
+              <a:t>현재 단계 6/10    |    현재 폴더 ~/ros2_curri/agv_ws    |    현재 터미널</a:t>
             </a:r>
           </a:p>
         </p:txBody>
@@ -8313,48 +8481,45 @@
               </a:defRPr>
             </a:pPr>
             <a:r>
-              <a:t>    def command_callback(self, command):</a:t>
+              <a:t>import math</a:t>
             </a:r>
             <a:br/>
             <a:r>
-              <a:t>        safe = Twist()</a:t>
+              <a:t>import rclpy</a:t>
             </a:r>
             <a:br/>
             <a:r>
-              <a:t>        if self.obstacle_distance &gt;= self.get_parameter('stop_distance').value or command.linear.x &lt;= 0.0:</a:t>
+              <a:t>from rclpy.node import Node</a:t>
             </a:r>
             <a:br/>
             <a:r>
-              <a:t>            safe = command</a:t>
+              <a:t>from geometry_msgs.msg import Twist</a:t>
             </a:r>
             <a:br/>
             <a:r>
-              <a:t>        else:</a:t>
-            </a:r>
-            <a:br/>
-            <a:r>
-              <a:t>            self.get_logger().warn('obstacle at %.2f m: stopping forward command' % self.obstacle_distance)</a:t>
-            </a:r>
-            <a:br/>
-            <a:r>
-              <a:t>        self.publisher.publish(safe)</a:t>
+              <a:t>from sensor_msgs.msg import LaserScan</a:t>
             </a:r>
             <a:br/>
             <a:br/>
             <a:r>
-              <a:t>def main():</a:t>
+              <a:t>class SafetyController(Node):</a:t>
             </a:r>
             <a:br/>
             <a:r>
-              <a:t>    rclpy.init()</a:t>
+              <a:t>    """Pass a desired command through unless an obstacle is within stop_distance."""</a:t>
             </a:r>
             <a:br/>
-            <a:r>
-              <a:t>    node = SafetyController()</a:t>
-            </a:r>
             <a:br/>
             <a:r>
-              <a:t>    try:</a:t>
+              <a:t>    def __init__(self):</a:t>
+            </a:r>
+            <a:br/>
+            <a:r>
+              <a:t>        super().__init__('safety_controller')</a:t>
+            </a:r>
+            <a:br/>
+            <a:r>
+              <a:t>        self.declare_parameter('stop_distance', 0.5)</a:t>
             </a:r>
           </a:p>
         </p:txBody>
@@ -8393,7 +8558,7 @@
               </a:defRPr>
             </a:pPr>
             <a:r>
-              <a:t>파일 전체 3/4 · 이 슬라이드 다음에 같은 파일의 나머지 줄이 이어집니다.</a:t>
+              <a:t>파일 전체 1/4 · 이 슬라이드 다음에 같은 파일의 나머지 줄이 이어집니다.</a:t>
             </a:r>
           </a:p>
         </p:txBody>
@@ -8450,7 +8615,7 @@
               </a:defRPr>
             </a:pPr>
             <a:r>
-              <a:t>파일을 계속 작성하고 저장한다 (4/4)</a:t>
+              <a:t>파일을 계속 작성하고 저장한다 (2/4)</a:t>
             </a:r>
           </a:p>
         </p:txBody>
@@ -8625,7 +8790,7 @@
               </a:defRPr>
             </a:pPr>
             <a:r>
-              <a:t>현재 단계 9/10    |    현재 폴더 ~/ros2_curri/agv_ws    |    현재 터미널</a:t>
+              <a:t>현재 단계 7/10    |    현재 폴더 ~/ros2_curri/agv_ws    |    현재 터미널</a:t>
             </a:r>
           </a:p>
         </p:txBody>
@@ -8784,32 +8949,46 @@
               </a:defRPr>
             </a:pPr>
             <a:r>
-              <a:t>        rclpy.spin(node)</a:t>
+              <a:t>        self.declare_parameter('front_half_angle_deg', 15.0)</a:t>
             </a:r>
             <a:br/>
             <a:r>
-              <a:t>    except KeyboardInterrupt:</a:t>
+              <a:t>        self.obstacle_distance = math.inf</a:t>
             </a:r>
             <a:br/>
             <a:r>
-              <a:t>        pass</a:t>
+              <a:t>        self.create_subscription(LaserScan, '/scan', self.scan_callback, 10)</a:t>
             </a:r>
             <a:br/>
             <a:r>
-              <a:t>    finally:</a:t>
+              <a:t>        self.create_subscription(Twist, '/cmd_vel_raw', self.command_callback, 10)</a:t>
             </a:r>
             <a:br/>
             <a:r>
-              <a:t>        node.destroy_node()</a:t>
+              <a:t>        self.publisher = self.create_publisher(Twist, '/cmd_vel', 10)</a:t>
             </a:r>
             <a:br/>
-            <a:r>
-              <a:t>        if rclpy.ok():</a:t>
-            </a:r>
             <a:br/>
             <a:r>
-              <a:t>            rclpy.shutdown()</a:t>
-            </a:r>
+              <a:t>    def scan_callback(self, scan):</a:t>
+            </a:r>
+            <a:br/>
+            <a:r>
+              <a:t>        limit = math.radians(self.get_parameter('front_half_angle_deg').value)</a:t>
+            </a:r>
+            <a:br/>
+            <a:r>
+              <a:t>        readings = [value for index,</a:t>
+            </a:r>
+            <a:br/>
+            <a:r>
+              <a:t>            value in enumerate(scan.ranges) if abs(scan.angle_min + index * scan.angle_increment) &lt;= limit and math.isfinite(value)]</a:t>
+            </a:r>
+            <a:br/>
+            <a:r>
+              <a:t>        self.obstacle_distance = min(readings) if readings else math.inf</a:t>
+            </a:r>
+            <a:br/>
           </a:p>
         </p:txBody>
       </p:sp>
@@ -8847,7 +9026,7 @@
               </a:defRPr>
             </a:pPr>
             <a:r>
-              <a:t>파일 전체 4/4 · 이 슬라이드 다음에 같은 파일의 나머지 줄이 이어집니다.</a:t>
+              <a:t>파일 전체 2/4 · 이 슬라이드 다음에 같은 파일의 나머지 줄이 이어집니다.</a:t>
             </a:r>
           </a:p>
         </p:txBody>
@@ -8904,7 +9083,7 @@
               </a:defRPr>
             </a:pPr>
             <a:r>
-              <a:t>파일을 새로 만들고 저장한다 (1/2)</a:t>
+              <a:t>파일을 계속 작성하고 저장한다 (3/4)</a:t>
             </a:r>
           </a:p>
         </p:txBody>
@@ -8943,7 +9122,7 @@
               </a:defRPr>
             </a:pPr>
             <a:r>
-              <a:t>~/ros2_curri/agv_ws/src/agv_bringup/config/mission.yaml</a:t>
+              <a:t>~/ros2_curri/agv_ws/src/agv_control/agv_control/safety_controller.py</a:t>
             </a:r>
           </a:p>
         </p:txBody>
@@ -9079,7 +9258,7 @@
               </a:defRPr>
             </a:pPr>
             <a:r>
-              <a:t>현재 단계 10/12    |    현재 폴더 ~/ros2_curri/agv_ws    |    현재 터미널</a:t>
+              <a:t>현재 단계 8/10    |    현재 폴더 ~/ros2_curri/agv_ws    |    현재 터미널</a:t>
             </a:r>
           </a:p>
         </p:txBody>
@@ -9176,11 +9355,11 @@
               </a:defRPr>
             </a:pPr>
             <a:r>
-              <a:t>파일 생성: mkdir -p ~/ros2_curri/agv_ws/src/agv_bringup/config</a:t>
+              <a:t>파일 생성: mkdir -p ~/ros2_curri/agv_ws/src/agv_control/agv_control</a:t>
             </a:r>
             <a:br/>
             <a:r>
-              <a:t>파일 열기: nano ~/ros2_curri/agv_ws/src/agv_bringup/config/mission.yaml</a:t>
+              <a:t>파일 열기: nano ~/ros2_curri/agv_ws/src/agv_control/agv_control/safety_controller.py</a:t>
             </a:r>
           </a:p>
         </p:txBody>
@@ -9238,51 +9417,48 @@
               </a:defRPr>
             </a:pPr>
             <a:r>
-              <a:t>mission_manager:</a:t>
+              <a:t>    def command_callback(self, command):</a:t>
             </a:r>
             <a:br/>
             <a:r>
-              <a:t>  ros__parameters:</a:t>
+              <a:t>        safe = Twist()</a:t>
             </a:r>
             <a:br/>
             <a:r>
-              <a:t>    use_sim_time: true</a:t>
+              <a:t>        if self.obstacle_distance &gt;= self.get_parameter('stop_distance').value or command.linear.x &lt;= 0.0:</a:t>
             </a:r>
             <a:br/>
             <a:r>
-              <a:t>    stop_distance: 0.50</a:t>
+              <a:t>            safe = command</a:t>
             </a:r>
             <a:br/>
             <a:r>
-              <a:t>    search_speed: 0.25</a:t>
+              <a:t>        else:</a:t>
             </a:r>
             <a:br/>
             <a:r>
-              <a:t>    approach_speed: 0.15</a:t>
+              <a:t>            self.get_logger().warn('obstacle at %.2f m: stopping forward command' % self.obstacle_distance)</a:t>
             </a:r>
             <a:br/>
             <a:r>
-              <a:t>    image_center_x: 320</a:t>
+              <a:t>        self.publisher.publish(safe)</a:t>
             </a:r>
             <a:br/>
-            <a:r>
-              <a:t>    target_timeout_sec: 0.70</a:t>
-            </a:r>
             <a:br/>
             <a:r>
-              <a:t>safety_controller:</a:t>
+              <a:t>def main():</a:t>
             </a:r>
             <a:br/>
             <a:r>
-              <a:t>  ros__parameters:</a:t>
+              <a:t>    rclpy.init()</a:t>
             </a:r>
             <a:br/>
             <a:r>
-              <a:t>    use_sim_time: true</a:t>
+              <a:t>    node = SafetyController()</a:t>
             </a:r>
             <a:br/>
             <a:r>
-              <a:t>    stop_distance: 0.50</a:t>
+              <a:t>    try:</a:t>
             </a:r>
           </a:p>
         </p:txBody>
@@ -9321,7 +9497,7 @@
               </a:defRPr>
             </a:pPr>
             <a:r>
-              <a:t>파일 전체 1/2 · 이 슬라이드 다음에 같은 파일의 나머지 줄이 이어집니다.</a:t>
+              <a:t>파일 전체 3/4 · 이 슬라이드 다음에 같은 파일의 나머지 줄이 이어집니다.</a:t>
             </a:r>
           </a:p>
         </p:txBody>
@@ -9378,7 +9554,7 @@
               </a:defRPr>
             </a:pPr>
             <a:r>
-              <a:t>파일을 계속 작성하고 저장한다 (2/2)</a:t>
+              <a:t>파일을 계속 작성하고 저장한다 (4/4)</a:t>
             </a:r>
           </a:p>
         </p:txBody>
@@ -9417,7 +9593,7 @@
               </a:defRPr>
             </a:pPr>
             <a:r>
-              <a:t>~/ros2_curri/agv_ws/src/agv_bringup/config/mission.yaml</a:t>
+              <a:t>~/ros2_curri/agv_ws/src/agv_control/agv_control/safety_controller.py</a:t>
             </a:r>
           </a:p>
         </p:txBody>
@@ -9553,7 +9729,7 @@
               </a:defRPr>
             </a:pPr>
             <a:r>
-              <a:t>현재 단계 11/12    |    현재 폴더 ~/ros2_curri/agv_ws    |    현재 터미널</a:t>
+              <a:t>현재 단계 9/10    |    현재 폴더 ~/ros2_curri/agv_ws    |    현재 터미널</a:t>
             </a:r>
           </a:p>
         </p:txBody>
@@ -9650,11 +9826,11 @@
               </a:defRPr>
             </a:pPr>
             <a:r>
-              <a:t>파일 생성: mkdir -p ~/ros2_curri/agv_ws/src/agv_bringup/config</a:t>
+              <a:t>파일 생성: mkdir -p ~/ros2_curri/agv_ws/src/agv_control/agv_control</a:t>
             </a:r>
             <a:br/>
             <a:r>
-              <a:t>파일 열기: nano ~/ros2_curri/agv_ws/src/agv_bringup/config/mission.yaml</a:t>
+              <a:t>파일 열기: nano ~/ros2_curri/agv_ws/src/agv_control/agv_control/safety_controller.py</a:t>
             </a:r>
           </a:p>
         </p:txBody>
@@ -9712,7 +9888,31 @@
               </a:defRPr>
             </a:pPr>
             <a:r>
-              <a:t>    front_half_angle_deg: 15.0</a:t>
+              <a:t>        rclpy.spin(node)</a:t>
+            </a:r>
+            <a:br/>
+            <a:r>
+              <a:t>    except KeyboardInterrupt:</a:t>
+            </a:r>
+            <a:br/>
+            <a:r>
+              <a:t>        pass</a:t>
+            </a:r>
+            <a:br/>
+            <a:r>
+              <a:t>    finally:</a:t>
+            </a:r>
+            <a:br/>
+            <a:r>
+              <a:t>        node.destroy_node()</a:t>
+            </a:r>
+            <a:br/>
+            <a:r>
+              <a:t>        if rclpy.ok():</a:t>
+            </a:r>
+            <a:br/>
+            <a:r>
+              <a:t>            rclpy.shutdown()</a:t>
             </a:r>
           </a:p>
         </p:txBody>
@@ -9751,7 +9951,7 @@
               </a:defRPr>
             </a:pPr>
             <a:r>
-              <a:t>파일 전체 2/2 · 이 슬라이드 다음에 같은 파일의 나머지 줄이 이어집니다.</a:t>
+              <a:t>파일 전체 4/4 · 이 슬라이드 다음에 같은 파일의 나머지 줄이 이어집니다.</a:t>
             </a:r>
           </a:p>
         </p:txBody>
@@ -9808,7 +10008,7 @@
               </a:defRPr>
             </a:pPr>
             <a:r>
-              <a:t>build → source → run 순서로 실행한다</a:t>
+              <a:t>파일을 새로 만들고 저장한다 (1/2)</a:t>
             </a:r>
           </a:p>
         </p:txBody>
@@ -9847,7 +10047,7 @@
               </a:defRPr>
             </a:pPr>
             <a:r>
-              <a:t>새 파일 또는 수정 파일은 build와 source 뒤에만 실행 이름·설정에 반영됩니다.</a:t>
+              <a:t>~/ros2_curri/agv_ws/src/agv_bringup/config/mission.yaml</a:t>
             </a:r>
           </a:p>
         </p:txBody>
@@ -9983,23 +10183,124 @@
               </a:defRPr>
             </a:pPr>
             <a:r>
-              <a:t>현재 단계 실행    |    현재 폴더 ~/ros2_curri/agv_ws    |    현재 터미널</a:t>
-            </a:r>
-          </a:p>
-        </p:txBody>
-      </p:sp>
-      <p:sp>
-        <p:nvSpPr>
-          <p:cNvPr id="7" name="Rounded Rectangle 6"/>
+              <a:t>현재 단계 10/12    |    현재 폴더 ~/ros2_curri/agv_ws    |    현재 터미널</a:t>
+            </a:r>
+          </a:p>
+        </p:txBody>
+      </p:sp>
+      <p:sp>
+        <p:nvSpPr>
+          <p:cNvPr id="7" name="TextBox 6"/>
+          <p:cNvSpPr txBox="1"/>
+          <p:nvPr/>
+        </p:nvSpPr>
+        <p:spPr>
+          <a:xfrm>
+            <a:off x="658368" y="1627632"/>
+            <a:ext cx="10972800" cy="256032"/>
+          </a:xfrm>
+          <a:prstGeom prst="rect">
+            <a:avLst/>
+          </a:prstGeom>
+          <a:noFill/>
+        </p:spPr>
+        <p:txBody>
+          <a:bodyPr wrap="square" lIns="73152" rIns="73152" tIns="36576" bIns="36576">
+            <a:spAutoFit/>
+          </a:bodyPr>
+          <a:lstStyle/>
+          <a:p>
+            <a:pPr algn="l">
+              <a:spcAft>
+                <a:spcPts val="0"/>
+              </a:spcAft>
+              <a:defRPr sz="1500" b="1">
+                <a:solidFill>
+                  <a:srgbClr val="122C4E"/>
+                </a:solidFill>
+                <a:latin typeface="Noto Sans CJK KR"/>
+              </a:defRPr>
+            </a:pPr>
+            <a:r>
+              <a:t>이번 단계: 파일의 전체 내용을 중간 생략 없이 작성합니다. 아래 줄 범위를 끝까지 입력하세요.</a:t>
+            </a:r>
+          </a:p>
+        </p:txBody>
+      </p:sp>
+      <p:sp>
+        <p:nvSpPr>
+          <p:cNvPr id="8" name="Rectangle 7"/>
           <p:cNvSpPr/>
           <p:nvPr/>
         </p:nvSpPr>
         <p:spPr>
           <a:xfrm>
-            <a:off x="658368" y="1700784"/>
-            <a:ext cx="10972800" cy="3182112"/>
-          </a:xfrm>
-          <a:prstGeom prst="roundRect">
+            <a:off x="658368" y="1956816"/>
+            <a:ext cx="10972800" cy="603504"/>
+          </a:xfrm>
+          <a:prstGeom prst="rect">
+            <a:avLst/>
+          </a:prstGeom>
+          <a:solidFill>
+            <a:srgbClr val="F4F7FB"/>
+          </a:solidFill>
+          <a:ln>
+            <a:solidFill>
+              <a:srgbClr val="F4F7FB"/>
+            </a:solidFill>
+          </a:ln>
+        </p:spPr>
+        <p:style>
+          <a:lnRef idx="1">
+            <a:schemeClr val="accent1"/>
+          </a:lnRef>
+          <a:fillRef idx="3">
+            <a:schemeClr val="accent1"/>
+          </a:fillRef>
+          <a:effectRef idx="2">
+            <a:schemeClr val="accent1"/>
+          </a:effectRef>
+          <a:fontRef idx="minor">
+            <a:schemeClr val="lt1"/>
+          </a:fontRef>
+        </p:style>
+        <p:txBody>
+          <a:bodyPr rtlCol="0" anchor="ctr" wrap="square" lIns="73152" rIns="73152" tIns="36576" bIns="36576"/>
+          <a:lstStyle/>
+          <a:p>
+            <a:pPr algn="l">
+              <a:spcAft>
+                <a:spcPts val="0"/>
+              </a:spcAft>
+              <a:defRPr sz="1400" b="0">
+                <a:solidFill>
+                  <a:srgbClr val="122C4E"/>
+                </a:solidFill>
+                <a:latin typeface="DejaVu Sans Mono"/>
+              </a:defRPr>
+            </a:pPr>
+            <a:r>
+              <a:t>파일 생성: mkdir -p ~/ros2_curri/agv_ws/src/agv_bringup/config</a:t>
+            </a:r>
+            <a:br/>
+            <a:r>
+              <a:t>파일 열기: nano ~/ros2_curri/agv_ws/src/agv_bringup/config/mission.yaml</a:t>
+            </a:r>
+          </a:p>
+        </p:txBody>
+      </p:sp>
+      <p:sp>
+        <p:nvSpPr>
+          <p:cNvPr id="9" name="Rectangle 8"/>
+          <p:cNvSpPr/>
+          <p:nvPr/>
+        </p:nvSpPr>
+        <p:spPr>
+          <a:xfrm>
+            <a:off x="658368" y="2706624"/>
+            <a:ext cx="10972800" cy="3364992"/>
+          </a:xfrm>
+          <a:prstGeom prst="rect">
             <a:avLst/>
           </a:prstGeom>
           <a:solidFill>
@@ -10026,14 +10327,14 @@
           </a:fontRef>
         </p:style>
         <p:txBody>
-          <a:bodyPr rtlCol="0" anchor="ctr" wrap="square" lIns="73152" rIns="73152" tIns="36576" bIns="36576"/>
+          <a:bodyPr rtlCol="0" anchor="ctr" wrap="square" lIns="164592" rIns="164592" tIns="109728" bIns="36576"/>
           <a:lstStyle/>
           <a:p>
             <a:pPr algn="l">
               <a:spcAft>
                 <a:spcPts val="0"/>
               </a:spcAft>
-              <a:defRPr sz="1600" b="0">
+              <a:defRPr sz="1400" b="0">
                 <a:solidFill>
                   <a:srgbClr val="FFFFFF"/>
                 </a:solidFill>
@@ -10041,25 +10342,65 @@
               </a:defRPr>
             </a:pPr>
             <a:r>
-              <a:t>source ~/ros2_curri/agv_ws/install/setup.bash</a:t>
+              <a:t>mission_manager:</a:t>
             </a:r>
             <a:br/>
             <a:r>
-              <a:t>ros2 run agv_control safety_controller --ros-args -p stop_distance:=0.5</a:t>
-            </a:r>
-          </a:p>
-        </p:txBody>
-      </p:sp>
-      <p:sp>
-        <p:nvSpPr>
-          <p:cNvPr id="8" name="TextBox 7"/>
+              <a:t>  ros__parameters:</a:t>
+            </a:r>
+            <a:br/>
+            <a:r>
+              <a:t>    use_sim_time: true</a:t>
+            </a:r>
+            <a:br/>
+            <a:r>
+              <a:t>    stop_distance: 0.50</a:t>
+            </a:r>
+            <a:br/>
+            <a:r>
+              <a:t>    search_speed: 0.25</a:t>
+            </a:r>
+            <a:br/>
+            <a:r>
+              <a:t>    approach_speed: 0.15</a:t>
+            </a:r>
+            <a:br/>
+            <a:r>
+              <a:t>    image_center_x: 320</a:t>
+            </a:r>
+            <a:br/>
+            <a:r>
+              <a:t>    target_timeout_sec: 0.70</a:t>
+            </a:r>
+            <a:br/>
+            <a:r>
+              <a:t>safety_controller:</a:t>
+            </a:r>
+            <a:br/>
+            <a:r>
+              <a:t>  ros__parameters:</a:t>
+            </a:r>
+            <a:br/>
+            <a:r>
+              <a:t>    use_sim_time: true</a:t>
+            </a:r>
+            <a:br/>
+            <a:r>
+              <a:t>    stop_distance: 0.50</a:t>
+            </a:r>
+          </a:p>
+        </p:txBody>
+      </p:sp>
+      <p:sp>
+        <p:nvSpPr>
+          <p:cNvPr id="10" name="TextBox 9"/>
           <p:cNvSpPr txBox="1"/>
           <p:nvPr/>
         </p:nvSpPr>
         <p:spPr>
           <a:xfrm>
-            <a:off x="786384" y="5239512"/>
-            <a:ext cx="1261872" cy="237744"/>
+            <a:off x="749808" y="6181344"/>
+            <a:ext cx="10789920" cy="201168"/>
           </a:xfrm>
           <a:prstGeom prst="rect">
             <a:avLst/>
@@ -10076,54 +10417,15 @@
               <a:spcAft>
                 <a:spcPts val="0"/>
               </a:spcAft>
-              <a:defRPr sz="1800" b="1">
-                <a:solidFill>
-                  <a:srgbClr val="2A8B5A"/>
-                </a:solidFill>
-                <a:latin typeface="Noto Sans CJK KR"/>
-              </a:defRPr>
-            </a:pPr>
-            <a:r>
-              <a:t>확인 기준</a:t>
-            </a:r>
-          </a:p>
-        </p:txBody>
-      </p:sp>
-      <p:sp>
-        <p:nvSpPr>
-          <p:cNvPr id="9" name="TextBox 8"/>
-          <p:cNvSpPr txBox="1"/>
-          <p:nvPr/>
-        </p:nvSpPr>
-        <p:spPr>
-          <a:xfrm>
-            <a:off x="786384" y="5532120"/>
-            <a:ext cx="10469880" cy="420624"/>
-          </a:xfrm>
-          <a:prstGeom prst="rect">
-            <a:avLst/>
-          </a:prstGeom>
-          <a:noFill/>
-        </p:spPr>
-        <p:txBody>
-          <a:bodyPr wrap="square" lIns="73152" rIns="73152" tIns="36576" bIns="36576">
-            <a:spAutoFit/>
-          </a:bodyPr>
-          <a:lstStyle/>
-          <a:p>
-            <a:pPr algn="l">
-              <a:spcAft>
-                <a:spcPts val="0"/>
-              </a:spcAft>
-              <a:defRPr sz="1800" b="0">
-                <a:solidFill>
-                  <a:srgbClr val="122C4E"/>
-                </a:solidFill>
-                <a:latin typeface="Noto Sans CJK KR"/>
-              </a:defRPr>
-            </a:pPr>
-            <a:r>
-              <a:t>0.5 m 안 장애물에서 forward cmd_vel이 zero Twist로 바뀌는 조건을 설명한다.</a:t>
+              <a:defRPr sz="1000" b="0">
+                <a:solidFill>
+                  <a:srgbClr val="5C6672"/>
+                </a:solidFill>
+                <a:latin typeface="Noto Sans CJK KR"/>
+              </a:defRPr>
+            </a:pPr>
+            <a:r>
+              <a:t>파일 전체 1/2 · 이 슬라이드 다음에 같은 파일의 나머지 줄이 이어집니다.</a:t>
             </a:r>
           </a:p>
         </p:txBody>
@@ -10180,7 +10482,7 @@
               </a:defRPr>
             </a:pPr>
             <a:r>
-              <a:t>정상 결과: 실제 환경에서 확인한 출력</a:t>
+              <a:t>파일을 계속 작성하고 저장한다 (2/2)</a:t>
             </a:r>
           </a:p>
         </p:txBody>
@@ -10219,7 +10521,7 @@
               </a:defRPr>
             </a:pPr>
             <a:r>
-              <a:t>실제 ROS 2 환경의 파일·패키지·구성 검증 로그</a:t>
+              <a:t>~/ros2_curri/agv_ws/src/agv_bringup/config/mission.yaml</a:t>
             </a:r>
           </a:p>
         </p:txBody>
@@ -10302,30 +10604,64 @@
           </a:p>
         </p:txBody>
       </p:sp>
-      <p:pic>
-        <p:nvPicPr>
-          <p:cNvPr id="6" name="Picture 5" descr="validation_terminal.png"/>
-          <p:cNvPicPr>
-            <a:picLocks noChangeAspect="1"/>
-          </p:cNvPicPr>
-          <p:nvPr/>
-        </p:nvPicPr>
-        <p:blipFill>
-          <a:blip r:embed="rId2"/>
-          <a:stretch>
-            <a:fillRect/>
-          </a:stretch>
-        </p:blipFill>
-        <p:spPr>
-          <a:xfrm>
-            <a:off x="790956" y="1562649"/>
-            <a:ext cx="10607040" cy="4381924"/>
-          </a:xfrm>
-          <a:prstGeom prst="rect">
-            <a:avLst/>
-          </a:prstGeom>
-        </p:spPr>
-      </p:pic>
+      <p:sp>
+        <p:nvSpPr>
+          <p:cNvPr id="6" name="Rectangle 5"/>
+          <p:cNvSpPr/>
+          <p:nvPr/>
+        </p:nvSpPr>
+        <p:spPr>
+          <a:xfrm>
+            <a:off x="566928" y="1188720"/>
+            <a:ext cx="11064240" cy="347472"/>
+          </a:xfrm>
+          <a:prstGeom prst="rect">
+            <a:avLst/>
+          </a:prstGeom>
+          <a:solidFill>
+            <a:srgbClr val="F4F7FB"/>
+          </a:solidFill>
+          <a:ln>
+            <a:solidFill>
+              <a:srgbClr val="F4F7FB"/>
+            </a:solidFill>
+          </a:ln>
+        </p:spPr>
+        <p:style>
+          <a:lnRef idx="1">
+            <a:schemeClr val="accent1"/>
+          </a:lnRef>
+          <a:fillRef idx="3">
+            <a:schemeClr val="accent1"/>
+          </a:fillRef>
+          <a:effectRef idx="2">
+            <a:schemeClr val="accent1"/>
+          </a:effectRef>
+          <a:fontRef idx="minor">
+            <a:schemeClr val="lt1"/>
+          </a:fontRef>
+        </p:style>
+        <p:txBody>
+          <a:bodyPr rtlCol="0" anchor="ctr" wrap="square" lIns="73152" rIns="73152" tIns="36576" bIns="36576"/>
+          <a:lstStyle/>
+          <a:p>
+            <a:pPr algn="l">
+              <a:spcAft>
+                <a:spcPts val="0"/>
+              </a:spcAft>
+              <a:defRPr sz="1300" b="1">
+                <a:solidFill>
+                  <a:srgbClr val="122C4E"/>
+                </a:solidFill>
+                <a:latin typeface="Noto Sans CJK KR"/>
+              </a:defRPr>
+            </a:pPr>
+            <a:r>
+              <a:t>현재 단계 11/12    |    현재 폴더 ~/ros2_curri/agv_ws    |    현재 터미널</a:t>
+            </a:r>
+          </a:p>
+        </p:txBody>
+      </p:sp>
       <p:sp>
         <p:nvSpPr>
           <p:cNvPr id="7" name="TextBox 6"/>
@@ -10334,8 +10670,8 @@
         </p:nvSpPr>
         <p:spPr>
           <a:xfrm>
-            <a:off x="777240" y="6217920"/>
-            <a:ext cx="10607040" cy="182880"/>
+            <a:off x="658368" y="1627632"/>
+            <a:ext cx="10972800" cy="256032"/>
           </a:xfrm>
           <a:prstGeom prst="rect">
             <a:avLst/>
@@ -10348,19 +10684,178 @@
           </a:bodyPr>
           <a:lstStyle/>
           <a:p>
-            <a:pPr algn="ctr">
-              <a:spcAft>
-                <a:spcPts val="0"/>
-              </a:spcAft>
-              <a:defRPr sz="1100" b="1">
-                <a:solidFill>
-                  <a:srgbClr val="2A8B5A"/>
-                </a:solidFill>
-                <a:latin typeface="Noto Sans CJK KR"/>
-              </a:defRPr>
-            </a:pPr>
-            <a:r>
-              <a:t>① 명령/설정  ② 정상 출력 또는 화면  ③ 다음 검증 명령으로 재확인</a:t>
+            <a:pPr algn="l">
+              <a:spcAft>
+                <a:spcPts val="0"/>
+              </a:spcAft>
+              <a:defRPr sz="1500" b="1">
+                <a:solidFill>
+                  <a:srgbClr val="122C4E"/>
+                </a:solidFill>
+                <a:latin typeface="Noto Sans CJK KR"/>
+              </a:defRPr>
+            </a:pPr>
+            <a:r>
+              <a:t>이번 단계: 파일의 전체 내용을 중간 생략 없이 작성합니다. 아래 줄 범위를 끝까지 입력하세요.</a:t>
+            </a:r>
+          </a:p>
+        </p:txBody>
+      </p:sp>
+      <p:sp>
+        <p:nvSpPr>
+          <p:cNvPr id="8" name="Rectangle 7"/>
+          <p:cNvSpPr/>
+          <p:nvPr/>
+        </p:nvSpPr>
+        <p:spPr>
+          <a:xfrm>
+            <a:off x="658368" y="1956816"/>
+            <a:ext cx="10972800" cy="603504"/>
+          </a:xfrm>
+          <a:prstGeom prst="rect">
+            <a:avLst/>
+          </a:prstGeom>
+          <a:solidFill>
+            <a:srgbClr val="F4F7FB"/>
+          </a:solidFill>
+          <a:ln>
+            <a:solidFill>
+              <a:srgbClr val="F4F7FB"/>
+            </a:solidFill>
+          </a:ln>
+        </p:spPr>
+        <p:style>
+          <a:lnRef idx="1">
+            <a:schemeClr val="accent1"/>
+          </a:lnRef>
+          <a:fillRef idx="3">
+            <a:schemeClr val="accent1"/>
+          </a:fillRef>
+          <a:effectRef idx="2">
+            <a:schemeClr val="accent1"/>
+          </a:effectRef>
+          <a:fontRef idx="minor">
+            <a:schemeClr val="lt1"/>
+          </a:fontRef>
+        </p:style>
+        <p:txBody>
+          <a:bodyPr rtlCol="0" anchor="ctr" wrap="square" lIns="73152" rIns="73152" tIns="36576" bIns="36576"/>
+          <a:lstStyle/>
+          <a:p>
+            <a:pPr algn="l">
+              <a:spcAft>
+                <a:spcPts val="0"/>
+              </a:spcAft>
+              <a:defRPr sz="1400" b="0">
+                <a:solidFill>
+                  <a:srgbClr val="122C4E"/>
+                </a:solidFill>
+                <a:latin typeface="DejaVu Sans Mono"/>
+              </a:defRPr>
+            </a:pPr>
+            <a:r>
+              <a:t>파일 생성: mkdir -p ~/ros2_curri/agv_ws/src/agv_bringup/config</a:t>
+            </a:r>
+            <a:br/>
+            <a:r>
+              <a:t>파일 열기: nano ~/ros2_curri/agv_ws/src/agv_bringup/config/mission.yaml</a:t>
+            </a:r>
+          </a:p>
+        </p:txBody>
+      </p:sp>
+      <p:sp>
+        <p:nvSpPr>
+          <p:cNvPr id="9" name="Rectangle 8"/>
+          <p:cNvSpPr/>
+          <p:nvPr/>
+        </p:nvSpPr>
+        <p:spPr>
+          <a:xfrm>
+            <a:off x="658368" y="2706624"/>
+            <a:ext cx="10972800" cy="3364992"/>
+          </a:xfrm>
+          <a:prstGeom prst="rect">
+            <a:avLst/>
+          </a:prstGeom>
+          <a:solidFill>
+            <a:srgbClr val="1D232D"/>
+          </a:solidFill>
+          <a:ln>
+            <a:solidFill>
+              <a:srgbClr val="1D232D"/>
+            </a:solidFill>
+          </a:ln>
+        </p:spPr>
+        <p:style>
+          <a:lnRef idx="1">
+            <a:schemeClr val="accent1"/>
+          </a:lnRef>
+          <a:fillRef idx="3">
+            <a:schemeClr val="accent1"/>
+          </a:fillRef>
+          <a:effectRef idx="2">
+            <a:schemeClr val="accent1"/>
+          </a:effectRef>
+          <a:fontRef idx="minor">
+            <a:schemeClr val="lt1"/>
+          </a:fontRef>
+        </p:style>
+        <p:txBody>
+          <a:bodyPr rtlCol="0" anchor="ctr" wrap="square" lIns="164592" rIns="164592" tIns="109728" bIns="36576"/>
+          <a:lstStyle/>
+          <a:p>
+            <a:pPr algn="l">
+              <a:spcAft>
+                <a:spcPts val="0"/>
+              </a:spcAft>
+              <a:defRPr sz="1400" b="0">
+                <a:solidFill>
+                  <a:srgbClr val="FFFFFF"/>
+                </a:solidFill>
+                <a:latin typeface="DejaVu Sans Mono"/>
+              </a:defRPr>
+            </a:pPr>
+            <a:r>
+              <a:t>    front_half_angle_deg: 15.0</a:t>
+            </a:r>
+          </a:p>
+        </p:txBody>
+      </p:sp>
+      <p:sp>
+        <p:nvSpPr>
+          <p:cNvPr id="10" name="TextBox 9"/>
+          <p:cNvSpPr txBox="1"/>
+          <p:nvPr/>
+        </p:nvSpPr>
+        <p:spPr>
+          <a:xfrm>
+            <a:off x="749808" y="6181344"/>
+            <a:ext cx="10789920" cy="201168"/>
+          </a:xfrm>
+          <a:prstGeom prst="rect">
+            <a:avLst/>
+          </a:prstGeom>
+          <a:noFill/>
+        </p:spPr>
+        <p:txBody>
+          <a:bodyPr wrap="square" lIns="73152" rIns="73152" tIns="36576" bIns="36576">
+            <a:spAutoFit/>
+          </a:bodyPr>
+          <a:lstStyle/>
+          <a:p>
+            <a:pPr algn="l">
+              <a:spcAft>
+                <a:spcPts val="0"/>
+              </a:spcAft>
+              <a:defRPr sz="1000" b="0">
+                <a:solidFill>
+                  <a:srgbClr val="5C6672"/>
+                </a:solidFill>
+                <a:latin typeface="Noto Sans CJK KR"/>
+              </a:defRPr>
+            </a:pPr>
+            <a:r>
+              <a:t>파일 전체 2/2 · 이 슬라이드 다음에 같은 파일의 나머지 줄이 이어집니다.</a:t>
             </a:r>
           </a:p>
         </p:txBody>
@@ -10878,7 +11373,7 @@
               </a:defRPr>
             </a:pPr>
             <a:r>
-              <a:t>정상 결과: 실제 환경에서 확인한 출력</a:t>
+              <a:t>build → source → run 순서로 실행한다</a:t>
             </a:r>
           </a:p>
         </p:txBody>
@@ -10917,7 +11412,7 @@
               </a:defRPr>
             </a:pPr>
             <a:r>
-              <a:t>실제 RViz2: safety sector Marker와 Path를 추가해 확인하는 통합 display</a:t>
+              <a:t>새 파일 또는 수정 파일은 build와 source 뒤에만 실행 이름·설정에 반영됩니다.</a:t>
             </a:r>
           </a:p>
         </p:txBody>
@@ -11000,40 +11495,136 @@
           </a:p>
         </p:txBody>
       </p:sp>
-      <p:pic>
-        <p:nvPicPr>
-          <p:cNvPr id="6" name="Picture 5" descr="02_rviz_marker_path_actual.png"/>
-          <p:cNvPicPr>
-            <a:picLocks noChangeAspect="1"/>
-          </p:cNvPicPr>
-          <p:nvPr/>
-        </p:nvPicPr>
-        <p:blipFill>
-          <a:blip r:embed="rId2"/>
-          <a:stretch>
-            <a:fillRect/>
-          </a:stretch>
-        </p:blipFill>
-        <p:spPr>
-          <a:xfrm>
-            <a:off x="2971409" y="1353312"/>
-            <a:ext cx="6246133" cy="4800600"/>
-          </a:xfrm>
-          <a:prstGeom prst="rect">
-            <a:avLst/>
-          </a:prstGeom>
-        </p:spPr>
-      </p:pic>
-      <p:sp>
-        <p:nvSpPr>
-          <p:cNvPr id="7" name="TextBox 6"/>
+      <p:sp>
+        <p:nvSpPr>
+          <p:cNvPr id="6" name="Rectangle 5"/>
+          <p:cNvSpPr/>
+          <p:nvPr/>
+        </p:nvSpPr>
+        <p:spPr>
+          <a:xfrm>
+            <a:off x="566928" y="1188720"/>
+            <a:ext cx="11064240" cy="347472"/>
+          </a:xfrm>
+          <a:prstGeom prst="rect">
+            <a:avLst/>
+          </a:prstGeom>
+          <a:solidFill>
+            <a:srgbClr val="F4F7FB"/>
+          </a:solidFill>
+          <a:ln>
+            <a:solidFill>
+              <a:srgbClr val="F4F7FB"/>
+            </a:solidFill>
+          </a:ln>
+        </p:spPr>
+        <p:style>
+          <a:lnRef idx="1">
+            <a:schemeClr val="accent1"/>
+          </a:lnRef>
+          <a:fillRef idx="3">
+            <a:schemeClr val="accent1"/>
+          </a:fillRef>
+          <a:effectRef idx="2">
+            <a:schemeClr val="accent1"/>
+          </a:effectRef>
+          <a:fontRef idx="minor">
+            <a:schemeClr val="lt1"/>
+          </a:fontRef>
+        </p:style>
+        <p:txBody>
+          <a:bodyPr rtlCol="0" anchor="ctr" wrap="square" lIns="73152" rIns="73152" tIns="36576" bIns="36576"/>
+          <a:lstStyle/>
+          <a:p>
+            <a:pPr algn="l">
+              <a:spcAft>
+                <a:spcPts val="0"/>
+              </a:spcAft>
+              <a:defRPr sz="1300" b="1">
+                <a:solidFill>
+                  <a:srgbClr val="122C4E"/>
+                </a:solidFill>
+                <a:latin typeface="Noto Sans CJK KR"/>
+              </a:defRPr>
+            </a:pPr>
+            <a:r>
+              <a:t>현재 단계 실행    |    현재 폴더 ~/ros2_curri/agv_ws    |    현재 터미널</a:t>
+            </a:r>
+          </a:p>
+        </p:txBody>
+      </p:sp>
+      <p:sp>
+        <p:nvSpPr>
+          <p:cNvPr id="7" name="Rounded Rectangle 6"/>
+          <p:cNvSpPr/>
+          <p:nvPr/>
+        </p:nvSpPr>
+        <p:spPr>
+          <a:xfrm>
+            <a:off x="658368" y="1700784"/>
+            <a:ext cx="10972800" cy="3182112"/>
+          </a:xfrm>
+          <a:prstGeom prst="roundRect">
+            <a:avLst/>
+          </a:prstGeom>
+          <a:solidFill>
+            <a:srgbClr val="1D232D"/>
+          </a:solidFill>
+          <a:ln>
+            <a:solidFill>
+              <a:srgbClr val="1D232D"/>
+            </a:solidFill>
+          </a:ln>
+        </p:spPr>
+        <p:style>
+          <a:lnRef idx="1">
+            <a:schemeClr val="accent1"/>
+          </a:lnRef>
+          <a:fillRef idx="3">
+            <a:schemeClr val="accent1"/>
+          </a:fillRef>
+          <a:effectRef idx="2">
+            <a:schemeClr val="accent1"/>
+          </a:effectRef>
+          <a:fontRef idx="minor">
+            <a:schemeClr val="lt1"/>
+          </a:fontRef>
+        </p:style>
+        <p:txBody>
+          <a:bodyPr rtlCol="0" anchor="ctr" wrap="square" lIns="73152" rIns="73152" tIns="36576" bIns="36576"/>
+          <a:lstStyle/>
+          <a:p>
+            <a:pPr algn="l">
+              <a:spcAft>
+                <a:spcPts val="0"/>
+              </a:spcAft>
+              <a:defRPr sz="1600" b="0">
+                <a:solidFill>
+                  <a:srgbClr val="FFFFFF"/>
+                </a:solidFill>
+                <a:latin typeface="DejaVu Sans Mono"/>
+              </a:defRPr>
+            </a:pPr>
+            <a:r>
+              <a:t>source ~/ros2_curri/agv_ws/install/setup.bash</a:t>
+            </a:r>
+            <a:br/>
+            <a:r>
+              <a:t>ros2 run agv_control safety_controller --ros-args -p stop_distance:=0.5</a:t>
+            </a:r>
+          </a:p>
+        </p:txBody>
+      </p:sp>
+      <p:sp>
+        <p:nvSpPr>
+          <p:cNvPr id="8" name="TextBox 7"/>
           <p:cNvSpPr txBox="1"/>
           <p:nvPr/>
         </p:nvSpPr>
         <p:spPr>
           <a:xfrm>
-            <a:off x="777240" y="6217920"/>
-            <a:ext cx="10607040" cy="182880"/>
+            <a:off x="786384" y="5239512"/>
+            <a:ext cx="1261872" cy="237744"/>
           </a:xfrm>
           <a:prstGeom prst="rect">
             <a:avLst/>
@@ -11046,11 +11637,11 @@
           </a:bodyPr>
           <a:lstStyle/>
           <a:p>
-            <a:pPr algn="ctr">
-              <a:spcAft>
-                <a:spcPts val="0"/>
-              </a:spcAft>
-              <a:defRPr sz="1100" b="1">
+            <a:pPr algn="l">
+              <a:spcAft>
+                <a:spcPts val="0"/>
+              </a:spcAft>
+              <a:defRPr sz="1800" b="1">
                 <a:solidFill>
                   <a:srgbClr val="2A8B5A"/>
                 </a:solidFill>
@@ -11058,7 +11649,46 @@
               </a:defRPr>
             </a:pPr>
             <a:r>
-              <a:t>① 명령/설정  ② 정상 출력 또는 화면  ③ 다음 검증 명령으로 재확인</a:t>
+              <a:t>확인 기준</a:t>
+            </a:r>
+          </a:p>
+        </p:txBody>
+      </p:sp>
+      <p:sp>
+        <p:nvSpPr>
+          <p:cNvPr id="9" name="TextBox 8"/>
+          <p:cNvSpPr txBox="1"/>
+          <p:nvPr/>
+        </p:nvSpPr>
+        <p:spPr>
+          <a:xfrm>
+            <a:off x="786384" y="5532120"/>
+            <a:ext cx="10469880" cy="420624"/>
+          </a:xfrm>
+          <a:prstGeom prst="rect">
+            <a:avLst/>
+          </a:prstGeom>
+          <a:noFill/>
+        </p:spPr>
+        <p:txBody>
+          <a:bodyPr wrap="square" lIns="73152" rIns="73152" tIns="36576" bIns="36576">
+            <a:spAutoFit/>
+          </a:bodyPr>
+          <a:lstStyle/>
+          <a:p>
+            <a:pPr algn="l">
+              <a:spcAft>
+                <a:spcPts val="0"/>
+              </a:spcAft>
+              <a:defRPr sz="1800" b="0">
+                <a:solidFill>
+                  <a:srgbClr val="122C4E"/>
+                </a:solidFill>
+                <a:latin typeface="Noto Sans CJK KR"/>
+              </a:defRPr>
+            </a:pPr>
+            <a:r>
+              <a:t>0.5 m 안 장애물에서 forward cmd_vel이 zero Twist로 바뀌는 조건을 설명한다.</a:t>
             </a:r>
           </a:p>
         </p:txBody>
@@ -11115,7 +11745,7 @@
               </a:defRPr>
             </a:pPr>
             <a:r>
-              <a:t>객관적 검증 명령으로 완료를 확인한다</a:t>
+              <a:t>정상 결과: 실제 환경에서 확인한 출력</a:t>
             </a:r>
           </a:p>
         </p:txBody>
@@ -11154,7 +11784,7 @@
               </a:defRPr>
             </a:pPr>
             <a:r>
-              <a:t>화면만 보지 말고 topic·frame·파일·parameter를 다시 확인합니다.</a:t>
+              <a:t>실제 ROS 2 환경의 파일·패키지·구성 검증 로그</a:t>
             </a:r>
           </a:p>
         </p:txBody>
@@ -11237,210 +11867,40 @@
           </a:p>
         </p:txBody>
       </p:sp>
-      <p:sp>
-        <p:nvSpPr>
-          <p:cNvPr id="6" name="Rectangle 5"/>
-          <p:cNvSpPr/>
-          <p:nvPr/>
-        </p:nvSpPr>
-        <p:spPr>
-          <a:xfrm>
-            <a:off x="566928" y="1188720"/>
-            <a:ext cx="11064240" cy="347472"/>
-          </a:xfrm>
-          <a:prstGeom prst="rect">
-            <a:avLst/>
-          </a:prstGeom>
-          <a:solidFill>
-            <a:srgbClr val="F4F7FB"/>
-          </a:solidFill>
-          <a:ln>
-            <a:solidFill>
-              <a:srgbClr val="F4F7FB"/>
-            </a:solidFill>
-          </a:ln>
-        </p:spPr>
-        <p:style>
-          <a:lnRef idx="1">
-            <a:schemeClr val="accent1"/>
-          </a:lnRef>
-          <a:fillRef idx="3">
-            <a:schemeClr val="accent1"/>
-          </a:fillRef>
-          <a:effectRef idx="2">
-            <a:schemeClr val="accent1"/>
-          </a:effectRef>
-          <a:fontRef idx="minor">
-            <a:schemeClr val="lt1"/>
-          </a:fontRef>
-        </p:style>
-        <p:txBody>
-          <a:bodyPr rtlCol="0" anchor="ctr" wrap="square" lIns="73152" rIns="73152" tIns="36576" bIns="36576"/>
-          <a:lstStyle/>
-          <a:p>
-            <a:pPr algn="l">
-              <a:spcAft>
-                <a:spcPts val="0"/>
-              </a:spcAft>
-              <a:defRPr sz="1300" b="1">
-                <a:solidFill>
-                  <a:srgbClr val="122C4E"/>
-                </a:solidFill>
-                <a:latin typeface="Noto Sans CJK KR"/>
-              </a:defRPr>
-            </a:pPr>
-            <a:r>
-              <a:t>현재 단계 검증    |    현재 폴더 ~/ros2_curri/agv_ws    |    현재 터미널</a:t>
-            </a:r>
-          </a:p>
-        </p:txBody>
-      </p:sp>
-      <p:sp>
-        <p:nvSpPr>
-          <p:cNvPr id="7" name="Rounded Rectangle 6"/>
-          <p:cNvSpPr/>
-          <p:nvPr/>
-        </p:nvSpPr>
-        <p:spPr>
-          <a:xfrm>
-            <a:off x="658368" y="1755648"/>
-            <a:ext cx="10972800" cy="2148840"/>
-          </a:xfrm>
-          <a:prstGeom prst="roundRect">
-            <a:avLst/>
-          </a:prstGeom>
-          <a:solidFill>
-            <a:srgbClr val="1D232D"/>
-          </a:solidFill>
-          <a:ln>
-            <a:solidFill>
-              <a:srgbClr val="1D232D"/>
-            </a:solidFill>
-          </a:ln>
-        </p:spPr>
-        <p:style>
-          <a:lnRef idx="1">
-            <a:schemeClr val="accent1"/>
-          </a:lnRef>
-          <a:fillRef idx="3">
-            <a:schemeClr val="accent1"/>
-          </a:fillRef>
-          <a:effectRef idx="2">
-            <a:schemeClr val="accent1"/>
-          </a:effectRef>
-          <a:fontRef idx="minor">
-            <a:schemeClr val="lt1"/>
-          </a:fontRef>
-        </p:style>
-        <p:txBody>
-          <a:bodyPr rtlCol="0" anchor="ctr" wrap="square" lIns="73152" rIns="73152" tIns="36576" bIns="36576"/>
-          <a:lstStyle/>
-          <a:p>
-            <a:pPr algn="l">
-              <a:spcAft>
-                <a:spcPts val="0"/>
-              </a:spcAft>
-              <a:defRPr sz="1600" b="0">
-                <a:solidFill>
-                  <a:srgbClr val="FFFFFF"/>
-                </a:solidFill>
-                <a:latin typeface="DejaVu Sans Mono"/>
-              </a:defRPr>
-            </a:pPr>
-            <a:r>
-              <a:t>ros2 topic info /cmd_vel_raw</a:t>
-            </a:r>
-            <a:br/>
-            <a:r>
-              <a:t>ros2 topic info /cmd_vel</a:t>
-            </a:r>
-            <a:br/>
-            <a:r>
-              <a:t>ros2 param get /safety_controller stop_distance</a:t>
-            </a:r>
-          </a:p>
-        </p:txBody>
-      </p:sp>
-      <p:sp>
-        <p:nvSpPr>
-          <p:cNvPr id="8" name="Rounded Rectangle 7"/>
-          <p:cNvSpPr/>
-          <p:nvPr/>
-        </p:nvSpPr>
-        <p:spPr>
-          <a:xfrm>
-            <a:off x="658368" y="4206240"/>
-            <a:ext cx="10972800" cy="1554480"/>
-          </a:xfrm>
-          <a:prstGeom prst="roundRect">
-            <a:avLst/>
-          </a:prstGeom>
-          <a:solidFill>
-            <a:srgbClr val="F4F7FB"/>
-          </a:solidFill>
-          <a:ln>
-            <a:solidFill>
-              <a:srgbClr val="D1DFD5"/>
-            </a:solidFill>
-          </a:ln>
-        </p:spPr>
-        <p:style>
-          <a:lnRef idx="1">
-            <a:schemeClr val="accent1"/>
-          </a:lnRef>
-          <a:fillRef idx="3">
-            <a:schemeClr val="accent1"/>
-          </a:fillRef>
-          <a:effectRef idx="2">
-            <a:schemeClr val="accent1"/>
-          </a:effectRef>
-          <a:fontRef idx="minor">
-            <a:schemeClr val="lt1"/>
-          </a:fontRef>
-        </p:style>
-        <p:txBody>
-          <a:bodyPr rtlCol="0" anchor="ctr" wrap="square" lIns="73152" rIns="73152" tIns="36576" bIns="36576"/>
-          <a:lstStyle/>
-          <a:p>
-            <a:pPr algn="l">
-              <a:spcAft>
-                <a:spcPts val="0"/>
-              </a:spcAft>
-              <a:defRPr sz="1800" b="1">
-                <a:solidFill>
-                  <a:srgbClr val="2A8B5A"/>
-                </a:solidFill>
-                <a:latin typeface="Noto Sans CJK KR"/>
-              </a:defRPr>
-            </a:pPr>
-            <a:r>
-              <a:t>완료 체크</a:t>
-            </a:r>
-            <a:br/>
-            <a:r>
-              <a:t>□ 명령이 오류 없이 실행된다.</a:t>
-            </a:r>
-            <a:br/>
-            <a:r>
-              <a:t>□ 기대한 파일·topic·frame·parameter 이름이 보인다.</a:t>
-            </a:r>
-            <a:br/>
-            <a:r>
-              <a:t>□ 값의 단위와 방향을 한 문장으로 설명할 수 있다.</a:t>
-            </a:r>
-          </a:p>
-        </p:txBody>
-      </p:sp>
-      <p:sp>
-        <p:nvSpPr>
-          <p:cNvPr id="9" name="TextBox 8"/>
+      <p:pic>
+        <p:nvPicPr>
+          <p:cNvPr id="6" name="Picture 5" descr="validation_terminal.png"/>
+          <p:cNvPicPr>
+            <a:picLocks noChangeAspect="1"/>
+          </p:cNvPicPr>
+          <p:nvPr/>
+        </p:nvPicPr>
+        <p:blipFill>
+          <a:blip r:embed="rId2"/>
+          <a:stretch>
+            <a:fillRect/>
+          </a:stretch>
+        </p:blipFill>
+        <p:spPr>
+          <a:xfrm>
+            <a:off x="790956" y="1562649"/>
+            <a:ext cx="10607040" cy="4381924"/>
+          </a:xfrm>
+          <a:prstGeom prst="rect">
+            <a:avLst/>
+          </a:prstGeom>
+        </p:spPr>
+      </p:pic>
+      <p:sp>
+        <p:nvSpPr>
+          <p:cNvPr id="7" name="TextBox 6"/>
           <p:cNvSpPr txBox="1"/>
           <p:nvPr/>
         </p:nvSpPr>
         <p:spPr>
           <a:xfrm>
-            <a:off x="731520" y="5989320"/>
-            <a:ext cx="10789920" cy="237744"/>
+            <a:off x="777240" y="6144768"/>
+            <a:ext cx="10607040" cy="310896"/>
           </a:xfrm>
           <a:prstGeom prst="rect">
             <a:avLst/>
@@ -11453,19 +11913,19 @@
           </a:bodyPr>
           <a:lstStyle/>
           <a:p>
-            <a:pPr algn="l">
-              <a:spcAft>
-                <a:spcPts val="0"/>
-              </a:spcAft>
-              <a:defRPr sz="1500" b="1">
-                <a:solidFill>
-                  <a:srgbClr val="122C4E"/>
-                </a:solidFill>
-                <a:latin typeface="Noto Sans CJK KR"/>
-              </a:defRPr>
-            </a:pPr>
-            <a:r>
-              <a:t>완료 조건: 0.5 m 안 장애물에서 forward cmd_vel이 zero Twist로 바뀌는 조건을 설명한다.</a:t>
+            <a:pPr algn="ctr">
+              <a:spcAft>
+                <a:spcPts val="0"/>
+              </a:spcAft>
+              <a:defRPr sz="1100" b="1">
+                <a:solidFill>
+                  <a:srgbClr val="2A8B5A"/>
+                </a:solidFill>
+                <a:latin typeface="Noto Sans CJK KR"/>
+              </a:defRPr>
+            </a:pPr>
+            <a:r>
+              <a:t>화면에서 확인: ① 명령/설정  ② 정상 출력 또는 화면  ③ 다음 검증 명령으로 재확인</a:t>
             </a:r>
           </a:p>
         </p:txBody>
@@ -11522,7 +11982,7 @@
               </a:defRPr>
             </a:pPr>
             <a:r>
-              <a:t>막히면: 증상 → 우선 확인 → 재검증</a:t>
+              <a:t>정상 결과: 실제 환경에서 확인한 출력</a:t>
             </a:r>
           </a:p>
         </p:txBody>
@@ -11561,7 +12021,7 @@
               </a:defRPr>
             </a:pPr>
             <a:r>
-              <a:t>오류 메시지를 숨기지 않고 같은 순서로 점검합니다.</a:t>
+              <a:t>실제 RViz2: safety sector Marker와 Path를 추가해 확인하는 통합 display</a:t>
             </a:r>
           </a:p>
         </p:txBody>
@@ -11644,119 +12104,40 @@
           </a:p>
         </p:txBody>
       </p:sp>
-      <p:sp>
-        <p:nvSpPr>
-          <p:cNvPr id="6" name="Rectangle 5"/>
-          <p:cNvSpPr/>
-          <p:nvPr/>
-        </p:nvSpPr>
-        <p:spPr>
-          <a:xfrm>
-            <a:off x="566928" y="1188720"/>
-            <a:ext cx="11064240" cy="347472"/>
-          </a:xfrm>
-          <a:prstGeom prst="rect">
-            <a:avLst/>
-          </a:prstGeom>
-          <a:solidFill>
-            <a:srgbClr val="F4F7FB"/>
-          </a:solidFill>
-          <a:ln>
-            <a:solidFill>
-              <a:srgbClr val="F4F7FB"/>
-            </a:solidFill>
-          </a:ln>
-        </p:spPr>
-        <p:style>
-          <a:lnRef idx="1">
-            <a:schemeClr val="accent1"/>
-          </a:lnRef>
-          <a:fillRef idx="3">
-            <a:schemeClr val="accent1"/>
-          </a:fillRef>
-          <a:effectRef idx="2">
-            <a:schemeClr val="accent1"/>
-          </a:effectRef>
-          <a:fontRef idx="minor">
-            <a:schemeClr val="lt1"/>
-          </a:fontRef>
-        </p:style>
-        <p:txBody>
-          <a:bodyPr rtlCol="0" anchor="ctr" wrap="square" lIns="73152" rIns="73152" tIns="36576" bIns="36576"/>
-          <a:lstStyle/>
-          <a:p>
-            <a:pPr algn="l">
-              <a:spcAft>
-                <a:spcPts val="0"/>
-              </a:spcAft>
-              <a:defRPr sz="1300" b="1">
-                <a:solidFill>
-                  <a:srgbClr val="122C4E"/>
-                </a:solidFill>
-                <a:latin typeface="Noto Sans CJK KR"/>
-              </a:defRPr>
-            </a:pPr>
-            <a:r>
-              <a:t>현재 단계 오류 대응    |    현재 폴더 ~/ros2_curri/agv_ws    |    현재 터미널</a:t>
-            </a:r>
-          </a:p>
-        </p:txBody>
-      </p:sp>
-      <p:sp>
-        <p:nvSpPr>
-          <p:cNvPr id="7" name="Rounded Rectangle 6"/>
-          <p:cNvSpPr/>
-          <p:nvPr/>
-        </p:nvSpPr>
-        <p:spPr>
-          <a:xfrm>
-            <a:off x="694944" y="1755648"/>
-            <a:ext cx="10972800" cy="1115568"/>
-          </a:xfrm>
-          <a:prstGeom prst="roundRect">
-            <a:avLst/>
-          </a:prstGeom>
-          <a:solidFill>
-            <a:srgbClr val="FFF7F4"/>
-          </a:solidFill>
-          <a:ln>
-            <a:solidFill>
-              <a:srgbClr val="EDBEB4"/>
-            </a:solidFill>
-          </a:ln>
-        </p:spPr>
-        <p:style>
-          <a:lnRef idx="1">
-            <a:schemeClr val="accent1"/>
-          </a:lnRef>
-          <a:fillRef idx="3">
-            <a:schemeClr val="accent1"/>
-          </a:fillRef>
-          <a:effectRef idx="2">
-            <a:schemeClr val="accent1"/>
-          </a:effectRef>
-          <a:fontRef idx="minor">
-            <a:schemeClr val="lt1"/>
-          </a:fontRef>
-        </p:style>
-        <p:txBody>
-          <a:bodyPr rtlCol="0" anchor="ctr"/>
-          <a:lstStyle/>
-          <a:p>
-            <a:pPr algn="ctr"/>
-          </a:p>
-        </p:txBody>
-      </p:sp>
-      <p:sp>
-        <p:nvSpPr>
-          <p:cNvPr id="8" name="TextBox 7"/>
+      <p:pic>
+        <p:nvPicPr>
+          <p:cNvPr id="6" name="Picture 5" descr="02_rviz_marker_path_actual.png"/>
+          <p:cNvPicPr>
+            <a:picLocks noChangeAspect="1"/>
+          </p:cNvPicPr>
+          <p:nvPr/>
+        </p:nvPicPr>
+        <p:blipFill>
+          <a:blip r:embed="rId2"/>
+          <a:stretch>
+            <a:fillRect/>
+          </a:stretch>
+        </p:blipFill>
+        <p:spPr>
+          <a:xfrm>
+            <a:off x="2971409" y="1353312"/>
+            <a:ext cx="6246133" cy="4800600"/>
+          </a:xfrm>
+          <a:prstGeom prst="rect">
+            <a:avLst/>
+          </a:prstGeom>
+        </p:spPr>
+      </p:pic>
+      <p:sp>
+        <p:nvSpPr>
+          <p:cNvPr id="7" name="TextBox 6"/>
           <p:cNvSpPr txBox="1"/>
           <p:nvPr/>
         </p:nvSpPr>
         <p:spPr>
           <a:xfrm>
-            <a:off x="896112" y="1901952"/>
-            <a:ext cx="2926080" cy="274320"/>
+            <a:off x="777240" y="6144768"/>
+            <a:ext cx="10607040" cy="310896"/>
           </a:xfrm>
           <a:prstGeom prst="rect">
             <a:avLst/>
@@ -11769,228 +12150,19 @@
           </a:bodyPr>
           <a:lstStyle/>
           <a:p>
-            <a:pPr algn="l">
-              <a:spcAft>
-                <a:spcPts val="0"/>
-              </a:spcAft>
-              <a:defRPr sz="1800" b="1">
-                <a:solidFill>
-                  <a:srgbClr val="BE3B3B"/>
-                </a:solidFill>
-                <a:latin typeface="Noto Sans CJK KR"/>
-              </a:defRPr>
-            </a:pPr>
-            <a:r>
-              <a:t>증상 1: 장애물이 있는데 멈추지 않음</a:t>
-            </a:r>
-          </a:p>
-        </p:txBody>
-      </p:sp>
-      <p:sp>
-        <p:nvSpPr>
-          <p:cNvPr id="9" name="TextBox 8"/>
-          <p:cNvSpPr txBox="1"/>
-          <p:nvPr/>
-        </p:nvSpPr>
-        <p:spPr>
-          <a:xfrm>
-            <a:off x="3794760" y="1883664"/>
-            <a:ext cx="7543800" cy="621792"/>
-          </a:xfrm>
-          <a:prstGeom prst="rect">
-            <a:avLst/>
-          </a:prstGeom>
-          <a:noFill/>
-        </p:spPr>
-        <p:txBody>
-          <a:bodyPr wrap="square" lIns="73152" rIns="73152" tIns="36576" bIns="36576">
-            <a:spAutoFit/>
-          </a:bodyPr>
-          <a:lstStyle/>
-          <a:p>
-            <a:pPr algn="l">
-              <a:spcAft>
-                <a:spcPts val="0"/>
-              </a:spcAft>
-              <a:defRPr sz="1600" b="0">
-                <a:solidFill>
-                  <a:srgbClr val="122C4E"/>
-                </a:solidFill>
-                <a:latin typeface="Noto Sans CJK KR"/>
-              </a:defRPr>
-            </a:pPr>
-            <a:r>
-              <a:t>우선 확인: sector 각도·finite range·threshold m 단위를 확인한다.</a:t>
-            </a:r>
-            <a:br/>
-            <a:r>
-              <a:t>수정 후: ros2 topic info /cmd_vel_raw</a:t>
-            </a:r>
-          </a:p>
-        </p:txBody>
-      </p:sp>
-      <p:sp>
-        <p:nvSpPr>
-          <p:cNvPr id="10" name="Rounded Rectangle 9"/>
-          <p:cNvSpPr/>
-          <p:nvPr/>
-        </p:nvSpPr>
-        <p:spPr>
-          <a:xfrm>
-            <a:off x="694944" y="3172968"/>
-            <a:ext cx="10972800" cy="1115568"/>
-          </a:xfrm>
-          <a:prstGeom prst="roundRect">
-            <a:avLst/>
-          </a:prstGeom>
-          <a:solidFill>
-            <a:srgbClr val="FFF7F4"/>
-          </a:solidFill>
-          <a:ln>
-            <a:solidFill>
-              <a:srgbClr val="EDBEB4"/>
-            </a:solidFill>
-          </a:ln>
-        </p:spPr>
-        <p:style>
-          <a:lnRef idx="1">
-            <a:schemeClr val="accent1"/>
-          </a:lnRef>
-          <a:fillRef idx="3">
-            <a:schemeClr val="accent1"/>
-          </a:fillRef>
-          <a:effectRef idx="2">
-            <a:schemeClr val="accent1"/>
-          </a:effectRef>
-          <a:fontRef idx="minor">
-            <a:schemeClr val="lt1"/>
-          </a:fontRef>
-        </p:style>
-        <p:txBody>
-          <a:bodyPr rtlCol="0" anchor="ctr"/>
-          <a:lstStyle/>
-          <a:p>
-            <a:pPr algn="ctr"/>
-          </a:p>
-        </p:txBody>
-      </p:sp>
-      <p:sp>
-        <p:nvSpPr>
-          <p:cNvPr id="11" name="TextBox 10"/>
-          <p:cNvSpPr txBox="1"/>
-          <p:nvPr/>
-        </p:nvSpPr>
-        <p:spPr>
-          <a:xfrm>
-            <a:off x="896112" y="3319272"/>
-            <a:ext cx="2926080" cy="274320"/>
-          </a:xfrm>
-          <a:prstGeom prst="rect">
-            <a:avLst/>
-          </a:prstGeom>
-          <a:noFill/>
-        </p:spPr>
-        <p:txBody>
-          <a:bodyPr wrap="square" lIns="73152" rIns="73152" tIns="36576" bIns="36576">
-            <a:spAutoFit/>
-          </a:bodyPr>
-          <a:lstStyle/>
-          <a:p>
-            <a:pPr algn="l">
-              <a:spcAft>
-                <a:spcPts val="0"/>
-              </a:spcAft>
-              <a:defRPr sz="1800" b="1">
-                <a:solidFill>
-                  <a:srgbClr val="BE3B3B"/>
-                </a:solidFill>
-                <a:latin typeface="Noto Sans CJK KR"/>
-              </a:defRPr>
-            </a:pPr>
-            <a:r>
-              <a:t>증상 2: 항상 STOP</a:t>
-            </a:r>
-          </a:p>
-        </p:txBody>
-      </p:sp>
-      <p:sp>
-        <p:nvSpPr>
-          <p:cNvPr id="12" name="TextBox 11"/>
-          <p:cNvSpPr txBox="1"/>
-          <p:nvPr/>
-        </p:nvSpPr>
-        <p:spPr>
-          <a:xfrm>
-            <a:off x="3794760" y="3300984"/>
-            <a:ext cx="7543800" cy="621792"/>
-          </a:xfrm>
-          <a:prstGeom prst="rect">
-            <a:avLst/>
-          </a:prstGeom>
-          <a:noFill/>
-        </p:spPr>
-        <p:txBody>
-          <a:bodyPr wrap="square" lIns="73152" rIns="73152" tIns="36576" bIns="36576">
-            <a:spAutoFit/>
-          </a:bodyPr>
-          <a:lstStyle/>
-          <a:p>
-            <a:pPr algn="l">
-              <a:spcAft>
-                <a:spcPts val="0"/>
-              </a:spcAft>
-              <a:defRPr sz="1600" b="0">
-                <a:solidFill>
-                  <a:srgbClr val="122C4E"/>
-                </a:solidFill>
-                <a:latin typeface="Noto Sans CJK KR"/>
-              </a:defRPr>
-            </a:pPr>
-            <a:r>
-              <a:t>우선 확인: inf/NaN 처리와 lidar frame 전방 방향을 확인한다.</a:t>
-            </a:r>
-            <a:br/>
-            <a:r>
-              <a:t>수정 후: ros2 topic info /cmd_vel_raw</a:t>
-            </a:r>
-          </a:p>
-        </p:txBody>
-      </p:sp>
-      <p:sp>
-        <p:nvSpPr>
-          <p:cNvPr id="13" name="TextBox 12"/>
-          <p:cNvSpPr txBox="1"/>
-          <p:nvPr/>
-        </p:nvSpPr>
-        <p:spPr>
-          <a:xfrm>
-            <a:off x="822960" y="5102352"/>
-            <a:ext cx="10607040" cy="402336"/>
-          </a:xfrm>
-          <a:prstGeom prst="rect">
-            <a:avLst/>
-          </a:prstGeom>
-          <a:noFill/>
-        </p:spPr>
-        <p:txBody>
-          <a:bodyPr wrap="square" lIns="73152" rIns="73152" tIns="36576" bIns="36576">
-            <a:spAutoFit/>
-          </a:bodyPr>
-          <a:lstStyle/>
-          <a:p>
             <a:pPr algn="ctr">
               <a:spcAft>
                 <a:spcPts val="0"/>
               </a:spcAft>
-              <a:defRPr sz="1800" b="1">
-                <a:solidFill>
-                  <a:srgbClr val="DB7E22"/>
-                </a:solidFill>
-                <a:latin typeface="Noto Sans CJK KR"/>
-              </a:defRPr>
-            </a:pPr>
-            <a:r>
-              <a:t>공통 순서: ① 현재 폴더 ② source ③ 파일 경로 ④ 이름/타입/단위 ⑤ build·source 후 재실행</a:t>
+              <a:defRPr sz="1100" b="1">
+                <a:solidFill>
+                  <a:srgbClr val="2A8B5A"/>
+                </a:solidFill>
+                <a:latin typeface="Noto Sans CJK KR"/>
+              </a:defRPr>
+            </a:pPr>
+            <a:r>
+              <a:t>화면에서 확인: 명령·설정과 화면의 topic·frame·결과 이름을 대조합니다.</a:t>
             </a:r>
           </a:p>
         </p:txBody>
@@ -12047,7 +12219,7 @@
               </a:defRPr>
             </a:pPr>
             <a:r>
-              <a:t>미니 실습: 값 하나를 바꾸고 결과를 비교한다</a:t>
+              <a:t>객관적 검증 명령으로 완료를 확인한다</a:t>
             </a:r>
           </a:p>
         </p:txBody>
@@ -12086,7 +12258,7 @@
               </a:defRPr>
             </a:pPr>
             <a:r>
-              <a:t>정상 결과를 만든 뒤에는 한 번에 하나의 값만 바꿉니다.</a:t>
+              <a:t>화면만 보지 말고 topic·frame·파일·parameter를 다시 확인합니다.</a:t>
             </a:r>
           </a:p>
         </p:txBody>
@@ -12222,7 +12394,7 @@
               </a:defRPr>
             </a:pPr>
             <a:r>
-              <a:t>현재 단계 미니 실습    |    현재 폴더 ~/ros2_curri/agv_ws    |    현재 터미널</a:t>
+              <a:t>현재 단계 검증    |    현재 폴더 ~/ros2_curri/agv_ws    |    현재 터미널</a:t>
             </a:r>
           </a:p>
         </p:txBody>
@@ -12235,18 +12407,18 @@
         </p:nvSpPr>
         <p:spPr>
           <a:xfrm>
-            <a:off x="749808" y="1874519"/>
-            <a:ext cx="10652760" cy="1993392"/>
+            <a:off x="658368" y="1755648"/>
+            <a:ext cx="10972800" cy="2148840"/>
           </a:xfrm>
           <a:prstGeom prst="roundRect">
             <a:avLst/>
           </a:prstGeom>
           <a:solidFill>
-            <a:srgbClr val="FFF8EB"/>
+            <a:srgbClr val="1D232D"/>
           </a:solidFill>
           <a:ln>
             <a:solidFill>
-              <a:srgbClr val="ECC680"/>
+              <a:srgbClr val="1D232D"/>
             </a:solidFill>
           </a:ln>
         </p:spPr>
@@ -12268,33 +12440,111 @@
           <a:bodyPr rtlCol="0" anchor="ctr" wrap="square" lIns="73152" rIns="73152" tIns="36576" bIns="36576"/>
           <a:lstStyle/>
           <a:p>
-            <a:pPr algn="ctr">
-              <a:spcAft>
-                <a:spcPts val="0"/>
-              </a:spcAft>
-              <a:defRPr sz="2300" b="1">
-                <a:solidFill>
-                  <a:srgbClr val="122C4E"/>
-                </a:solidFill>
-                <a:latin typeface="Noto Sans CJK KR"/>
-              </a:defRPr>
-            </a:pPr>
-            <a:r>
-              <a:t>stop_distance 0.50→0.80 m로 바꾸면 어떤 상황에서 더 일찍 멈추는지 /cmd_vel 로그 기준으로 작성한다.</a:t>
-            </a:r>
-          </a:p>
-        </p:txBody>
-      </p:sp>
-      <p:sp>
-        <p:nvSpPr>
-          <p:cNvPr id="8" name="TextBox 7"/>
+            <a:pPr algn="l">
+              <a:spcAft>
+                <a:spcPts val="0"/>
+              </a:spcAft>
+              <a:defRPr sz="1600" b="0">
+                <a:solidFill>
+                  <a:srgbClr val="FFFFFF"/>
+                </a:solidFill>
+                <a:latin typeface="DejaVu Sans Mono"/>
+              </a:defRPr>
+            </a:pPr>
+            <a:r>
+              <a:t>ros2 topic info /cmd_vel_raw</a:t>
+            </a:r>
+            <a:br/>
+            <a:r>
+              <a:t>ros2 topic info /cmd_vel</a:t>
+            </a:r>
+            <a:br/>
+            <a:r>
+              <a:t>ros2 param get /safety_controller stop_distance</a:t>
+            </a:r>
+          </a:p>
+        </p:txBody>
+      </p:sp>
+      <p:sp>
+        <p:nvSpPr>
+          <p:cNvPr id="8" name="Rounded Rectangle 7"/>
+          <p:cNvSpPr/>
+          <p:nvPr/>
+        </p:nvSpPr>
+        <p:spPr>
+          <a:xfrm>
+            <a:off x="658368" y="4206240"/>
+            <a:ext cx="10972800" cy="1554480"/>
+          </a:xfrm>
+          <a:prstGeom prst="roundRect">
+            <a:avLst/>
+          </a:prstGeom>
+          <a:solidFill>
+            <a:srgbClr val="F4F7FB"/>
+          </a:solidFill>
+          <a:ln>
+            <a:solidFill>
+              <a:srgbClr val="D1DFD5"/>
+            </a:solidFill>
+          </a:ln>
+        </p:spPr>
+        <p:style>
+          <a:lnRef idx="1">
+            <a:schemeClr val="accent1"/>
+          </a:lnRef>
+          <a:fillRef idx="3">
+            <a:schemeClr val="accent1"/>
+          </a:fillRef>
+          <a:effectRef idx="2">
+            <a:schemeClr val="accent1"/>
+          </a:effectRef>
+          <a:fontRef idx="minor">
+            <a:schemeClr val="lt1"/>
+          </a:fontRef>
+        </p:style>
+        <p:txBody>
+          <a:bodyPr rtlCol="0" anchor="ctr" wrap="square" lIns="73152" rIns="73152" tIns="36576" bIns="36576"/>
+          <a:lstStyle/>
+          <a:p>
+            <a:pPr algn="l">
+              <a:spcAft>
+                <a:spcPts val="0"/>
+              </a:spcAft>
+              <a:defRPr sz="1800" b="1">
+                <a:solidFill>
+                  <a:srgbClr val="2A8B5A"/>
+                </a:solidFill>
+                <a:latin typeface="Noto Sans CJK KR"/>
+              </a:defRPr>
+            </a:pPr>
+            <a:r>
+              <a:t>완료 체크</a:t>
+            </a:r>
+            <a:br/>
+            <a:r>
+              <a:t>□ 명령이 오류 없이 실행된다.</a:t>
+            </a:r>
+            <a:br/>
+            <a:r>
+              <a:t>□ 기대한 파일·topic·frame·parameter 이름이 보인다.</a:t>
+            </a:r>
+            <a:br/>
+            <a:r>
+              <a:t>□ 값의 단위와 방향을 한 문장으로 설명할 수 있다.</a:t>
+            </a:r>
+          </a:p>
+        </p:txBody>
+      </p:sp>
+      <p:sp>
+        <p:nvSpPr>
+          <p:cNvPr id="9" name="TextBox 8"/>
           <p:cNvSpPr txBox="1"/>
           <p:nvPr/>
         </p:nvSpPr>
         <p:spPr>
           <a:xfrm>
-            <a:off x="877824" y="4590288"/>
-            <a:ext cx="10241280" cy="594360"/>
+            <a:off x="731520" y="5989320"/>
+            <a:ext cx="10789920" cy="237744"/>
           </a:xfrm>
           <a:prstGeom prst="rect">
             <a:avLst/>
@@ -12307,19 +12557,19 @@
           </a:bodyPr>
           <a:lstStyle/>
           <a:p>
-            <a:pPr algn="ctr">
-              <a:spcAft>
-                <a:spcPts val="0"/>
-              </a:spcAft>
-              <a:defRPr sz="1900" b="1">
-                <a:solidFill>
-                  <a:srgbClr val="DB7E22"/>
-                </a:solidFill>
-                <a:latin typeface="Noto Sans CJK KR"/>
-              </a:defRPr>
-            </a:pPr>
-            <a:r>
-              <a:t>기록할 것: 바꾼 값(단위) · 기대한 변화 · 실제 출력/화면 · 원래 값으로 되돌린 결과</a:t>
+            <a:pPr algn="l">
+              <a:spcAft>
+                <a:spcPts val="0"/>
+              </a:spcAft>
+              <a:defRPr sz="1500" b="1">
+                <a:solidFill>
+                  <a:srgbClr val="122C4E"/>
+                </a:solidFill>
+                <a:latin typeface="Noto Sans CJK KR"/>
+              </a:defRPr>
+            </a:pPr>
+            <a:r>
+              <a:t>완료 조건: 0.5 m 안 장애물에서 forward cmd_vel이 zero Twist로 바뀌는 조건을 설명한다.</a:t>
             </a:r>
           </a:p>
         </p:txBody>
@@ -12376,7 +12626,7 @@
               </a:defRPr>
             </a:pPr>
             <a:r>
-              <a:t>체크포인트를 저장하고 다음 모듈로 넘긴다</a:t>
+              <a:t>막히면: 증상 → 우선 확인 → 재검증</a:t>
             </a:r>
           </a:p>
         </p:txBody>
@@ -12415,7 +12665,7 @@
               </a:defRPr>
             </a:pPr>
             <a:r>
-              <a:t>현재 Complete는 다음 Starter의 기준선입니다.</a:t>
+              <a:t>오류 메시지를 숨기지 않고 같은 순서로 점검합니다.</a:t>
             </a:r>
           </a:p>
         </p:txBody>
@@ -12551,7 +12801,7 @@
               </a:defRPr>
             </a:pPr>
             <a:r>
-              <a:t>현재 단계 체크포인트    |    현재 폴더 ~/ros2_curri/agv_ws    |    현재 터미널</a:t>
+              <a:t>현재 단계 오류 대응    |    현재 폴더 ~/ros2_curri/agv_ws    |    현재 터미널</a:t>
             </a:r>
           </a:p>
         </p:txBody>
@@ -12564,18 +12814,18 @@
         </p:nvSpPr>
         <p:spPr>
           <a:xfrm>
-            <a:off x="685800" y="1737360"/>
-            <a:ext cx="10972800" cy="3611880"/>
+            <a:off x="694944" y="1755648"/>
+            <a:ext cx="10972800" cy="1115568"/>
           </a:xfrm>
           <a:prstGeom prst="roundRect">
             <a:avLst/>
           </a:prstGeom>
           <a:solidFill>
-            <a:srgbClr val="F4F7FB"/>
+            <a:srgbClr val="FFF7F4"/>
           </a:solidFill>
           <a:ln>
             <a:solidFill>
-              <a:srgbClr val="D2DCE8"/>
+              <a:srgbClr val="EDBEB4"/>
             </a:solidFill>
           </a:ln>
         </p:spPr>
@@ -12609,111 +12859,8 @@
         </p:nvSpPr>
         <p:spPr>
           <a:xfrm>
-            <a:off x="896112" y="1993392"/>
-            <a:ext cx="10332720" cy="2971800"/>
-          </a:xfrm>
-          <a:prstGeom prst="rect">
-            <a:avLst/>
-          </a:prstGeom>
-          <a:noFill/>
-        </p:spPr>
-        <p:txBody>
-          <a:bodyPr wrap="square" lIns="109728" rIns="109728">
-            <a:spAutoFit/>
-          </a:bodyPr>
-          <a:lstStyle/>
-          <a:p>
-            <a:pPr>
-              <a:spcAft>
-                <a:spcPts val="800"/>
-              </a:spcAft>
-              <a:defRPr sz="1800">
-                <a:solidFill>
-                  <a:srgbClr val="122C4E"/>
-                </a:solidFill>
-                <a:latin typeface="Noto Sans CJK KR"/>
-              </a:defRPr>
-            </a:pPr>
-            <a:r>
-              <a:t>• □ 완료 화면: 0.5 m 안 장애물에서 forward cmd_vel이 zero Twist로 바뀌는 조건을 설명한다.</a:t>
-            </a:r>
-          </a:p>
-          <a:p>
-            <a:pPr>
-              <a:spcAft>
-                <a:spcPts val="800"/>
-              </a:spcAft>
-              <a:defRPr sz="1800">
-                <a:solidFill>
-                  <a:srgbClr val="122C4E"/>
-                </a:solidFill>
-                <a:latin typeface="Noto Sans CJK KR"/>
-              </a:defRPr>
-            </a:pPr>
-            <a:r>
-              <a:t>• □ Complete 파일: blocks/E_autonomy_logic/M18_obstacle_perception/complete/</a:t>
-            </a:r>
-          </a:p>
-          <a:p>
-            <a:pPr>
-              <a:spcAft>
-                <a:spcPts val="800"/>
-              </a:spcAft>
-              <a:defRPr sz="1800">
-                <a:solidFill>
-                  <a:srgbClr val="122C4E"/>
-                </a:solidFill>
-                <a:latin typeface="Noto Sans CJK KR"/>
-              </a:defRPr>
-            </a:pPr>
-            <a:r>
-              <a:t>• □ 정상 로그·캡처: logs/validation.log, screenshots/validation_terminal.png</a:t>
-            </a:r>
-          </a:p>
-          <a:p>
-            <a:pPr>
-              <a:spcAft>
-                <a:spcPts val="800"/>
-              </a:spcAft>
-              <a:defRPr sz="1800">
-                <a:solidFill>
-                  <a:srgbClr val="122C4E"/>
-                </a:solidFill>
-                <a:latin typeface="Noto Sans CJK KR"/>
-              </a:defRPr>
-            </a:pPr>
-            <a:r>
-              <a:t>• □ 버전 식별: CHECKSUM_or_TAG.txt의 SHA-256 manifest</a:t>
-            </a:r>
-          </a:p>
-          <a:p>
-            <a:pPr>
-              <a:spcAft>
-                <a:spcPts val="800"/>
-              </a:spcAft>
-              <a:defRPr sz="1800">
-                <a:solidFill>
-                  <a:srgbClr val="122C4E"/>
-                </a:solidFill>
-                <a:latin typeface="Noto Sans CJK KR"/>
-              </a:defRPr>
-            </a:pPr>
-            <a:r>
-              <a:t>• □ 다음 시작 조건: M19 FSM</a:t>
-            </a:r>
-          </a:p>
-        </p:txBody>
-      </p:sp>
-      <p:sp>
-        <p:nvSpPr>
-          <p:cNvPr id="9" name="TextBox 8"/>
-          <p:cNvSpPr txBox="1"/>
-          <p:nvPr/>
-        </p:nvSpPr>
-        <p:spPr>
-          <a:xfrm>
-            <a:off x="868680" y="5596128"/>
-            <a:ext cx="10515600" cy="338328"/>
+            <a:off x="896112" y="1901952"/>
+            <a:ext cx="2926080" cy="274320"/>
           </a:xfrm>
           <a:prstGeom prst="rect">
             <a:avLst/>
@@ -12726,19 +12873,228 @@
           </a:bodyPr>
           <a:lstStyle/>
           <a:p>
+            <a:pPr algn="l">
+              <a:spcAft>
+                <a:spcPts val="0"/>
+              </a:spcAft>
+              <a:defRPr sz="1800" b="1">
+                <a:solidFill>
+                  <a:srgbClr val="BE3B3B"/>
+                </a:solidFill>
+                <a:latin typeface="Noto Sans CJK KR"/>
+              </a:defRPr>
+            </a:pPr>
+            <a:r>
+              <a:t>증상 1: 장애물이 있는데 멈추지 않음</a:t>
+            </a:r>
+          </a:p>
+        </p:txBody>
+      </p:sp>
+      <p:sp>
+        <p:nvSpPr>
+          <p:cNvPr id="9" name="TextBox 8"/>
+          <p:cNvSpPr txBox="1"/>
+          <p:nvPr/>
+        </p:nvSpPr>
+        <p:spPr>
+          <a:xfrm>
+            <a:off x="3794760" y="1883664"/>
+            <a:ext cx="7543800" cy="621792"/>
+          </a:xfrm>
+          <a:prstGeom prst="rect">
+            <a:avLst/>
+          </a:prstGeom>
+          <a:noFill/>
+        </p:spPr>
+        <p:txBody>
+          <a:bodyPr wrap="square" lIns="73152" rIns="73152" tIns="36576" bIns="36576">
+            <a:spAutoFit/>
+          </a:bodyPr>
+          <a:lstStyle/>
+          <a:p>
+            <a:pPr algn="l">
+              <a:spcAft>
+                <a:spcPts val="0"/>
+              </a:spcAft>
+              <a:defRPr sz="1600" b="0">
+                <a:solidFill>
+                  <a:srgbClr val="122C4E"/>
+                </a:solidFill>
+                <a:latin typeface="Noto Sans CJK KR"/>
+              </a:defRPr>
+            </a:pPr>
+            <a:r>
+              <a:t>우선 확인: sector 각도·finite range·threshold m 단위를 확인한다.</a:t>
+            </a:r>
+            <a:br/>
+            <a:r>
+              <a:t>수정 후: ros2 topic info /cmd_vel_raw</a:t>
+            </a:r>
+          </a:p>
+        </p:txBody>
+      </p:sp>
+      <p:sp>
+        <p:nvSpPr>
+          <p:cNvPr id="10" name="Rounded Rectangle 9"/>
+          <p:cNvSpPr/>
+          <p:nvPr/>
+        </p:nvSpPr>
+        <p:spPr>
+          <a:xfrm>
+            <a:off x="694944" y="3172968"/>
+            <a:ext cx="10972800" cy="1115568"/>
+          </a:xfrm>
+          <a:prstGeom prst="roundRect">
+            <a:avLst/>
+          </a:prstGeom>
+          <a:solidFill>
+            <a:srgbClr val="FFF7F4"/>
+          </a:solidFill>
+          <a:ln>
+            <a:solidFill>
+              <a:srgbClr val="EDBEB4"/>
+            </a:solidFill>
+          </a:ln>
+        </p:spPr>
+        <p:style>
+          <a:lnRef idx="1">
+            <a:schemeClr val="accent1"/>
+          </a:lnRef>
+          <a:fillRef idx="3">
+            <a:schemeClr val="accent1"/>
+          </a:fillRef>
+          <a:effectRef idx="2">
+            <a:schemeClr val="accent1"/>
+          </a:effectRef>
+          <a:fontRef idx="minor">
+            <a:schemeClr val="lt1"/>
+          </a:fontRef>
+        </p:style>
+        <p:txBody>
+          <a:bodyPr rtlCol="0" anchor="ctr"/>
+          <a:lstStyle/>
+          <a:p>
+            <a:pPr algn="ctr"/>
+          </a:p>
+        </p:txBody>
+      </p:sp>
+      <p:sp>
+        <p:nvSpPr>
+          <p:cNvPr id="11" name="TextBox 10"/>
+          <p:cNvSpPr txBox="1"/>
+          <p:nvPr/>
+        </p:nvSpPr>
+        <p:spPr>
+          <a:xfrm>
+            <a:off x="896112" y="3319272"/>
+            <a:ext cx="2926080" cy="274320"/>
+          </a:xfrm>
+          <a:prstGeom prst="rect">
+            <a:avLst/>
+          </a:prstGeom>
+          <a:noFill/>
+        </p:spPr>
+        <p:txBody>
+          <a:bodyPr wrap="square" lIns="73152" rIns="73152" tIns="36576" bIns="36576">
+            <a:spAutoFit/>
+          </a:bodyPr>
+          <a:lstStyle/>
+          <a:p>
+            <a:pPr algn="l">
+              <a:spcAft>
+                <a:spcPts val="0"/>
+              </a:spcAft>
+              <a:defRPr sz="1800" b="1">
+                <a:solidFill>
+                  <a:srgbClr val="BE3B3B"/>
+                </a:solidFill>
+                <a:latin typeface="Noto Sans CJK KR"/>
+              </a:defRPr>
+            </a:pPr>
+            <a:r>
+              <a:t>증상 2: 항상 STOP</a:t>
+            </a:r>
+          </a:p>
+        </p:txBody>
+      </p:sp>
+      <p:sp>
+        <p:nvSpPr>
+          <p:cNvPr id="12" name="TextBox 11"/>
+          <p:cNvSpPr txBox="1"/>
+          <p:nvPr/>
+        </p:nvSpPr>
+        <p:spPr>
+          <a:xfrm>
+            <a:off x="3794760" y="3300984"/>
+            <a:ext cx="7543800" cy="621792"/>
+          </a:xfrm>
+          <a:prstGeom prst="rect">
+            <a:avLst/>
+          </a:prstGeom>
+          <a:noFill/>
+        </p:spPr>
+        <p:txBody>
+          <a:bodyPr wrap="square" lIns="73152" rIns="73152" tIns="36576" bIns="36576">
+            <a:spAutoFit/>
+          </a:bodyPr>
+          <a:lstStyle/>
+          <a:p>
+            <a:pPr algn="l">
+              <a:spcAft>
+                <a:spcPts val="0"/>
+              </a:spcAft>
+              <a:defRPr sz="1600" b="0">
+                <a:solidFill>
+                  <a:srgbClr val="122C4E"/>
+                </a:solidFill>
+                <a:latin typeface="Noto Sans CJK KR"/>
+              </a:defRPr>
+            </a:pPr>
+            <a:r>
+              <a:t>우선 확인: inf/NaN 처리와 lidar frame 전방 방향을 확인한다.</a:t>
+            </a:r>
+            <a:br/>
+            <a:r>
+              <a:t>수정 후: ros2 topic info /cmd_vel_raw</a:t>
+            </a:r>
+          </a:p>
+        </p:txBody>
+      </p:sp>
+      <p:sp>
+        <p:nvSpPr>
+          <p:cNvPr id="13" name="TextBox 12"/>
+          <p:cNvSpPr txBox="1"/>
+          <p:nvPr/>
+        </p:nvSpPr>
+        <p:spPr>
+          <a:xfrm>
+            <a:off x="822960" y="5102352"/>
+            <a:ext cx="10607040" cy="402336"/>
+          </a:xfrm>
+          <a:prstGeom prst="rect">
+            <a:avLst/>
+          </a:prstGeom>
+          <a:noFill/>
+        </p:spPr>
+        <p:txBody>
+          <a:bodyPr wrap="square" lIns="73152" rIns="73152" tIns="36576" bIns="36576">
+            <a:spAutoFit/>
+          </a:bodyPr>
+          <a:lstStyle/>
+          <a:p>
             <a:pPr algn="ctr">
               <a:spcAft>
                 <a:spcPts val="0"/>
               </a:spcAft>
-              <a:defRPr sz="1700" b="1">
-                <a:solidFill>
-                  <a:srgbClr val="2A8B5A"/>
-                </a:solidFill>
-                <a:latin typeface="Noto Sans CJK KR"/>
-              </a:defRPr>
-            </a:pPr>
-            <a:r>
-              <a:t>다음 모듈을 시작하기 전, 이 슬라이드의 Complete와 다음 모듈의 Starter를 비교합니다.</a:t>
+              <a:defRPr sz="1800" b="1">
+                <a:solidFill>
+                  <a:srgbClr val="DB7E22"/>
+                </a:solidFill>
+                <a:latin typeface="Noto Sans CJK KR"/>
+              </a:defRPr>
+            </a:pPr>
+            <a:r>
+              <a:t>공통 순서: ① 현재 폴더 ② source ③ 파일 경로 ④ 이름/타입/단위 ⑤ build·source 후 재실행</a:t>
             </a:r>
           </a:p>
         </p:txBody>
@@ -12795,6 +13151,754 @@
               </a:defRPr>
             </a:pPr>
             <a:r>
+              <a:t>미니 실습: 값 하나를 바꾸고 결과를 비교한다</a:t>
+            </a:r>
+          </a:p>
+        </p:txBody>
+      </p:sp>
+      <p:sp>
+        <p:nvSpPr>
+          <p:cNvPr id="3" name="TextBox 2"/>
+          <p:cNvSpPr txBox="1"/>
+          <p:nvPr/>
+        </p:nvSpPr>
+        <p:spPr>
+          <a:xfrm>
+            <a:off x="603504" y="859536"/>
+            <a:ext cx="10698480" cy="292608"/>
+          </a:xfrm>
+          <a:prstGeom prst="rect">
+            <a:avLst/>
+          </a:prstGeom>
+          <a:noFill/>
+        </p:spPr>
+        <p:txBody>
+          <a:bodyPr wrap="square" lIns="73152" rIns="73152" tIns="36576" bIns="36576">
+            <a:spAutoFit/>
+          </a:bodyPr>
+          <a:lstStyle/>
+          <a:p>
+            <a:pPr algn="l">
+              <a:spcAft>
+                <a:spcPts val="0"/>
+              </a:spcAft>
+              <a:defRPr sz="1700" b="0">
+                <a:solidFill>
+                  <a:srgbClr val="5C6672"/>
+                </a:solidFill>
+                <a:latin typeface="Noto Sans CJK KR"/>
+              </a:defRPr>
+            </a:pPr>
+            <a:r>
+              <a:t>정상 결과를 만든 뒤에는 한 번에 하나의 값만 바꿉니다.</a:t>
+            </a:r>
+          </a:p>
+        </p:txBody>
+      </p:sp>
+      <p:sp>
+        <p:nvSpPr>
+          <p:cNvPr id="4" name="TextBox 3"/>
+          <p:cNvSpPr txBox="1"/>
+          <p:nvPr/>
+        </p:nvSpPr>
+        <p:spPr>
+          <a:xfrm>
+            <a:off x="530352" y="6510528"/>
+            <a:ext cx="7772400" cy="201168"/>
+          </a:xfrm>
+          <a:prstGeom prst="rect">
+            <a:avLst/>
+          </a:prstGeom>
+          <a:noFill/>
+        </p:spPr>
+        <p:txBody>
+          <a:bodyPr wrap="square" lIns="73152" rIns="73152" tIns="36576" bIns="36576">
+            <a:spAutoFit/>
+          </a:bodyPr>
+          <a:lstStyle/>
+          <a:p>
+            <a:pPr algn="l">
+              <a:spcAft>
+                <a:spcPts val="0"/>
+              </a:spcAft>
+              <a:defRPr sz="1000" b="0">
+                <a:solidFill>
+                  <a:srgbClr val="5C6672"/>
+                </a:solidFill>
+                <a:latin typeface="Noto Sans CJK KR"/>
+              </a:defRPr>
+            </a:pPr>
+            <a:r>
+              <a:t>ROS 2 Jazzy · Gazebo Harmonic · M18 · 따라 하기형 AGV 실습</a:t>
+            </a:r>
+          </a:p>
+        </p:txBody>
+      </p:sp>
+      <p:sp>
+        <p:nvSpPr>
+          <p:cNvPr id="5" name="TextBox 4"/>
+          <p:cNvSpPr txBox="1"/>
+          <p:nvPr/>
+        </p:nvSpPr>
+        <p:spPr>
+          <a:xfrm>
+            <a:off x="9144000" y="6510528"/>
+            <a:ext cx="2468880" cy="201168"/>
+          </a:xfrm>
+          <a:prstGeom prst="rect">
+            <a:avLst/>
+          </a:prstGeom>
+          <a:noFill/>
+        </p:spPr>
+        <p:txBody>
+          <a:bodyPr wrap="square" lIns="73152" rIns="73152" tIns="36576" bIns="36576">
+            <a:spAutoFit/>
+          </a:bodyPr>
+          <a:lstStyle/>
+          <a:p>
+            <a:pPr algn="r">
+              <a:spcAft>
+                <a:spcPts val="0"/>
+              </a:spcAft>
+              <a:defRPr sz="1000" b="0">
+                <a:solidFill>
+                  <a:srgbClr val="5C6672"/>
+                </a:solidFill>
+                <a:latin typeface="Noto Sans CJK KR"/>
+              </a:defRPr>
+            </a:pPr>
+            <a:r>
+              <a:t>명령·파일 경로는 슬라이드에서 복사 가능</a:t>
+            </a:r>
+          </a:p>
+        </p:txBody>
+      </p:sp>
+      <p:sp>
+        <p:nvSpPr>
+          <p:cNvPr id="6" name="Rectangle 5"/>
+          <p:cNvSpPr/>
+          <p:nvPr/>
+        </p:nvSpPr>
+        <p:spPr>
+          <a:xfrm>
+            <a:off x="566928" y="1188720"/>
+            <a:ext cx="11064240" cy="347472"/>
+          </a:xfrm>
+          <a:prstGeom prst="rect">
+            <a:avLst/>
+          </a:prstGeom>
+          <a:solidFill>
+            <a:srgbClr val="F4F7FB"/>
+          </a:solidFill>
+          <a:ln>
+            <a:solidFill>
+              <a:srgbClr val="F4F7FB"/>
+            </a:solidFill>
+          </a:ln>
+        </p:spPr>
+        <p:style>
+          <a:lnRef idx="1">
+            <a:schemeClr val="accent1"/>
+          </a:lnRef>
+          <a:fillRef idx="3">
+            <a:schemeClr val="accent1"/>
+          </a:fillRef>
+          <a:effectRef idx="2">
+            <a:schemeClr val="accent1"/>
+          </a:effectRef>
+          <a:fontRef idx="minor">
+            <a:schemeClr val="lt1"/>
+          </a:fontRef>
+        </p:style>
+        <p:txBody>
+          <a:bodyPr rtlCol="0" anchor="ctr" wrap="square" lIns="73152" rIns="73152" tIns="36576" bIns="36576"/>
+          <a:lstStyle/>
+          <a:p>
+            <a:pPr algn="l">
+              <a:spcAft>
+                <a:spcPts val="0"/>
+              </a:spcAft>
+              <a:defRPr sz="1300" b="1">
+                <a:solidFill>
+                  <a:srgbClr val="122C4E"/>
+                </a:solidFill>
+                <a:latin typeface="Noto Sans CJK KR"/>
+              </a:defRPr>
+            </a:pPr>
+            <a:r>
+              <a:t>현재 단계 미니 실습    |    현재 폴더 ~/ros2_curri/agv_ws    |    현재 터미널</a:t>
+            </a:r>
+          </a:p>
+        </p:txBody>
+      </p:sp>
+      <p:sp>
+        <p:nvSpPr>
+          <p:cNvPr id="7" name="Rounded Rectangle 6"/>
+          <p:cNvSpPr/>
+          <p:nvPr/>
+        </p:nvSpPr>
+        <p:spPr>
+          <a:xfrm>
+            <a:off x="749808" y="1874519"/>
+            <a:ext cx="10652760" cy="1993392"/>
+          </a:xfrm>
+          <a:prstGeom prst="roundRect">
+            <a:avLst/>
+          </a:prstGeom>
+          <a:solidFill>
+            <a:srgbClr val="FFF8EB"/>
+          </a:solidFill>
+          <a:ln>
+            <a:solidFill>
+              <a:srgbClr val="ECC680"/>
+            </a:solidFill>
+          </a:ln>
+        </p:spPr>
+        <p:style>
+          <a:lnRef idx="1">
+            <a:schemeClr val="accent1"/>
+          </a:lnRef>
+          <a:fillRef idx="3">
+            <a:schemeClr val="accent1"/>
+          </a:fillRef>
+          <a:effectRef idx="2">
+            <a:schemeClr val="accent1"/>
+          </a:effectRef>
+          <a:fontRef idx="minor">
+            <a:schemeClr val="lt1"/>
+          </a:fontRef>
+        </p:style>
+        <p:txBody>
+          <a:bodyPr rtlCol="0" anchor="ctr" wrap="square" lIns="73152" rIns="73152" tIns="36576" bIns="36576"/>
+          <a:lstStyle/>
+          <a:p>
+            <a:pPr algn="ctr">
+              <a:spcAft>
+                <a:spcPts val="0"/>
+              </a:spcAft>
+              <a:defRPr sz="2300" b="1">
+                <a:solidFill>
+                  <a:srgbClr val="122C4E"/>
+                </a:solidFill>
+                <a:latin typeface="Noto Sans CJK KR"/>
+              </a:defRPr>
+            </a:pPr>
+            <a:r>
+              <a:t>stop_distance 0.50→0.80 m로 바꾸면 어떤 상황에서 더 일찍 멈추는지 /cmd_vel 로그 기준으로 작성한다.</a:t>
+            </a:r>
+          </a:p>
+        </p:txBody>
+      </p:sp>
+      <p:sp>
+        <p:nvSpPr>
+          <p:cNvPr id="8" name="TextBox 7"/>
+          <p:cNvSpPr txBox="1"/>
+          <p:nvPr/>
+        </p:nvSpPr>
+        <p:spPr>
+          <a:xfrm>
+            <a:off x="877824" y="4590288"/>
+            <a:ext cx="10241280" cy="594360"/>
+          </a:xfrm>
+          <a:prstGeom prst="rect">
+            <a:avLst/>
+          </a:prstGeom>
+          <a:noFill/>
+        </p:spPr>
+        <p:txBody>
+          <a:bodyPr wrap="square" lIns="73152" rIns="73152" tIns="36576" bIns="36576">
+            <a:spAutoFit/>
+          </a:bodyPr>
+          <a:lstStyle/>
+          <a:p>
+            <a:pPr algn="ctr">
+              <a:spcAft>
+                <a:spcPts val="0"/>
+              </a:spcAft>
+              <a:defRPr sz="1900" b="1">
+                <a:solidFill>
+                  <a:srgbClr val="DB7E22"/>
+                </a:solidFill>
+                <a:latin typeface="Noto Sans CJK KR"/>
+              </a:defRPr>
+            </a:pPr>
+            <a:r>
+              <a:t>기록할 것: 바꾼 값(단위) · 기대한 변화 · 실제 출력/화면 · 원래 값으로 되돌린 결과</a:t>
+            </a:r>
+          </a:p>
+        </p:txBody>
+      </p:sp>
+    </p:spTree>
+  </p:cSld>
+  <p:clrMapOvr>
+    <a:masterClrMapping/>
+  </p:clrMapOvr>
+</p:sld>
+</file>
+
+<file path=ppt/slides/slide26.xml><?xml version="1.0" encoding="utf-8"?>
+<p:sld xmlns:a="http://schemas.openxmlformats.org/drawingml/2006/main" xmlns:p="http://schemas.openxmlformats.org/presentationml/2006/main" xmlns:r="http://schemas.openxmlformats.org/officeDocument/2006/relationships">
+  <p:cSld>
+    <p:spTree>
+      <p:nvGrpSpPr>
+        <p:cNvPr id="1" name=""/>
+        <p:cNvGrpSpPr/>
+        <p:nvPr/>
+      </p:nvGrpSpPr>
+      <p:grpSpPr/>
+      <p:sp>
+        <p:nvSpPr>
+          <p:cNvPr id="2" name="TextBox 1"/>
+          <p:cNvSpPr txBox="1"/>
+          <p:nvPr/>
+        </p:nvSpPr>
+        <p:spPr>
+          <a:xfrm>
+            <a:off x="566928" y="347472"/>
+            <a:ext cx="10881360" cy="438912"/>
+          </a:xfrm>
+          <a:prstGeom prst="rect">
+            <a:avLst/>
+          </a:prstGeom>
+          <a:noFill/>
+        </p:spPr>
+        <p:txBody>
+          <a:bodyPr wrap="square" lIns="73152" rIns="73152" tIns="36576" bIns="36576">
+            <a:spAutoFit/>
+          </a:bodyPr>
+          <a:lstStyle/>
+          <a:p>
+            <a:pPr algn="l">
+              <a:spcAft>
+                <a:spcPts val="0"/>
+              </a:spcAft>
+              <a:defRPr sz="3200" b="1">
+                <a:solidFill>
+                  <a:srgbClr val="122C4E"/>
+                </a:solidFill>
+                <a:latin typeface="Noto Sans CJK KR"/>
+              </a:defRPr>
+            </a:pPr>
+            <a:r>
+              <a:t>체크포인트를 저장하고 다음 모듈로 넘긴다</a:t>
+            </a:r>
+          </a:p>
+        </p:txBody>
+      </p:sp>
+      <p:sp>
+        <p:nvSpPr>
+          <p:cNvPr id="3" name="TextBox 2"/>
+          <p:cNvSpPr txBox="1"/>
+          <p:nvPr/>
+        </p:nvSpPr>
+        <p:spPr>
+          <a:xfrm>
+            <a:off x="603504" y="859536"/>
+            <a:ext cx="10698480" cy="292608"/>
+          </a:xfrm>
+          <a:prstGeom prst="rect">
+            <a:avLst/>
+          </a:prstGeom>
+          <a:noFill/>
+        </p:spPr>
+        <p:txBody>
+          <a:bodyPr wrap="square" lIns="73152" rIns="73152" tIns="36576" bIns="36576">
+            <a:spAutoFit/>
+          </a:bodyPr>
+          <a:lstStyle/>
+          <a:p>
+            <a:pPr algn="l">
+              <a:spcAft>
+                <a:spcPts val="0"/>
+              </a:spcAft>
+              <a:defRPr sz="1700" b="0">
+                <a:solidFill>
+                  <a:srgbClr val="5C6672"/>
+                </a:solidFill>
+                <a:latin typeface="Noto Sans CJK KR"/>
+              </a:defRPr>
+            </a:pPr>
+            <a:r>
+              <a:t>현재 Complete는 다음 Starter의 기준선입니다.</a:t>
+            </a:r>
+          </a:p>
+        </p:txBody>
+      </p:sp>
+      <p:sp>
+        <p:nvSpPr>
+          <p:cNvPr id="4" name="TextBox 3"/>
+          <p:cNvSpPr txBox="1"/>
+          <p:nvPr/>
+        </p:nvSpPr>
+        <p:spPr>
+          <a:xfrm>
+            <a:off x="530352" y="6510528"/>
+            <a:ext cx="7772400" cy="201168"/>
+          </a:xfrm>
+          <a:prstGeom prst="rect">
+            <a:avLst/>
+          </a:prstGeom>
+          <a:noFill/>
+        </p:spPr>
+        <p:txBody>
+          <a:bodyPr wrap="square" lIns="73152" rIns="73152" tIns="36576" bIns="36576">
+            <a:spAutoFit/>
+          </a:bodyPr>
+          <a:lstStyle/>
+          <a:p>
+            <a:pPr algn="l">
+              <a:spcAft>
+                <a:spcPts val="0"/>
+              </a:spcAft>
+              <a:defRPr sz="1000" b="0">
+                <a:solidFill>
+                  <a:srgbClr val="5C6672"/>
+                </a:solidFill>
+                <a:latin typeface="Noto Sans CJK KR"/>
+              </a:defRPr>
+            </a:pPr>
+            <a:r>
+              <a:t>ROS 2 Jazzy · Gazebo Harmonic · M18 · 따라 하기형 AGV 실습</a:t>
+            </a:r>
+          </a:p>
+        </p:txBody>
+      </p:sp>
+      <p:sp>
+        <p:nvSpPr>
+          <p:cNvPr id="5" name="TextBox 4"/>
+          <p:cNvSpPr txBox="1"/>
+          <p:nvPr/>
+        </p:nvSpPr>
+        <p:spPr>
+          <a:xfrm>
+            <a:off x="9144000" y="6510528"/>
+            <a:ext cx="2468880" cy="201168"/>
+          </a:xfrm>
+          <a:prstGeom prst="rect">
+            <a:avLst/>
+          </a:prstGeom>
+          <a:noFill/>
+        </p:spPr>
+        <p:txBody>
+          <a:bodyPr wrap="square" lIns="73152" rIns="73152" tIns="36576" bIns="36576">
+            <a:spAutoFit/>
+          </a:bodyPr>
+          <a:lstStyle/>
+          <a:p>
+            <a:pPr algn="r">
+              <a:spcAft>
+                <a:spcPts val="0"/>
+              </a:spcAft>
+              <a:defRPr sz="1000" b="0">
+                <a:solidFill>
+                  <a:srgbClr val="5C6672"/>
+                </a:solidFill>
+                <a:latin typeface="Noto Sans CJK KR"/>
+              </a:defRPr>
+            </a:pPr>
+            <a:r>
+              <a:t>명령·파일 경로는 슬라이드에서 복사 가능</a:t>
+            </a:r>
+          </a:p>
+        </p:txBody>
+      </p:sp>
+      <p:sp>
+        <p:nvSpPr>
+          <p:cNvPr id="6" name="Rectangle 5"/>
+          <p:cNvSpPr/>
+          <p:nvPr/>
+        </p:nvSpPr>
+        <p:spPr>
+          <a:xfrm>
+            <a:off x="566928" y="1188720"/>
+            <a:ext cx="11064240" cy="347472"/>
+          </a:xfrm>
+          <a:prstGeom prst="rect">
+            <a:avLst/>
+          </a:prstGeom>
+          <a:solidFill>
+            <a:srgbClr val="F4F7FB"/>
+          </a:solidFill>
+          <a:ln>
+            <a:solidFill>
+              <a:srgbClr val="F4F7FB"/>
+            </a:solidFill>
+          </a:ln>
+        </p:spPr>
+        <p:style>
+          <a:lnRef idx="1">
+            <a:schemeClr val="accent1"/>
+          </a:lnRef>
+          <a:fillRef idx="3">
+            <a:schemeClr val="accent1"/>
+          </a:fillRef>
+          <a:effectRef idx="2">
+            <a:schemeClr val="accent1"/>
+          </a:effectRef>
+          <a:fontRef idx="minor">
+            <a:schemeClr val="lt1"/>
+          </a:fontRef>
+        </p:style>
+        <p:txBody>
+          <a:bodyPr rtlCol="0" anchor="ctr" wrap="square" lIns="73152" rIns="73152" tIns="36576" bIns="36576"/>
+          <a:lstStyle/>
+          <a:p>
+            <a:pPr algn="l">
+              <a:spcAft>
+                <a:spcPts val="0"/>
+              </a:spcAft>
+              <a:defRPr sz="1300" b="1">
+                <a:solidFill>
+                  <a:srgbClr val="122C4E"/>
+                </a:solidFill>
+                <a:latin typeface="Noto Sans CJK KR"/>
+              </a:defRPr>
+            </a:pPr>
+            <a:r>
+              <a:t>현재 단계 체크포인트    |    현재 폴더 ~/ros2_curri/agv_ws    |    현재 터미널</a:t>
+            </a:r>
+          </a:p>
+        </p:txBody>
+      </p:sp>
+      <p:sp>
+        <p:nvSpPr>
+          <p:cNvPr id="7" name="Rounded Rectangle 6"/>
+          <p:cNvSpPr/>
+          <p:nvPr/>
+        </p:nvSpPr>
+        <p:spPr>
+          <a:xfrm>
+            <a:off x="685800" y="1737360"/>
+            <a:ext cx="10972800" cy="3611880"/>
+          </a:xfrm>
+          <a:prstGeom prst="roundRect">
+            <a:avLst/>
+          </a:prstGeom>
+          <a:solidFill>
+            <a:srgbClr val="F4F7FB"/>
+          </a:solidFill>
+          <a:ln>
+            <a:solidFill>
+              <a:srgbClr val="D2DCE8"/>
+            </a:solidFill>
+          </a:ln>
+        </p:spPr>
+        <p:style>
+          <a:lnRef idx="1">
+            <a:schemeClr val="accent1"/>
+          </a:lnRef>
+          <a:fillRef idx="3">
+            <a:schemeClr val="accent1"/>
+          </a:fillRef>
+          <a:effectRef idx="2">
+            <a:schemeClr val="accent1"/>
+          </a:effectRef>
+          <a:fontRef idx="minor">
+            <a:schemeClr val="lt1"/>
+          </a:fontRef>
+        </p:style>
+        <p:txBody>
+          <a:bodyPr rtlCol="0" anchor="ctr"/>
+          <a:lstStyle/>
+          <a:p>
+            <a:pPr algn="ctr"/>
+          </a:p>
+        </p:txBody>
+      </p:sp>
+      <p:sp>
+        <p:nvSpPr>
+          <p:cNvPr id="8" name="TextBox 7"/>
+          <p:cNvSpPr txBox="1"/>
+          <p:nvPr/>
+        </p:nvSpPr>
+        <p:spPr>
+          <a:xfrm>
+            <a:off x="896112" y="1993392"/>
+            <a:ext cx="10332720" cy="2971800"/>
+          </a:xfrm>
+          <a:prstGeom prst="rect">
+            <a:avLst/>
+          </a:prstGeom>
+          <a:noFill/>
+        </p:spPr>
+        <p:txBody>
+          <a:bodyPr wrap="square" lIns="109728" rIns="109728">
+            <a:spAutoFit/>
+          </a:bodyPr>
+          <a:lstStyle/>
+          <a:p>
+            <a:pPr>
+              <a:spcAft>
+                <a:spcPts val="800"/>
+              </a:spcAft>
+              <a:defRPr sz="1800">
+                <a:solidFill>
+                  <a:srgbClr val="122C4E"/>
+                </a:solidFill>
+                <a:latin typeface="Noto Sans CJK KR"/>
+              </a:defRPr>
+            </a:pPr>
+            <a:r>
+              <a:t>• □ 완료 화면: 0.5 m 안 장애물에서 forward cmd_vel이 zero Twist로 바뀌는 조건을 설명한다.</a:t>
+            </a:r>
+          </a:p>
+          <a:p>
+            <a:pPr>
+              <a:spcAft>
+                <a:spcPts val="800"/>
+              </a:spcAft>
+              <a:defRPr sz="1800">
+                <a:solidFill>
+                  <a:srgbClr val="122C4E"/>
+                </a:solidFill>
+                <a:latin typeface="Noto Sans CJK KR"/>
+              </a:defRPr>
+            </a:pPr>
+            <a:r>
+              <a:t>• □ Complete 파일: blocks/E_autonomy_logic/M18_obstacle_perception/complete/</a:t>
+            </a:r>
+          </a:p>
+          <a:p>
+            <a:pPr>
+              <a:spcAft>
+                <a:spcPts val="800"/>
+              </a:spcAft>
+              <a:defRPr sz="1800">
+                <a:solidFill>
+                  <a:srgbClr val="122C4E"/>
+                </a:solidFill>
+                <a:latin typeface="Noto Sans CJK KR"/>
+              </a:defRPr>
+            </a:pPr>
+            <a:r>
+              <a:t>• □ 정상 로그·캡처: logs/validation.log, screenshots/validation_terminal.png</a:t>
+            </a:r>
+          </a:p>
+          <a:p>
+            <a:pPr>
+              <a:spcAft>
+                <a:spcPts val="800"/>
+              </a:spcAft>
+              <a:defRPr sz="1800">
+                <a:solidFill>
+                  <a:srgbClr val="122C4E"/>
+                </a:solidFill>
+                <a:latin typeface="Noto Sans CJK KR"/>
+              </a:defRPr>
+            </a:pPr>
+            <a:r>
+              <a:t>• □ 버전 식별: CHECKSUM_or_TAG.txt의 SHA-256 manifest</a:t>
+            </a:r>
+          </a:p>
+          <a:p>
+            <a:pPr>
+              <a:spcAft>
+                <a:spcPts val="800"/>
+              </a:spcAft>
+              <a:defRPr sz="1800">
+                <a:solidFill>
+                  <a:srgbClr val="122C4E"/>
+                </a:solidFill>
+                <a:latin typeface="Noto Sans CJK KR"/>
+              </a:defRPr>
+            </a:pPr>
+            <a:r>
+              <a:t>• □ 다음 시작 조건: M19 FSM</a:t>
+            </a:r>
+          </a:p>
+        </p:txBody>
+      </p:sp>
+      <p:sp>
+        <p:nvSpPr>
+          <p:cNvPr id="9" name="TextBox 8"/>
+          <p:cNvSpPr txBox="1"/>
+          <p:nvPr/>
+        </p:nvSpPr>
+        <p:spPr>
+          <a:xfrm>
+            <a:off x="868680" y="5596128"/>
+            <a:ext cx="10515600" cy="338328"/>
+          </a:xfrm>
+          <a:prstGeom prst="rect">
+            <a:avLst/>
+          </a:prstGeom>
+          <a:noFill/>
+        </p:spPr>
+        <p:txBody>
+          <a:bodyPr wrap="square" lIns="73152" rIns="73152" tIns="36576" bIns="36576">
+            <a:spAutoFit/>
+          </a:bodyPr>
+          <a:lstStyle/>
+          <a:p>
+            <a:pPr algn="ctr">
+              <a:spcAft>
+                <a:spcPts val="0"/>
+              </a:spcAft>
+              <a:defRPr sz="1700" b="1">
+                <a:solidFill>
+                  <a:srgbClr val="2A8B5A"/>
+                </a:solidFill>
+                <a:latin typeface="Noto Sans CJK KR"/>
+              </a:defRPr>
+            </a:pPr>
+            <a:r>
+              <a:t>다음 모듈을 시작하기 전, 이 슬라이드의 Complete와 다음 모듈의 Starter를 비교합니다.</a:t>
+            </a:r>
+          </a:p>
+        </p:txBody>
+      </p:sp>
+    </p:spTree>
+  </p:cSld>
+  <p:clrMapOvr>
+    <a:masterClrMapping/>
+  </p:clrMapOvr>
+</p:sld>
+</file>
+
+<file path=ppt/slides/slide27.xml><?xml version="1.0" encoding="utf-8"?>
+<p:sld xmlns:a="http://schemas.openxmlformats.org/drawingml/2006/main" xmlns:p="http://schemas.openxmlformats.org/presentationml/2006/main" xmlns:r="http://schemas.openxmlformats.org/officeDocument/2006/relationships">
+  <p:cSld>
+    <p:spTree>
+      <p:nvGrpSpPr>
+        <p:cNvPr id="1" name=""/>
+        <p:cNvGrpSpPr/>
+        <p:nvPr/>
+      </p:nvGrpSpPr>
+      <p:grpSpPr/>
+      <p:sp>
+        <p:nvSpPr>
+          <p:cNvPr id="2" name="TextBox 1"/>
+          <p:cNvSpPr txBox="1"/>
+          <p:nvPr/>
+        </p:nvSpPr>
+        <p:spPr>
+          <a:xfrm>
+            <a:off x="566928" y="347472"/>
+            <a:ext cx="10881360" cy="438912"/>
+          </a:xfrm>
+          <a:prstGeom prst="rect">
+            <a:avLst/>
+          </a:prstGeom>
+          <a:noFill/>
+        </p:spPr>
+        <p:txBody>
+          <a:bodyPr wrap="square" lIns="73152" rIns="73152" tIns="36576" bIns="36576">
+            <a:spAutoFit/>
+          </a:bodyPr>
+          <a:lstStyle/>
+          <a:p>
+            <a:pPr algn="l">
+              <a:spcAft>
+                <a:spcPts val="0"/>
+              </a:spcAft>
+              <a:defRPr sz="3200" b="1">
+                <a:solidFill>
+                  <a:srgbClr val="122C4E"/>
+                </a:solidFill>
+                <a:latin typeface="Noto Sans CJK KR"/>
+              </a:defRPr>
+            </a:pPr>
+            <a:r>
               <a:t>공식 참고 자료</a:t>
             </a:r>
           </a:p>
@@ -14915,7 +16019,7 @@
               </a:defRPr>
             </a:pPr>
             <a:r>
-              <a:t>안전 임계값을 고정한다</a:t>
+              <a:t>코드/설정이 실제로 만드는 것 (1/2)</a:t>
             </a:r>
           </a:p>
         </p:txBody>
@@ -14954,7 +16058,7 @@
               </a:defRPr>
             </a:pPr>
             <a:r>
-              <a:t>한 장에는 한 행동만 수행합니다.</a:t>
+              <a:t>파일을 입력하기 전에 ‘무엇을 만들고 어디서 볼지’를 먼저 연결합니다.</a:t>
             </a:r>
           </a:p>
         </p:txBody>
@@ -15090,109 +16194,31 @@
               </a:defRPr>
             </a:pPr>
             <a:r>
-              <a:t>현재 단계 1/2    |    현재 폴더 ~/ros2_curri/agv_ws    |    현재 터미널</a:t>
-            </a:r>
-          </a:p>
-        </p:txBody>
-      </p:sp>
-      <p:sp>
-        <p:nvSpPr>
-          <p:cNvPr id="7" name="TextBox 6"/>
-          <p:cNvSpPr txBox="1"/>
-          <p:nvPr/>
-        </p:nvSpPr>
-        <p:spPr>
-          <a:xfrm>
-            <a:off x="676656" y="1764792"/>
-            <a:ext cx="1828800" cy="347472"/>
-          </a:xfrm>
-          <a:prstGeom prst="rect">
-            <a:avLst/>
-          </a:prstGeom>
-          <a:noFill/>
-        </p:spPr>
-        <p:txBody>
-          <a:bodyPr wrap="square" lIns="73152" rIns="73152" tIns="36576" bIns="36576">
-            <a:spAutoFit/>
-          </a:bodyPr>
-          <a:lstStyle/>
-          <a:p>
-            <a:pPr algn="l">
-              <a:spcAft>
-                <a:spcPts val="0"/>
-              </a:spcAft>
-              <a:defRPr sz="1800" b="1">
-                <a:solidFill>
-                  <a:srgbClr val="225B9B"/>
-                </a:solidFill>
-                <a:latin typeface="Noto Sans CJK KR"/>
-              </a:defRPr>
-            </a:pPr>
-            <a:r>
-              <a:t>왜 하는가</a:t>
-            </a:r>
-          </a:p>
-        </p:txBody>
-      </p:sp>
-      <p:sp>
-        <p:nvSpPr>
-          <p:cNvPr id="8" name="TextBox 7"/>
-          <p:cNvSpPr txBox="1"/>
-          <p:nvPr/>
-        </p:nvSpPr>
-        <p:spPr>
-          <a:xfrm>
-            <a:off x="676656" y="2103120"/>
-            <a:ext cx="10789920" cy="512064"/>
-          </a:xfrm>
-          <a:prstGeom prst="rect">
-            <a:avLst/>
-          </a:prstGeom>
-          <a:noFill/>
-        </p:spPr>
-        <p:txBody>
-          <a:bodyPr wrap="square" lIns="73152" rIns="73152" tIns="36576" bIns="36576">
-            <a:spAutoFit/>
-          </a:bodyPr>
-          <a:lstStyle/>
-          <a:p>
-            <a:pPr algn="l">
-              <a:spcAft>
-                <a:spcPts val="0"/>
-              </a:spcAft>
-              <a:defRPr sz="2000" b="0">
-                <a:solidFill>
-                  <a:srgbClr val="122C4E"/>
-                </a:solidFill>
-                <a:latin typeface="Noto Sans CJK KR"/>
-              </a:defRPr>
-            </a:pPr>
-            <a:r>
-              <a:t>distance는 m 단위이며 safety가 vision보다 먼저 final /cmd_vel을 결정한다.</a:t>
-            </a:r>
-          </a:p>
-        </p:txBody>
-      </p:sp>
-      <p:sp>
-        <p:nvSpPr>
-          <p:cNvPr id="9" name="Rounded Rectangle 8"/>
+              <a:t>현재 단계 파일 역할    |    현재 폴더 ~/ros2_curri/agv_ws    |    현재 터미널</a:t>
+            </a:r>
+          </a:p>
+        </p:txBody>
+      </p:sp>
+      <p:sp>
+        <p:nvSpPr>
+          <p:cNvPr id="7" name="Rounded Rectangle 6"/>
           <p:cNvSpPr/>
           <p:nvPr/>
         </p:nvSpPr>
         <p:spPr>
           <a:xfrm>
-            <a:off x="676656" y="2871216"/>
-            <a:ext cx="10835640" cy="2331720"/>
+            <a:off x="640080" y="1627632"/>
+            <a:ext cx="10972800" cy="2048256"/>
           </a:xfrm>
           <a:prstGeom prst="roundRect">
             <a:avLst/>
           </a:prstGeom>
           <a:solidFill>
-            <a:srgbClr val="1D232D"/>
+            <a:srgbClr val="F4F7FB"/>
           </a:solidFill>
           <a:ln>
             <a:solidFill>
-              <a:srgbClr val="1D232D"/>
+              <a:srgbClr val="CCDBEB"/>
             </a:solidFill>
           </a:ln>
         </p:spPr>
@@ -15211,40 +16237,23 @@
           </a:fontRef>
         </p:style>
         <p:txBody>
-          <a:bodyPr rtlCol="0" anchor="ctr" wrap="square" lIns="73152" rIns="73152" tIns="36576" bIns="36576"/>
-          <a:lstStyle/>
-          <a:p>
-            <a:pPr algn="l">
-              <a:spcAft>
-                <a:spcPts val="0"/>
-              </a:spcAft>
-              <a:defRPr sz="1600" b="0">
-                <a:solidFill>
-                  <a:srgbClr val="FFFFFF"/>
-                </a:solidFill>
-                <a:latin typeface="DejaVu Sans Mono"/>
-              </a:defRPr>
-            </a:pPr>
-            <a:r>
-              <a:t>ros2 run agv_control safety_controller --ros-args \</a:t>
-            </a:r>
-            <a:br/>
-            <a:r>
-              <a:t>  -p stop_distance:=0.5 -p front_half_angle_deg:=15.0</a:t>
-            </a:r>
-          </a:p>
-        </p:txBody>
-      </p:sp>
-      <p:sp>
-        <p:nvSpPr>
-          <p:cNvPr id="10" name="TextBox 9"/>
+          <a:bodyPr rtlCol="0" anchor="ctr"/>
+          <a:lstStyle/>
+          <a:p>
+            <a:pPr algn="ctr"/>
+          </a:p>
+        </p:txBody>
+      </p:sp>
+      <p:sp>
+        <p:nvSpPr>
+          <p:cNvPr id="8" name="TextBox 7"/>
           <p:cNvSpPr txBox="1"/>
           <p:nvPr/>
         </p:nvSpPr>
         <p:spPr>
           <a:xfrm>
-            <a:off x="768096" y="5468112"/>
-            <a:ext cx="1143000" cy="256032"/>
+            <a:off x="850392" y="1764792"/>
+            <a:ext cx="10424160" cy="256032"/>
           </a:xfrm>
           <a:prstGeom prst="rect">
             <a:avLst/>
@@ -15261,29 +16270,29 @@
               <a:spcAft>
                 <a:spcPts val="0"/>
               </a:spcAft>
-              <a:defRPr sz="1800" b="1">
-                <a:solidFill>
-                  <a:srgbClr val="2A8B5A"/>
-                </a:solidFill>
-                <a:latin typeface="Noto Sans CJK KR"/>
-              </a:defRPr>
-            </a:pPr>
-            <a:r>
-              <a:t>확인</a:t>
-            </a:r>
-          </a:p>
-        </p:txBody>
-      </p:sp>
-      <p:sp>
-        <p:nvSpPr>
-          <p:cNvPr id="11" name="TextBox 10"/>
+              <a:defRPr sz="1300" b="1">
+                <a:solidFill>
+                  <a:srgbClr val="225B9B"/>
+                </a:solidFill>
+                <a:latin typeface="DejaVu Sans Mono"/>
+              </a:defRPr>
+            </a:pPr>
+            <a:r>
+              <a:t>~/ros2_curri/agv_ws/src/agv_sensors/agv_sensors/lidar_processor.py</a:t>
+            </a:r>
+          </a:p>
+        </p:txBody>
+      </p:sp>
+      <p:sp>
+        <p:nvSpPr>
+          <p:cNvPr id="9" name="TextBox 8"/>
           <p:cNvSpPr txBox="1"/>
           <p:nvPr/>
         </p:nvSpPr>
         <p:spPr>
           <a:xfrm>
-            <a:off x="768096" y="5742432"/>
-            <a:ext cx="10561320" cy="347472"/>
+            <a:off x="868680" y="2130552"/>
+            <a:ext cx="1234440" cy="228600"/>
           </a:xfrm>
           <a:prstGeom prst="rect">
             <a:avLst/>
@@ -15300,7 +16309,46 @@
               <a:spcAft>
                 <a:spcPts val="0"/>
               </a:spcAft>
-              <a:defRPr sz="1800" b="0">
+              <a:defRPr sz="1500" b="1">
+                <a:solidFill>
+                  <a:srgbClr val="2A8B5A"/>
+                </a:solidFill>
+                <a:latin typeface="Noto Sans CJK KR"/>
+              </a:defRPr>
+            </a:pPr>
+            <a:r>
+              <a:t>만드는 것</a:t>
+            </a:r>
+          </a:p>
+        </p:txBody>
+      </p:sp>
+      <p:sp>
+        <p:nvSpPr>
+          <p:cNvPr id="10" name="TextBox 9"/>
+          <p:cNvSpPr txBox="1"/>
+          <p:nvPr/>
+        </p:nvSpPr>
+        <p:spPr>
+          <a:xfrm>
+            <a:off x="1975104" y="2112264"/>
+            <a:ext cx="9189720" cy="274320"/>
+          </a:xfrm>
+          <a:prstGeom prst="rect">
+            <a:avLst/>
+          </a:prstGeom>
+          <a:noFill/>
+        </p:spPr>
+        <p:txBody>
+          <a:bodyPr wrap="square" lIns="73152" rIns="73152" tIns="36576" bIns="36576">
+            <a:spAutoFit/>
+          </a:bodyPr>
+          <a:lstStyle/>
+          <a:p>
+            <a:pPr algn="l">
+              <a:spcAft>
+                <a:spcPts val="0"/>
+              </a:spcAft>
+              <a:defRPr sz="1500" b="0">
                 <a:solidFill>
                   <a:srgbClr val="122C4E"/>
                 </a:solidFill>
@@ -15308,7 +16356,489 @@
               </a:defRPr>
             </a:pPr>
             <a:r>
-              <a:t>명령의 출력에서 topic·frame·파일 이름 또는 성공 메시지를 찾으면 이 단계가 완료됩니다.</a:t>
+              <a:t>LaserScan의 전방 sector에서 유효 거리 최소값을 계산하는 안전 입력 노드</a:t>
+            </a:r>
+          </a:p>
+        </p:txBody>
+      </p:sp>
+      <p:sp>
+        <p:nvSpPr>
+          <p:cNvPr id="11" name="TextBox 10"/>
+          <p:cNvSpPr txBox="1"/>
+          <p:nvPr/>
+        </p:nvSpPr>
+        <p:spPr>
+          <a:xfrm>
+            <a:off x="868680" y="2505456"/>
+            <a:ext cx="1234440" cy="228600"/>
+          </a:xfrm>
+          <a:prstGeom prst="rect">
+            <a:avLst/>
+          </a:prstGeom>
+          <a:noFill/>
+        </p:spPr>
+        <p:txBody>
+          <a:bodyPr wrap="square" lIns="73152" rIns="73152" tIns="36576" bIns="36576">
+            <a:spAutoFit/>
+          </a:bodyPr>
+          <a:lstStyle/>
+          <a:p>
+            <a:pPr algn="l">
+              <a:spcAft>
+                <a:spcPts val="0"/>
+              </a:spcAft>
+              <a:defRPr sz="1500" b="1">
+                <a:solidFill>
+                  <a:srgbClr val="DB7E22"/>
+                </a:solidFill>
+                <a:latin typeface="Noto Sans CJK KR"/>
+              </a:defRPr>
+            </a:pPr>
+            <a:r>
+              <a:t>코드 읽기</a:t>
+            </a:r>
+          </a:p>
+        </p:txBody>
+      </p:sp>
+      <p:sp>
+        <p:nvSpPr>
+          <p:cNvPr id="12" name="TextBox 11"/>
+          <p:cNvSpPr txBox="1"/>
+          <p:nvPr/>
+        </p:nvSpPr>
+        <p:spPr>
+          <a:xfrm>
+            <a:off x="1975104" y="2487168"/>
+            <a:ext cx="9189720" cy="301752"/>
+          </a:xfrm>
+          <a:prstGeom prst="rect">
+            <a:avLst/>
+          </a:prstGeom>
+          <a:noFill/>
+        </p:spPr>
+        <p:txBody>
+          <a:bodyPr wrap="square" lIns="73152" rIns="73152" tIns="36576" bIns="36576">
+            <a:spAutoFit/>
+          </a:bodyPr>
+          <a:lstStyle/>
+          <a:p>
+            <a:pPr algn="l">
+              <a:spcAft>
+                <a:spcPts val="0"/>
+              </a:spcAft>
+              <a:defRPr sz="1400" b="0">
+                <a:solidFill>
+                  <a:srgbClr val="122C4E"/>
+                </a:solidFill>
+                <a:latin typeface="Noto Sans CJK KR"/>
+              </a:defRPr>
+            </a:pPr>
+            <a:r>
+              <a:t>ranges 필터 → 각도 index → minimum → /obstacle_distance publish 순서로 읽는다.</a:t>
+            </a:r>
+          </a:p>
+        </p:txBody>
+      </p:sp>
+      <p:sp>
+        <p:nvSpPr>
+          <p:cNvPr id="13" name="TextBox 12"/>
+          <p:cNvSpPr txBox="1"/>
+          <p:nvPr/>
+        </p:nvSpPr>
+        <p:spPr>
+          <a:xfrm>
+            <a:off x="868680" y="2889504"/>
+            <a:ext cx="1234440" cy="228600"/>
+          </a:xfrm>
+          <a:prstGeom prst="rect">
+            <a:avLst/>
+          </a:prstGeom>
+          <a:noFill/>
+        </p:spPr>
+        <p:txBody>
+          <a:bodyPr wrap="square" lIns="73152" rIns="73152" tIns="36576" bIns="36576">
+            <a:spAutoFit/>
+          </a:bodyPr>
+          <a:lstStyle/>
+          <a:p>
+            <a:pPr algn="l">
+              <a:spcAft>
+                <a:spcPts val="0"/>
+              </a:spcAft>
+              <a:defRPr sz="1500" b="1">
+                <a:solidFill>
+                  <a:srgbClr val="225B9B"/>
+                </a:solidFill>
+                <a:latin typeface="Noto Sans CJK KR"/>
+              </a:defRPr>
+            </a:pPr>
+            <a:r>
+              <a:t>사용/확인</a:t>
+            </a:r>
+          </a:p>
+        </p:txBody>
+      </p:sp>
+      <p:sp>
+        <p:nvSpPr>
+          <p:cNvPr id="14" name="TextBox 13"/>
+          <p:cNvSpPr txBox="1"/>
+          <p:nvPr/>
+        </p:nvSpPr>
+        <p:spPr>
+          <a:xfrm>
+            <a:off x="1975104" y="2871216"/>
+            <a:ext cx="9189720" cy="512064"/>
+          </a:xfrm>
+          <a:prstGeom prst="rect">
+            <a:avLst/>
+          </a:prstGeom>
+          <a:noFill/>
+        </p:spPr>
+        <p:txBody>
+          <a:bodyPr wrap="square" lIns="73152" rIns="73152" tIns="36576" bIns="36576">
+            <a:spAutoFit/>
+          </a:bodyPr>
+          <a:lstStyle/>
+          <a:p>
+            <a:pPr algn="l">
+              <a:spcAft>
+                <a:spcPts val="0"/>
+              </a:spcAft>
+              <a:defRPr sz="1300" b="0">
+                <a:solidFill>
+                  <a:srgbClr val="122C4E"/>
+                </a:solidFill>
+                <a:latin typeface="Noto Sans CJK KR"/>
+              </a:defRPr>
+            </a:pPr>
+            <a:r>
+              <a:t>사용: launch 뒤 /scan과 /obstacle_distance를 별 터미널에서 본다.</a:t>
+            </a:r>
+            <a:br/>
+            <a:r>
+              <a:t>화면/출력: LiDAR terminal의 frame·range와 RViz LaserScan</a:t>
+            </a:r>
+          </a:p>
+        </p:txBody>
+      </p:sp>
+      <p:sp>
+        <p:nvSpPr>
+          <p:cNvPr id="15" name="Rounded Rectangle 14"/>
+          <p:cNvSpPr/>
+          <p:nvPr/>
+        </p:nvSpPr>
+        <p:spPr>
+          <a:xfrm>
+            <a:off x="640080" y="3941063"/>
+            <a:ext cx="10972800" cy="2048256"/>
+          </a:xfrm>
+          <a:prstGeom prst="roundRect">
+            <a:avLst/>
+          </a:prstGeom>
+          <a:solidFill>
+            <a:srgbClr val="F4F7FB"/>
+          </a:solidFill>
+          <a:ln>
+            <a:solidFill>
+              <a:srgbClr val="CCDBEB"/>
+            </a:solidFill>
+          </a:ln>
+        </p:spPr>
+        <p:style>
+          <a:lnRef idx="1">
+            <a:schemeClr val="accent1"/>
+          </a:lnRef>
+          <a:fillRef idx="3">
+            <a:schemeClr val="accent1"/>
+          </a:fillRef>
+          <a:effectRef idx="2">
+            <a:schemeClr val="accent1"/>
+          </a:effectRef>
+          <a:fontRef idx="minor">
+            <a:schemeClr val="lt1"/>
+          </a:fontRef>
+        </p:style>
+        <p:txBody>
+          <a:bodyPr rtlCol="0" anchor="ctr"/>
+          <a:lstStyle/>
+          <a:p>
+            <a:pPr algn="ctr"/>
+          </a:p>
+        </p:txBody>
+      </p:sp>
+      <p:sp>
+        <p:nvSpPr>
+          <p:cNvPr id="16" name="TextBox 15"/>
+          <p:cNvSpPr txBox="1"/>
+          <p:nvPr/>
+        </p:nvSpPr>
+        <p:spPr>
+          <a:xfrm>
+            <a:off x="850392" y="4078224"/>
+            <a:ext cx="10424160" cy="256032"/>
+          </a:xfrm>
+          <a:prstGeom prst="rect">
+            <a:avLst/>
+          </a:prstGeom>
+          <a:noFill/>
+        </p:spPr>
+        <p:txBody>
+          <a:bodyPr wrap="square" lIns="73152" rIns="73152" tIns="36576" bIns="36576">
+            <a:spAutoFit/>
+          </a:bodyPr>
+          <a:lstStyle/>
+          <a:p>
+            <a:pPr algn="l">
+              <a:spcAft>
+                <a:spcPts val="0"/>
+              </a:spcAft>
+              <a:defRPr sz="1300" b="1">
+                <a:solidFill>
+                  <a:srgbClr val="225B9B"/>
+                </a:solidFill>
+                <a:latin typeface="DejaVu Sans Mono"/>
+              </a:defRPr>
+            </a:pPr>
+            <a:r>
+              <a:t>~/ros2_curri/agv_ws/src/agv_control/agv_control/safety_controller.py</a:t>
+            </a:r>
+          </a:p>
+        </p:txBody>
+      </p:sp>
+      <p:sp>
+        <p:nvSpPr>
+          <p:cNvPr id="17" name="TextBox 16"/>
+          <p:cNvSpPr txBox="1"/>
+          <p:nvPr/>
+        </p:nvSpPr>
+        <p:spPr>
+          <a:xfrm>
+            <a:off x="868680" y="4443983"/>
+            <a:ext cx="1234440" cy="228600"/>
+          </a:xfrm>
+          <a:prstGeom prst="rect">
+            <a:avLst/>
+          </a:prstGeom>
+          <a:noFill/>
+        </p:spPr>
+        <p:txBody>
+          <a:bodyPr wrap="square" lIns="73152" rIns="73152" tIns="36576" bIns="36576">
+            <a:spAutoFit/>
+          </a:bodyPr>
+          <a:lstStyle/>
+          <a:p>
+            <a:pPr algn="l">
+              <a:spcAft>
+                <a:spcPts val="0"/>
+              </a:spcAft>
+              <a:defRPr sz="1500" b="1">
+                <a:solidFill>
+                  <a:srgbClr val="2A8B5A"/>
+                </a:solidFill>
+                <a:latin typeface="Noto Sans CJK KR"/>
+              </a:defRPr>
+            </a:pPr>
+            <a:r>
+              <a:t>만드는 것</a:t>
+            </a:r>
+          </a:p>
+        </p:txBody>
+      </p:sp>
+      <p:sp>
+        <p:nvSpPr>
+          <p:cNvPr id="18" name="TextBox 17"/>
+          <p:cNvSpPr txBox="1"/>
+          <p:nvPr/>
+        </p:nvSpPr>
+        <p:spPr>
+          <a:xfrm>
+            <a:off x="1975104" y="4425696"/>
+            <a:ext cx="9189720" cy="274320"/>
+          </a:xfrm>
+          <a:prstGeom prst="rect">
+            <a:avLst/>
+          </a:prstGeom>
+          <a:noFill/>
+        </p:spPr>
+        <p:txBody>
+          <a:bodyPr wrap="square" lIns="73152" rIns="73152" tIns="36576" bIns="36576">
+            <a:spAutoFit/>
+          </a:bodyPr>
+          <a:lstStyle/>
+          <a:p>
+            <a:pPr algn="l">
+              <a:spcAft>
+                <a:spcPts val="0"/>
+              </a:spcAft>
+              <a:defRPr sz="1500" b="0">
+                <a:solidFill>
+                  <a:srgbClr val="122C4E"/>
+                </a:solidFill>
+                <a:latin typeface="Noto Sans CJK KR"/>
+              </a:defRPr>
+            </a:pPr>
+            <a:r>
+              <a:t>ROS 2 node 또는 실행 보조 로직</a:t>
+            </a:r>
+          </a:p>
+        </p:txBody>
+      </p:sp>
+      <p:sp>
+        <p:nvSpPr>
+          <p:cNvPr id="19" name="TextBox 18"/>
+          <p:cNvSpPr txBox="1"/>
+          <p:nvPr/>
+        </p:nvSpPr>
+        <p:spPr>
+          <a:xfrm>
+            <a:off x="868680" y="4818888"/>
+            <a:ext cx="1234440" cy="228600"/>
+          </a:xfrm>
+          <a:prstGeom prst="rect">
+            <a:avLst/>
+          </a:prstGeom>
+          <a:noFill/>
+        </p:spPr>
+        <p:txBody>
+          <a:bodyPr wrap="square" lIns="73152" rIns="73152" tIns="36576" bIns="36576">
+            <a:spAutoFit/>
+          </a:bodyPr>
+          <a:lstStyle/>
+          <a:p>
+            <a:pPr algn="l">
+              <a:spcAft>
+                <a:spcPts val="0"/>
+              </a:spcAft>
+              <a:defRPr sz="1500" b="1">
+                <a:solidFill>
+                  <a:srgbClr val="DB7E22"/>
+                </a:solidFill>
+                <a:latin typeface="Noto Sans CJK KR"/>
+              </a:defRPr>
+            </a:pPr>
+            <a:r>
+              <a:t>코드 읽기</a:t>
+            </a:r>
+          </a:p>
+        </p:txBody>
+      </p:sp>
+      <p:sp>
+        <p:nvSpPr>
+          <p:cNvPr id="20" name="TextBox 19"/>
+          <p:cNvSpPr txBox="1"/>
+          <p:nvPr/>
+        </p:nvSpPr>
+        <p:spPr>
+          <a:xfrm>
+            <a:off x="1975104" y="4800600"/>
+            <a:ext cx="9189720" cy="301752"/>
+          </a:xfrm>
+          <a:prstGeom prst="rect">
+            <a:avLst/>
+          </a:prstGeom>
+          <a:noFill/>
+        </p:spPr>
+        <p:txBody>
+          <a:bodyPr wrap="square" lIns="73152" rIns="73152" tIns="36576" bIns="36576">
+            <a:spAutoFit/>
+          </a:bodyPr>
+          <a:lstStyle/>
+          <a:p>
+            <a:pPr algn="l">
+              <a:spcAft>
+                <a:spcPts val="0"/>
+              </a:spcAft>
+              <a:defRPr sz="1400" b="0">
+                <a:solidFill>
+                  <a:srgbClr val="122C4E"/>
+                </a:solidFill>
+                <a:latin typeface="Noto Sans CJK KR"/>
+              </a:defRPr>
+            </a:pPr>
+            <a:r>
+              <a:t>import → Node 생성 → publisher/subscription → callback/main 순서로 읽는다.</a:t>
+            </a:r>
+          </a:p>
+        </p:txBody>
+      </p:sp>
+      <p:sp>
+        <p:nvSpPr>
+          <p:cNvPr id="21" name="TextBox 20"/>
+          <p:cNvSpPr txBox="1"/>
+          <p:nvPr/>
+        </p:nvSpPr>
+        <p:spPr>
+          <a:xfrm>
+            <a:off x="868680" y="5202936"/>
+            <a:ext cx="1234440" cy="228600"/>
+          </a:xfrm>
+          <a:prstGeom prst="rect">
+            <a:avLst/>
+          </a:prstGeom>
+          <a:noFill/>
+        </p:spPr>
+        <p:txBody>
+          <a:bodyPr wrap="square" lIns="73152" rIns="73152" tIns="36576" bIns="36576">
+            <a:spAutoFit/>
+          </a:bodyPr>
+          <a:lstStyle/>
+          <a:p>
+            <a:pPr algn="l">
+              <a:spcAft>
+                <a:spcPts val="0"/>
+              </a:spcAft>
+              <a:defRPr sz="1500" b="1">
+                <a:solidFill>
+                  <a:srgbClr val="225B9B"/>
+                </a:solidFill>
+                <a:latin typeface="Noto Sans CJK KR"/>
+              </a:defRPr>
+            </a:pPr>
+            <a:r>
+              <a:t>사용/확인</a:t>
+            </a:r>
+          </a:p>
+        </p:txBody>
+      </p:sp>
+      <p:sp>
+        <p:nvSpPr>
+          <p:cNvPr id="22" name="TextBox 21"/>
+          <p:cNvSpPr txBox="1"/>
+          <p:nvPr/>
+        </p:nvSpPr>
+        <p:spPr>
+          <a:xfrm>
+            <a:off x="1975104" y="5184648"/>
+            <a:ext cx="9189720" cy="512064"/>
+          </a:xfrm>
+          <a:prstGeom prst="rect">
+            <a:avLst/>
+          </a:prstGeom>
+          <a:noFill/>
+        </p:spPr>
+        <p:txBody>
+          <a:bodyPr wrap="square" lIns="73152" rIns="73152" tIns="36576" bIns="36576">
+            <a:spAutoFit/>
+          </a:bodyPr>
+          <a:lstStyle/>
+          <a:p>
+            <a:pPr algn="l">
+              <a:spcAft>
+                <a:spcPts val="0"/>
+              </a:spcAft>
+              <a:defRPr sz="1300" b="0">
+                <a:solidFill>
+                  <a:srgbClr val="122C4E"/>
+                </a:solidFill>
+                <a:latin typeface="Noto Sans CJK KR"/>
+              </a:defRPr>
+            </a:pPr>
+            <a:r>
+              <a:t>사용: package를 build·source한 뒤 ros2 run 또는 launch에서 실행한다.</a:t>
+            </a:r>
+            <a:br/>
+            <a:r>
+              <a:t>화면/출력: terminal의 node/topic/log 출력</a:t>
             </a:r>
           </a:p>
         </p:txBody>
@@ -15365,7 +16895,7 @@
               </a:defRPr>
             </a:pPr>
             <a:r>
-              <a:t>raw와 safe command를 분리한다</a:t>
+              <a:t>코드/설정이 실제로 만드는 것 (2/2)</a:t>
             </a:r>
           </a:p>
         </p:txBody>
@@ -15404,7 +16934,7 @@
               </a:defRPr>
             </a:pPr>
             <a:r>
-              <a:t>한 장에는 한 행동만 수행합니다.</a:t>
+              <a:t>파일을 입력하기 전에 ‘무엇을 만들고 어디서 볼지’를 먼저 연결합니다.</a:t>
             </a:r>
           </a:p>
         </p:txBody>
@@ -15540,109 +17070,31 @@
               </a:defRPr>
             </a:pPr>
             <a:r>
-              <a:t>현재 단계 2/2    |    현재 폴더 ~/ros2_curri/agv_ws    |    현재 터미널</a:t>
-            </a:r>
-          </a:p>
-        </p:txBody>
-      </p:sp>
-      <p:sp>
-        <p:nvSpPr>
-          <p:cNvPr id="7" name="TextBox 6"/>
-          <p:cNvSpPr txBox="1"/>
-          <p:nvPr/>
-        </p:nvSpPr>
-        <p:spPr>
-          <a:xfrm>
-            <a:off x="676656" y="1764792"/>
-            <a:ext cx="1828800" cy="347472"/>
-          </a:xfrm>
-          <a:prstGeom prst="rect">
-            <a:avLst/>
-          </a:prstGeom>
-          <a:noFill/>
-        </p:spPr>
-        <p:txBody>
-          <a:bodyPr wrap="square" lIns="73152" rIns="73152" tIns="36576" bIns="36576">
-            <a:spAutoFit/>
-          </a:bodyPr>
-          <a:lstStyle/>
-          <a:p>
-            <a:pPr algn="l">
-              <a:spcAft>
-                <a:spcPts val="0"/>
-              </a:spcAft>
-              <a:defRPr sz="1800" b="1">
-                <a:solidFill>
-                  <a:srgbClr val="225B9B"/>
-                </a:solidFill>
-                <a:latin typeface="Noto Sans CJK KR"/>
-              </a:defRPr>
-            </a:pPr>
-            <a:r>
-              <a:t>왜 하는가</a:t>
-            </a:r>
-          </a:p>
-        </p:txBody>
-      </p:sp>
-      <p:sp>
-        <p:nvSpPr>
-          <p:cNvPr id="8" name="TextBox 7"/>
-          <p:cNvSpPr txBox="1"/>
-          <p:nvPr/>
-        </p:nvSpPr>
-        <p:spPr>
-          <a:xfrm>
-            <a:off x="676656" y="2103120"/>
-            <a:ext cx="10789920" cy="512064"/>
-          </a:xfrm>
-          <a:prstGeom prst="rect">
-            <a:avLst/>
-          </a:prstGeom>
-          <a:noFill/>
-        </p:spPr>
-        <p:txBody>
-          <a:bodyPr wrap="square" lIns="73152" rIns="73152" tIns="36576" bIns="36576">
-            <a:spAutoFit/>
-          </a:bodyPr>
-          <a:lstStyle/>
-          <a:p>
-            <a:pPr algn="l">
-              <a:spcAft>
-                <a:spcPts val="0"/>
-              </a:spcAft>
-              <a:defRPr sz="2000" b="0">
-                <a:solidFill>
-                  <a:srgbClr val="122C4E"/>
-                </a:solidFill>
-                <a:latin typeface="Noto Sans CJK KR"/>
-              </a:defRPr>
-            </a:pPr>
-            <a:r>
-              <a:t>mission은 /cmd_vel_raw, 안전 필터만 /cmd_vel을 발행한다.</a:t>
-            </a:r>
-          </a:p>
-        </p:txBody>
-      </p:sp>
-      <p:sp>
-        <p:nvSpPr>
-          <p:cNvPr id="9" name="Rounded Rectangle 8"/>
+              <a:t>현재 단계 파일 역할    |    현재 폴더 ~/ros2_curri/agv_ws    |    현재 터미널</a:t>
+            </a:r>
+          </a:p>
+        </p:txBody>
+      </p:sp>
+      <p:sp>
+        <p:nvSpPr>
+          <p:cNvPr id="7" name="Rounded Rectangle 6"/>
           <p:cNvSpPr/>
           <p:nvPr/>
         </p:nvSpPr>
         <p:spPr>
           <a:xfrm>
-            <a:off x="676656" y="2871216"/>
-            <a:ext cx="10835640" cy="2331720"/>
+            <a:off x="640080" y="1627632"/>
+            <a:ext cx="10972800" cy="2048256"/>
           </a:xfrm>
           <a:prstGeom prst="roundRect">
             <a:avLst/>
           </a:prstGeom>
           <a:solidFill>
-            <a:srgbClr val="1D232D"/>
+            <a:srgbClr val="F4F7FB"/>
           </a:solidFill>
           <a:ln>
             <a:solidFill>
-              <a:srgbClr val="1D232D"/>
+              <a:srgbClr val="CCDBEB"/>
             </a:solidFill>
           </a:ln>
         </p:spPr>
@@ -15661,44 +17113,23 @@
           </a:fontRef>
         </p:style>
         <p:txBody>
-          <a:bodyPr rtlCol="0" anchor="ctr" wrap="square" lIns="73152" rIns="73152" tIns="36576" bIns="36576"/>
-          <a:lstStyle/>
-          <a:p>
-            <a:pPr algn="l">
-              <a:spcAft>
-                <a:spcPts val="0"/>
-              </a:spcAft>
-              <a:defRPr sz="1600" b="0">
-                <a:solidFill>
-                  <a:srgbClr val="FFFFFF"/>
-                </a:solidFill>
-                <a:latin typeface="DejaVu Sans Mono"/>
-              </a:defRPr>
-            </a:pPr>
-            <a:r>
-              <a:t>ros2 topic echo /cmd_vel_raw</a:t>
-            </a:r>
-            <a:br/>
-            <a:r>
-              <a:t>ros2 topic echo /cmd_vel</a:t>
-            </a:r>
-            <a:br/>
-            <a:r>
-              <a:t>ros2 topic echo /scan --once</a:t>
-            </a:r>
-          </a:p>
-        </p:txBody>
-      </p:sp>
-      <p:sp>
-        <p:nvSpPr>
-          <p:cNvPr id="10" name="TextBox 9"/>
+          <a:bodyPr rtlCol="0" anchor="ctr"/>
+          <a:lstStyle/>
+          <a:p>
+            <a:pPr algn="ctr"/>
+          </a:p>
+        </p:txBody>
+      </p:sp>
+      <p:sp>
+        <p:nvSpPr>
+          <p:cNvPr id="8" name="TextBox 7"/>
           <p:cNvSpPr txBox="1"/>
           <p:nvPr/>
         </p:nvSpPr>
         <p:spPr>
           <a:xfrm>
-            <a:off x="768096" y="5468112"/>
-            <a:ext cx="1143000" cy="256032"/>
+            <a:off x="850392" y="1764792"/>
+            <a:ext cx="10424160" cy="256032"/>
           </a:xfrm>
           <a:prstGeom prst="rect">
             <a:avLst/>
@@ -15715,29 +17146,29 @@
               <a:spcAft>
                 <a:spcPts val="0"/>
               </a:spcAft>
-              <a:defRPr sz="1800" b="1">
-                <a:solidFill>
-                  <a:srgbClr val="2A8B5A"/>
-                </a:solidFill>
-                <a:latin typeface="Noto Sans CJK KR"/>
-              </a:defRPr>
-            </a:pPr>
-            <a:r>
-              <a:t>확인</a:t>
-            </a:r>
-          </a:p>
-        </p:txBody>
-      </p:sp>
-      <p:sp>
-        <p:nvSpPr>
-          <p:cNvPr id="11" name="TextBox 10"/>
+              <a:defRPr sz="1300" b="1">
+                <a:solidFill>
+                  <a:srgbClr val="225B9B"/>
+                </a:solidFill>
+                <a:latin typeface="DejaVu Sans Mono"/>
+              </a:defRPr>
+            </a:pPr>
+            <a:r>
+              <a:t>~/ros2_curri/agv_ws/src/agv_bringup/config/mission.yaml</a:t>
+            </a:r>
+          </a:p>
+        </p:txBody>
+      </p:sp>
+      <p:sp>
+        <p:nvSpPr>
+          <p:cNvPr id="9" name="TextBox 8"/>
           <p:cNvSpPr txBox="1"/>
           <p:nvPr/>
         </p:nvSpPr>
         <p:spPr>
           <a:xfrm>
-            <a:off x="768096" y="5742432"/>
-            <a:ext cx="10561320" cy="347472"/>
+            <a:off x="868680" y="2130552"/>
+            <a:ext cx="1234440" cy="228600"/>
           </a:xfrm>
           <a:prstGeom prst="rect">
             <a:avLst/>
@@ -15754,7 +17185,46 @@
               <a:spcAft>
                 <a:spcPts val="0"/>
               </a:spcAft>
-              <a:defRPr sz="1800" b="0">
+              <a:defRPr sz="1500" b="1">
+                <a:solidFill>
+                  <a:srgbClr val="2A8B5A"/>
+                </a:solidFill>
+                <a:latin typeface="Noto Sans CJK KR"/>
+              </a:defRPr>
+            </a:pPr>
+            <a:r>
+              <a:t>만드는 것</a:t>
+            </a:r>
+          </a:p>
+        </p:txBody>
+      </p:sp>
+      <p:sp>
+        <p:nvSpPr>
+          <p:cNvPr id="10" name="TextBox 9"/>
+          <p:cNvSpPr txBox="1"/>
+          <p:nvPr/>
+        </p:nvSpPr>
+        <p:spPr>
+          <a:xfrm>
+            <a:off x="1975104" y="2112264"/>
+            <a:ext cx="9189720" cy="274320"/>
+          </a:xfrm>
+          <a:prstGeom prst="rect">
+            <a:avLst/>
+          </a:prstGeom>
+          <a:noFill/>
+        </p:spPr>
+        <p:txBody>
+          <a:bodyPr wrap="square" lIns="73152" rIns="73152" tIns="36576" bIns="36576">
+            <a:spAutoFit/>
+          </a:bodyPr>
+          <a:lstStyle/>
+          <a:p>
+            <a:pPr algn="l">
+              <a:spcAft>
+                <a:spcPts val="0"/>
+              </a:spcAft>
+              <a:defRPr sz="1500" b="0">
                 <a:solidFill>
                   <a:srgbClr val="122C4E"/>
                 </a:solidFill>
@@ -15762,7 +17232,167 @@
               </a:defRPr>
             </a:pPr>
             <a:r>
-              <a:t>명령의 출력에서 topic·frame·파일 이름 또는 성공 메시지를 찾으면 이 단계가 완료됩니다.</a:t>
+              <a:t>실행 시 읽히는 ROS 2 설정값</a:t>
+            </a:r>
+          </a:p>
+        </p:txBody>
+      </p:sp>
+      <p:sp>
+        <p:nvSpPr>
+          <p:cNvPr id="11" name="TextBox 10"/>
+          <p:cNvSpPr txBox="1"/>
+          <p:nvPr/>
+        </p:nvSpPr>
+        <p:spPr>
+          <a:xfrm>
+            <a:off x="868680" y="2505456"/>
+            <a:ext cx="1234440" cy="228600"/>
+          </a:xfrm>
+          <a:prstGeom prst="rect">
+            <a:avLst/>
+          </a:prstGeom>
+          <a:noFill/>
+        </p:spPr>
+        <p:txBody>
+          <a:bodyPr wrap="square" lIns="73152" rIns="73152" tIns="36576" bIns="36576">
+            <a:spAutoFit/>
+          </a:bodyPr>
+          <a:lstStyle/>
+          <a:p>
+            <a:pPr algn="l">
+              <a:spcAft>
+                <a:spcPts val="0"/>
+              </a:spcAft>
+              <a:defRPr sz="1500" b="1">
+                <a:solidFill>
+                  <a:srgbClr val="DB7E22"/>
+                </a:solidFill>
+                <a:latin typeface="Noto Sans CJK KR"/>
+              </a:defRPr>
+            </a:pPr>
+            <a:r>
+              <a:t>코드 읽기</a:t>
+            </a:r>
+          </a:p>
+        </p:txBody>
+      </p:sp>
+      <p:sp>
+        <p:nvSpPr>
+          <p:cNvPr id="12" name="TextBox 11"/>
+          <p:cNvSpPr txBox="1"/>
+          <p:nvPr/>
+        </p:nvSpPr>
+        <p:spPr>
+          <a:xfrm>
+            <a:off x="1975104" y="2487168"/>
+            <a:ext cx="9189720" cy="301752"/>
+          </a:xfrm>
+          <a:prstGeom prst="rect">
+            <a:avLst/>
+          </a:prstGeom>
+          <a:noFill/>
+        </p:spPr>
+        <p:txBody>
+          <a:bodyPr wrap="square" lIns="73152" rIns="73152" tIns="36576" bIns="36576">
+            <a:spAutoFit/>
+          </a:bodyPr>
+          <a:lstStyle/>
+          <a:p>
+            <a:pPr algn="l">
+              <a:spcAft>
+                <a:spcPts val="0"/>
+              </a:spcAft>
+              <a:defRPr sz="1400" b="0">
+                <a:solidFill>
+                  <a:srgbClr val="122C4E"/>
+                </a:solidFill>
+                <a:latin typeface="Noto Sans CJK KR"/>
+              </a:defRPr>
+            </a:pPr>
+            <a:r>
+              <a:t>이름 → type/value → launch에서 전달되는 위치를 비교한다.</a:t>
+            </a:r>
+          </a:p>
+        </p:txBody>
+      </p:sp>
+      <p:sp>
+        <p:nvSpPr>
+          <p:cNvPr id="13" name="TextBox 12"/>
+          <p:cNvSpPr txBox="1"/>
+          <p:nvPr/>
+        </p:nvSpPr>
+        <p:spPr>
+          <a:xfrm>
+            <a:off x="868680" y="2889504"/>
+            <a:ext cx="1234440" cy="228600"/>
+          </a:xfrm>
+          <a:prstGeom prst="rect">
+            <a:avLst/>
+          </a:prstGeom>
+          <a:noFill/>
+        </p:spPr>
+        <p:txBody>
+          <a:bodyPr wrap="square" lIns="73152" rIns="73152" tIns="36576" bIns="36576">
+            <a:spAutoFit/>
+          </a:bodyPr>
+          <a:lstStyle/>
+          <a:p>
+            <a:pPr algn="l">
+              <a:spcAft>
+                <a:spcPts val="0"/>
+              </a:spcAft>
+              <a:defRPr sz="1500" b="1">
+                <a:solidFill>
+                  <a:srgbClr val="225B9B"/>
+                </a:solidFill>
+                <a:latin typeface="Noto Sans CJK KR"/>
+              </a:defRPr>
+            </a:pPr>
+            <a:r>
+              <a:t>사용/확인</a:t>
+            </a:r>
+          </a:p>
+        </p:txBody>
+      </p:sp>
+      <p:sp>
+        <p:nvSpPr>
+          <p:cNvPr id="14" name="TextBox 13"/>
+          <p:cNvSpPr txBox="1"/>
+          <p:nvPr/>
+        </p:nvSpPr>
+        <p:spPr>
+          <a:xfrm>
+            <a:off x="1975104" y="2871216"/>
+            <a:ext cx="9189720" cy="512064"/>
+          </a:xfrm>
+          <a:prstGeom prst="rect">
+            <a:avLst/>
+          </a:prstGeom>
+          <a:noFill/>
+        </p:spPr>
+        <p:txBody>
+          <a:bodyPr wrap="square" lIns="73152" rIns="73152" tIns="36576" bIns="36576">
+            <a:spAutoFit/>
+          </a:bodyPr>
+          <a:lstStyle/>
+          <a:p>
+            <a:pPr algn="l">
+              <a:spcAft>
+                <a:spcPts val="0"/>
+              </a:spcAft>
+              <a:defRPr sz="1300" b="0">
+                <a:solidFill>
+                  <a:srgbClr val="122C4E"/>
+                </a:solidFill>
+                <a:latin typeface="Noto Sans CJK KR"/>
+              </a:defRPr>
+            </a:pPr>
+            <a:r>
+              <a:t>사용: launch 실행 뒤 ros2 param/topic 명령으로 확인한다.</a:t>
+            </a:r>
+            <a:br/>
+            <a:r>
+              <a:t>화면/출력: terminal의 parameter/topic 출력</a:t>
             </a:r>
           </a:p>
         </p:txBody>
@@ -15819,7 +17449,7 @@
               </a:defRPr>
             </a:pPr>
             <a:r>
-              <a:t>파일을 새로 만들고 저장한다 (1/3)</a:t>
+              <a:t>안전 임계값을 고정한다</a:t>
             </a:r>
           </a:p>
         </p:txBody>
@@ -15858,7 +17488,7 @@
               </a:defRPr>
             </a:pPr>
             <a:r>
-              <a:t>~/ros2_curri/agv_ws/src/agv_sensors/agv_sensors/lidar_processor.py</a:t>
+              <a:t>한 장에는 한 행동만 수행합니다.</a:t>
             </a:r>
           </a:p>
         </p:txBody>
@@ -15994,7 +17624,7 @@
               </a:defRPr>
             </a:pPr>
             <a:r>
-              <a:t>현재 단계 3/6    |    현재 폴더 ~/ros2_curri/agv_ws    |    현재 터미널</a:t>
+              <a:t>현재 단계 1/2    |    현재 폴더 ~/ros2_curri/agv_ws    |    현재 터미널</a:t>
             </a:r>
           </a:p>
         </p:txBody>
@@ -16007,8 +17637,8 @@
         </p:nvSpPr>
         <p:spPr>
           <a:xfrm>
-            <a:off x="658368" y="1627632"/>
-            <a:ext cx="10972800" cy="256032"/>
+            <a:off x="676656" y="1764792"/>
+            <a:ext cx="1828800" cy="347472"/>
           </a:xfrm>
           <a:prstGeom prst="rect">
             <a:avLst/>
@@ -16025,7 +17655,46 @@
               <a:spcAft>
                 <a:spcPts val="0"/>
               </a:spcAft>
-              <a:defRPr sz="1500" b="1">
+              <a:defRPr sz="1800" b="1">
+                <a:solidFill>
+                  <a:srgbClr val="225B9B"/>
+                </a:solidFill>
+                <a:latin typeface="Noto Sans CJK KR"/>
+              </a:defRPr>
+            </a:pPr>
+            <a:r>
+              <a:t>왜 하는가</a:t>
+            </a:r>
+          </a:p>
+        </p:txBody>
+      </p:sp>
+      <p:sp>
+        <p:nvSpPr>
+          <p:cNvPr id="8" name="TextBox 7"/>
+          <p:cNvSpPr txBox="1"/>
+          <p:nvPr/>
+        </p:nvSpPr>
+        <p:spPr>
+          <a:xfrm>
+            <a:off x="676656" y="2103120"/>
+            <a:ext cx="10789920" cy="512064"/>
+          </a:xfrm>
+          <a:prstGeom prst="rect">
+            <a:avLst/>
+          </a:prstGeom>
+          <a:noFill/>
+        </p:spPr>
+        <p:txBody>
+          <a:bodyPr wrap="square" lIns="73152" rIns="73152" tIns="36576" bIns="36576">
+            <a:spAutoFit/>
+          </a:bodyPr>
+          <a:lstStyle/>
+          <a:p>
+            <a:pPr algn="l">
+              <a:spcAft>
+                <a:spcPts val="0"/>
+              </a:spcAft>
+              <a:defRPr sz="2000" b="0">
                 <a:solidFill>
                   <a:srgbClr val="122C4E"/>
                 </a:solidFill>
@@ -16033,85 +17702,23 @@
               </a:defRPr>
             </a:pPr>
             <a:r>
-              <a:t>이번 단계: 파일의 전체 내용을 중간 생략 없이 작성합니다. 아래 줄 범위를 끝까지 입력하세요.</a:t>
-            </a:r>
-          </a:p>
-        </p:txBody>
-      </p:sp>
-      <p:sp>
-        <p:nvSpPr>
-          <p:cNvPr id="8" name="Rectangle 7"/>
+              <a:t>distance는 m 단위이며 safety가 vision보다 먼저 final /cmd_vel을 결정한다.</a:t>
+            </a:r>
+          </a:p>
+        </p:txBody>
+      </p:sp>
+      <p:sp>
+        <p:nvSpPr>
+          <p:cNvPr id="9" name="Rounded Rectangle 8"/>
           <p:cNvSpPr/>
           <p:nvPr/>
         </p:nvSpPr>
         <p:spPr>
           <a:xfrm>
-            <a:off x="658368" y="1956816"/>
-            <a:ext cx="10972800" cy="603504"/>
-          </a:xfrm>
-          <a:prstGeom prst="rect">
-            <a:avLst/>
-          </a:prstGeom>
-          <a:solidFill>
-            <a:srgbClr val="F4F7FB"/>
-          </a:solidFill>
-          <a:ln>
-            <a:solidFill>
-              <a:srgbClr val="F4F7FB"/>
-            </a:solidFill>
-          </a:ln>
-        </p:spPr>
-        <p:style>
-          <a:lnRef idx="1">
-            <a:schemeClr val="accent1"/>
-          </a:lnRef>
-          <a:fillRef idx="3">
-            <a:schemeClr val="accent1"/>
-          </a:fillRef>
-          <a:effectRef idx="2">
-            <a:schemeClr val="accent1"/>
-          </a:effectRef>
-          <a:fontRef idx="minor">
-            <a:schemeClr val="lt1"/>
-          </a:fontRef>
-        </p:style>
-        <p:txBody>
-          <a:bodyPr rtlCol="0" anchor="ctr" wrap="square" lIns="73152" rIns="73152" tIns="36576" bIns="36576"/>
-          <a:lstStyle/>
-          <a:p>
-            <a:pPr algn="l">
-              <a:spcAft>
-                <a:spcPts val="0"/>
-              </a:spcAft>
-              <a:defRPr sz="1400" b="0">
-                <a:solidFill>
-                  <a:srgbClr val="122C4E"/>
-                </a:solidFill>
-                <a:latin typeface="DejaVu Sans Mono"/>
-              </a:defRPr>
-            </a:pPr>
-            <a:r>
-              <a:t>파일 생성: mkdir -p ~/ros2_curri/agv_ws/src/agv_sensors/agv_sensors</a:t>
-            </a:r>
-            <a:br/>
-            <a:r>
-              <a:t>파일 열기: nano ~/ros2_curri/agv_ws/src/agv_sensors/agv_sensors/lidar_processor.py</a:t>
-            </a:r>
-          </a:p>
-        </p:txBody>
-      </p:sp>
-      <p:sp>
-        <p:nvSpPr>
-          <p:cNvPr id="9" name="Rectangle 8"/>
-          <p:cNvSpPr/>
-          <p:nvPr/>
-        </p:nvSpPr>
-        <p:spPr>
-          <a:xfrm>
-            <a:off x="658368" y="2706624"/>
-            <a:ext cx="10972800" cy="3364992"/>
-          </a:xfrm>
-          <a:prstGeom prst="rect">
+            <a:off x="676656" y="2871216"/>
+            <a:ext cx="10835640" cy="2331720"/>
+          </a:xfrm>
+          <a:prstGeom prst="roundRect">
             <a:avLst/>
           </a:prstGeom>
           <a:solidFill>
@@ -16138,14 +17745,14 @@
           </a:fontRef>
         </p:style>
         <p:txBody>
-          <a:bodyPr rtlCol="0" anchor="ctr" wrap="square" lIns="164592" rIns="164592" tIns="109728" bIns="36576"/>
+          <a:bodyPr rtlCol="0" anchor="ctr" wrap="square" lIns="73152" rIns="73152" tIns="36576" bIns="36576"/>
           <a:lstStyle/>
           <a:p>
             <a:pPr algn="l">
               <a:spcAft>
                 <a:spcPts val="0"/>
               </a:spcAft>
-              <a:defRPr sz="1400" b="0">
+              <a:defRPr sz="1600" b="0">
                 <a:solidFill>
                   <a:srgbClr val="FFFFFF"/>
                 </a:solidFill>
@@ -16153,45 +17760,11 @@
               </a:defRPr>
             </a:pPr>
             <a:r>
-              <a:t>import math</a:t>
+              <a:t>ros2 run agv_control safety_controller --ros-args \</a:t>
             </a:r>
             <a:br/>
             <a:r>
-              <a:t>import rclpy</a:t>
-            </a:r>
-            <a:br/>
-            <a:r>
-              <a:t>from rclpy.node import Node</a:t>
-            </a:r>
-            <a:br/>
-            <a:r>
-              <a:t>from rclpy.qos import qos_profile_sensor_data</a:t>
-            </a:r>
-            <a:br/>
-            <a:r>
-              <a:t>from sensor_msgs.msg import LaserScan</a:t>
-            </a:r>
-            <a:br/>
-            <a:r>
-              <a:t>from std_msgs.msg import Float32</a:t>
-            </a:r>
-            <a:br/>
-            <a:br/>
-            <a:r>
-              <a:t>class LidarProcessor(Node):</a:t>
-            </a:r>
-            <a:br/>
-            <a:br/>
-            <a:r>
-              <a:t>    def __init__(self):</a:t>
-            </a:r>
-            <a:br/>
-            <a:r>
-              <a:t>        super().__init__('lidar_processor')</a:t>
-            </a:r>
-            <a:br/>
-            <a:r>
-              <a:t>        self.declare_parameter('front_half_angle_deg', 15.0)</a:t>
+              <a:t>  -p stop_distance:=0.5 -p front_half_angle_deg:=15.0</a:t>
             </a:r>
           </a:p>
         </p:txBody>
@@ -16204,8 +17777,8 @@
         </p:nvSpPr>
         <p:spPr>
           <a:xfrm>
-            <a:off x="749808" y="6181344"/>
-            <a:ext cx="10789920" cy="201168"/>
+            <a:off x="768096" y="5468112"/>
+            <a:ext cx="1143000" cy="256032"/>
           </a:xfrm>
           <a:prstGeom prst="rect">
             <a:avLst/>
@@ -16222,15 +17795,54 @@
               <a:spcAft>
                 <a:spcPts val="0"/>
               </a:spcAft>
-              <a:defRPr sz="1000" b="0">
-                <a:solidFill>
-                  <a:srgbClr val="5C6672"/>
-                </a:solidFill>
-                <a:latin typeface="Noto Sans CJK KR"/>
-              </a:defRPr>
-            </a:pPr>
-            <a:r>
-              <a:t>파일 전체 1/3 · 이 슬라이드 다음에 같은 파일의 나머지 줄이 이어집니다.</a:t>
+              <a:defRPr sz="1800" b="1">
+                <a:solidFill>
+                  <a:srgbClr val="2A8B5A"/>
+                </a:solidFill>
+                <a:latin typeface="Noto Sans CJK KR"/>
+              </a:defRPr>
+            </a:pPr>
+            <a:r>
+              <a:t>확인</a:t>
+            </a:r>
+          </a:p>
+        </p:txBody>
+      </p:sp>
+      <p:sp>
+        <p:nvSpPr>
+          <p:cNvPr id="11" name="TextBox 10"/>
+          <p:cNvSpPr txBox="1"/>
+          <p:nvPr/>
+        </p:nvSpPr>
+        <p:spPr>
+          <a:xfrm>
+            <a:off x="768096" y="5742432"/>
+            <a:ext cx="10561320" cy="347472"/>
+          </a:xfrm>
+          <a:prstGeom prst="rect">
+            <a:avLst/>
+          </a:prstGeom>
+          <a:noFill/>
+        </p:spPr>
+        <p:txBody>
+          <a:bodyPr wrap="square" lIns="73152" rIns="73152" tIns="36576" bIns="36576">
+            <a:spAutoFit/>
+          </a:bodyPr>
+          <a:lstStyle/>
+          <a:p>
+            <a:pPr algn="l">
+              <a:spcAft>
+                <a:spcPts val="0"/>
+              </a:spcAft>
+              <a:defRPr sz="1800" b="0">
+                <a:solidFill>
+                  <a:srgbClr val="122C4E"/>
+                </a:solidFill>
+                <a:latin typeface="Noto Sans CJK KR"/>
+              </a:defRPr>
+            </a:pPr>
+            <a:r>
+              <a:t>명령의 출력에서 topic·frame·파일 이름 또는 성공 메시지를 찾으면 이 단계가 완료됩니다.</a:t>
             </a:r>
           </a:p>
         </p:txBody>

--- a/blocks/E_autonomy_logic/M18_obstacle_perception/M18_LiDAR_장애물_감지와_Perception_결합.pptx
+++ b/blocks/E_autonomy_logic/M18_obstacle_perception/M18_LiDAR_장애물_감지와_Perception_결합.pptx
@@ -7551,7 +7551,7 @@
               <a:spcAft>
                 <a:spcPts val="0"/>
               </a:spcAft>
-              <a:defRPr sz="1800" b="1">
+              <a:defRPr sz="1400" b="1">
                 <a:solidFill>
                   <a:srgbClr val="FFFFFF"/>
                 </a:solidFill>
@@ -7559,7 +7559,7 @@
               </a:defRPr>
             </a:pPr>
             <a:r>
-              <a:t>M18 · Block E · ROS 2 + Gazebo Sim AGV</a:t>
+              <a:t>ROS 2 기반 AGV End-to-End 개발 커리큘럼 · M18 · Block E</a:t>
             </a:r>
           </a:p>
         </p:txBody>
@@ -7769,7 +7769,7 @@
               <a:spcAft>
                 <a:spcPts val="0"/>
               </a:spcAft>
-              <a:defRPr sz="1000" b="0">
+              <a:defRPr sz="900" b="0">
                 <a:solidFill>
                   <a:srgbClr val="5C6672"/>
                 </a:solidFill>
@@ -7777,7 +7777,7 @@
               </a:defRPr>
             </a:pPr>
             <a:r>
-              <a:t>ROS 2 Jazzy · Gazebo Harmonic · M18 · 따라 하기형 AGV 실습</a:t>
+              <a:t>ROS 2 기반 AGV End-to-End 개발 커리큘럼 · M18 · Block E</a:t>
             </a:r>
           </a:p>
         </p:txBody>
@@ -7943,7 +7943,7 @@
               <a:spcAft>
                 <a:spcPts val="0"/>
               </a:spcAft>
-              <a:defRPr sz="1000" b="0">
+              <a:defRPr sz="900" b="0">
                 <a:solidFill>
                   <a:srgbClr val="5C6672"/>
                 </a:solidFill>
@@ -7951,7 +7951,7 @@
               </a:defRPr>
             </a:pPr>
             <a:r>
-              <a:t>ROS 2 Jazzy · Gazebo Harmonic · M18 · 따라 하기형 AGV 실습</a:t>
+              <a:t>ROS 2 기반 AGV End-to-End 개발 커리큘럼 · M18 · Block E</a:t>
             </a:r>
           </a:p>
         </p:txBody>
@@ -8497,7 +8497,7 @@
               <a:spcAft>
                 <a:spcPts val="0"/>
               </a:spcAft>
-              <a:defRPr sz="1000" b="0">
+              <a:defRPr sz="900" b="0">
                 <a:solidFill>
                   <a:srgbClr val="5C6672"/>
                 </a:solidFill>
@@ -8505,7 +8505,7 @@
               </a:defRPr>
             </a:pPr>
             <a:r>
-              <a:t>ROS 2 Jazzy · Gazebo Harmonic · M18 · 따라 하기형 AGV 실습</a:t>
+              <a:t>ROS 2 기반 AGV End-to-End 개발 커리큘럼 · M18 · Block E</a:t>
             </a:r>
           </a:p>
         </p:txBody>
@@ -9025,7 +9025,7 @@
               <a:spcAft>
                 <a:spcPts val="0"/>
               </a:spcAft>
-              <a:defRPr sz="1000" b="0">
+              <a:defRPr sz="900" b="0">
                 <a:solidFill>
                   <a:srgbClr val="5C6672"/>
                 </a:solidFill>
@@ -9033,7 +9033,7 @@
               </a:defRPr>
             </a:pPr>
             <a:r>
-              <a:t>ROS 2 Jazzy · Gazebo Harmonic · M18 · 따라 하기형 AGV 실습</a:t>
+              <a:t>ROS 2 기반 AGV End-to-End 개발 커리큘럼 · M18 · Block E</a:t>
             </a:r>
           </a:p>
         </p:txBody>
@@ -9814,7 +9814,7 @@
               <a:spcAft>
                 <a:spcPts val="0"/>
               </a:spcAft>
-              <a:defRPr sz="1000" b="0">
+              <a:defRPr sz="900" b="0">
                 <a:solidFill>
                   <a:srgbClr val="5C6672"/>
                 </a:solidFill>
@@ -9822,7 +9822,7 @@
               </a:defRPr>
             </a:pPr>
             <a:r>
-              <a:t>ROS 2 Jazzy · Gazebo Harmonic · M18 · 따라 하기형 AGV 실습</a:t>
+              <a:t>ROS 2 기반 AGV End-to-End 개발 커리큘럼 · M18 · Block E</a:t>
             </a:r>
           </a:p>
         </p:txBody>
@@ -10603,7 +10603,7 @@
               <a:spcAft>
                 <a:spcPts val="0"/>
               </a:spcAft>
-              <a:defRPr sz="1000" b="0">
+              <a:defRPr sz="900" b="0">
                 <a:solidFill>
                   <a:srgbClr val="5C6672"/>
                 </a:solidFill>
@@ -10611,7 +10611,7 @@
               </a:defRPr>
             </a:pPr>
             <a:r>
-              <a:t>ROS 2 Jazzy · Gazebo Harmonic · M18 · 따라 하기형 AGV 실습</a:t>
+              <a:t>ROS 2 기반 AGV End-to-End 개발 커리큘럼 · M18 · Block E</a:t>
             </a:r>
           </a:p>
         </p:txBody>
@@ -11400,7 +11400,7 @@
               <a:spcAft>
                 <a:spcPts val="0"/>
               </a:spcAft>
-              <a:defRPr sz="1000" b="0">
+              <a:defRPr sz="900" b="0">
                 <a:solidFill>
                   <a:srgbClr val="5C6672"/>
                 </a:solidFill>
@@ -11408,7 +11408,7 @@
               </a:defRPr>
             </a:pPr>
             <a:r>
-              <a:t>ROS 2 Jazzy · Gazebo Harmonic · M18 · 따라 하기형 AGV 실습</a:t>
+              <a:t>ROS 2 기반 AGV End-to-End 개발 커리큘럼 · M18 · Block E</a:t>
             </a:r>
           </a:p>
         </p:txBody>
@@ -12193,7 +12193,7 @@
               <a:spcAft>
                 <a:spcPts val="0"/>
               </a:spcAft>
-              <a:defRPr sz="1000" b="0">
+              <a:defRPr sz="900" b="0">
                 <a:solidFill>
                   <a:srgbClr val="5C6672"/>
                 </a:solidFill>
@@ -12201,7 +12201,7 @@
               </a:defRPr>
             </a:pPr>
             <a:r>
-              <a:t>ROS 2 Jazzy · Gazebo Harmonic · M18 · 따라 하기형 AGV 실습</a:t>
+              <a:t>ROS 2 기반 AGV End-to-End 개발 커리큘럼 · M18 · Block E</a:t>
             </a:r>
           </a:p>
         </p:txBody>
@@ -12762,7 +12762,7 @@
               <a:spcAft>
                 <a:spcPts val="0"/>
               </a:spcAft>
-              <a:defRPr sz="1000" b="0">
+              <a:defRPr sz="900" b="0">
                 <a:solidFill>
                   <a:srgbClr val="5C6672"/>
                 </a:solidFill>
@@ -12770,7 +12770,7 @@
               </a:defRPr>
             </a:pPr>
             <a:r>
-              <a:t>ROS 2 Jazzy · Gazebo Harmonic · M18 · 따라 하기형 AGV 실습</a:t>
+              <a:t>ROS 2 기반 AGV End-to-End 개발 커리큘럼 · M18 · Block E</a:t>
             </a:r>
           </a:p>
         </p:txBody>
@@ -13230,7 +13230,7 @@
               <a:spcAft>
                 <a:spcPts val="0"/>
               </a:spcAft>
-              <a:defRPr sz="1000" b="0">
+              <a:defRPr sz="900" b="0">
                 <a:solidFill>
                   <a:srgbClr val="5C6672"/>
                 </a:solidFill>
@@ -13238,7 +13238,7 @@
               </a:defRPr>
             </a:pPr>
             <a:r>
-              <a:t>ROS 2 Jazzy · Gazebo Harmonic · M18 · 따라 하기형 AGV 실습</a:t>
+              <a:t>ROS 2 기반 AGV End-to-End 개발 커리큘럼 · M18 · Block E</a:t>
             </a:r>
           </a:p>
         </p:txBody>
@@ -13698,7 +13698,7 @@
               <a:spcAft>
                 <a:spcPts val="0"/>
               </a:spcAft>
-              <a:defRPr sz="1000" b="0">
+              <a:defRPr sz="900" b="0">
                 <a:solidFill>
                   <a:srgbClr val="5C6672"/>
                 </a:solidFill>
@@ -13706,7 +13706,7 @@
               </a:defRPr>
             </a:pPr>
             <a:r>
-              <a:t>ROS 2 Jazzy · Gazebo Harmonic · M18 · 따라 하기형 AGV 실습</a:t>
+              <a:t>ROS 2 기반 AGV End-to-End 개발 커리큘럼 · M18 · Block E</a:t>
             </a:r>
           </a:p>
         </p:txBody>
@@ -14164,7 +14164,7 @@
               <a:spcAft>
                 <a:spcPts val="0"/>
               </a:spcAft>
-              <a:defRPr sz="1000" b="0">
+              <a:defRPr sz="900" b="0">
                 <a:solidFill>
                   <a:srgbClr val="5C6672"/>
                 </a:solidFill>
@@ -14172,7 +14172,7 @@
               </a:defRPr>
             </a:pPr>
             <a:r>
-              <a:t>ROS 2 Jazzy · Gazebo Harmonic · M18 · 따라 하기형 AGV 실습</a:t>
+              <a:t>ROS 2 기반 AGV End-to-End 개발 커리큘럼 · M18 · Block E</a:t>
             </a:r>
           </a:p>
         </p:txBody>
@@ -14625,7 +14625,7 @@
               <a:spcAft>
                 <a:spcPts val="0"/>
               </a:spcAft>
-              <a:defRPr sz="1000" b="0">
+              <a:defRPr sz="900" b="0">
                 <a:solidFill>
                   <a:srgbClr val="5C6672"/>
                 </a:solidFill>
@@ -14633,7 +14633,7 @@
               </a:defRPr>
             </a:pPr>
             <a:r>
-              <a:t>ROS 2 Jazzy · Gazebo Harmonic · M18 · 따라 하기형 AGV 실습</a:t>
+              <a:t>ROS 2 기반 AGV End-to-End 개발 커리큘럼 · M18 · Block E</a:t>
             </a:r>
           </a:p>
         </p:txBody>
@@ -15153,7 +15153,7 @@
               <a:spcAft>
                 <a:spcPts val="0"/>
               </a:spcAft>
-              <a:defRPr sz="1000" b="0">
+              <a:defRPr sz="900" b="0">
                 <a:solidFill>
                   <a:srgbClr val="5C6672"/>
                 </a:solidFill>
@@ -15161,7 +15161,7 @@
               </a:defRPr>
             </a:pPr>
             <a:r>
-              <a:t>ROS 2 Jazzy · Gazebo Harmonic · M18 · 따라 하기형 AGV 실습</a:t>
+              <a:t>ROS 2 기반 AGV End-to-End 개발 커리큘럼 · M18 · Block E</a:t>
             </a:r>
           </a:p>
         </p:txBody>
@@ -15942,7 +15942,7 @@
               <a:spcAft>
                 <a:spcPts val="0"/>
               </a:spcAft>
-              <a:defRPr sz="1000" b="0">
+              <a:defRPr sz="900" b="0">
                 <a:solidFill>
                   <a:srgbClr val="5C6672"/>
                 </a:solidFill>
@@ -15950,7 +15950,7 @@
               </a:defRPr>
             </a:pPr>
             <a:r>
-              <a:t>ROS 2 Jazzy · Gazebo Harmonic · M18 · 따라 하기형 AGV 실습</a:t>
+              <a:t>ROS 2 기반 AGV End-to-End 개발 커리큘럼 · M18 · Block E</a:t>
             </a:r>
           </a:p>
         </p:txBody>
@@ -16731,7 +16731,7 @@
               <a:spcAft>
                 <a:spcPts val="0"/>
               </a:spcAft>
-              <a:defRPr sz="1000" b="0">
+              <a:defRPr sz="900" b="0">
                 <a:solidFill>
                   <a:srgbClr val="5C6672"/>
                 </a:solidFill>
@@ -16739,7 +16739,7 @@
               </a:defRPr>
             </a:pPr>
             <a:r>
-              <a:t>ROS 2 Jazzy · Gazebo Harmonic · M18 · 따라 하기형 AGV 실습</a:t>
+              <a:t>ROS 2 기반 AGV End-to-End 개발 커리큘럼 · M18 · Block E</a:t>
             </a:r>
           </a:p>
         </p:txBody>
@@ -17528,7 +17528,7 @@
               <a:spcAft>
                 <a:spcPts val="0"/>
               </a:spcAft>
-              <a:defRPr sz="1000" b="0">
+              <a:defRPr sz="900" b="0">
                 <a:solidFill>
                   <a:srgbClr val="5C6672"/>
                 </a:solidFill>
@@ -17536,7 +17536,7 @@
               </a:defRPr>
             </a:pPr>
             <a:r>
-              <a:t>ROS 2 Jazzy · Gazebo Harmonic · M18 · 따라 하기형 AGV 실습</a:t>
+              <a:t>ROS 2 기반 AGV End-to-End 개발 커리큘럼 · M18 · Block E</a:t>
             </a:r>
           </a:p>
         </p:txBody>
@@ -18321,7 +18321,7 @@
               <a:spcAft>
                 <a:spcPts val="0"/>
               </a:spcAft>
-              <a:defRPr sz="1000" b="0">
+              <a:defRPr sz="900" b="0">
                 <a:solidFill>
                   <a:srgbClr val="5C6672"/>
                 </a:solidFill>
@@ -18329,7 +18329,7 @@
               </a:defRPr>
             </a:pPr>
             <a:r>
-              <a:t>ROS 2 Jazzy · Gazebo Harmonic · M18 · 따라 하기형 AGV 실습</a:t>
+              <a:t>ROS 2 기반 AGV End-to-End 개발 커리큘럼 · M18 · Block E</a:t>
             </a:r>
           </a:p>
         </p:txBody>
@@ -18894,7 +18894,7 @@
               <a:spcAft>
                 <a:spcPts val="0"/>
               </a:spcAft>
-              <a:defRPr sz="1000" b="0">
+              <a:defRPr sz="900" b="0">
                 <a:solidFill>
                   <a:srgbClr val="5C6672"/>
                 </a:solidFill>
@@ -18902,7 +18902,7 @@
               </a:defRPr>
             </a:pPr>
             <a:r>
-              <a:t>ROS 2 Jazzy · Gazebo Harmonic · M18 · 따라 하기형 AGV 실습</a:t>
+              <a:t>ROS 2 기반 AGV End-to-End 개발 커리큘럼 · M18 · Block E</a:t>
             </a:r>
           </a:p>
         </p:txBody>
@@ -19362,7 +19362,7 @@
               <a:spcAft>
                 <a:spcPts val="0"/>
               </a:spcAft>
-              <a:defRPr sz="1000" b="0">
+              <a:defRPr sz="900" b="0">
                 <a:solidFill>
                   <a:srgbClr val="5C6672"/>
                 </a:solidFill>
@@ -19370,7 +19370,7 @@
               </a:defRPr>
             </a:pPr>
             <a:r>
-              <a:t>ROS 2 Jazzy · Gazebo Harmonic · M18 · 따라 하기형 AGV 실습</a:t>
+              <a:t>ROS 2 기반 AGV End-to-End 개발 커리큘럼 · M18 · Block E</a:t>
             </a:r>
           </a:p>
         </p:txBody>
@@ -19830,7 +19830,7 @@
               <a:spcAft>
                 <a:spcPts val="0"/>
               </a:spcAft>
-              <a:defRPr sz="1000" b="0">
+              <a:defRPr sz="900" b="0">
                 <a:solidFill>
                   <a:srgbClr val="5C6672"/>
                 </a:solidFill>
@@ -19838,7 +19838,7 @@
               </a:defRPr>
             </a:pPr>
             <a:r>
-              <a:t>ROS 2 Jazzy · Gazebo Harmonic · M18 · 따라 하기형 AGV 실습</a:t>
+              <a:t>ROS 2 기반 AGV End-to-End 개발 커리큘럼 · M18 · Block E</a:t>
             </a:r>
           </a:p>
         </p:txBody>
@@ -20301,7 +20301,7 @@
               <a:spcAft>
                 <a:spcPts val="0"/>
               </a:spcAft>
-              <a:defRPr sz="1000" b="0">
+              <a:defRPr sz="900" b="0">
                 <a:solidFill>
                   <a:srgbClr val="5C6672"/>
                 </a:solidFill>
@@ -20309,7 +20309,7 @@
               </a:defRPr>
             </a:pPr>
             <a:r>
-              <a:t>ROS 2 Jazzy · Gazebo Harmonic · M18 · 따라 하기형 AGV 실습</a:t>
+              <a:t>ROS 2 기반 AGV End-to-End 개발 커리큘럼 · M18 · Block E</a:t>
             </a:r>
           </a:p>
         </p:txBody>
@@ -20755,7 +20755,7 @@
               <a:spcAft>
                 <a:spcPts val="0"/>
               </a:spcAft>
-              <a:defRPr sz="1000" b="0">
+              <a:defRPr sz="900" b="0">
                 <a:solidFill>
                   <a:srgbClr val="5C6672"/>
                 </a:solidFill>
@@ -20763,7 +20763,7 @@
               </a:defRPr>
             </a:pPr>
             <a:r>
-              <a:t>ROS 2 Jazzy · Gazebo Harmonic · M18 · 따라 하기형 AGV 실습</a:t>
+              <a:t>ROS 2 기반 AGV End-to-End 개발 커리큘럼 · M18 · Block E</a:t>
             </a:r>
           </a:p>
         </p:txBody>
@@ -21174,7 +21174,7 @@
               <a:spcAft>
                 <a:spcPts val="0"/>
               </a:spcAft>
-              <a:defRPr sz="1000" b="0">
+              <a:defRPr sz="900" b="0">
                 <a:solidFill>
                   <a:srgbClr val="5C6672"/>
                 </a:solidFill>
@@ -21182,7 +21182,7 @@
               </a:defRPr>
             </a:pPr>
             <a:r>
-              <a:t>ROS 2 Jazzy · Gazebo Harmonic · M18 · 따라 하기형 AGV 실습</a:t>
+              <a:t>ROS 2 기반 AGV End-to-End 개발 커리큘럼 · M18 · Block E</a:t>
             </a:r>
           </a:p>
         </p:txBody>
@@ -21702,7 +21702,7 @@
               <a:spcAft>
                 <a:spcPts val="0"/>
               </a:spcAft>
-              <a:defRPr sz="1000" b="0">
+              <a:defRPr sz="900" b="0">
                 <a:solidFill>
                   <a:srgbClr val="5C6672"/>
                 </a:solidFill>
@@ -21710,7 +21710,7 @@
               </a:defRPr>
             </a:pPr>
             <a:r>
-              <a:t>ROS 2 Jazzy · Gazebo Harmonic · M18 · 따라 하기형 AGV 실습</a:t>
+              <a:t>ROS 2 기반 AGV End-to-End 개발 커리큘럼 · M18 · Block E</a:t>
             </a:r>
           </a:p>
         </p:txBody>
@@ -22491,7 +22491,7 @@
               <a:spcAft>
                 <a:spcPts val="0"/>
               </a:spcAft>
-              <a:defRPr sz="1000" b="0">
+              <a:defRPr sz="900" b="0">
                 <a:solidFill>
                   <a:srgbClr val="5C6672"/>
                 </a:solidFill>
@@ -22499,7 +22499,7 @@
               </a:defRPr>
             </a:pPr>
             <a:r>
-              <a:t>ROS 2 Jazzy · Gazebo Harmonic · M18 · 따라 하기형 AGV 실습</a:t>
+              <a:t>ROS 2 기반 AGV End-to-End 개발 커리큘럼 · M18 · Block E</a:t>
             </a:r>
           </a:p>
         </p:txBody>
@@ -23060,7 +23060,7 @@
               <a:spcAft>
                 <a:spcPts val="0"/>
               </a:spcAft>
-              <a:defRPr sz="1000" b="0">
+              <a:defRPr sz="900" b="0">
                 <a:solidFill>
                   <a:srgbClr val="5C6672"/>
                 </a:solidFill>
@@ -23068,7 +23068,7 @@
               </a:defRPr>
             </a:pPr>
             <a:r>
-              <a:t>ROS 2 Jazzy · Gazebo Harmonic · M18 · 따라 하기형 AGV 실습</a:t>
+              <a:t>ROS 2 기반 AGV End-to-End 개발 커리큘럼 · M18 · Block E</a:t>
             </a:r>
           </a:p>
         </p:txBody>
@@ -23534,7 +23534,7 @@
               <a:spcAft>
                 <a:spcPts val="0"/>
               </a:spcAft>
-              <a:defRPr sz="1000" b="0">
+              <a:defRPr sz="900" b="0">
                 <a:solidFill>
                   <a:srgbClr val="5C6672"/>
                 </a:solidFill>
@@ -23542,7 +23542,7 @@
               </a:defRPr>
             </a:pPr>
             <a:r>
-              <a:t>ROS 2 Jazzy · Gazebo Harmonic · M18 · 따라 하기형 AGV 실습</a:t>
+              <a:t>ROS 2 기반 AGV End-to-End 개발 커리큘럼 · M18 · Block E</a:t>
             </a:r>
           </a:p>
         </p:txBody>
@@ -23964,7 +23964,7 @@
               <a:spcAft>
                 <a:spcPts val="0"/>
               </a:spcAft>
-              <a:defRPr sz="1000" b="0">
+              <a:defRPr sz="900" b="0">
                 <a:solidFill>
                   <a:srgbClr val="5C6672"/>
                 </a:solidFill>
@@ -23972,7 +23972,7 @@
               </a:defRPr>
             </a:pPr>
             <a:r>
-              <a:t>ROS 2 Jazzy · Gazebo Harmonic · M18 · 따라 하기형 AGV 실습</a:t>
+              <a:t>ROS 2 기반 AGV End-to-End 개발 커리큘럼 · M18 · Block E</a:t>
             </a:r>
           </a:p>
         </p:txBody>
@@ -24414,7 +24414,7 @@
               <a:spcAft>
                 <a:spcPts val="0"/>
               </a:spcAft>
-              <a:defRPr sz="1000" b="0">
+              <a:defRPr sz="900" b="0">
                 <a:solidFill>
                   <a:srgbClr val="5C6672"/>
                 </a:solidFill>
@@ -24422,7 +24422,7 @@
               </a:defRPr>
             </a:pPr>
             <a:r>
-              <a:t>ROS 2 Jazzy · Gazebo Harmonic · M18 · 따라 하기형 AGV 실습</a:t>
+              <a:t>ROS 2 기반 AGV End-to-End 개발 커리큘럼 · M18 · Block E</a:t>
             </a:r>
           </a:p>
         </p:txBody>
@@ -24868,7 +24868,7 @@
               <a:spcAft>
                 <a:spcPts val="0"/>
               </a:spcAft>
-              <a:defRPr sz="1000" b="0">
+              <a:defRPr sz="900" b="0">
                 <a:solidFill>
                   <a:srgbClr val="5C6672"/>
                 </a:solidFill>
@@ -24876,7 +24876,7 @@
               </a:defRPr>
             </a:pPr>
             <a:r>
-              <a:t>ROS 2 Jazzy · Gazebo Harmonic · M18 · 따라 하기형 AGV 실습</a:t>
+              <a:t>ROS 2 기반 AGV End-to-End 개발 커리큘럼 · M18 · Block E</a:t>
             </a:r>
           </a:p>
         </p:txBody>
@@ -25240,7 +25240,7 @@
               <a:spcAft>
                 <a:spcPts val="0"/>
               </a:spcAft>
-              <a:defRPr sz="1000" b="0">
+              <a:defRPr sz="900" b="0">
                 <a:solidFill>
                   <a:srgbClr val="5C6672"/>
                 </a:solidFill>
@@ -25248,7 +25248,7 @@
               </a:defRPr>
             </a:pPr>
             <a:r>
-              <a:t>ROS 2 Jazzy · Gazebo Harmonic · M18 · 따라 하기형 AGV 실습</a:t>
+              <a:t>ROS 2 기반 AGV End-to-End 개발 커리큘럼 · M18 · Block E</a:t>
             </a:r>
           </a:p>
         </p:txBody>
@@ -25477,7 +25477,7 @@
               <a:spcAft>
                 <a:spcPts val="0"/>
               </a:spcAft>
-              <a:defRPr sz="1000" b="0">
+              <a:defRPr sz="900" b="0">
                 <a:solidFill>
                   <a:srgbClr val="5C6672"/>
                 </a:solidFill>
@@ -25485,7 +25485,7 @@
               </a:defRPr>
             </a:pPr>
             <a:r>
-              <a:t>ROS 2 Jazzy · Gazebo Harmonic · M18 · 따라 하기형 AGV 실습</a:t>
+              <a:t>ROS 2 기반 AGV End-to-End 개발 커리큘럼 · M18 · Block E</a:t>
             </a:r>
           </a:p>
         </p:txBody>
@@ -25884,7 +25884,7 @@
               <a:spcAft>
                 <a:spcPts val="0"/>
               </a:spcAft>
-              <a:defRPr sz="1000" b="0">
+              <a:defRPr sz="900" b="0">
                 <a:solidFill>
                   <a:srgbClr val="5C6672"/>
                 </a:solidFill>
@@ -25892,7 +25892,7 @@
               </a:defRPr>
             </a:pPr>
             <a:r>
-              <a:t>ROS 2 Jazzy · Gazebo Harmonic · M18 · 따라 하기형 AGV 실습</a:t>
+              <a:t>ROS 2 기반 AGV End-to-End 개발 커리큘럼 · M18 · Block E</a:t>
             </a:r>
           </a:p>
         </p:txBody>
@@ -26217,7 +26217,7 @@
               <a:spcAft>
                 <a:spcPts val="0"/>
               </a:spcAft>
-              <a:defRPr sz="1000" b="0">
+              <a:defRPr sz="900" b="0">
                 <a:solidFill>
                   <a:srgbClr val="5C6672"/>
                 </a:solidFill>
@@ -26225,7 +26225,7 @@
               </a:defRPr>
             </a:pPr>
             <a:r>
-              <a:t>ROS 2 Jazzy · Gazebo Harmonic · M18 · 따라 하기형 AGV 실습</a:t>
+              <a:t>ROS 2 기반 AGV End-to-End 개발 커리큘럼 · M18 · Block E</a:t>
             </a:r>
           </a:p>
         </p:txBody>
@@ -26742,7 +26742,7 @@
               <a:spcAft>
                 <a:spcPts val="0"/>
               </a:spcAft>
-              <a:defRPr sz="1000" b="0">
+              <a:defRPr sz="900" b="0">
                 <a:solidFill>
                   <a:srgbClr val="5C6672"/>
                 </a:solidFill>
@@ -26750,7 +26750,7 @@
               </a:defRPr>
             </a:pPr>
             <a:r>
-              <a:t>ROS 2 Jazzy · Gazebo Harmonic · M18 · 따라 하기형 AGV 실습</a:t>
+              <a:t>ROS 2 기반 AGV End-to-End 개발 커리큘럼 · M18 · Block E</a:t>
             </a:r>
           </a:p>
         </p:txBody>
@@ -27126,7 +27126,7 @@
               <a:spcAft>
                 <a:spcPts val="0"/>
               </a:spcAft>
-              <a:defRPr sz="1000" b="0">
+              <a:defRPr sz="900" b="0">
                 <a:solidFill>
                   <a:srgbClr val="5C6672"/>
                 </a:solidFill>
@@ -27134,7 +27134,7 @@
               </a:defRPr>
             </a:pPr>
             <a:r>
-              <a:t>ROS 2 Jazzy · Gazebo Harmonic · M18 · 따라 하기형 AGV 실습</a:t>
+              <a:t>ROS 2 기반 AGV End-to-End 개발 커리큘럼 · M18 · Block E</a:t>
             </a:r>
           </a:p>
         </p:txBody>
@@ -27455,7 +27455,7 @@
               <a:spcAft>
                 <a:spcPts val="0"/>
               </a:spcAft>
-              <a:defRPr sz="1000" b="0">
+              <a:defRPr sz="900" b="0">
                 <a:solidFill>
                   <a:srgbClr val="5C6672"/>
                 </a:solidFill>
@@ -27463,7 +27463,7 @@
               </a:defRPr>
             </a:pPr>
             <a:r>
-              <a:t>ROS 2 Jazzy · Gazebo Harmonic · M18 · 따라 하기형 AGV 실습</a:t>
+              <a:t>ROS 2 기반 AGV End-to-End 개발 커리큘럼 · M18 · Block E</a:t>
             </a:r>
           </a:p>
         </p:txBody>
@@ -27874,7 +27874,7 @@
               <a:spcAft>
                 <a:spcPts val="0"/>
               </a:spcAft>
-              <a:defRPr sz="1000" b="0">
+              <a:defRPr sz="900" b="0">
                 <a:solidFill>
                   <a:srgbClr val="5C6672"/>
                 </a:solidFill>
@@ -27882,7 +27882,7 @@
               </a:defRPr>
             </a:pPr>
             <a:r>
-              <a:t>ROS 2 Jazzy · Gazebo Harmonic · M18 · 따라 하기형 AGV 실습</a:t>
+              <a:t>ROS 2 기반 AGV End-to-End 개발 커리큘럼 · M18 · Block E</a:t>
             </a:r>
           </a:p>
         </p:txBody>
@@ -28405,7 +28405,7 @@
               <a:spcAft>
                 <a:spcPts val="0"/>
               </a:spcAft>
-              <a:defRPr sz="1000" b="0">
+              <a:defRPr sz="900" b="0">
                 <a:solidFill>
                   <a:srgbClr val="5C6672"/>
                 </a:solidFill>
@@ -28413,7 +28413,7 @@
               </a:defRPr>
             </a:pPr>
             <a:r>
-              <a:t>ROS 2 Jazzy · Gazebo Harmonic · M18 · 따라 하기형 AGV 실습</a:t>
+              <a:t>ROS 2 기반 AGV End-to-End 개발 커리큘럼 · M18 · Block E</a:t>
             </a:r>
           </a:p>
         </p:txBody>
@@ -29045,7 +29045,7 @@
               <a:spcAft>
                 <a:spcPts val="0"/>
               </a:spcAft>
-              <a:defRPr sz="1000" b="0">
+              <a:defRPr sz="900" b="0">
                 <a:solidFill>
                   <a:srgbClr val="5C6672"/>
                 </a:solidFill>
@@ -29053,7 +29053,7 @@
               </a:defRPr>
             </a:pPr>
             <a:r>
-              <a:t>ROS 2 Jazzy · Gazebo Harmonic · M18 · 따라 하기형 AGV 실습</a:t>
+              <a:t>ROS 2 기반 AGV End-to-End 개발 커리큘럼 · M18 · Block E</a:t>
             </a:r>
           </a:p>
         </p:txBody>
@@ -29282,7 +29282,7 @@
               <a:spcAft>
                 <a:spcPts val="0"/>
               </a:spcAft>
-              <a:defRPr sz="1000" b="0">
+              <a:defRPr sz="900" b="0">
                 <a:solidFill>
                   <a:srgbClr val="5C6672"/>
                 </a:solidFill>
@@ -29290,7 +29290,7 @@
               </a:defRPr>
             </a:pPr>
             <a:r>
-              <a:t>ROS 2 Jazzy · Gazebo Harmonic · M18 · 따라 하기형 AGV 실습</a:t>
+              <a:t>ROS 2 기반 AGV End-to-End 개발 커리큘럼 · M18 · Block E</a:t>
             </a:r>
           </a:p>
         </p:txBody>
@@ -29836,7 +29836,7 @@
               <a:spcAft>
                 <a:spcPts val="0"/>
               </a:spcAft>
-              <a:defRPr sz="1000" b="0">
+              <a:defRPr sz="900" b="0">
                 <a:solidFill>
                   <a:srgbClr val="5C6672"/>
                 </a:solidFill>
@@ -29844,7 +29844,7 @@
               </a:defRPr>
             </a:pPr>
             <a:r>
-              <a:t>ROS 2 Jazzy · Gazebo Harmonic · M18 · 따라 하기형 AGV 실습</a:t>
+              <a:t>ROS 2 기반 AGV End-to-End 개발 커리큘럼 · M18 · Block E</a:t>
             </a:r>
           </a:p>
         </p:txBody>
@@ -30119,7 +30119,7 @@
               <a:spcAft>
                 <a:spcPts val="0"/>
               </a:spcAft>
-              <a:defRPr sz="1000" b="0">
+              <a:defRPr sz="900" b="0">
                 <a:solidFill>
                   <a:srgbClr val="5C6672"/>
                 </a:solidFill>
@@ -30127,7 +30127,7 @@
               </a:defRPr>
             </a:pPr>
             <a:r>
-              <a:t>ROS 2 Jazzy · Gazebo Harmonic · M18 · 따라 하기형 AGV 실습</a:t>
+              <a:t>ROS 2 기반 AGV End-to-End 개발 커리큘럼 · M18 · Block E</a:t>
             </a:r>
           </a:p>
         </p:txBody>

--- a/blocks/E_autonomy_logic/M18_obstacle_perception/M18_LiDAR_장애물_감지와_Perception_결합.pptx
+++ b/blocks/E_autonomy_logic/M18_obstacle_perception/M18_LiDAR_장애물_감지와_Perception_결합.pptx
@@ -49,6 +49,7 @@
     <p:sldId id="297" r:id="rId49"/>
     <p:sldId id="298" r:id="rId50"/>
     <p:sldId id="299" r:id="rId51"/>
+    <p:sldId id="300" r:id="rId52"/>
   </p:sldIdLst>
   <p:sldSz cx="12191999" cy="6858000" type="screen4x3"/>
   <p:notesSz cx="6858000" cy="9144000"/>
@@ -3380,7 +3381,7 @@
           </a:p>
           <a:p>
             <a:r>
-              <a:t>[확인] ① 명령/설정  ② 정상 출력 또는 화면  ③ 다음 검증 명령으로 재확인</a:t>
+              <a:t>[확인] 명령·설정과 화면의 topic·frame·결과 이름을 대조합니다.</a:t>
             </a:r>
           </a:p>
           <a:p>
@@ -3460,27 +3461,17 @@
           <a:lstStyle/>
           <a:p>
             <a:r>
-              <a:t>[설명] 검증 명령은 GUI 결과와 별도로 실행해 재현 가능한 완료 기준을 만든다.</a:t>
-            </a:r>
-          </a:p>
-          <a:p>
-            <a:r>
-              <a:t>[실행] ros2 topic info /cmd_vel_raw</a:t>
-            </a:r>
-          </a:p>
-          <a:p>
-            <a:r>
-              <a:t>ros2 topic info /cmd_vel</a:t>
-            </a:r>
-          </a:p>
-          <a:p>
-            <a:r>
-              <a:t>ros2 param get /safety_controller stop_distance</a:t>
-            </a:r>
-          </a:p>
-          <a:p>
-            <a:r>
-              <a:t>[확인] 0.5 m 안 장애물에서 forward cmd_vel이 zero Twist로 바뀌는 조건을 설명한다.</a:t>
+              <a:t>[설명] 실제 Ubuntu/ROS 2 환경에서 생성한 검증 화면이다.</a:t>
+            </a:r>
+          </a:p>
+          <a:p>
+            <a:r>
+              <a:t>[실행] 슬라이드의 명령 또는 파일 작성 단계를 진행한다.</a:t>
+            </a:r>
+          </a:p>
+          <a:p>
+            <a:r>
+              <a:t>[확인] ① 명령/설정  ② 정상 출력 또는 화면  ③ 다음 검증 명령으로 재확인</a:t>
             </a:r>
           </a:p>
           <a:p>
@@ -3650,17 +3641,27 @@
           <a:lstStyle/>
           <a:p>
             <a:r>
-              <a:t>[설명] 오류를 대신 해결하지 말고 증상부터 우선 확인 순서대로 교육생이 실행하게 한다.</a:t>
-            </a:r>
-          </a:p>
-          <a:p>
-            <a:r>
-              <a:t>[실행] 슬라이드의 명령 또는 파일 작성 단계를 진행한다.</a:t>
-            </a:r>
-          </a:p>
-          <a:p>
-            <a:r>
-              <a:t>[확인] 수정 뒤 첫 검증 명령을 다시 실행한다.</a:t>
+              <a:t>[설명] 검증 명령은 GUI 결과와 별도로 실행해 재현 가능한 완료 기준을 만든다.</a:t>
+            </a:r>
+          </a:p>
+          <a:p>
+            <a:r>
+              <a:t>[실행] ros2 topic info /cmd_vel_raw</a:t>
+            </a:r>
+          </a:p>
+          <a:p>
+            <a:r>
+              <a:t>ros2 topic info /cmd_vel</a:t>
+            </a:r>
+          </a:p>
+          <a:p>
+            <a:r>
+              <a:t>ros2 param get /safety_controller stop_distance</a:t>
+            </a:r>
+          </a:p>
+          <a:p>
+            <a:r>
+              <a:t>[확인] 0.5 m 안 장애물에서 forward cmd_vel이 zero Twist로 바뀌는 조건을 설명한다.</a:t>
             </a:r>
           </a:p>
           <a:p>
@@ -3670,7 +3671,7 @@
           </a:p>
           <a:p>
             <a:r>
-              <a:t>[오류] 슬라이드의 두 대표 오류를 먼저 사용한다.</a:t>
+              <a:t>[오류] 오류가 나면 현재 폴더, source, 파일 경로를 먼저 확인한다.</a:t>
             </a:r>
           </a:p>
         </p:txBody>
@@ -3740,37 +3741,17 @@
           <a:lstStyle/>
           <a:p>
             <a:r>
-              <a:t>[설명] Complete는 정답 복사본이 아니라 막혔을 때 비교·복구하는 안전망이다.</a:t>
-            </a:r>
-          </a:p>
-          <a:p>
-            <a:r>
-              <a:t>[실행] cd ~/ros2_curri</a:t>
-            </a:r>
-          </a:p>
-          <a:p>
-            <a:r>
-              <a:t>diff -ru my_agv_ws/src blocks/E_autonomy_logic/M18_obstacle_perception/complete/agv_ws/src || true</a:t>
-            </a:r>
-          </a:p>
-          <a:p>
-            <a:r>
-              <a:t>cp -a my_agv_ws/src my_agv_ws/src_before_M18</a:t>
-            </a:r>
-          </a:p>
-          <a:p>
-            <a:r>
-              <a:t>cp -a blocks/E_autonomy_logic/M18_obstacle_perception/complete/agv_ws/src/. my_agv_ws/src/</a:t>
-            </a:r>
-          </a:p>
-          <a:p>
-            <a:r>
-              <a:t>cd my_agv_ws &amp;&amp; colcon build --symlink-install &amp;&amp; source install/setup.bash</a:t>
-            </a:r>
-          </a:p>
-          <a:p>
-            <a:r>
-              <a:t>[확인] diff에서 내 파일과 Complete의 차이를 설명할 수 있다.</a:t>
+              <a:t>[설명] 오류를 대신 해결하지 말고 증상부터 우선 확인 순서대로 교육생이 실행하게 한다.</a:t>
+            </a:r>
+          </a:p>
+          <a:p>
+            <a:r>
+              <a:t>[실행] 슬라이드의 명령 또는 파일 작성 단계를 진행한다.</a:t>
+            </a:r>
+          </a:p>
+          <a:p>
+            <a:r>
+              <a:t>[확인] 수정 뒤 첫 검증 명령을 다시 실행한다.</a:t>
             </a:r>
           </a:p>
           <a:p>
@@ -3780,7 +3761,7 @@
           </a:p>
           <a:p>
             <a:r>
-              <a:t>[오류] 오류가 나면 현재 폴더, source, 파일 경로를 먼저 확인한다.</a:t>
+              <a:t>[오류] 슬라이드의 두 대표 오류를 먼저 사용한다.</a:t>
             </a:r>
           </a:p>
         </p:txBody>
@@ -3850,17 +3831,37 @@
           <a:lstStyle/>
           <a:p>
             <a:r>
-              <a:t>[설명] 교육생이 직접 한 값만 바꿔 원인과 결과를 연결하게 한다.</a:t>
-            </a:r>
-          </a:p>
-          <a:p>
-            <a:r>
-              <a:t>[실행] 슬라이드의 명령 또는 파일 작성 단계를 진행한다.</a:t>
-            </a:r>
-          </a:p>
-          <a:p>
-            <a:r>
-              <a:t>[확인] 원래 값과 변경 값을 모두 기록한다.</a:t>
+              <a:t>[설명] Complete는 정답 복사본이 아니라 막혔을 때 비교·복구하는 안전망이다.</a:t>
+            </a:r>
+          </a:p>
+          <a:p>
+            <a:r>
+              <a:t>[실행] cd ~/ros2_curri</a:t>
+            </a:r>
+          </a:p>
+          <a:p>
+            <a:r>
+              <a:t>diff -ru my_agv_ws/src blocks/E_autonomy_logic/M18_obstacle_perception/complete/agv_ws/src || true</a:t>
+            </a:r>
+          </a:p>
+          <a:p>
+            <a:r>
+              <a:t>cp -a my_agv_ws/src my_agv_ws/src_before_M18</a:t>
+            </a:r>
+          </a:p>
+          <a:p>
+            <a:r>
+              <a:t>cp -a blocks/E_autonomy_logic/M18_obstacle_perception/complete/agv_ws/src/. my_agv_ws/src/</a:t>
+            </a:r>
+          </a:p>
+          <a:p>
+            <a:r>
+              <a:t>cd my_agv_ws &amp;&amp; colcon build --symlink-install &amp;&amp; source install/setup.bash</a:t>
+            </a:r>
+          </a:p>
+          <a:p>
+            <a:r>
+              <a:t>[확인] diff에서 내 파일과 Complete의 차이를 설명할 수 있다.</a:t>
             </a:r>
           </a:p>
           <a:p>
@@ -3940,7 +3941,7 @@
           <a:lstStyle/>
           <a:p>
             <a:r>
-              <a:t>[설명] 교육생이 자신의 workspace·캡처·로그를 저장했는지 확인하고 다음 모듈의 시작 상태를 읽는다.</a:t>
+              <a:t>[설명] 교육생이 직접 한 값만 바꿔 원인과 결과를 연결하게 한다.</a:t>
             </a:r>
           </a:p>
           <a:p>
@@ -3950,7 +3951,7 @@
           </a:p>
           <a:p>
             <a:r>
-              <a:t>[확인] M19 FSM 시작 조건을 말할 수 있다.</a:t>
+              <a:t>[확인] 원래 값과 변경 값을 모두 기록한다.</a:t>
             </a:r>
           </a:p>
           <a:p>
@@ -3986,6 +3987,96 @@
 </file>
 
 <file path=ppt/notesSlides/notesSlide44.xml><?xml version="1.0" encoding="utf-8"?>
+<p:notes xmlns:a="http://schemas.openxmlformats.org/drawingml/2006/main" xmlns:p="http://schemas.openxmlformats.org/presentationml/2006/main" xmlns:r="http://schemas.openxmlformats.org/officeDocument/2006/relationships">
+  <p:cSld>
+    <p:spTree>
+      <p:nvGrpSpPr>
+        <p:cNvPr id="1" name=""/>
+        <p:cNvGrpSpPr/>
+        <p:nvPr/>
+      </p:nvGrpSpPr>
+      <p:grpSpPr>
+        <a:xfrm>
+          <a:off x="0" y="0"/>
+          <a:ext cx="0" cy="0"/>
+          <a:chOff x="0" y="0"/>
+          <a:chExt cx="0" cy="0"/>
+        </a:xfrm>
+      </p:grpSpPr>
+      <p:sp>
+        <p:nvSpPr>
+          <p:cNvPr id="2" name="Slide Image Placeholder 1"/>
+          <p:cNvSpPr>
+            <a:spLocks noGrp="1"/>
+          </p:cNvSpPr>
+          <p:nvPr>
+            <p:ph type="sldImg" idx="2"/>
+          </p:nvPr>
+        </p:nvSpPr>
+        <p:spPr/>
+      </p:sp>
+      <p:sp>
+        <p:nvSpPr>
+          <p:cNvPr id="3" name="Notes Placeholder 2"/>
+          <p:cNvSpPr>
+            <a:spLocks noGrp="1"/>
+          </p:cNvSpPr>
+          <p:nvPr>
+            <p:ph type="body" idx="3" sz="quarter"/>
+          </p:nvPr>
+        </p:nvSpPr>
+        <p:spPr/>
+        <p:txBody>
+          <a:bodyPr/>
+          <a:lstStyle/>
+          <a:p>
+            <a:r>
+              <a:t>[설명] 교육생이 자신의 workspace·캡처·로그를 저장했는지 확인하고 다음 모듈의 시작 상태를 읽는다.</a:t>
+            </a:r>
+          </a:p>
+          <a:p>
+            <a:r>
+              <a:t>[실행] 슬라이드의 명령 또는 파일 작성 단계를 진행한다.</a:t>
+            </a:r>
+          </a:p>
+          <a:p>
+            <a:r>
+              <a:t>[확인] M19 FSM 시작 조건을 말할 수 있다.</a:t>
+            </a:r>
+          </a:p>
+          <a:p>
+            <a:r>
+              <a:t>[멈춤] 교육생이 현재 체크포인트를 통과할 때까지 기다린다.</a:t>
+            </a:r>
+          </a:p>
+          <a:p>
+            <a:r>
+              <a:t>[오류] 오류가 나면 현재 폴더, source, 파일 경로를 먼저 확인한다.</a:t>
+            </a:r>
+          </a:p>
+        </p:txBody>
+      </p:sp>
+      <p:sp>
+        <p:nvSpPr>
+          <p:cNvPr id="4" name="Slide Number Placeholder 3"/>
+          <p:cNvSpPr>
+            <a:spLocks noGrp="1"/>
+          </p:cNvSpPr>
+          <p:nvPr>
+            <p:ph type="sldNum" idx="5" sz="quarter"/>
+          </p:nvPr>
+        </p:nvSpPr>
+        <p:spPr/>
+      </p:sp>
+    </p:spTree>
+  </p:cSld>
+  <p:clrMapOvr>
+    <a:masterClrMapping/>
+  </p:clrMapOvr>
+</p:notes>
+</file>
+
+<file path=ppt/notesSlides/notesSlide45.xml><?xml version="1.0" encoding="utf-8"?>
 <p:notes xmlns:a="http://schemas.openxmlformats.org/drawingml/2006/main" xmlns:p="http://schemas.openxmlformats.org/presentationml/2006/main" xmlns:r="http://schemas.openxmlformats.org/officeDocument/2006/relationships">
   <p:cSld>
     <p:spTree>
@@ -8801,7 +8892,7 @@
           </a:fontRef>
         </p:style>
         <p:txBody>
-          <a:bodyPr rtlCol="0" anchor="ctr" wrap="square" lIns="73152" rIns="73152" tIns="36576" bIns="36576"/>
+          <a:bodyPr rtlCol="0" anchor="ctr" wrap="square" lIns="109728" rIns="109728" tIns="73152" bIns="73152"/>
           <a:lstStyle/>
           <a:p>
             <a:pPr algn="l">
@@ -8818,7 +8909,19 @@
             <a:r>
               <a:t>mkdir -p ~/ros2_curri/my_agv_ws/src/agv_sensors/agv_sensors</a:t>
             </a:r>
-            <a:br/>
+          </a:p>
+          <a:p>
+            <a:pPr algn="l">
+              <a:spcAft>
+                <a:spcPts val="0"/>
+              </a:spcAft>
+              <a:defRPr sz="1600" b="0">
+                <a:solidFill>
+                  <a:srgbClr val="FFFFFF"/>
+                </a:solidFill>
+                <a:latin typeface="DejaVu Sans Mono"/>
+              </a:defRPr>
+            </a:pPr>
             <a:r>
               <a:t>nano ~/ros2_curri/my_agv_ws/src/agv_sensors/agv_sensors/lidar_processor.py</a:t>
             </a:r>
@@ -13011,7 +13114,7 @@
           </a:fontRef>
         </p:style>
         <p:txBody>
-          <a:bodyPr rtlCol="0" anchor="ctr" wrap="square" lIns="164592" rIns="164592" tIns="109728" bIns="36576"/>
+          <a:bodyPr rtlCol="0" anchor="ctr" wrap="square" lIns="164592" rIns="164592" tIns="109728" bIns="73152"/>
           <a:lstStyle/>
           <a:p>
             <a:pPr algn="l">
@@ -13028,41 +13131,173 @@
             <a:r>
               <a:t>import math</a:t>
             </a:r>
-            <a:br/>
+          </a:p>
+          <a:p>
+            <a:pPr algn="l">
+              <a:spcAft>
+                <a:spcPts val="0"/>
+              </a:spcAft>
+              <a:defRPr sz="1400" b="0">
+                <a:solidFill>
+                  <a:srgbClr val="FFFFFF"/>
+                </a:solidFill>
+                <a:latin typeface="DejaVu Sans Mono"/>
+              </a:defRPr>
+            </a:pPr>
             <a:r>
               <a:t>import rclpy</a:t>
             </a:r>
-            <a:br/>
+          </a:p>
+          <a:p>
+            <a:pPr algn="l">
+              <a:spcAft>
+                <a:spcPts val="0"/>
+              </a:spcAft>
+              <a:defRPr sz="1400" b="0">
+                <a:solidFill>
+                  <a:srgbClr val="FFFFFF"/>
+                </a:solidFill>
+                <a:latin typeface="DejaVu Sans Mono"/>
+              </a:defRPr>
+            </a:pPr>
             <a:r>
               <a:t>from rclpy.node import Node</a:t>
             </a:r>
-            <a:br/>
+          </a:p>
+          <a:p>
+            <a:pPr algn="l">
+              <a:spcAft>
+                <a:spcPts val="0"/>
+              </a:spcAft>
+              <a:defRPr sz="1400" b="0">
+                <a:solidFill>
+                  <a:srgbClr val="FFFFFF"/>
+                </a:solidFill>
+                <a:latin typeface="DejaVu Sans Mono"/>
+              </a:defRPr>
+            </a:pPr>
             <a:r>
               <a:t>from rclpy.qos import qos_profile_sensor_data</a:t>
             </a:r>
-            <a:br/>
+          </a:p>
+          <a:p>
+            <a:pPr algn="l">
+              <a:spcAft>
+                <a:spcPts val="0"/>
+              </a:spcAft>
+              <a:defRPr sz="1400" b="0">
+                <a:solidFill>
+                  <a:srgbClr val="FFFFFF"/>
+                </a:solidFill>
+                <a:latin typeface="DejaVu Sans Mono"/>
+              </a:defRPr>
+            </a:pPr>
             <a:r>
               <a:t>from sensor_msgs.msg import LaserScan</a:t>
             </a:r>
-            <a:br/>
+          </a:p>
+          <a:p>
+            <a:pPr algn="l">
+              <a:spcAft>
+                <a:spcPts val="0"/>
+              </a:spcAft>
+              <a:defRPr sz="1400" b="0">
+                <a:solidFill>
+                  <a:srgbClr val="FFFFFF"/>
+                </a:solidFill>
+                <a:latin typeface="DejaVu Sans Mono"/>
+              </a:defRPr>
+            </a:pPr>
             <a:r>
               <a:t>from std_msgs.msg import Float32</a:t>
             </a:r>
-            <a:br/>
-            <a:br/>
+          </a:p>
+          <a:p>
+            <a:pPr algn="l">
+              <a:spcAft>
+                <a:spcPts val="0"/>
+              </a:spcAft>
+              <a:defRPr sz="1400" b="0">
+                <a:solidFill>
+                  <a:srgbClr val="FFFFFF"/>
+                </a:solidFill>
+                <a:latin typeface="DejaVu Sans Mono"/>
+              </a:defRPr>
+            </a:pPr>
+          </a:p>
+          <a:p>
+            <a:pPr algn="l">
+              <a:spcAft>
+                <a:spcPts val="0"/>
+              </a:spcAft>
+              <a:defRPr sz="1400" b="0">
+                <a:solidFill>
+                  <a:srgbClr val="FFFFFF"/>
+                </a:solidFill>
+                <a:latin typeface="DejaVu Sans Mono"/>
+              </a:defRPr>
+            </a:pPr>
             <a:r>
               <a:t>class LidarProcessor(Node):</a:t>
             </a:r>
-            <a:br/>
-            <a:br/>
+          </a:p>
+          <a:p>
+            <a:pPr algn="l">
+              <a:spcAft>
+                <a:spcPts val="0"/>
+              </a:spcAft>
+              <a:defRPr sz="1400" b="0">
+                <a:solidFill>
+                  <a:srgbClr val="FFFFFF"/>
+                </a:solidFill>
+                <a:latin typeface="DejaVu Sans Mono"/>
+              </a:defRPr>
+            </a:pPr>
+          </a:p>
+          <a:p>
+            <a:pPr algn="l">
+              <a:spcAft>
+                <a:spcPts val="0"/>
+              </a:spcAft>
+              <a:defRPr sz="1400" b="0">
+                <a:solidFill>
+                  <a:srgbClr val="FFFFFF"/>
+                </a:solidFill>
+                <a:latin typeface="DejaVu Sans Mono"/>
+              </a:defRPr>
+            </a:pPr>
             <a:r>
               <a:t>    def __init__(self):</a:t>
             </a:r>
-            <a:br/>
+          </a:p>
+          <a:p>
+            <a:pPr algn="l">
+              <a:spcAft>
+                <a:spcPts val="0"/>
+              </a:spcAft>
+              <a:defRPr sz="1400" b="0">
+                <a:solidFill>
+                  <a:srgbClr val="FFFFFF"/>
+                </a:solidFill>
+                <a:latin typeface="DejaVu Sans Mono"/>
+              </a:defRPr>
+            </a:pPr>
             <a:r>
               <a:t>        super().__init__('lidar_processor')</a:t>
             </a:r>
-            <a:br/>
+          </a:p>
+          <a:p>
+            <a:pPr algn="l">
+              <a:spcAft>
+                <a:spcPts val="0"/>
+              </a:spcAft>
+              <a:defRPr sz="1400" b="0">
+                <a:solidFill>
+                  <a:srgbClr val="FFFFFF"/>
+                </a:solidFill>
+                <a:latin typeface="DejaVu Sans Mono"/>
+              </a:defRPr>
+            </a:pPr>
             <a:r>
               <a:t>        self.declare_parameter('front_half_angle_deg', 15.0)</a:t>
             </a:r>
@@ -13479,7 +13714,7 @@
           </a:fontRef>
         </p:style>
         <p:txBody>
-          <a:bodyPr rtlCol="0" anchor="ctr" wrap="square" lIns="164592" rIns="164592" tIns="109728" bIns="36576"/>
+          <a:bodyPr rtlCol="0" anchor="ctr" wrap="square" lIns="164592" rIns="164592" tIns="109728" bIns="73152"/>
           <a:lstStyle/>
           <a:p>
             <a:pPr algn="l">
@@ -13496,41 +13731,173 @@
             <a:r>
               <a:t>        self.subscription = self.create_subscription(LaserScan, '/scan', self.callback,</a:t>
             </a:r>
-            <a:br/>
+          </a:p>
+          <a:p>
+            <a:pPr algn="l">
+              <a:spcAft>
+                <a:spcPts val="0"/>
+              </a:spcAft>
+              <a:defRPr sz="1400" b="0">
+                <a:solidFill>
+                  <a:srgbClr val="FFFFFF"/>
+                </a:solidFill>
+                <a:latin typeface="DejaVu Sans Mono"/>
+              </a:defRPr>
+            </a:pPr>
             <a:r>
               <a:t>            qos_profile_sensor_data)</a:t>
             </a:r>
-            <a:br/>
+          </a:p>
+          <a:p>
+            <a:pPr algn="l">
+              <a:spcAft>
+                <a:spcPts val="0"/>
+              </a:spcAft>
+              <a:defRPr sz="1400" b="0">
+                <a:solidFill>
+                  <a:srgbClr val="FFFFFF"/>
+                </a:solidFill>
+                <a:latin typeface="DejaVu Sans Mono"/>
+              </a:defRPr>
+            </a:pPr>
             <a:r>
               <a:t>        self.publisher = self.create_publisher(Float32, '/obstacle_distance', 10)</a:t>
             </a:r>
-            <a:br/>
-            <a:br/>
+          </a:p>
+          <a:p>
+            <a:pPr algn="l">
+              <a:spcAft>
+                <a:spcPts val="0"/>
+              </a:spcAft>
+              <a:defRPr sz="1400" b="0">
+                <a:solidFill>
+                  <a:srgbClr val="FFFFFF"/>
+                </a:solidFill>
+                <a:latin typeface="DejaVu Sans Mono"/>
+              </a:defRPr>
+            </a:pPr>
+          </a:p>
+          <a:p>
+            <a:pPr algn="l">
+              <a:spcAft>
+                <a:spcPts val="0"/>
+              </a:spcAft>
+              <a:defRPr sz="1400" b="0">
+                <a:solidFill>
+                  <a:srgbClr val="FFFFFF"/>
+                </a:solidFill>
+                <a:latin typeface="DejaVu Sans Mono"/>
+              </a:defRPr>
+            </a:pPr>
             <a:r>
               <a:t>    def callback(self, scan):</a:t>
             </a:r>
-            <a:br/>
+          </a:p>
+          <a:p>
+            <a:pPr algn="l">
+              <a:spcAft>
+                <a:spcPts val="0"/>
+              </a:spcAft>
+              <a:defRPr sz="1400" b="0">
+                <a:solidFill>
+                  <a:srgbClr val="FFFFFF"/>
+                </a:solidFill>
+                <a:latin typeface="DejaVu Sans Mono"/>
+              </a:defRPr>
+            </a:pPr>
             <a:r>
               <a:t>        half_angle = math.radians(self.get_parameter('front_half_angle_deg').value)</a:t>
             </a:r>
-            <a:br/>
+          </a:p>
+          <a:p>
+            <a:pPr algn="l">
+              <a:spcAft>
+                <a:spcPts val="0"/>
+              </a:spcAft>
+              <a:defRPr sz="1400" b="0">
+                <a:solidFill>
+                  <a:srgbClr val="FFFFFF"/>
+                </a:solidFill>
+                <a:latin typeface="DejaVu Sans Mono"/>
+              </a:defRPr>
+            </a:pPr>
             <a:r>
               <a:t>        front_ranges = [distance for index,</a:t>
             </a:r>
-            <a:br/>
+          </a:p>
+          <a:p>
+            <a:pPr algn="l">
+              <a:spcAft>
+                <a:spcPts val="0"/>
+              </a:spcAft>
+              <a:defRPr sz="1400" b="0">
+                <a:solidFill>
+                  <a:srgbClr val="FFFFFF"/>
+                </a:solidFill>
+                <a:latin typeface="DejaVu Sans Mono"/>
+              </a:defRPr>
+            </a:pPr>
             <a:r>
               <a:t>            distance in enumerate(scan.ranges) if abs(scan.angle_min + index * scan.angle_increment) &lt;= half_angle and math.isfinite(distance)]</a:t>
             </a:r>
-            <a:br/>
+          </a:p>
+          <a:p>
+            <a:pPr algn="l">
+              <a:spcAft>
+                <a:spcPts val="0"/>
+              </a:spcAft>
+              <a:defRPr sz="1400" b="0">
+                <a:solidFill>
+                  <a:srgbClr val="FFFFFF"/>
+                </a:solidFill>
+                <a:latin typeface="DejaVu Sans Mono"/>
+              </a:defRPr>
+            </a:pPr>
             <a:r>
               <a:t>        result = Float32(data=min(front_ranges) if front_ranges else float('inf'))</a:t>
             </a:r>
-            <a:br/>
+          </a:p>
+          <a:p>
+            <a:pPr algn="l">
+              <a:spcAft>
+                <a:spcPts val="0"/>
+              </a:spcAft>
+              <a:defRPr sz="1400" b="0">
+                <a:solidFill>
+                  <a:srgbClr val="FFFFFF"/>
+                </a:solidFill>
+                <a:latin typeface="DejaVu Sans Mono"/>
+              </a:defRPr>
+            </a:pPr>
             <a:r>
               <a:t>        self.publisher.publish(result)</a:t>
             </a:r>
-            <a:br/>
-            <a:br/>
+          </a:p>
+          <a:p>
+            <a:pPr algn="l">
+              <a:spcAft>
+                <a:spcPts val="0"/>
+              </a:spcAft>
+              <a:defRPr sz="1400" b="0">
+                <a:solidFill>
+                  <a:srgbClr val="FFFFFF"/>
+                </a:solidFill>
+                <a:latin typeface="DejaVu Sans Mono"/>
+              </a:defRPr>
+            </a:pPr>
+          </a:p>
+          <a:p>
+            <a:pPr algn="l">
+              <a:spcAft>
+                <a:spcPts val="0"/>
+              </a:spcAft>
+              <a:defRPr sz="1400" b="0">
+                <a:solidFill>
+                  <a:srgbClr val="FFFFFF"/>
+                </a:solidFill>
+                <a:latin typeface="DejaVu Sans Mono"/>
+              </a:defRPr>
+            </a:pPr>
             <a:r>
               <a:t>def main():</a:t>
             </a:r>
@@ -13947,7 +14314,7 @@
           </a:fontRef>
         </p:style>
         <p:txBody>
-          <a:bodyPr rtlCol="0" anchor="ctr" wrap="square" lIns="164592" rIns="164592" tIns="109728" bIns="36576"/>
+          <a:bodyPr rtlCol="0" anchor="ctr" wrap="square" lIns="164592" rIns="164592" tIns="109728" bIns="73152"/>
           <a:lstStyle/>
           <a:p>
             <a:pPr algn="l">
@@ -13964,39 +14331,147 @@
             <a:r>
               <a:t>    rclpy.init()</a:t>
             </a:r>
-            <a:br/>
+          </a:p>
+          <a:p>
+            <a:pPr algn="l">
+              <a:spcAft>
+                <a:spcPts val="0"/>
+              </a:spcAft>
+              <a:defRPr sz="1400" b="0">
+                <a:solidFill>
+                  <a:srgbClr val="FFFFFF"/>
+                </a:solidFill>
+                <a:latin typeface="DejaVu Sans Mono"/>
+              </a:defRPr>
+            </a:pPr>
             <a:r>
               <a:t>    node = LidarProcessor()</a:t>
             </a:r>
-            <a:br/>
+          </a:p>
+          <a:p>
+            <a:pPr algn="l">
+              <a:spcAft>
+                <a:spcPts val="0"/>
+              </a:spcAft>
+              <a:defRPr sz="1400" b="0">
+                <a:solidFill>
+                  <a:srgbClr val="FFFFFF"/>
+                </a:solidFill>
+                <a:latin typeface="DejaVu Sans Mono"/>
+              </a:defRPr>
+            </a:pPr>
             <a:r>
               <a:t>    try:</a:t>
             </a:r>
-            <a:br/>
+          </a:p>
+          <a:p>
+            <a:pPr algn="l">
+              <a:spcAft>
+                <a:spcPts val="0"/>
+              </a:spcAft>
+              <a:defRPr sz="1400" b="0">
+                <a:solidFill>
+                  <a:srgbClr val="FFFFFF"/>
+                </a:solidFill>
+                <a:latin typeface="DejaVu Sans Mono"/>
+              </a:defRPr>
+            </a:pPr>
             <a:r>
               <a:t>        rclpy.spin(node)</a:t>
             </a:r>
-            <a:br/>
+          </a:p>
+          <a:p>
+            <a:pPr algn="l">
+              <a:spcAft>
+                <a:spcPts val="0"/>
+              </a:spcAft>
+              <a:defRPr sz="1400" b="0">
+                <a:solidFill>
+                  <a:srgbClr val="FFFFFF"/>
+                </a:solidFill>
+                <a:latin typeface="DejaVu Sans Mono"/>
+              </a:defRPr>
+            </a:pPr>
             <a:r>
               <a:t>    except KeyboardInterrupt:</a:t>
             </a:r>
-            <a:br/>
+          </a:p>
+          <a:p>
+            <a:pPr algn="l">
+              <a:spcAft>
+                <a:spcPts val="0"/>
+              </a:spcAft>
+              <a:defRPr sz="1400" b="0">
+                <a:solidFill>
+                  <a:srgbClr val="FFFFFF"/>
+                </a:solidFill>
+                <a:latin typeface="DejaVu Sans Mono"/>
+              </a:defRPr>
+            </a:pPr>
             <a:r>
               <a:t>        pass</a:t>
             </a:r>
-            <a:br/>
+          </a:p>
+          <a:p>
+            <a:pPr algn="l">
+              <a:spcAft>
+                <a:spcPts val="0"/>
+              </a:spcAft>
+              <a:defRPr sz="1400" b="0">
+                <a:solidFill>
+                  <a:srgbClr val="FFFFFF"/>
+                </a:solidFill>
+                <a:latin typeface="DejaVu Sans Mono"/>
+              </a:defRPr>
+            </a:pPr>
             <a:r>
               <a:t>    finally:</a:t>
             </a:r>
-            <a:br/>
+          </a:p>
+          <a:p>
+            <a:pPr algn="l">
+              <a:spcAft>
+                <a:spcPts val="0"/>
+              </a:spcAft>
+              <a:defRPr sz="1400" b="0">
+                <a:solidFill>
+                  <a:srgbClr val="FFFFFF"/>
+                </a:solidFill>
+                <a:latin typeface="DejaVu Sans Mono"/>
+              </a:defRPr>
+            </a:pPr>
             <a:r>
               <a:t>        node.destroy_node()</a:t>
             </a:r>
-            <a:br/>
+          </a:p>
+          <a:p>
+            <a:pPr algn="l">
+              <a:spcAft>
+                <a:spcPts val="0"/>
+              </a:spcAft>
+              <a:defRPr sz="1400" b="0">
+                <a:solidFill>
+                  <a:srgbClr val="FFFFFF"/>
+                </a:solidFill>
+                <a:latin typeface="DejaVu Sans Mono"/>
+              </a:defRPr>
+            </a:pPr>
             <a:r>
               <a:t>        if rclpy.ok():</a:t>
             </a:r>
-            <a:br/>
+          </a:p>
+          <a:p>
+            <a:pPr algn="l">
+              <a:spcAft>
+                <a:spcPts val="0"/>
+              </a:spcAft>
+              <a:defRPr sz="1400" b="0">
+                <a:solidFill>
+                  <a:srgbClr val="FFFFFF"/>
+                </a:solidFill>
+                <a:latin typeface="DejaVu Sans Mono"/>
+              </a:defRPr>
+            </a:pPr>
             <a:r>
               <a:t>            rclpy.shutdown()</a:t>
             </a:r>
@@ -14929,7 +15404,7 @@
           </a:fontRef>
         </p:style>
         <p:txBody>
-          <a:bodyPr rtlCol="0" anchor="ctr" wrap="square" lIns="73152" rIns="73152" tIns="36576" bIns="36576"/>
+          <a:bodyPr rtlCol="0" anchor="ctr" wrap="square" lIns="109728" rIns="109728" tIns="73152" bIns="73152"/>
           <a:lstStyle/>
           <a:p>
             <a:pPr algn="l">
@@ -14946,7 +15421,19 @@
             <a:r>
               <a:t>mkdir -p ~/ros2_curri/my_agv_ws/src/agv_control/agv_control</a:t>
             </a:r>
-            <a:br/>
+          </a:p>
+          <a:p>
+            <a:pPr algn="l">
+              <a:spcAft>
+                <a:spcPts val="0"/>
+              </a:spcAft>
+              <a:defRPr sz="1600" b="0">
+                <a:solidFill>
+                  <a:srgbClr val="FFFFFF"/>
+                </a:solidFill>
+                <a:latin typeface="DejaVu Sans Mono"/>
+              </a:defRPr>
+            </a:pPr>
             <a:r>
               <a:t>nano ~/ros2_curri/my_agv_ws/src/agv_control/agv_control/safety_controller.py</a:t>
             </a:r>
@@ -19143,7 +19630,7 @@
           </a:fontRef>
         </p:style>
         <p:txBody>
-          <a:bodyPr rtlCol="0" anchor="ctr" wrap="square" lIns="164592" rIns="164592" tIns="109728" bIns="36576"/>
+          <a:bodyPr rtlCol="0" anchor="ctr" wrap="square" lIns="164592" rIns="164592" tIns="109728" bIns="73152"/>
           <a:lstStyle/>
           <a:p>
             <a:pPr algn="l">
@@ -19160,41 +19647,173 @@
             <a:r>
               <a:t>import math</a:t>
             </a:r>
-            <a:br/>
+          </a:p>
+          <a:p>
+            <a:pPr algn="l">
+              <a:spcAft>
+                <a:spcPts val="0"/>
+              </a:spcAft>
+              <a:defRPr sz="1400" b="0">
+                <a:solidFill>
+                  <a:srgbClr val="FFFFFF"/>
+                </a:solidFill>
+                <a:latin typeface="DejaVu Sans Mono"/>
+              </a:defRPr>
+            </a:pPr>
             <a:r>
               <a:t>import rclpy</a:t>
             </a:r>
-            <a:br/>
+          </a:p>
+          <a:p>
+            <a:pPr algn="l">
+              <a:spcAft>
+                <a:spcPts val="0"/>
+              </a:spcAft>
+              <a:defRPr sz="1400" b="0">
+                <a:solidFill>
+                  <a:srgbClr val="FFFFFF"/>
+                </a:solidFill>
+                <a:latin typeface="DejaVu Sans Mono"/>
+              </a:defRPr>
+            </a:pPr>
             <a:r>
               <a:t>from rclpy.node import Node</a:t>
             </a:r>
-            <a:br/>
+          </a:p>
+          <a:p>
+            <a:pPr algn="l">
+              <a:spcAft>
+                <a:spcPts val="0"/>
+              </a:spcAft>
+              <a:defRPr sz="1400" b="0">
+                <a:solidFill>
+                  <a:srgbClr val="FFFFFF"/>
+                </a:solidFill>
+                <a:latin typeface="DejaVu Sans Mono"/>
+              </a:defRPr>
+            </a:pPr>
             <a:r>
               <a:t>from geometry_msgs.msg import Twist</a:t>
             </a:r>
-            <a:br/>
+          </a:p>
+          <a:p>
+            <a:pPr algn="l">
+              <a:spcAft>
+                <a:spcPts val="0"/>
+              </a:spcAft>
+              <a:defRPr sz="1400" b="0">
+                <a:solidFill>
+                  <a:srgbClr val="FFFFFF"/>
+                </a:solidFill>
+                <a:latin typeface="DejaVu Sans Mono"/>
+              </a:defRPr>
+            </a:pPr>
             <a:r>
               <a:t>from sensor_msgs.msg import LaserScan</a:t>
             </a:r>
-            <a:br/>
-            <a:br/>
+          </a:p>
+          <a:p>
+            <a:pPr algn="l">
+              <a:spcAft>
+                <a:spcPts val="0"/>
+              </a:spcAft>
+              <a:defRPr sz="1400" b="0">
+                <a:solidFill>
+                  <a:srgbClr val="FFFFFF"/>
+                </a:solidFill>
+                <a:latin typeface="DejaVu Sans Mono"/>
+              </a:defRPr>
+            </a:pPr>
+          </a:p>
+          <a:p>
+            <a:pPr algn="l">
+              <a:spcAft>
+                <a:spcPts val="0"/>
+              </a:spcAft>
+              <a:defRPr sz="1400" b="0">
+                <a:solidFill>
+                  <a:srgbClr val="FFFFFF"/>
+                </a:solidFill>
+                <a:latin typeface="DejaVu Sans Mono"/>
+              </a:defRPr>
+            </a:pPr>
             <a:r>
               <a:t>class SafetyController(Node):</a:t>
             </a:r>
-            <a:br/>
+          </a:p>
+          <a:p>
+            <a:pPr algn="l">
+              <a:spcAft>
+                <a:spcPts val="0"/>
+              </a:spcAft>
+              <a:defRPr sz="1400" b="0">
+                <a:solidFill>
+                  <a:srgbClr val="FFFFFF"/>
+                </a:solidFill>
+                <a:latin typeface="DejaVu Sans Mono"/>
+              </a:defRPr>
+            </a:pPr>
             <a:r>
               <a:t>    """Pass a desired command through unless an obstacle is within stop_distance."""</a:t>
             </a:r>
-            <a:br/>
-            <a:br/>
+          </a:p>
+          <a:p>
+            <a:pPr algn="l">
+              <a:spcAft>
+                <a:spcPts val="0"/>
+              </a:spcAft>
+              <a:defRPr sz="1400" b="0">
+                <a:solidFill>
+                  <a:srgbClr val="FFFFFF"/>
+                </a:solidFill>
+                <a:latin typeface="DejaVu Sans Mono"/>
+              </a:defRPr>
+            </a:pPr>
+          </a:p>
+          <a:p>
+            <a:pPr algn="l">
+              <a:spcAft>
+                <a:spcPts val="0"/>
+              </a:spcAft>
+              <a:defRPr sz="1400" b="0">
+                <a:solidFill>
+                  <a:srgbClr val="FFFFFF"/>
+                </a:solidFill>
+                <a:latin typeface="DejaVu Sans Mono"/>
+              </a:defRPr>
+            </a:pPr>
             <a:r>
               <a:t>    def __init__(self):</a:t>
             </a:r>
-            <a:br/>
+          </a:p>
+          <a:p>
+            <a:pPr algn="l">
+              <a:spcAft>
+                <a:spcPts val="0"/>
+              </a:spcAft>
+              <a:defRPr sz="1400" b="0">
+                <a:solidFill>
+                  <a:srgbClr val="FFFFFF"/>
+                </a:solidFill>
+                <a:latin typeface="DejaVu Sans Mono"/>
+              </a:defRPr>
+            </a:pPr>
             <a:r>
               <a:t>        super().__init__('safety_controller')</a:t>
             </a:r>
-            <a:br/>
+          </a:p>
+          <a:p>
+            <a:pPr algn="l">
+              <a:spcAft>
+                <a:spcPts val="0"/>
+              </a:spcAft>
+              <a:defRPr sz="1400" b="0">
+                <a:solidFill>
+                  <a:srgbClr val="FFFFFF"/>
+                </a:solidFill>
+                <a:latin typeface="DejaVu Sans Mono"/>
+              </a:defRPr>
+            </a:pPr>
             <a:r>
               <a:t>        self.declare_parameter('stop_distance', 0.5)</a:t>
             </a:r>
@@ -19611,7 +20230,7 @@
           </a:fontRef>
         </p:style>
         <p:txBody>
-          <a:bodyPr rtlCol="0" anchor="ctr" wrap="square" lIns="164592" rIns="164592" tIns="109728" bIns="36576"/>
+          <a:bodyPr rtlCol="0" anchor="ctr" wrap="square" lIns="164592" rIns="164592" tIns="109728" bIns="73152"/>
           <a:lstStyle/>
           <a:p>
             <a:pPr algn="l">
@@ -19628,44 +20247,163 @@
             <a:r>
               <a:t>        self.declare_parameter('front_half_angle_deg', 15.0)</a:t>
             </a:r>
-            <a:br/>
+          </a:p>
+          <a:p>
+            <a:pPr algn="l">
+              <a:spcAft>
+                <a:spcPts val="0"/>
+              </a:spcAft>
+              <a:defRPr sz="1400" b="0">
+                <a:solidFill>
+                  <a:srgbClr val="FFFFFF"/>
+                </a:solidFill>
+                <a:latin typeface="DejaVu Sans Mono"/>
+              </a:defRPr>
+            </a:pPr>
             <a:r>
               <a:t>        self.obstacle_distance = math.inf</a:t>
             </a:r>
-            <a:br/>
+          </a:p>
+          <a:p>
+            <a:pPr algn="l">
+              <a:spcAft>
+                <a:spcPts val="0"/>
+              </a:spcAft>
+              <a:defRPr sz="1400" b="0">
+                <a:solidFill>
+                  <a:srgbClr val="FFFFFF"/>
+                </a:solidFill>
+                <a:latin typeface="DejaVu Sans Mono"/>
+              </a:defRPr>
+            </a:pPr>
             <a:r>
               <a:t>        self.create_subscription(LaserScan, '/scan', self.scan_callback, 10)</a:t>
             </a:r>
-            <a:br/>
+          </a:p>
+          <a:p>
+            <a:pPr algn="l">
+              <a:spcAft>
+                <a:spcPts val="0"/>
+              </a:spcAft>
+              <a:defRPr sz="1400" b="0">
+                <a:solidFill>
+                  <a:srgbClr val="FFFFFF"/>
+                </a:solidFill>
+                <a:latin typeface="DejaVu Sans Mono"/>
+              </a:defRPr>
+            </a:pPr>
             <a:r>
               <a:t>        self.create_subscription(Twist, '/cmd_vel_raw', self.command_callback, 10)</a:t>
             </a:r>
-            <a:br/>
+          </a:p>
+          <a:p>
+            <a:pPr algn="l">
+              <a:spcAft>
+                <a:spcPts val="0"/>
+              </a:spcAft>
+              <a:defRPr sz="1400" b="0">
+                <a:solidFill>
+                  <a:srgbClr val="FFFFFF"/>
+                </a:solidFill>
+                <a:latin typeface="DejaVu Sans Mono"/>
+              </a:defRPr>
+            </a:pPr>
             <a:r>
               <a:t>        self.publisher = self.create_publisher(Twist, '/cmd_vel', 10)</a:t>
             </a:r>
-            <a:br/>
-            <a:br/>
+          </a:p>
+          <a:p>
+            <a:pPr algn="l">
+              <a:spcAft>
+                <a:spcPts val="0"/>
+              </a:spcAft>
+              <a:defRPr sz="1400" b="0">
+                <a:solidFill>
+                  <a:srgbClr val="FFFFFF"/>
+                </a:solidFill>
+                <a:latin typeface="DejaVu Sans Mono"/>
+              </a:defRPr>
+            </a:pPr>
+          </a:p>
+          <a:p>
+            <a:pPr algn="l">
+              <a:spcAft>
+                <a:spcPts val="0"/>
+              </a:spcAft>
+              <a:defRPr sz="1400" b="0">
+                <a:solidFill>
+                  <a:srgbClr val="FFFFFF"/>
+                </a:solidFill>
+                <a:latin typeface="DejaVu Sans Mono"/>
+              </a:defRPr>
+            </a:pPr>
             <a:r>
               <a:t>    def scan_callback(self, scan):</a:t>
             </a:r>
-            <a:br/>
+          </a:p>
+          <a:p>
+            <a:pPr algn="l">
+              <a:spcAft>
+                <a:spcPts val="0"/>
+              </a:spcAft>
+              <a:defRPr sz="1400" b="0">
+                <a:solidFill>
+                  <a:srgbClr val="FFFFFF"/>
+                </a:solidFill>
+                <a:latin typeface="DejaVu Sans Mono"/>
+              </a:defRPr>
+            </a:pPr>
             <a:r>
               <a:t>        limit = math.radians(self.get_parameter('front_half_angle_deg').value)</a:t>
             </a:r>
-            <a:br/>
+          </a:p>
+          <a:p>
+            <a:pPr algn="l">
+              <a:spcAft>
+                <a:spcPts val="0"/>
+              </a:spcAft>
+              <a:defRPr sz="1400" b="0">
+                <a:solidFill>
+                  <a:srgbClr val="FFFFFF"/>
+                </a:solidFill>
+                <a:latin typeface="DejaVu Sans Mono"/>
+              </a:defRPr>
+            </a:pPr>
             <a:r>
               <a:t>        readings = [value for index,</a:t>
             </a:r>
-            <a:br/>
+          </a:p>
+          <a:p>
+            <a:pPr algn="l">
+              <a:spcAft>
+                <a:spcPts val="0"/>
+              </a:spcAft>
+              <a:defRPr sz="1400" b="0">
+                <a:solidFill>
+                  <a:srgbClr val="FFFFFF"/>
+                </a:solidFill>
+                <a:latin typeface="DejaVu Sans Mono"/>
+              </a:defRPr>
+            </a:pPr>
             <a:r>
               <a:t>            value in enumerate(scan.ranges) if abs(scan.angle_min + index * scan.angle_increment) &lt;= limit and math.isfinite(value)]</a:t>
             </a:r>
-            <a:br/>
+          </a:p>
+          <a:p>
+            <a:pPr algn="l">
+              <a:spcAft>
+                <a:spcPts val="0"/>
+              </a:spcAft>
+              <a:defRPr sz="1400" b="0">
+                <a:solidFill>
+                  <a:srgbClr val="FFFFFF"/>
+                </a:solidFill>
+                <a:latin typeface="DejaVu Sans Mono"/>
+              </a:defRPr>
+            </a:pPr>
             <a:r>
               <a:t>        self.obstacle_distance = min(readings) if readings else math.inf</a:t>
             </a:r>
-            <a:br/>
           </a:p>
         </p:txBody>
       </p:sp>
@@ -20079,7 +20817,7 @@
           </a:fontRef>
         </p:style>
         <p:txBody>
-          <a:bodyPr rtlCol="0" anchor="ctr" wrap="square" lIns="164592" rIns="164592" tIns="109728" bIns="36576"/>
+          <a:bodyPr rtlCol="0" anchor="ctr" wrap="square" lIns="164592" rIns="164592" tIns="109728" bIns="73152"/>
           <a:lstStyle/>
           <a:p>
             <a:pPr algn="l">
@@ -20096,44 +20834,176 @@
             <a:r>
               <a:t>    def command_callback(self, command):</a:t>
             </a:r>
-            <a:br/>
+          </a:p>
+          <a:p>
+            <a:pPr algn="l">
+              <a:spcAft>
+                <a:spcPts val="0"/>
+              </a:spcAft>
+              <a:defRPr sz="1400" b="0">
+                <a:solidFill>
+                  <a:srgbClr val="FFFFFF"/>
+                </a:solidFill>
+                <a:latin typeface="DejaVu Sans Mono"/>
+              </a:defRPr>
+            </a:pPr>
             <a:r>
               <a:t>        safe = Twist()</a:t>
             </a:r>
-            <a:br/>
+          </a:p>
+          <a:p>
+            <a:pPr algn="l">
+              <a:spcAft>
+                <a:spcPts val="0"/>
+              </a:spcAft>
+              <a:defRPr sz="1400" b="0">
+                <a:solidFill>
+                  <a:srgbClr val="FFFFFF"/>
+                </a:solidFill>
+                <a:latin typeface="DejaVu Sans Mono"/>
+              </a:defRPr>
+            </a:pPr>
             <a:r>
               <a:t>        if self.obstacle_distance &gt;= self.get_parameter('stop_distance').value or command.linear.x &lt;= 0.0:</a:t>
             </a:r>
-            <a:br/>
+          </a:p>
+          <a:p>
+            <a:pPr algn="l">
+              <a:spcAft>
+                <a:spcPts val="0"/>
+              </a:spcAft>
+              <a:defRPr sz="1400" b="0">
+                <a:solidFill>
+                  <a:srgbClr val="FFFFFF"/>
+                </a:solidFill>
+                <a:latin typeface="DejaVu Sans Mono"/>
+              </a:defRPr>
+            </a:pPr>
             <a:r>
               <a:t>            safe = command</a:t>
             </a:r>
-            <a:br/>
+          </a:p>
+          <a:p>
+            <a:pPr algn="l">
+              <a:spcAft>
+                <a:spcPts val="0"/>
+              </a:spcAft>
+              <a:defRPr sz="1400" b="0">
+                <a:solidFill>
+                  <a:srgbClr val="FFFFFF"/>
+                </a:solidFill>
+                <a:latin typeface="DejaVu Sans Mono"/>
+              </a:defRPr>
+            </a:pPr>
             <a:r>
               <a:t>        else:</a:t>
             </a:r>
-            <a:br/>
+          </a:p>
+          <a:p>
+            <a:pPr algn="l">
+              <a:spcAft>
+                <a:spcPts val="0"/>
+              </a:spcAft>
+              <a:defRPr sz="1400" b="0">
+                <a:solidFill>
+                  <a:srgbClr val="FFFFFF"/>
+                </a:solidFill>
+                <a:latin typeface="DejaVu Sans Mono"/>
+              </a:defRPr>
+            </a:pPr>
             <a:r>
               <a:t>            self.get_logger().warn('obstacle at %.2f m: stopping forward command' % self.obstacle_distance)</a:t>
             </a:r>
-            <a:br/>
+          </a:p>
+          <a:p>
+            <a:pPr algn="l">
+              <a:spcAft>
+                <a:spcPts val="0"/>
+              </a:spcAft>
+              <a:defRPr sz="1400" b="0">
+                <a:solidFill>
+                  <a:srgbClr val="FFFFFF"/>
+                </a:solidFill>
+                <a:latin typeface="DejaVu Sans Mono"/>
+              </a:defRPr>
+            </a:pPr>
             <a:r>
               <a:t>        self.publisher.publish(safe)</a:t>
             </a:r>
-            <a:br/>
-            <a:br/>
+          </a:p>
+          <a:p>
+            <a:pPr algn="l">
+              <a:spcAft>
+                <a:spcPts val="0"/>
+              </a:spcAft>
+              <a:defRPr sz="1400" b="0">
+                <a:solidFill>
+                  <a:srgbClr val="FFFFFF"/>
+                </a:solidFill>
+                <a:latin typeface="DejaVu Sans Mono"/>
+              </a:defRPr>
+            </a:pPr>
+          </a:p>
+          <a:p>
+            <a:pPr algn="l">
+              <a:spcAft>
+                <a:spcPts val="0"/>
+              </a:spcAft>
+              <a:defRPr sz="1400" b="0">
+                <a:solidFill>
+                  <a:srgbClr val="FFFFFF"/>
+                </a:solidFill>
+                <a:latin typeface="DejaVu Sans Mono"/>
+              </a:defRPr>
+            </a:pPr>
             <a:r>
               <a:t>def main():</a:t>
             </a:r>
-            <a:br/>
+          </a:p>
+          <a:p>
+            <a:pPr algn="l">
+              <a:spcAft>
+                <a:spcPts val="0"/>
+              </a:spcAft>
+              <a:defRPr sz="1400" b="0">
+                <a:solidFill>
+                  <a:srgbClr val="FFFFFF"/>
+                </a:solidFill>
+                <a:latin typeface="DejaVu Sans Mono"/>
+              </a:defRPr>
+            </a:pPr>
             <a:r>
               <a:t>    rclpy.init()</a:t>
             </a:r>
-            <a:br/>
+          </a:p>
+          <a:p>
+            <a:pPr algn="l">
+              <a:spcAft>
+                <a:spcPts val="0"/>
+              </a:spcAft>
+              <a:defRPr sz="1400" b="0">
+                <a:solidFill>
+                  <a:srgbClr val="FFFFFF"/>
+                </a:solidFill>
+                <a:latin typeface="DejaVu Sans Mono"/>
+              </a:defRPr>
+            </a:pPr>
             <a:r>
               <a:t>    node = SafetyController()</a:t>
             </a:r>
-            <a:br/>
+          </a:p>
+          <a:p>
+            <a:pPr algn="l">
+              <a:spcAft>
+                <a:spcPts val="0"/>
+              </a:spcAft>
+              <a:defRPr sz="1400" b="0">
+                <a:solidFill>
+                  <a:srgbClr val="FFFFFF"/>
+                </a:solidFill>
+                <a:latin typeface="DejaVu Sans Mono"/>
+              </a:defRPr>
+            </a:pPr>
             <a:r>
               <a:t>    try:</a:t>
             </a:r>
@@ -20550,7 +21420,7 @@
           </a:fontRef>
         </p:style>
         <p:txBody>
-          <a:bodyPr rtlCol="0" anchor="ctr" wrap="square" lIns="164592" rIns="164592" tIns="109728" bIns="36576"/>
+          <a:bodyPr rtlCol="0" anchor="ctr" wrap="square" lIns="164592" rIns="164592" tIns="109728" bIns="73152"/>
           <a:lstStyle/>
           <a:p>
             <a:pPr algn="l">
@@ -20567,27 +21437,99 @@
             <a:r>
               <a:t>        rclpy.spin(node)</a:t>
             </a:r>
-            <a:br/>
+          </a:p>
+          <a:p>
+            <a:pPr algn="l">
+              <a:spcAft>
+                <a:spcPts val="0"/>
+              </a:spcAft>
+              <a:defRPr sz="1400" b="0">
+                <a:solidFill>
+                  <a:srgbClr val="FFFFFF"/>
+                </a:solidFill>
+                <a:latin typeface="DejaVu Sans Mono"/>
+              </a:defRPr>
+            </a:pPr>
             <a:r>
               <a:t>    except KeyboardInterrupt:</a:t>
             </a:r>
-            <a:br/>
+          </a:p>
+          <a:p>
+            <a:pPr algn="l">
+              <a:spcAft>
+                <a:spcPts val="0"/>
+              </a:spcAft>
+              <a:defRPr sz="1400" b="0">
+                <a:solidFill>
+                  <a:srgbClr val="FFFFFF"/>
+                </a:solidFill>
+                <a:latin typeface="DejaVu Sans Mono"/>
+              </a:defRPr>
+            </a:pPr>
             <a:r>
               <a:t>        pass</a:t>
             </a:r>
-            <a:br/>
+          </a:p>
+          <a:p>
+            <a:pPr algn="l">
+              <a:spcAft>
+                <a:spcPts val="0"/>
+              </a:spcAft>
+              <a:defRPr sz="1400" b="0">
+                <a:solidFill>
+                  <a:srgbClr val="FFFFFF"/>
+                </a:solidFill>
+                <a:latin typeface="DejaVu Sans Mono"/>
+              </a:defRPr>
+            </a:pPr>
             <a:r>
               <a:t>    finally:</a:t>
             </a:r>
-            <a:br/>
+          </a:p>
+          <a:p>
+            <a:pPr algn="l">
+              <a:spcAft>
+                <a:spcPts val="0"/>
+              </a:spcAft>
+              <a:defRPr sz="1400" b="0">
+                <a:solidFill>
+                  <a:srgbClr val="FFFFFF"/>
+                </a:solidFill>
+                <a:latin typeface="DejaVu Sans Mono"/>
+              </a:defRPr>
+            </a:pPr>
             <a:r>
               <a:t>        node.destroy_node()</a:t>
             </a:r>
-            <a:br/>
+          </a:p>
+          <a:p>
+            <a:pPr algn="l">
+              <a:spcAft>
+                <a:spcPts val="0"/>
+              </a:spcAft>
+              <a:defRPr sz="1400" b="0">
+                <a:solidFill>
+                  <a:srgbClr val="FFFFFF"/>
+                </a:solidFill>
+                <a:latin typeface="DejaVu Sans Mono"/>
+              </a:defRPr>
+            </a:pPr>
             <a:r>
               <a:t>        if rclpy.ok():</a:t>
             </a:r>
-            <a:br/>
+          </a:p>
+          <a:p>
+            <a:pPr algn="l">
+              <a:spcAft>
+                <a:spcPts val="0"/>
+              </a:spcAft>
+              <a:defRPr sz="1400" b="0">
+                <a:solidFill>
+                  <a:srgbClr val="FFFFFF"/>
+                </a:solidFill>
+                <a:latin typeface="DejaVu Sans Mono"/>
+              </a:defRPr>
+            </a:pPr>
             <a:r>
               <a:t>            rclpy.shutdown()</a:t>
             </a:r>
@@ -21478,7 +22420,7 @@
           </a:fontRef>
         </p:style>
         <p:txBody>
-          <a:bodyPr rtlCol="0" anchor="ctr" wrap="square" lIns="73152" rIns="73152" tIns="36576" bIns="36576"/>
+          <a:bodyPr rtlCol="0" anchor="ctr" wrap="square" lIns="109728" rIns="109728" tIns="73152" bIns="73152"/>
           <a:lstStyle/>
           <a:p>
             <a:pPr algn="l">
@@ -21495,7 +22437,19 @@
             <a:r>
               <a:t>mkdir -p ~/ros2_curri/my_agv_ws/src/agv_bringup/config</a:t>
             </a:r>
-            <a:br/>
+          </a:p>
+          <a:p>
+            <a:pPr algn="l">
+              <a:spcAft>
+                <a:spcPts val="0"/>
+              </a:spcAft>
+              <a:defRPr sz="1600" b="0">
+                <a:solidFill>
+                  <a:srgbClr val="FFFFFF"/>
+                </a:solidFill>
+                <a:latin typeface="DejaVu Sans Mono"/>
+              </a:defRPr>
+            </a:pPr>
             <a:r>
               <a:t>nano ~/ros2_curri/my_agv_ws/src/agv_bringup/config/mission.yaml</a:t>
             </a:r>
@@ -23309,7 +24263,7 @@
           </a:fontRef>
         </p:style>
         <p:txBody>
-          <a:bodyPr rtlCol="0" anchor="ctr" wrap="square" lIns="164592" rIns="164592" tIns="109728" bIns="36576"/>
+          <a:bodyPr rtlCol="0" anchor="ctr" wrap="square" lIns="164592" rIns="164592" tIns="109728" bIns="73152"/>
           <a:lstStyle/>
           <a:p>
             <a:pPr algn="l">
@@ -23326,47 +24280,179 @@
             <a:r>
               <a:t>mission_manager:</a:t>
             </a:r>
-            <a:br/>
+          </a:p>
+          <a:p>
+            <a:pPr algn="l">
+              <a:spcAft>
+                <a:spcPts val="0"/>
+              </a:spcAft>
+              <a:defRPr sz="1400" b="0">
+                <a:solidFill>
+                  <a:srgbClr val="FFFFFF"/>
+                </a:solidFill>
+                <a:latin typeface="DejaVu Sans Mono"/>
+              </a:defRPr>
+            </a:pPr>
             <a:r>
               <a:t>  ros__parameters:</a:t>
             </a:r>
-            <a:br/>
+          </a:p>
+          <a:p>
+            <a:pPr algn="l">
+              <a:spcAft>
+                <a:spcPts val="0"/>
+              </a:spcAft>
+              <a:defRPr sz="1400" b="0">
+                <a:solidFill>
+                  <a:srgbClr val="FFFFFF"/>
+                </a:solidFill>
+                <a:latin typeface="DejaVu Sans Mono"/>
+              </a:defRPr>
+            </a:pPr>
             <a:r>
               <a:t>    use_sim_time: true</a:t>
             </a:r>
-            <a:br/>
+          </a:p>
+          <a:p>
+            <a:pPr algn="l">
+              <a:spcAft>
+                <a:spcPts val="0"/>
+              </a:spcAft>
+              <a:defRPr sz="1400" b="0">
+                <a:solidFill>
+                  <a:srgbClr val="FFFFFF"/>
+                </a:solidFill>
+                <a:latin typeface="DejaVu Sans Mono"/>
+              </a:defRPr>
+            </a:pPr>
             <a:r>
               <a:t>    stop_distance: 0.50</a:t>
             </a:r>
-            <a:br/>
+          </a:p>
+          <a:p>
+            <a:pPr algn="l">
+              <a:spcAft>
+                <a:spcPts val="0"/>
+              </a:spcAft>
+              <a:defRPr sz="1400" b="0">
+                <a:solidFill>
+                  <a:srgbClr val="FFFFFF"/>
+                </a:solidFill>
+                <a:latin typeface="DejaVu Sans Mono"/>
+              </a:defRPr>
+            </a:pPr>
             <a:r>
               <a:t>    search_speed: 0.25</a:t>
             </a:r>
-            <a:br/>
+          </a:p>
+          <a:p>
+            <a:pPr algn="l">
+              <a:spcAft>
+                <a:spcPts val="0"/>
+              </a:spcAft>
+              <a:defRPr sz="1400" b="0">
+                <a:solidFill>
+                  <a:srgbClr val="FFFFFF"/>
+                </a:solidFill>
+                <a:latin typeface="DejaVu Sans Mono"/>
+              </a:defRPr>
+            </a:pPr>
             <a:r>
               <a:t>    approach_speed: 0.15</a:t>
             </a:r>
-            <a:br/>
+          </a:p>
+          <a:p>
+            <a:pPr algn="l">
+              <a:spcAft>
+                <a:spcPts val="0"/>
+              </a:spcAft>
+              <a:defRPr sz="1400" b="0">
+                <a:solidFill>
+                  <a:srgbClr val="FFFFFF"/>
+                </a:solidFill>
+                <a:latin typeface="DejaVu Sans Mono"/>
+              </a:defRPr>
+            </a:pPr>
             <a:r>
               <a:t>    image_center_x: 320</a:t>
             </a:r>
-            <a:br/>
+          </a:p>
+          <a:p>
+            <a:pPr algn="l">
+              <a:spcAft>
+                <a:spcPts val="0"/>
+              </a:spcAft>
+              <a:defRPr sz="1400" b="0">
+                <a:solidFill>
+                  <a:srgbClr val="FFFFFF"/>
+                </a:solidFill>
+                <a:latin typeface="DejaVu Sans Mono"/>
+              </a:defRPr>
+            </a:pPr>
             <a:r>
               <a:t>    target_timeout_sec: 0.70</a:t>
             </a:r>
-            <a:br/>
+          </a:p>
+          <a:p>
+            <a:pPr algn="l">
+              <a:spcAft>
+                <a:spcPts val="0"/>
+              </a:spcAft>
+              <a:defRPr sz="1400" b="0">
+                <a:solidFill>
+                  <a:srgbClr val="FFFFFF"/>
+                </a:solidFill>
+                <a:latin typeface="DejaVu Sans Mono"/>
+              </a:defRPr>
+            </a:pPr>
             <a:r>
               <a:t>safety_controller:</a:t>
             </a:r>
-            <a:br/>
+          </a:p>
+          <a:p>
+            <a:pPr algn="l">
+              <a:spcAft>
+                <a:spcPts val="0"/>
+              </a:spcAft>
+              <a:defRPr sz="1400" b="0">
+                <a:solidFill>
+                  <a:srgbClr val="FFFFFF"/>
+                </a:solidFill>
+                <a:latin typeface="DejaVu Sans Mono"/>
+              </a:defRPr>
+            </a:pPr>
             <a:r>
               <a:t>  ros__parameters:</a:t>
             </a:r>
-            <a:br/>
+          </a:p>
+          <a:p>
+            <a:pPr algn="l">
+              <a:spcAft>
+                <a:spcPts val="0"/>
+              </a:spcAft>
+              <a:defRPr sz="1400" b="0">
+                <a:solidFill>
+                  <a:srgbClr val="FFFFFF"/>
+                </a:solidFill>
+                <a:latin typeface="DejaVu Sans Mono"/>
+              </a:defRPr>
+            </a:pPr>
             <a:r>
               <a:t>    use_sim_time: true</a:t>
             </a:r>
-            <a:br/>
+          </a:p>
+          <a:p>
+            <a:pPr algn="l">
+              <a:spcAft>
+                <a:spcPts val="0"/>
+              </a:spcAft>
+              <a:defRPr sz="1400" b="0">
+                <a:solidFill>
+                  <a:srgbClr val="FFFFFF"/>
+                </a:solidFill>
+                <a:latin typeface="DejaVu Sans Mono"/>
+              </a:defRPr>
+            </a:pPr>
             <a:r>
               <a:t>    stop_distance: 0.50</a:t>
             </a:r>
@@ -23783,7 +24869,7 @@
           </a:fontRef>
         </p:style>
         <p:txBody>
-          <a:bodyPr rtlCol="0" anchor="ctr" wrap="square" lIns="164592" rIns="164592" tIns="109728" bIns="36576"/>
+          <a:bodyPr rtlCol="0" anchor="ctr" wrap="square" lIns="164592" rIns="164592" tIns="109728" bIns="73152"/>
           <a:lstStyle/>
           <a:p>
             <a:pPr algn="l">
@@ -24069,7 +25155,7 @@
               </a:defRPr>
             </a:pPr>
             <a:r>
-              <a:t>현재 단계 실행 1/2    |    현재 폴더 ~/ros2_curri/my_agv_ws    |    현재 터미널</a:t>
+              <a:t>현재 단계 실행 1/2    |    현재 폴더 ~/ros2_curri/my_agv_ws    |    터미널 1</a:t>
             </a:r>
           </a:p>
         </p:txBody>
@@ -24082,25 +25168,25 @@
         </p:nvSpPr>
         <p:spPr>
           <a:xfrm>
-            <a:off x="676656" y="1764792"/>
-            <a:ext cx="1828800" cy="347472"/>
-          </a:xfrm>
-          <a:prstGeom prst="rect">
-            <a:avLst/>
-          </a:prstGeom>
-          <a:noFill/>
-        </p:spPr>
-        <p:txBody>
-          <a:bodyPr wrap="square" lIns="73152" rIns="73152" tIns="36576" bIns="36576">
-            <a:spAutoFit/>
-          </a:bodyPr>
-          <a:lstStyle/>
-          <a:p>
-            <a:pPr algn="l">
-              <a:spcAft>
-                <a:spcPts val="0"/>
-              </a:spcAft>
-              <a:defRPr sz="1800" b="1">
+            <a:off x="676656" y="1719072"/>
+            <a:ext cx="1691640" cy="274320"/>
+          </a:xfrm>
+          <a:prstGeom prst="rect">
+            <a:avLst/>
+          </a:prstGeom>
+          <a:noFill/>
+        </p:spPr>
+        <p:txBody>
+          <a:bodyPr wrap="square" lIns="73152" rIns="73152" tIns="36576" bIns="36576">
+            <a:spAutoFit/>
+          </a:bodyPr>
+          <a:lstStyle/>
+          <a:p>
+            <a:pPr algn="l">
+              <a:spcAft>
+                <a:spcPts val="0"/>
+              </a:spcAft>
+              <a:defRPr sz="1700" b="1">
                 <a:solidFill>
                   <a:srgbClr val="225B9B"/>
                 </a:solidFill>
@@ -24108,7 +25194,7 @@
               </a:defRPr>
             </a:pPr>
             <a:r>
-              <a:t>왜 하는가</a:t>
+              <a:t>명령의 목적</a:t>
             </a:r>
           </a:p>
         </p:txBody>
@@ -24121,7 +25207,7 @@
         </p:nvSpPr>
         <p:spPr>
           <a:xfrm>
-            <a:off x="676656" y="2103120"/>
+            <a:off x="676656" y="2002536"/>
             <a:ext cx="10789920" cy="512064"/>
           </a:xfrm>
           <a:prstGeom prst="rect">
@@ -24139,7 +25225,7 @@
               <a:spcAft>
                 <a:spcPts val="0"/>
               </a:spcAft>
-              <a:defRPr sz="2000" b="0">
+              <a:defRPr sz="1800" b="0">
                 <a:solidFill>
                   <a:srgbClr val="122C4E"/>
                 </a:solidFill>
@@ -24154,14 +25240,53 @@
       </p:sp>
       <p:sp>
         <p:nvSpPr>
-          <p:cNvPr id="9" name="Rounded Rectangle 8"/>
+          <p:cNvPr id="9" name="TextBox 8"/>
+          <p:cNvSpPr txBox="1"/>
+          <p:nvPr/>
+        </p:nvSpPr>
+        <p:spPr>
+          <a:xfrm>
+            <a:off x="676656" y="2816352"/>
+            <a:ext cx="10835640" cy="256032"/>
+          </a:xfrm>
+          <a:prstGeom prst="rect">
+            <a:avLst/>
+          </a:prstGeom>
+          <a:noFill/>
+        </p:spPr>
+        <p:txBody>
+          <a:bodyPr wrap="square" lIns="73152" rIns="73152" tIns="36576" bIns="36576">
+            <a:spAutoFit/>
+          </a:bodyPr>
+          <a:lstStyle/>
+          <a:p>
+            <a:pPr algn="ctr">
+              <a:spcAft>
+                <a:spcPts val="0"/>
+              </a:spcAft>
+              <a:defRPr sz="1600" b="1">
+                <a:solidFill>
+                  <a:srgbClr val="225B9B"/>
+                </a:solidFill>
+                <a:latin typeface="Noto Sans CJK KR"/>
+              </a:defRPr>
+            </a:pPr>
+            <a:r>
+              <a:t>터미널 1 — 아래 검은 블록은 명령만 복사합니다.</a:t>
+            </a:r>
+          </a:p>
+        </p:txBody>
+      </p:sp>
+      <p:sp>
+        <p:nvSpPr>
+          <p:cNvPr id="10" name="Rounded Rectangle 9"/>
           <p:cNvSpPr/>
           <p:nvPr/>
         </p:nvSpPr>
         <p:spPr>
           <a:xfrm>
-            <a:off x="676656" y="2871216"/>
-            <a:ext cx="10835640" cy="2331720"/>
+            <a:off x="676656" y="3154680"/>
+            <a:ext cx="10835640" cy="1938528"/>
           </a:xfrm>
           <a:prstGeom prst="roundRect">
             <a:avLst/>
@@ -24190,7 +25315,7 @@
           </a:fontRef>
         </p:style>
         <p:txBody>
-          <a:bodyPr rtlCol="0" anchor="ctr" wrap="square" lIns="73152" rIns="73152" tIns="36576" bIns="36576"/>
+          <a:bodyPr rtlCol="0" anchor="ctr" wrap="square" lIns="109728" rIns="109728" tIns="73152" bIns="73152"/>
           <a:lstStyle/>
           <a:p>
             <a:pPr algn="l">
@@ -24207,7 +25332,19 @@
             <a:r>
               <a:t>ros2 run agv_control safety_controller --ros-args \</a:t>
             </a:r>
-            <a:br/>
+          </a:p>
+          <a:p>
+            <a:pPr algn="l">
+              <a:spcAft>
+                <a:spcPts val="0"/>
+              </a:spcAft>
+              <a:defRPr sz="1600" b="0">
+                <a:solidFill>
+                  <a:srgbClr val="FFFFFF"/>
+                </a:solidFill>
+                <a:latin typeface="DejaVu Sans Mono"/>
+              </a:defRPr>
+            </a:pPr>
             <a:r>
               <a:t>  -p stop_distance:=0.5 -p front_half_angle_deg:=15.0</a:t>
             </a:r>
@@ -24216,31 +25353,31 @@
       </p:sp>
       <p:sp>
         <p:nvSpPr>
-          <p:cNvPr id="10" name="TextBox 9"/>
-          <p:cNvSpPr txBox="1"/>
-          <p:nvPr/>
-        </p:nvSpPr>
-        <p:spPr>
-          <a:xfrm>
-            <a:off x="768096" y="5468112"/>
-            <a:ext cx="1143000" cy="256032"/>
-          </a:xfrm>
-          <a:prstGeom prst="rect">
-            <a:avLst/>
-          </a:prstGeom>
-          <a:noFill/>
-        </p:spPr>
-        <p:txBody>
-          <a:bodyPr wrap="square" lIns="73152" rIns="73152" tIns="36576" bIns="36576">
-            <a:spAutoFit/>
-          </a:bodyPr>
-          <a:lstStyle/>
-          <a:p>
-            <a:pPr algn="l">
-              <a:spcAft>
-                <a:spcPts val="0"/>
-              </a:spcAft>
-              <a:defRPr sz="1800" b="1">
+          <p:cNvPr id="11" name="TextBox 10"/>
+          <p:cNvSpPr txBox="1"/>
+          <p:nvPr/>
+        </p:nvSpPr>
+        <p:spPr>
+          <a:xfrm>
+            <a:off x="768096" y="5276088"/>
+            <a:ext cx="10561320" cy="384048"/>
+          </a:xfrm>
+          <a:prstGeom prst="rect">
+            <a:avLst/>
+          </a:prstGeom>
+          <a:noFill/>
+        </p:spPr>
+        <p:txBody>
+          <a:bodyPr wrap="square" lIns="73152" rIns="73152" tIns="36576" bIns="36576">
+            <a:spAutoFit/>
+          </a:bodyPr>
+          <a:lstStyle/>
+          <a:p>
+            <a:pPr algn="ctr">
+              <a:spcAft>
+                <a:spcPts val="0"/>
+              </a:spcAft>
+              <a:defRPr sz="1500" b="1">
                 <a:solidFill>
                   <a:srgbClr val="2A8B5A"/>
                 </a:solidFill>
@@ -24248,38 +25385,38 @@
               </a:defRPr>
             </a:pPr>
             <a:r>
-              <a:t>확인</a:t>
-            </a:r>
-          </a:p>
-        </p:txBody>
-      </p:sp>
-      <p:sp>
-        <p:nvSpPr>
-          <p:cNvPr id="11" name="TextBox 10"/>
-          <p:cNvSpPr txBox="1"/>
-          <p:nvPr/>
-        </p:nvSpPr>
-        <p:spPr>
-          <a:xfrm>
-            <a:off x="768096" y="5742432"/>
-            <a:ext cx="10561320" cy="347472"/>
-          </a:xfrm>
-          <a:prstGeom prst="rect">
-            <a:avLst/>
-          </a:prstGeom>
-          <a:noFill/>
-        </p:spPr>
-        <p:txBody>
-          <a:bodyPr wrap="square" lIns="73152" rIns="73152" tIns="36576" bIns="36576">
-            <a:spAutoFit/>
-          </a:bodyPr>
-          <a:lstStyle/>
-          <a:p>
-            <a:pPr algn="l">
-              <a:spcAft>
-                <a:spcPts val="0"/>
-              </a:spcAft>
-              <a:defRPr sz="1800" b="0">
+              <a:t>터미널 1 역할: 이 node를 실행합니다. 출력이 계속 나오는 동안 Ctrl+C로 종료하지 않습니다.</a:t>
+            </a:r>
+          </a:p>
+        </p:txBody>
+      </p:sp>
+      <p:sp>
+        <p:nvSpPr>
+          <p:cNvPr id="12" name="TextBox 11"/>
+          <p:cNvSpPr txBox="1"/>
+          <p:nvPr/>
+        </p:nvSpPr>
+        <p:spPr>
+          <a:xfrm>
+            <a:off x="768096" y="5916168"/>
+            <a:ext cx="10561320" cy="292608"/>
+          </a:xfrm>
+          <a:prstGeom prst="rect">
+            <a:avLst/>
+          </a:prstGeom>
+          <a:noFill/>
+        </p:spPr>
+        <p:txBody>
+          <a:bodyPr wrap="square" lIns="73152" rIns="73152" tIns="36576" bIns="36576">
+            <a:spAutoFit/>
+          </a:bodyPr>
+          <a:lstStyle/>
+          <a:p>
+            <a:pPr algn="ctr">
+              <a:spcAft>
+                <a:spcPts val="0"/>
+              </a:spcAft>
+              <a:defRPr sz="1500" b="1">
                 <a:solidFill>
                   <a:srgbClr val="122C4E"/>
                 </a:solidFill>
@@ -24287,7 +25424,7 @@
               </a:defRPr>
             </a:pPr>
             <a:r>
-              <a:t>출력에서 topic·frame·파일 이름 또는 성공 메시지를 찾고, 맞지 않으면 다음 파일로 가지 않습니다.</a:t>
+              <a:t>확인: 출력에서 topic·frame·파일 이름 또는 성공 메시지를 찾고, 맞지 않으면 다음 파일로 가지 않습니다.</a:t>
             </a:r>
           </a:p>
         </p:txBody>
@@ -24519,7 +25656,7 @@
               </a:defRPr>
             </a:pPr>
             <a:r>
-              <a:t>현재 단계 실행 2/2    |    현재 폴더 ~/ros2_curri/my_agv_ws    |    현재 터미널</a:t>
+              <a:t>현재 단계 실행 2/2    |    현재 폴더 ~/ros2_curri/my_agv_ws    |    터미널 1</a:t>
             </a:r>
           </a:p>
         </p:txBody>
@@ -24532,25 +25669,25 @@
         </p:nvSpPr>
         <p:spPr>
           <a:xfrm>
-            <a:off x="676656" y="1764792"/>
-            <a:ext cx="1828800" cy="347472"/>
-          </a:xfrm>
-          <a:prstGeom prst="rect">
-            <a:avLst/>
-          </a:prstGeom>
-          <a:noFill/>
-        </p:spPr>
-        <p:txBody>
-          <a:bodyPr wrap="square" lIns="73152" rIns="73152" tIns="36576" bIns="36576">
-            <a:spAutoFit/>
-          </a:bodyPr>
-          <a:lstStyle/>
-          <a:p>
-            <a:pPr algn="l">
-              <a:spcAft>
-                <a:spcPts val="0"/>
-              </a:spcAft>
-              <a:defRPr sz="1800" b="1">
+            <a:off x="676656" y="1719072"/>
+            <a:ext cx="1691640" cy="274320"/>
+          </a:xfrm>
+          <a:prstGeom prst="rect">
+            <a:avLst/>
+          </a:prstGeom>
+          <a:noFill/>
+        </p:spPr>
+        <p:txBody>
+          <a:bodyPr wrap="square" lIns="73152" rIns="73152" tIns="36576" bIns="36576">
+            <a:spAutoFit/>
+          </a:bodyPr>
+          <a:lstStyle/>
+          <a:p>
+            <a:pPr algn="l">
+              <a:spcAft>
+                <a:spcPts val="0"/>
+              </a:spcAft>
+              <a:defRPr sz="1700" b="1">
                 <a:solidFill>
                   <a:srgbClr val="225B9B"/>
                 </a:solidFill>
@@ -24558,7 +25695,7 @@
               </a:defRPr>
             </a:pPr>
             <a:r>
-              <a:t>왜 하는가</a:t>
+              <a:t>명령의 목적</a:t>
             </a:r>
           </a:p>
         </p:txBody>
@@ -24571,7 +25708,7 @@
         </p:nvSpPr>
         <p:spPr>
           <a:xfrm>
-            <a:off x="676656" y="2103120"/>
+            <a:off x="676656" y="2002536"/>
             <a:ext cx="10789920" cy="512064"/>
           </a:xfrm>
           <a:prstGeom prst="rect">
@@ -24589,7 +25726,7 @@
               <a:spcAft>
                 <a:spcPts val="0"/>
               </a:spcAft>
-              <a:defRPr sz="2000" b="0">
+              <a:defRPr sz="1800" b="0">
                 <a:solidFill>
                   <a:srgbClr val="122C4E"/>
                 </a:solidFill>
@@ -24604,14 +25741,53 @@
       </p:sp>
       <p:sp>
         <p:nvSpPr>
-          <p:cNvPr id="9" name="Rounded Rectangle 8"/>
+          <p:cNvPr id="9" name="TextBox 8"/>
+          <p:cNvSpPr txBox="1"/>
+          <p:nvPr/>
+        </p:nvSpPr>
+        <p:spPr>
+          <a:xfrm>
+            <a:off x="676656" y="2816352"/>
+            <a:ext cx="10835640" cy="256032"/>
+          </a:xfrm>
+          <a:prstGeom prst="rect">
+            <a:avLst/>
+          </a:prstGeom>
+          <a:noFill/>
+        </p:spPr>
+        <p:txBody>
+          <a:bodyPr wrap="square" lIns="73152" rIns="73152" tIns="36576" bIns="36576">
+            <a:spAutoFit/>
+          </a:bodyPr>
+          <a:lstStyle/>
+          <a:p>
+            <a:pPr algn="ctr">
+              <a:spcAft>
+                <a:spcPts val="0"/>
+              </a:spcAft>
+              <a:defRPr sz="1600" b="1">
+                <a:solidFill>
+                  <a:srgbClr val="225B9B"/>
+                </a:solidFill>
+                <a:latin typeface="Noto Sans CJK KR"/>
+              </a:defRPr>
+            </a:pPr>
+            <a:r>
+              <a:t>터미널 1 — 아래 검은 블록은 명령만 복사합니다.</a:t>
+            </a:r>
+          </a:p>
+        </p:txBody>
+      </p:sp>
+      <p:sp>
+        <p:nvSpPr>
+          <p:cNvPr id="10" name="Rounded Rectangle 9"/>
           <p:cNvSpPr/>
           <p:nvPr/>
         </p:nvSpPr>
         <p:spPr>
           <a:xfrm>
-            <a:off x="676656" y="2871216"/>
-            <a:ext cx="10835640" cy="2331720"/>
+            <a:off x="676656" y="3154680"/>
+            <a:ext cx="10835640" cy="1938528"/>
           </a:xfrm>
           <a:prstGeom prst="roundRect">
             <a:avLst/>
@@ -24640,7 +25816,7 @@
           </a:fontRef>
         </p:style>
         <p:txBody>
-          <a:bodyPr rtlCol="0" anchor="ctr" wrap="square" lIns="73152" rIns="73152" tIns="36576" bIns="36576"/>
+          <a:bodyPr rtlCol="0" anchor="ctr" wrap="square" lIns="109728" rIns="109728" tIns="73152" bIns="73152"/>
           <a:lstStyle/>
           <a:p>
             <a:pPr algn="l">
@@ -24657,11 +25833,35 @@
             <a:r>
               <a:t>ros2 topic echo /cmd_vel_raw</a:t>
             </a:r>
-            <a:br/>
+          </a:p>
+          <a:p>
+            <a:pPr algn="l">
+              <a:spcAft>
+                <a:spcPts val="0"/>
+              </a:spcAft>
+              <a:defRPr sz="1600" b="0">
+                <a:solidFill>
+                  <a:srgbClr val="FFFFFF"/>
+                </a:solidFill>
+                <a:latin typeface="DejaVu Sans Mono"/>
+              </a:defRPr>
+            </a:pPr>
             <a:r>
               <a:t>ros2 topic echo /cmd_vel</a:t>
             </a:r>
-            <a:br/>
+          </a:p>
+          <a:p>
+            <a:pPr algn="l">
+              <a:spcAft>
+                <a:spcPts val="0"/>
+              </a:spcAft>
+              <a:defRPr sz="1600" b="0">
+                <a:solidFill>
+                  <a:srgbClr val="FFFFFF"/>
+                </a:solidFill>
+                <a:latin typeface="DejaVu Sans Mono"/>
+              </a:defRPr>
+            </a:pPr>
             <a:r>
               <a:t>ros2 topic echo /scan --once</a:t>
             </a:r>
@@ -24670,31 +25870,31 @@
       </p:sp>
       <p:sp>
         <p:nvSpPr>
-          <p:cNvPr id="10" name="TextBox 9"/>
-          <p:cNvSpPr txBox="1"/>
-          <p:nvPr/>
-        </p:nvSpPr>
-        <p:spPr>
-          <a:xfrm>
-            <a:off x="768096" y="5468112"/>
-            <a:ext cx="1143000" cy="256032"/>
-          </a:xfrm>
-          <a:prstGeom prst="rect">
-            <a:avLst/>
-          </a:prstGeom>
-          <a:noFill/>
-        </p:spPr>
-        <p:txBody>
-          <a:bodyPr wrap="square" lIns="73152" rIns="73152" tIns="36576" bIns="36576">
-            <a:spAutoFit/>
-          </a:bodyPr>
-          <a:lstStyle/>
-          <a:p>
-            <a:pPr algn="l">
-              <a:spcAft>
-                <a:spcPts val="0"/>
-              </a:spcAft>
-              <a:defRPr sz="1800" b="1">
+          <p:cNvPr id="11" name="TextBox 10"/>
+          <p:cNvSpPr txBox="1"/>
+          <p:nvPr/>
+        </p:nvSpPr>
+        <p:spPr>
+          <a:xfrm>
+            <a:off x="768096" y="5276088"/>
+            <a:ext cx="10561320" cy="384048"/>
+          </a:xfrm>
+          <a:prstGeom prst="rect">
+            <a:avLst/>
+          </a:prstGeom>
+          <a:noFill/>
+        </p:spPr>
+        <p:txBody>
+          <a:bodyPr wrap="square" lIns="73152" rIns="73152" tIns="36576" bIns="36576">
+            <a:spAutoFit/>
+          </a:bodyPr>
+          <a:lstStyle/>
+          <a:p>
+            <a:pPr algn="ctr">
+              <a:spcAft>
+                <a:spcPts val="0"/>
+              </a:spcAft>
+              <a:defRPr sz="1500" b="1">
                 <a:solidFill>
                   <a:srgbClr val="2A8B5A"/>
                 </a:solidFill>
@@ -24702,38 +25902,38 @@
               </a:defRPr>
             </a:pPr>
             <a:r>
-              <a:t>확인</a:t>
-            </a:r>
-          </a:p>
-        </p:txBody>
-      </p:sp>
-      <p:sp>
-        <p:nvSpPr>
-          <p:cNvPr id="11" name="TextBox 10"/>
-          <p:cNvSpPr txBox="1"/>
-          <p:nvPr/>
-        </p:nvSpPr>
-        <p:spPr>
-          <a:xfrm>
-            <a:off x="768096" y="5742432"/>
-            <a:ext cx="10561320" cy="347472"/>
-          </a:xfrm>
-          <a:prstGeom prst="rect">
-            <a:avLst/>
-          </a:prstGeom>
-          <a:noFill/>
-        </p:spPr>
-        <p:txBody>
-          <a:bodyPr wrap="square" lIns="73152" rIns="73152" tIns="36576" bIns="36576">
-            <a:spAutoFit/>
-          </a:bodyPr>
-          <a:lstStyle/>
-          <a:p>
-            <a:pPr algn="l">
-              <a:spcAft>
-                <a:spcPts val="0"/>
-              </a:spcAft>
-              <a:defRPr sz="1800" b="0">
+              <a:t>터미널 1 역할: 다른 터미널의 실행 결과를 이 창에서 관찰·검증합니다.</a:t>
+            </a:r>
+          </a:p>
+        </p:txBody>
+      </p:sp>
+      <p:sp>
+        <p:nvSpPr>
+          <p:cNvPr id="12" name="TextBox 11"/>
+          <p:cNvSpPr txBox="1"/>
+          <p:nvPr/>
+        </p:nvSpPr>
+        <p:spPr>
+          <a:xfrm>
+            <a:off x="768096" y="5916168"/>
+            <a:ext cx="10561320" cy="292608"/>
+          </a:xfrm>
+          <a:prstGeom prst="rect">
+            <a:avLst/>
+          </a:prstGeom>
+          <a:noFill/>
+        </p:spPr>
+        <p:txBody>
+          <a:bodyPr wrap="square" lIns="73152" rIns="73152" tIns="36576" bIns="36576">
+            <a:spAutoFit/>
+          </a:bodyPr>
+          <a:lstStyle/>
+          <a:p>
+            <a:pPr algn="ctr">
+              <a:spcAft>
+                <a:spcPts val="0"/>
+              </a:spcAft>
+              <a:defRPr sz="1500" b="1">
                 <a:solidFill>
                   <a:srgbClr val="122C4E"/>
                 </a:solidFill>
@@ -24741,7 +25941,7 @@
               </a:defRPr>
             </a:pPr>
             <a:r>
-              <a:t>출력에서 topic·frame·파일 이름 또는 성공 메시지를 찾고, 맞지 않으면 다음 파일로 가지 않습니다.</a:t>
+              <a:t>확인: 출력에서 topic·frame·파일 이름 또는 성공 메시지를 찾고, 맞지 않으면 다음 파일로 가지 않습니다.</a:t>
             </a:r>
           </a:p>
         </p:txBody>
@@ -24973,21 +26173,138 @@
               </a:defRPr>
             </a:pPr>
             <a:r>
-              <a:t>현재 단계 실행    |    현재 폴더 ~/ros2_curri/my_agv_ws    |    현재 터미널</a:t>
-            </a:r>
-          </a:p>
-        </p:txBody>
-      </p:sp>
-      <p:sp>
-        <p:nvSpPr>
-          <p:cNvPr id="7" name="Rounded Rectangle 6"/>
+              <a:t>현재 단계 실행    |    현재 폴더 ~/ros2_curri/my_agv_ws    |    터미널 1</a:t>
+            </a:r>
+          </a:p>
+        </p:txBody>
+      </p:sp>
+      <p:sp>
+        <p:nvSpPr>
+          <p:cNvPr id="7" name="TextBox 6"/>
+          <p:cNvSpPr txBox="1"/>
+          <p:nvPr/>
+        </p:nvSpPr>
+        <p:spPr>
+          <a:xfrm>
+            <a:off x="676656" y="1719072"/>
+            <a:ext cx="1691640" cy="274320"/>
+          </a:xfrm>
+          <a:prstGeom prst="rect">
+            <a:avLst/>
+          </a:prstGeom>
+          <a:noFill/>
+        </p:spPr>
+        <p:txBody>
+          <a:bodyPr wrap="square" lIns="73152" rIns="73152" tIns="36576" bIns="36576">
+            <a:spAutoFit/>
+          </a:bodyPr>
+          <a:lstStyle/>
+          <a:p>
+            <a:pPr algn="l">
+              <a:spcAft>
+                <a:spcPts val="0"/>
+              </a:spcAft>
+              <a:defRPr sz="1700" b="1">
+                <a:solidFill>
+                  <a:srgbClr val="225B9B"/>
+                </a:solidFill>
+                <a:latin typeface="Noto Sans CJK KR"/>
+              </a:defRPr>
+            </a:pPr>
+            <a:r>
+              <a:t>명령의 목적</a:t>
+            </a:r>
+          </a:p>
+        </p:txBody>
+      </p:sp>
+      <p:sp>
+        <p:nvSpPr>
+          <p:cNvPr id="8" name="TextBox 7"/>
+          <p:cNvSpPr txBox="1"/>
+          <p:nvPr/>
+        </p:nvSpPr>
+        <p:spPr>
+          <a:xfrm>
+            <a:off x="676656" y="2002536"/>
+            <a:ext cx="10789920" cy="512064"/>
+          </a:xfrm>
+          <a:prstGeom prst="rect">
+            <a:avLst/>
+          </a:prstGeom>
+          <a:noFill/>
+        </p:spPr>
+        <p:txBody>
+          <a:bodyPr wrap="square" lIns="73152" rIns="73152" tIns="36576" bIns="36576">
+            <a:spAutoFit/>
+          </a:bodyPr>
+          <a:lstStyle/>
+          <a:p>
+            <a:pPr algn="l">
+              <a:spcAft>
+                <a:spcPts val="0"/>
+              </a:spcAft>
+              <a:defRPr sz="1800" b="0">
+                <a:solidFill>
+                  <a:srgbClr val="122C4E"/>
+                </a:solidFill>
+                <a:latin typeface="Noto Sans CJK KR"/>
+              </a:defRPr>
+            </a:pPr>
+            <a:r>
+              <a:t>명령 순서를 바꾸지 않습니다. build가 끝난 뒤 source하고, 마지막 명령으로 node·Gazebo·RViz를 실행합니다.</a:t>
+            </a:r>
+          </a:p>
+        </p:txBody>
+      </p:sp>
+      <p:sp>
+        <p:nvSpPr>
+          <p:cNvPr id="9" name="TextBox 8"/>
+          <p:cNvSpPr txBox="1"/>
+          <p:nvPr/>
+        </p:nvSpPr>
+        <p:spPr>
+          <a:xfrm>
+            <a:off x="676656" y="2816352"/>
+            <a:ext cx="10835640" cy="256032"/>
+          </a:xfrm>
+          <a:prstGeom prst="rect">
+            <a:avLst/>
+          </a:prstGeom>
+          <a:noFill/>
+        </p:spPr>
+        <p:txBody>
+          <a:bodyPr wrap="square" lIns="73152" rIns="73152" tIns="36576" bIns="36576">
+            <a:spAutoFit/>
+          </a:bodyPr>
+          <a:lstStyle/>
+          <a:p>
+            <a:pPr algn="ctr">
+              <a:spcAft>
+                <a:spcPts val="0"/>
+              </a:spcAft>
+              <a:defRPr sz="1600" b="1">
+                <a:solidFill>
+                  <a:srgbClr val="225B9B"/>
+                </a:solidFill>
+                <a:latin typeface="Noto Sans CJK KR"/>
+              </a:defRPr>
+            </a:pPr>
+            <a:r>
+              <a:t>터미널 1 — 아래 검은 블록은 명령만 복사합니다.</a:t>
+            </a:r>
+          </a:p>
+        </p:txBody>
+      </p:sp>
+      <p:sp>
+        <p:nvSpPr>
+          <p:cNvPr id="10" name="Rounded Rectangle 9"/>
           <p:cNvSpPr/>
           <p:nvPr/>
         </p:nvSpPr>
         <p:spPr>
           <a:xfrm>
-            <a:off x="658368" y="1700784"/>
-            <a:ext cx="10972800" cy="3182112"/>
+            <a:off x="676656" y="3154680"/>
+            <a:ext cx="10835640" cy="1938528"/>
           </a:xfrm>
           <a:prstGeom prst="roundRect">
             <a:avLst/>
@@ -25016,7 +26333,7 @@
           </a:fontRef>
         </p:style>
         <p:txBody>
-          <a:bodyPr rtlCol="0" anchor="ctr" wrap="square" lIns="73152" rIns="73152" tIns="36576" bIns="36576"/>
+          <a:bodyPr rtlCol="0" anchor="ctr" wrap="square" lIns="109728" rIns="109728" tIns="73152" bIns="73152"/>
           <a:lstStyle/>
           <a:p>
             <a:pPr algn="l">
@@ -25033,7 +26350,19 @@
             <a:r>
               <a:t>source ~/ros2_curri/my_agv_ws/install/setup.bash</a:t>
             </a:r>
-            <a:br/>
+          </a:p>
+          <a:p>
+            <a:pPr algn="l">
+              <a:spcAft>
+                <a:spcPts val="0"/>
+              </a:spcAft>
+              <a:defRPr sz="1600" b="0">
+                <a:solidFill>
+                  <a:srgbClr val="FFFFFF"/>
+                </a:solidFill>
+                <a:latin typeface="DejaVu Sans Mono"/>
+              </a:defRPr>
+            </a:pPr>
             <a:r>
               <a:t>ros2 run agv_control safety_controller --ros-args -p stop_distance:=0.5</a:t>
             </a:r>
@@ -25042,31 +26371,31 @@
       </p:sp>
       <p:sp>
         <p:nvSpPr>
-          <p:cNvPr id="8" name="TextBox 7"/>
-          <p:cNvSpPr txBox="1"/>
-          <p:nvPr/>
-        </p:nvSpPr>
-        <p:spPr>
-          <a:xfrm>
-            <a:off x="786384" y="5239512"/>
-            <a:ext cx="1261872" cy="237744"/>
-          </a:xfrm>
-          <a:prstGeom prst="rect">
-            <a:avLst/>
-          </a:prstGeom>
-          <a:noFill/>
-        </p:spPr>
-        <p:txBody>
-          <a:bodyPr wrap="square" lIns="73152" rIns="73152" tIns="36576" bIns="36576">
-            <a:spAutoFit/>
-          </a:bodyPr>
-          <a:lstStyle/>
-          <a:p>
-            <a:pPr algn="l">
-              <a:spcAft>
-                <a:spcPts val="0"/>
-              </a:spcAft>
-              <a:defRPr sz="1800" b="1">
+          <p:cNvPr id="11" name="TextBox 10"/>
+          <p:cNvSpPr txBox="1"/>
+          <p:nvPr/>
+        </p:nvSpPr>
+        <p:spPr>
+          <a:xfrm>
+            <a:off x="768096" y="5276088"/>
+            <a:ext cx="10561320" cy="384048"/>
+          </a:xfrm>
+          <a:prstGeom prst="rect">
+            <a:avLst/>
+          </a:prstGeom>
+          <a:noFill/>
+        </p:spPr>
+        <p:txBody>
+          <a:bodyPr wrap="square" lIns="73152" rIns="73152" tIns="36576" bIns="36576">
+            <a:spAutoFit/>
+          </a:bodyPr>
+          <a:lstStyle/>
+          <a:p>
+            <a:pPr algn="ctr">
+              <a:spcAft>
+                <a:spcPts val="0"/>
+              </a:spcAft>
+              <a:defRPr sz="1500" b="1">
                 <a:solidFill>
                   <a:srgbClr val="2A8B5A"/>
                 </a:solidFill>
@@ -25074,38 +26403,38 @@
               </a:defRPr>
             </a:pPr>
             <a:r>
-              <a:t>확인 기준</a:t>
-            </a:r>
-          </a:p>
-        </p:txBody>
-      </p:sp>
-      <p:sp>
-        <p:nvSpPr>
-          <p:cNvPr id="9" name="TextBox 8"/>
-          <p:cNvSpPr txBox="1"/>
-          <p:nvPr/>
-        </p:nvSpPr>
-        <p:spPr>
-          <a:xfrm>
-            <a:off x="786384" y="5532120"/>
-            <a:ext cx="10469880" cy="420624"/>
-          </a:xfrm>
-          <a:prstGeom prst="rect">
-            <a:avLst/>
-          </a:prstGeom>
-          <a:noFill/>
-        </p:spPr>
-        <p:txBody>
-          <a:bodyPr wrap="square" lIns="73152" rIns="73152" tIns="36576" bIns="36576">
-            <a:spAutoFit/>
-          </a:bodyPr>
-          <a:lstStyle/>
-          <a:p>
-            <a:pPr algn="l">
-              <a:spcAft>
-                <a:spcPts val="0"/>
-              </a:spcAft>
-              <a:defRPr sz="1800" b="0">
+              <a:t>터미널 1 역할: 이 node를 실행합니다. 출력이 계속 나오는 동안 Ctrl+C로 종료하지 않습니다.</a:t>
+            </a:r>
+          </a:p>
+        </p:txBody>
+      </p:sp>
+      <p:sp>
+        <p:nvSpPr>
+          <p:cNvPr id="12" name="TextBox 11"/>
+          <p:cNvSpPr txBox="1"/>
+          <p:nvPr/>
+        </p:nvSpPr>
+        <p:spPr>
+          <a:xfrm>
+            <a:off x="768096" y="5916168"/>
+            <a:ext cx="10561320" cy="292608"/>
+          </a:xfrm>
+          <a:prstGeom prst="rect">
+            <a:avLst/>
+          </a:prstGeom>
+          <a:noFill/>
+        </p:spPr>
+        <p:txBody>
+          <a:bodyPr wrap="square" lIns="73152" rIns="73152" tIns="36576" bIns="36576">
+            <a:spAutoFit/>
+          </a:bodyPr>
+          <a:lstStyle/>
+          <a:p>
+            <a:pPr algn="ctr">
+              <a:spcAft>
+                <a:spcPts val="0"/>
+              </a:spcAft>
+              <a:defRPr sz="1500" b="1">
                 <a:solidFill>
                   <a:srgbClr val="122C4E"/>
                 </a:solidFill>
@@ -25113,7 +26442,7 @@
               </a:defRPr>
             </a:pPr>
             <a:r>
-              <a:t>0.5 m 안 장애물에서 forward cmd_vel이 zero Twist로 바뀌는 조건을 설명한다.</a:t>
+              <a:t>확인: 0.5 m 안 장애물에서 forward cmd_vel이 zero Twist로 바뀌는 조건을 설명한다.</a:t>
             </a:r>
           </a:p>
         </p:txBody>
@@ -25209,7 +26538,7 @@
               </a:defRPr>
             </a:pPr>
             <a:r>
-              <a:t>실제 ROS 2 환경의 파일·패키지·구성 검증 로그</a:t>
+              <a:t>실제 RViz2: safety sector Marker와 Path를 추가해 확인하는 통합 display</a:t>
             </a:r>
           </a:p>
         </p:txBody>
@@ -25294,7 +26623,7 @@
       </p:sp>
       <p:pic>
         <p:nvPicPr>
-          <p:cNvPr id="6" name="Picture 5" descr="validation_terminal.png"/>
+          <p:cNvPr id="6" name="Picture 5" descr="02_rviz_marker_path_actual.png"/>
           <p:cNvPicPr>
             <a:picLocks noChangeAspect="1"/>
           </p:cNvPicPr>
@@ -25308,8 +26637,8 @@
         </p:blipFill>
         <p:spPr>
           <a:xfrm>
-            <a:off x="790956" y="1562649"/>
-            <a:ext cx="10607040" cy="4381924"/>
+            <a:off x="2971409" y="1353312"/>
+            <a:ext cx="6246133" cy="4800600"/>
           </a:xfrm>
           <a:prstGeom prst="rect">
             <a:avLst/>
@@ -25350,7 +26679,7 @@
               </a:defRPr>
             </a:pPr>
             <a:r>
-              <a:t>화면에서 확인: ① 명령/설정  ② 정상 출력 또는 화면  ③ 다음 검증 명령으로 재확인</a:t>
+              <a:t>화면에서 확인: 명령·설정과 화면의 topic·frame·결과 이름을 대조합니다.</a:t>
             </a:r>
           </a:p>
         </p:txBody>
@@ -25407,7 +26736,7 @@
               </a:defRPr>
             </a:pPr>
             <a:r>
-              <a:t>객관적 검증 명령으로 완료를 확인한다</a:t>
+              <a:t>정상 결과: 실제 환경에서 확인한 출력</a:t>
             </a:r>
           </a:p>
         </p:txBody>
@@ -25446,7 +26775,7 @@
               </a:defRPr>
             </a:pPr>
             <a:r>
-              <a:t>화면만 보지 말고 topic·frame·파일·parameter를 다시 확인합니다.</a:t>
+              <a:t>실제 ROS 2 환경의 파일·패키지·구성 검증 로그</a:t>
             </a:r>
           </a:p>
         </p:txBody>
@@ -25529,176 +26858,57 @@
           </a:p>
         </p:txBody>
       </p:sp>
-      <p:sp>
-        <p:nvSpPr>
-          <p:cNvPr id="6" name="Rectangle 5"/>
-          <p:cNvSpPr/>
-          <p:nvPr/>
-        </p:nvSpPr>
-        <p:spPr>
-          <a:xfrm>
-            <a:off x="566928" y="1188720"/>
-            <a:ext cx="11064240" cy="347472"/>
-          </a:xfrm>
-          <a:prstGeom prst="rect">
-            <a:avLst/>
-          </a:prstGeom>
-          <a:solidFill>
-            <a:srgbClr val="F4F7FB"/>
-          </a:solidFill>
-          <a:ln>
-            <a:solidFill>
-              <a:srgbClr val="F4F7FB"/>
-            </a:solidFill>
-          </a:ln>
-        </p:spPr>
-        <p:style>
-          <a:lnRef idx="1">
-            <a:schemeClr val="accent1"/>
-          </a:lnRef>
-          <a:fillRef idx="3">
-            <a:schemeClr val="accent1"/>
-          </a:fillRef>
-          <a:effectRef idx="2">
-            <a:schemeClr val="accent1"/>
-          </a:effectRef>
-          <a:fontRef idx="minor">
-            <a:schemeClr val="lt1"/>
-          </a:fontRef>
-        </p:style>
-        <p:txBody>
-          <a:bodyPr rtlCol="0" anchor="ctr" wrap="square" lIns="73152" rIns="73152" tIns="36576" bIns="36576"/>
-          <a:lstStyle/>
-          <a:p>
-            <a:pPr algn="l">
-              <a:spcAft>
-                <a:spcPts val="0"/>
-              </a:spcAft>
-              <a:defRPr sz="1300" b="1">
-                <a:solidFill>
-                  <a:srgbClr val="122C4E"/>
-                </a:solidFill>
-                <a:latin typeface="Noto Sans CJK KR"/>
-              </a:defRPr>
-            </a:pPr>
-            <a:r>
-              <a:t>현재 단계 검증    |    현재 폴더 ~/ros2_curri/my_agv_ws    |    현재 터미널</a:t>
-            </a:r>
-          </a:p>
-        </p:txBody>
-      </p:sp>
-      <p:sp>
-        <p:nvSpPr>
-          <p:cNvPr id="7" name="Rounded Rectangle 6"/>
-          <p:cNvSpPr/>
-          <p:nvPr/>
-        </p:nvSpPr>
-        <p:spPr>
-          <a:xfrm>
-            <a:off x="658368" y="1755648"/>
-            <a:ext cx="10972800" cy="2148840"/>
-          </a:xfrm>
-          <a:prstGeom prst="roundRect">
-            <a:avLst/>
-          </a:prstGeom>
-          <a:solidFill>
-            <a:srgbClr val="1D232D"/>
-          </a:solidFill>
-          <a:ln>
-            <a:solidFill>
-              <a:srgbClr val="1D232D"/>
-            </a:solidFill>
-          </a:ln>
-        </p:spPr>
-        <p:style>
-          <a:lnRef idx="1">
-            <a:schemeClr val="accent1"/>
-          </a:lnRef>
-          <a:fillRef idx="3">
-            <a:schemeClr val="accent1"/>
-          </a:fillRef>
-          <a:effectRef idx="2">
-            <a:schemeClr val="accent1"/>
-          </a:effectRef>
-          <a:fontRef idx="minor">
-            <a:schemeClr val="lt1"/>
-          </a:fontRef>
-        </p:style>
-        <p:txBody>
-          <a:bodyPr rtlCol="0" anchor="ctr" wrap="square" lIns="73152" rIns="73152" tIns="36576" bIns="36576"/>
-          <a:lstStyle/>
-          <a:p>
-            <a:pPr algn="l">
-              <a:spcAft>
-                <a:spcPts val="0"/>
-              </a:spcAft>
-              <a:defRPr sz="1600" b="0">
-                <a:solidFill>
-                  <a:srgbClr val="FFFFFF"/>
-                </a:solidFill>
-                <a:latin typeface="DejaVu Sans Mono"/>
-              </a:defRPr>
-            </a:pPr>
-            <a:r>
-              <a:t>ros2 topic info /cmd_vel_raw</a:t>
-            </a:r>
-            <a:br/>
-            <a:r>
-              <a:t>ros2 topic info /cmd_vel</a:t>
-            </a:r>
-            <a:br/>
-            <a:r>
-              <a:t>ros2 param get /safety_controller stop_distance</a:t>
-            </a:r>
-          </a:p>
-        </p:txBody>
-      </p:sp>
-      <p:sp>
-        <p:nvSpPr>
-          <p:cNvPr id="8" name="Rounded Rectangle 7"/>
-          <p:cNvSpPr/>
-          <p:nvPr/>
-        </p:nvSpPr>
-        <p:spPr>
-          <a:xfrm>
-            <a:off x="658368" y="4206240"/>
-            <a:ext cx="10972800" cy="1554480"/>
-          </a:xfrm>
-          <a:prstGeom prst="roundRect">
-            <a:avLst/>
-          </a:prstGeom>
-          <a:solidFill>
-            <a:srgbClr val="F4F7FB"/>
-          </a:solidFill>
-          <a:ln>
-            <a:solidFill>
-              <a:srgbClr val="D1DFD5"/>
-            </a:solidFill>
-          </a:ln>
-        </p:spPr>
-        <p:style>
-          <a:lnRef idx="1">
-            <a:schemeClr val="accent1"/>
-          </a:lnRef>
-          <a:fillRef idx="3">
-            <a:schemeClr val="accent1"/>
-          </a:fillRef>
-          <a:effectRef idx="2">
-            <a:schemeClr val="accent1"/>
-          </a:effectRef>
-          <a:fontRef idx="minor">
-            <a:schemeClr val="lt1"/>
-          </a:fontRef>
-        </p:style>
-        <p:txBody>
-          <a:bodyPr rtlCol="0" anchor="ctr" wrap="square" lIns="73152" rIns="73152" tIns="36576" bIns="36576"/>
-          <a:lstStyle/>
-          <a:p>
-            <a:pPr algn="l">
-              <a:spcAft>
-                <a:spcPts val="0"/>
-              </a:spcAft>
-              <a:defRPr sz="1800" b="1">
+      <p:pic>
+        <p:nvPicPr>
+          <p:cNvPr id="6" name="Picture 5" descr="validation_terminal.png"/>
+          <p:cNvPicPr>
+            <a:picLocks noChangeAspect="1"/>
+          </p:cNvPicPr>
+          <p:nvPr/>
+        </p:nvPicPr>
+        <p:blipFill>
+          <a:blip r:embed="rId2"/>
+          <a:stretch>
+            <a:fillRect/>
+          </a:stretch>
+        </p:blipFill>
+        <p:spPr>
+          <a:xfrm>
+            <a:off x="790956" y="1562649"/>
+            <a:ext cx="10607040" cy="4381924"/>
+          </a:xfrm>
+          <a:prstGeom prst="rect">
+            <a:avLst/>
+          </a:prstGeom>
+        </p:spPr>
+      </p:pic>
+      <p:sp>
+        <p:nvSpPr>
+          <p:cNvPr id="7" name="TextBox 6"/>
+          <p:cNvSpPr txBox="1"/>
+          <p:nvPr/>
+        </p:nvSpPr>
+        <p:spPr>
+          <a:xfrm>
+            <a:off x="777240" y="6144768"/>
+            <a:ext cx="10607040" cy="310896"/>
+          </a:xfrm>
+          <a:prstGeom prst="rect">
+            <a:avLst/>
+          </a:prstGeom>
+          <a:noFill/>
+        </p:spPr>
+        <p:txBody>
+          <a:bodyPr wrap="square" lIns="73152" rIns="73152" tIns="36576" bIns="36576">
+            <a:spAutoFit/>
+          </a:bodyPr>
+          <a:lstStyle/>
+          <a:p>
+            <a:pPr algn="ctr">
+              <a:spcAft>
+                <a:spcPts val="0"/>
+              </a:spcAft>
+              <a:defRPr sz="1100" b="1">
                 <a:solidFill>
                   <a:srgbClr val="2A8B5A"/>
                 </a:solidFill>
@@ -25706,58 +26916,7 @@
               </a:defRPr>
             </a:pPr>
             <a:r>
-              <a:t>완료 체크</a:t>
-            </a:r>
-            <a:br/>
-            <a:r>
-              <a:t>□ 명령이 오류 없이 실행된다.</a:t>
-            </a:r>
-            <a:br/>
-            <a:r>
-              <a:t>□ 기대한 파일·topic·frame·parameter 이름이 보인다.</a:t>
-            </a:r>
-            <a:br/>
-            <a:r>
-              <a:t>□ 값의 단위와 방향을 한 문장으로 설명할 수 있다.</a:t>
-            </a:r>
-          </a:p>
-        </p:txBody>
-      </p:sp>
-      <p:sp>
-        <p:nvSpPr>
-          <p:cNvPr id="9" name="TextBox 8"/>
-          <p:cNvSpPr txBox="1"/>
-          <p:nvPr/>
-        </p:nvSpPr>
-        <p:spPr>
-          <a:xfrm>
-            <a:off x="731520" y="5989320"/>
-            <a:ext cx="10789920" cy="237744"/>
-          </a:xfrm>
-          <a:prstGeom prst="rect">
-            <a:avLst/>
-          </a:prstGeom>
-          <a:noFill/>
-        </p:spPr>
-        <p:txBody>
-          <a:bodyPr wrap="square" lIns="73152" rIns="73152" tIns="36576" bIns="36576">
-            <a:spAutoFit/>
-          </a:bodyPr>
-          <a:lstStyle/>
-          <a:p>
-            <a:pPr algn="l">
-              <a:spcAft>
-                <a:spcPts val="0"/>
-              </a:spcAft>
-              <a:defRPr sz="1500" b="1">
-                <a:solidFill>
-                  <a:srgbClr val="122C4E"/>
-                </a:solidFill>
-                <a:latin typeface="Noto Sans CJK KR"/>
-              </a:defRPr>
-            </a:pPr>
-            <a:r>
-              <a:t>완료 조건: 0.5 m 안 장애물에서 forward cmd_vel이 zero Twist로 바뀌는 조건을 설명한다.</a:t>
+              <a:t>화면에서 확인: ① 명령/설정  ② 정상 출력 또는 화면  ③ 다음 검증 명령으로 재확인</a:t>
             </a:r>
           </a:p>
         </p:txBody>
@@ -26147,7 +27306,7 @@
               </a:defRPr>
             </a:pPr>
             <a:r>
-              <a:t>막히면: 증상 → 우선 확인 → 재검증</a:t>
+              <a:t>객관적 검증 명령으로 완료를 확인한다</a:t>
             </a:r>
           </a:p>
         </p:txBody>
@@ -26186,7 +27345,7 @@
               </a:defRPr>
             </a:pPr>
             <a:r>
-              <a:t>오류 메시지를 숨기지 않고 같은 순서로 점검합니다.</a:t>
+              <a:t>화면만 보지 말고 topic·frame·파일·parameter를 다시 확인합니다.</a:t>
             </a:r>
           </a:p>
         </p:txBody>
@@ -26322,7 +27481,7 @@
               </a:defRPr>
             </a:pPr>
             <a:r>
-              <a:t>현재 단계 오류 대응    |    현재 폴더 ~/ros2_curri/my_agv_ws    |    현재 터미널</a:t>
+              <a:t>현재 단계 검증    |    현재 폴더 ~/ros2_curri/my_agv_ws    |    현재 터미널</a:t>
             </a:r>
           </a:p>
         </p:txBody>
@@ -26335,18 +27494,18 @@
         </p:nvSpPr>
         <p:spPr>
           <a:xfrm>
-            <a:off x="694944" y="1755648"/>
-            <a:ext cx="10972800" cy="1115568"/>
+            <a:off x="658368" y="1755648"/>
+            <a:ext cx="10972800" cy="2148840"/>
           </a:xfrm>
           <a:prstGeom prst="roundRect">
             <a:avLst/>
           </a:prstGeom>
           <a:solidFill>
-            <a:srgbClr val="FFF7F4"/>
+            <a:srgbClr val="1D232D"/>
           </a:solidFill>
           <a:ln>
             <a:solidFill>
-              <a:srgbClr val="EDBEB4"/>
+              <a:srgbClr val="1D232D"/>
             </a:solidFill>
           </a:ln>
         </p:spPr>
@@ -26365,72 +27524,7 @@
           </a:fontRef>
         </p:style>
         <p:txBody>
-          <a:bodyPr rtlCol="0" anchor="ctr"/>
-          <a:lstStyle/>
-          <a:p>
-            <a:pPr algn="ctr"/>
-          </a:p>
-        </p:txBody>
-      </p:sp>
-      <p:sp>
-        <p:nvSpPr>
-          <p:cNvPr id="8" name="TextBox 7"/>
-          <p:cNvSpPr txBox="1"/>
-          <p:nvPr/>
-        </p:nvSpPr>
-        <p:spPr>
-          <a:xfrm>
-            <a:off x="896112" y="1901952"/>
-            <a:ext cx="2926080" cy="274320"/>
-          </a:xfrm>
-          <a:prstGeom prst="rect">
-            <a:avLst/>
-          </a:prstGeom>
-          <a:noFill/>
-        </p:spPr>
-        <p:txBody>
-          <a:bodyPr wrap="square" lIns="73152" rIns="73152" tIns="36576" bIns="36576">
-            <a:spAutoFit/>
-          </a:bodyPr>
-          <a:lstStyle/>
-          <a:p>
-            <a:pPr algn="l">
-              <a:spcAft>
-                <a:spcPts val="0"/>
-              </a:spcAft>
-              <a:defRPr sz="1800" b="1">
-                <a:solidFill>
-                  <a:srgbClr val="BE3B3B"/>
-                </a:solidFill>
-                <a:latin typeface="Noto Sans CJK KR"/>
-              </a:defRPr>
-            </a:pPr>
-            <a:r>
-              <a:t>증상 1: 장애물이 있는데 멈추지 않음</a:t>
-            </a:r>
-          </a:p>
-        </p:txBody>
-      </p:sp>
-      <p:sp>
-        <p:nvSpPr>
-          <p:cNvPr id="9" name="TextBox 8"/>
-          <p:cNvSpPr txBox="1"/>
-          <p:nvPr/>
-        </p:nvSpPr>
-        <p:spPr>
-          <a:xfrm>
-            <a:off x="3794760" y="1883664"/>
-            <a:ext cx="7543800" cy="621792"/>
-          </a:xfrm>
-          <a:prstGeom prst="rect">
-            <a:avLst/>
-          </a:prstGeom>
-          <a:noFill/>
-        </p:spPr>
-        <p:txBody>
-          <a:bodyPr wrap="square" lIns="73152" rIns="73152" tIns="36576" bIns="36576">
-            <a:spAutoFit/>
-          </a:bodyPr>
+          <a:bodyPr rtlCol="0" anchor="ctr" wrap="square" lIns="109728" rIns="109728" tIns="73152" bIns="73152"/>
           <a:lstStyle/>
           <a:p>
             <a:pPr algn="l">
@@ -26439,41 +27533,69 @@
               </a:spcAft>
               <a:defRPr sz="1600" b="0">
                 <a:solidFill>
-                  <a:srgbClr val="122C4E"/>
-                </a:solidFill>
-                <a:latin typeface="Noto Sans CJK KR"/>
-              </a:defRPr>
-            </a:pPr>
-            <a:r>
-              <a:t>우선 확인: sector 각도·finite range·threshold m 단위를 확인한다.</a:t>
-            </a:r>
-            <a:br/>
-            <a:r>
-              <a:t>수정 후: ros2 topic info /cmd_vel_raw</a:t>
-            </a:r>
-          </a:p>
-        </p:txBody>
-      </p:sp>
-      <p:sp>
-        <p:nvSpPr>
-          <p:cNvPr id="10" name="Rounded Rectangle 9"/>
+                  <a:srgbClr val="FFFFFF"/>
+                </a:solidFill>
+                <a:latin typeface="DejaVu Sans Mono"/>
+              </a:defRPr>
+            </a:pPr>
+            <a:r>
+              <a:t>ros2 topic info /cmd_vel_raw</a:t>
+            </a:r>
+          </a:p>
+          <a:p>
+            <a:pPr algn="l">
+              <a:spcAft>
+                <a:spcPts val="0"/>
+              </a:spcAft>
+              <a:defRPr sz="1600" b="0">
+                <a:solidFill>
+                  <a:srgbClr val="FFFFFF"/>
+                </a:solidFill>
+                <a:latin typeface="DejaVu Sans Mono"/>
+              </a:defRPr>
+            </a:pPr>
+            <a:r>
+              <a:t>ros2 topic info /cmd_vel</a:t>
+            </a:r>
+          </a:p>
+          <a:p>
+            <a:pPr algn="l">
+              <a:spcAft>
+                <a:spcPts val="0"/>
+              </a:spcAft>
+              <a:defRPr sz="1600" b="0">
+                <a:solidFill>
+                  <a:srgbClr val="FFFFFF"/>
+                </a:solidFill>
+                <a:latin typeface="DejaVu Sans Mono"/>
+              </a:defRPr>
+            </a:pPr>
+            <a:r>
+              <a:t>ros2 param get /safety_controller stop_distance</a:t>
+            </a:r>
+          </a:p>
+        </p:txBody>
+      </p:sp>
+      <p:sp>
+        <p:nvSpPr>
+          <p:cNvPr id="8" name="Rounded Rectangle 7"/>
           <p:cNvSpPr/>
           <p:nvPr/>
         </p:nvSpPr>
         <p:spPr>
           <a:xfrm>
-            <a:off x="694944" y="3172968"/>
-            <a:ext cx="10972800" cy="1115568"/>
+            <a:off x="658368" y="4206240"/>
+            <a:ext cx="10972800" cy="1554480"/>
           </a:xfrm>
           <a:prstGeom prst="roundRect">
             <a:avLst/>
           </a:prstGeom>
           <a:solidFill>
-            <a:srgbClr val="FFF7F4"/>
+            <a:srgbClr val="F4F7FB"/>
           </a:solidFill>
           <a:ln>
             <a:solidFill>
-              <a:srgbClr val="EDBEB4"/>
+              <a:srgbClr val="D1DFD5"/>
             </a:solidFill>
           </a:ln>
         </p:spPr>
@@ -26492,33 +27614,7 @@
           </a:fontRef>
         </p:style>
         <p:txBody>
-          <a:bodyPr rtlCol="0" anchor="ctr"/>
-          <a:lstStyle/>
-          <a:p>
-            <a:pPr algn="ctr"/>
-          </a:p>
-        </p:txBody>
-      </p:sp>
-      <p:sp>
-        <p:nvSpPr>
-          <p:cNvPr id="11" name="TextBox 10"/>
-          <p:cNvSpPr txBox="1"/>
-          <p:nvPr/>
-        </p:nvSpPr>
-        <p:spPr>
-          <a:xfrm>
-            <a:off x="896112" y="3319272"/>
-            <a:ext cx="2926080" cy="274320"/>
-          </a:xfrm>
-          <a:prstGeom prst="rect">
-            <a:avLst/>
-          </a:prstGeom>
-          <a:noFill/>
-        </p:spPr>
-        <p:txBody>
-          <a:bodyPr wrap="square" lIns="73152" rIns="73152" tIns="36576" bIns="36576">
-            <a:spAutoFit/>
-          </a:bodyPr>
+          <a:bodyPr rtlCol="0" anchor="ctr" wrap="square" lIns="73152" rIns="73152" tIns="36576" bIns="36576"/>
           <a:lstStyle/>
           <a:p>
             <a:pPr algn="l">
@@ -26527,44 +27623,56 @@
               </a:spcAft>
               <a:defRPr sz="1800" b="1">
                 <a:solidFill>
-                  <a:srgbClr val="BE3B3B"/>
-                </a:solidFill>
-                <a:latin typeface="Noto Sans CJK KR"/>
-              </a:defRPr>
-            </a:pPr>
-            <a:r>
-              <a:t>증상 2: 항상 STOP</a:t>
-            </a:r>
-          </a:p>
-        </p:txBody>
-      </p:sp>
-      <p:sp>
-        <p:nvSpPr>
-          <p:cNvPr id="12" name="TextBox 11"/>
-          <p:cNvSpPr txBox="1"/>
-          <p:nvPr/>
-        </p:nvSpPr>
-        <p:spPr>
-          <a:xfrm>
-            <a:off x="3794760" y="3300984"/>
-            <a:ext cx="7543800" cy="621792"/>
-          </a:xfrm>
-          <a:prstGeom prst="rect">
-            <a:avLst/>
-          </a:prstGeom>
-          <a:noFill/>
-        </p:spPr>
-        <p:txBody>
-          <a:bodyPr wrap="square" lIns="73152" rIns="73152" tIns="36576" bIns="36576">
-            <a:spAutoFit/>
-          </a:bodyPr>
-          <a:lstStyle/>
-          <a:p>
-            <a:pPr algn="l">
-              <a:spcAft>
-                <a:spcPts val="0"/>
-              </a:spcAft>
-              <a:defRPr sz="1600" b="0">
+                  <a:srgbClr val="2A8B5A"/>
+                </a:solidFill>
+                <a:latin typeface="Noto Sans CJK KR"/>
+              </a:defRPr>
+            </a:pPr>
+            <a:r>
+              <a:t>완료 체크</a:t>
+            </a:r>
+            <a:br/>
+            <a:r>
+              <a:t>□ 명령이 오류 없이 실행된다.</a:t>
+            </a:r>
+            <a:br/>
+            <a:r>
+              <a:t>□ 기대한 파일·topic·frame·parameter 이름이 보인다.</a:t>
+            </a:r>
+            <a:br/>
+            <a:r>
+              <a:t>□ 값의 단위와 방향을 한 문장으로 설명할 수 있다.</a:t>
+            </a:r>
+          </a:p>
+        </p:txBody>
+      </p:sp>
+      <p:sp>
+        <p:nvSpPr>
+          <p:cNvPr id="9" name="TextBox 8"/>
+          <p:cNvSpPr txBox="1"/>
+          <p:nvPr/>
+        </p:nvSpPr>
+        <p:spPr>
+          <a:xfrm>
+            <a:off x="731520" y="5989320"/>
+            <a:ext cx="10789920" cy="237744"/>
+          </a:xfrm>
+          <a:prstGeom prst="rect">
+            <a:avLst/>
+          </a:prstGeom>
+          <a:noFill/>
+        </p:spPr>
+        <p:txBody>
+          <a:bodyPr wrap="square" lIns="73152" rIns="73152" tIns="36576" bIns="36576">
+            <a:spAutoFit/>
+          </a:bodyPr>
+          <a:lstStyle/>
+          <a:p>
+            <a:pPr algn="l">
+              <a:spcAft>
+                <a:spcPts val="0"/>
+              </a:spcAft>
+              <a:defRPr sz="1500" b="1">
                 <a:solidFill>
                   <a:srgbClr val="122C4E"/>
                 </a:solidFill>
@@ -26572,50 +27680,7 @@
               </a:defRPr>
             </a:pPr>
             <a:r>
-              <a:t>우선 확인: inf/NaN 처리와 lidar frame 전방 방향을 확인한다.</a:t>
-            </a:r>
-            <a:br/>
-            <a:r>
-              <a:t>수정 후: ros2 topic info /cmd_vel_raw</a:t>
-            </a:r>
-          </a:p>
-        </p:txBody>
-      </p:sp>
-      <p:sp>
-        <p:nvSpPr>
-          <p:cNvPr id="13" name="TextBox 12"/>
-          <p:cNvSpPr txBox="1"/>
-          <p:nvPr/>
-        </p:nvSpPr>
-        <p:spPr>
-          <a:xfrm>
-            <a:off x="822960" y="5102352"/>
-            <a:ext cx="10607040" cy="402336"/>
-          </a:xfrm>
-          <a:prstGeom prst="rect">
-            <a:avLst/>
-          </a:prstGeom>
-          <a:noFill/>
-        </p:spPr>
-        <p:txBody>
-          <a:bodyPr wrap="square" lIns="73152" rIns="73152" tIns="36576" bIns="36576">
-            <a:spAutoFit/>
-          </a:bodyPr>
-          <a:lstStyle/>
-          <a:p>
-            <a:pPr algn="ctr">
-              <a:spcAft>
-                <a:spcPts val="0"/>
-              </a:spcAft>
-              <a:defRPr sz="1800" b="1">
-                <a:solidFill>
-                  <a:srgbClr val="DB7E22"/>
-                </a:solidFill>
-                <a:latin typeface="Noto Sans CJK KR"/>
-              </a:defRPr>
-            </a:pPr>
-            <a:r>
-              <a:t>공통 순서: ① 현재 폴더 ② source ③ 파일 경로 ④ 이름/타입/단위 ⑤ build·source 후 재실행</a:t>
+              <a:t>완료 조건: 0.5 m 안 장애물에서 forward cmd_vel이 zero Twist로 바뀌는 조건을 설명한다.</a:t>
             </a:r>
           </a:p>
         </p:txBody>
@@ -26672,7 +27737,7 @@
               </a:defRPr>
             </a:pPr>
             <a:r>
-              <a:t>막혔을 때만: Complete를 복구용으로 사용한다</a:t>
+              <a:t>막히면: 증상 → 우선 확인 → 재검증</a:t>
             </a:r>
           </a:p>
         </p:txBody>
@@ -26711,7 +27776,7 @@
               </a:defRPr>
             </a:pPr>
             <a:r>
-              <a:t>이 슬라이드가 먼저가 아닙니다. 직접 입력·실행을 시도한 뒤에만 내 파일과 Complete를 비교합니다.</a:t>
+              <a:t>오류 메시지를 숨기지 않고 같은 순서로 점검합니다.</a:t>
             </a:r>
           </a:p>
         </p:txBody>
@@ -26847,70 +27912,31 @@
               </a:defRPr>
             </a:pPr>
             <a:r>
-              <a:t>현재 단계 복구용 Complete    |    현재 폴더 ~/ros2_curri    |    현재 터미널</a:t>
-            </a:r>
-          </a:p>
-        </p:txBody>
-      </p:sp>
-      <p:sp>
-        <p:nvSpPr>
-          <p:cNvPr id="7" name="TextBox 6"/>
-          <p:cNvSpPr txBox="1"/>
-          <p:nvPr/>
-        </p:nvSpPr>
-        <p:spPr>
-          <a:xfrm>
-            <a:off x="713232" y="1664208"/>
-            <a:ext cx="10698480" cy="402336"/>
-          </a:xfrm>
-          <a:prstGeom prst="rect">
-            <a:avLst/>
-          </a:prstGeom>
-          <a:noFill/>
-        </p:spPr>
-        <p:txBody>
-          <a:bodyPr wrap="square" lIns="73152" rIns="73152" tIns="36576" bIns="36576">
-            <a:spAutoFit/>
-          </a:bodyPr>
-          <a:lstStyle/>
-          <a:p>
-            <a:pPr algn="ctr">
-              <a:spcAft>
-                <a:spcPts val="0"/>
-              </a:spcAft>
-              <a:defRPr sz="1800" b="1">
-                <a:solidFill>
-                  <a:srgbClr val="DB7E22"/>
-                </a:solidFill>
-                <a:latin typeface="Noto Sans CJK KR"/>
-              </a:defRPr>
-            </a:pPr>
-            <a:r>
-              <a:t>권장 순서: ① 내 오류를 확인  ② Complete와 diff  ③ 꼭 필요할 때만 backup 후 복사</a:t>
-            </a:r>
-          </a:p>
-        </p:txBody>
-      </p:sp>
-      <p:sp>
-        <p:nvSpPr>
-          <p:cNvPr id="8" name="Rounded Rectangle 7"/>
+              <a:t>현재 단계 오류 대응    |    현재 폴더 ~/ros2_curri/my_agv_ws    |    현재 터미널</a:t>
+            </a:r>
+          </a:p>
+        </p:txBody>
+      </p:sp>
+      <p:sp>
+        <p:nvSpPr>
+          <p:cNvPr id="7" name="Rounded Rectangle 6"/>
           <p:cNvSpPr/>
           <p:nvPr/>
         </p:nvSpPr>
         <p:spPr>
           <a:xfrm>
-            <a:off x="676656" y="2423160"/>
-            <a:ext cx="10881360" cy="2606040"/>
+            <a:off x="694944" y="1755648"/>
+            <a:ext cx="10972800" cy="1115568"/>
           </a:xfrm>
           <a:prstGeom prst="roundRect">
             <a:avLst/>
           </a:prstGeom>
           <a:solidFill>
-            <a:srgbClr val="1D232D"/>
+            <a:srgbClr val="FFF7F4"/>
           </a:solidFill>
           <a:ln>
             <a:solidFill>
-              <a:srgbClr val="1D232D"/>
+              <a:srgbClr val="EDBEB4"/>
             </a:solidFill>
           </a:ln>
         </p:spPr>
@@ -26929,52 +27955,232 @@
           </a:fontRef>
         </p:style>
         <p:txBody>
-          <a:bodyPr rtlCol="0" anchor="ctr" wrap="square" lIns="73152" rIns="73152" tIns="36576" bIns="36576"/>
-          <a:lstStyle/>
-          <a:p>
-            <a:pPr algn="l">
-              <a:spcAft>
-                <a:spcPts val="0"/>
-              </a:spcAft>
-              <a:defRPr sz="1400" b="0">
-                <a:solidFill>
-                  <a:srgbClr val="FFFFFF"/>
-                </a:solidFill>
-                <a:latin typeface="DejaVu Sans Mono"/>
-              </a:defRPr>
-            </a:pPr>
-            <a:r>
-              <a:t>cd ~/ros2_curri</a:t>
+          <a:bodyPr rtlCol="0" anchor="ctr"/>
+          <a:lstStyle/>
+          <a:p>
+            <a:pPr algn="ctr"/>
+          </a:p>
+        </p:txBody>
+      </p:sp>
+      <p:sp>
+        <p:nvSpPr>
+          <p:cNvPr id="8" name="TextBox 7"/>
+          <p:cNvSpPr txBox="1"/>
+          <p:nvPr/>
+        </p:nvSpPr>
+        <p:spPr>
+          <a:xfrm>
+            <a:off x="896112" y="1901952"/>
+            <a:ext cx="2926080" cy="274320"/>
+          </a:xfrm>
+          <a:prstGeom prst="rect">
+            <a:avLst/>
+          </a:prstGeom>
+          <a:noFill/>
+        </p:spPr>
+        <p:txBody>
+          <a:bodyPr wrap="square" lIns="73152" rIns="73152" tIns="36576" bIns="36576">
+            <a:spAutoFit/>
+          </a:bodyPr>
+          <a:lstStyle/>
+          <a:p>
+            <a:pPr algn="l">
+              <a:spcAft>
+                <a:spcPts val="0"/>
+              </a:spcAft>
+              <a:defRPr sz="1800" b="1">
+                <a:solidFill>
+                  <a:srgbClr val="BE3B3B"/>
+                </a:solidFill>
+                <a:latin typeface="Noto Sans CJK KR"/>
+              </a:defRPr>
+            </a:pPr>
+            <a:r>
+              <a:t>증상 1: 장애물이 있는데 멈추지 않음</a:t>
+            </a:r>
+          </a:p>
+        </p:txBody>
+      </p:sp>
+      <p:sp>
+        <p:nvSpPr>
+          <p:cNvPr id="9" name="TextBox 8"/>
+          <p:cNvSpPr txBox="1"/>
+          <p:nvPr/>
+        </p:nvSpPr>
+        <p:spPr>
+          <a:xfrm>
+            <a:off x="3794760" y="1883664"/>
+            <a:ext cx="7543800" cy="621792"/>
+          </a:xfrm>
+          <a:prstGeom prst="rect">
+            <a:avLst/>
+          </a:prstGeom>
+          <a:noFill/>
+        </p:spPr>
+        <p:txBody>
+          <a:bodyPr wrap="square" lIns="73152" rIns="73152" tIns="36576" bIns="36576">
+            <a:spAutoFit/>
+          </a:bodyPr>
+          <a:lstStyle/>
+          <a:p>
+            <a:pPr algn="l">
+              <a:spcAft>
+                <a:spcPts val="0"/>
+              </a:spcAft>
+              <a:defRPr sz="1600" b="0">
+                <a:solidFill>
+                  <a:srgbClr val="122C4E"/>
+                </a:solidFill>
+                <a:latin typeface="Noto Sans CJK KR"/>
+              </a:defRPr>
+            </a:pPr>
+            <a:r>
+              <a:t>우선 확인: sector 각도·finite range·threshold m 단위를 확인한다.</a:t>
             </a:r>
             <a:br/>
             <a:r>
-              <a:t>diff -ru my_agv_ws/src blocks/E_autonomy_logic/M18_obstacle_perception/complete/agv_ws/src || true</a:t>
+              <a:t>수정 후: ros2 topic info /cmd_vel_raw</a:t>
+            </a:r>
+          </a:p>
+        </p:txBody>
+      </p:sp>
+      <p:sp>
+        <p:nvSpPr>
+          <p:cNvPr id="10" name="Rounded Rectangle 9"/>
+          <p:cNvSpPr/>
+          <p:nvPr/>
+        </p:nvSpPr>
+        <p:spPr>
+          <a:xfrm>
+            <a:off x="694944" y="3172968"/>
+            <a:ext cx="10972800" cy="1115568"/>
+          </a:xfrm>
+          <a:prstGeom prst="roundRect">
+            <a:avLst/>
+          </a:prstGeom>
+          <a:solidFill>
+            <a:srgbClr val="FFF7F4"/>
+          </a:solidFill>
+          <a:ln>
+            <a:solidFill>
+              <a:srgbClr val="EDBEB4"/>
+            </a:solidFill>
+          </a:ln>
+        </p:spPr>
+        <p:style>
+          <a:lnRef idx="1">
+            <a:schemeClr val="accent1"/>
+          </a:lnRef>
+          <a:fillRef idx="3">
+            <a:schemeClr val="accent1"/>
+          </a:fillRef>
+          <a:effectRef idx="2">
+            <a:schemeClr val="accent1"/>
+          </a:effectRef>
+          <a:fontRef idx="minor">
+            <a:schemeClr val="lt1"/>
+          </a:fontRef>
+        </p:style>
+        <p:txBody>
+          <a:bodyPr rtlCol="0" anchor="ctr"/>
+          <a:lstStyle/>
+          <a:p>
+            <a:pPr algn="ctr"/>
+          </a:p>
+        </p:txBody>
+      </p:sp>
+      <p:sp>
+        <p:nvSpPr>
+          <p:cNvPr id="11" name="TextBox 10"/>
+          <p:cNvSpPr txBox="1"/>
+          <p:nvPr/>
+        </p:nvSpPr>
+        <p:spPr>
+          <a:xfrm>
+            <a:off x="896112" y="3319272"/>
+            <a:ext cx="2926080" cy="274320"/>
+          </a:xfrm>
+          <a:prstGeom prst="rect">
+            <a:avLst/>
+          </a:prstGeom>
+          <a:noFill/>
+        </p:spPr>
+        <p:txBody>
+          <a:bodyPr wrap="square" lIns="73152" rIns="73152" tIns="36576" bIns="36576">
+            <a:spAutoFit/>
+          </a:bodyPr>
+          <a:lstStyle/>
+          <a:p>
+            <a:pPr algn="l">
+              <a:spcAft>
+                <a:spcPts val="0"/>
+              </a:spcAft>
+              <a:defRPr sz="1800" b="1">
+                <a:solidFill>
+                  <a:srgbClr val="BE3B3B"/>
+                </a:solidFill>
+                <a:latin typeface="Noto Sans CJK KR"/>
+              </a:defRPr>
+            </a:pPr>
+            <a:r>
+              <a:t>증상 2: 항상 STOP</a:t>
+            </a:r>
+          </a:p>
+        </p:txBody>
+      </p:sp>
+      <p:sp>
+        <p:nvSpPr>
+          <p:cNvPr id="12" name="TextBox 11"/>
+          <p:cNvSpPr txBox="1"/>
+          <p:nvPr/>
+        </p:nvSpPr>
+        <p:spPr>
+          <a:xfrm>
+            <a:off x="3794760" y="3300984"/>
+            <a:ext cx="7543800" cy="621792"/>
+          </a:xfrm>
+          <a:prstGeom prst="rect">
+            <a:avLst/>
+          </a:prstGeom>
+          <a:noFill/>
+        </p:spPr>
+        <p:txBody>
+          <a:bodyPr wrap="square" lIns="73152" rIns="73152" tIns="36576" bIns="36576">
+            <a:spAutoFit/>
+          </a:bodyPr>
+          <a:lstStyle/>
+          <a:p>
+            <a:pPr algn="l">
+              <a:spcAft>
+                <a:spcPts val="0"/>
+              </a:spcAft>
+              <a:defRPr sz="1600" b="0">
+                <a:solidFill>
+                  <a:srgbClr val="122C4E"/>
+                </a:solidFill>
+                <a:latin typeface="Noto Sans CJK KR"/>
+              </a:defRPr>
+            </a:pPr>
+            <a:r>
+              <a:t>우선 확인: inf/NaN 처리와 lidar frame 전방 방향을 확인한다.</a:t>
             </a:r>
             <a:br/>
             <a:r>
-              <a:t>cp -a my_agv_ws/src my_agv_ws/src_before_M18</a:t>
-            </a:r>
-            <a:br/>
-            <a:r>
-              <a:t>cp -a blocks/E_autonomy_logic/M18_obstacle_perception/complete/agv_ws/src/. my_agv_ws/src/</a:t>
-            </a:r>
-            <a:br/>
-            <a:r>
-              <a:t>cd my_agv_ws &amp;&amp; colcon build --symlink-install &amp;&amp; source install/setup.bash</a:t>
-            </a:r>
-          </a:p>
-        </p:txBody>
-      </p:sp>
-      <p:sp>
-        <p:nvSpPr>
-          <p:cNvPr id="9" name="TextBox 8"/>
-          <p:cNvSpPr txBox="1"/>
-          <p:nvPr/>
-        </p:nvSpPr>
-        <p:spPr>
-          <a:xfrm>
-            <a:off x="786384" y="5413248"/>
-            <a:ext cx="10424160" cy="429768"/>
+              <a:t>수정 후: ros2 topic info /cmd_vel_raw</a:t>
+            </a:r>
+          </a:p>
+        </p:txBody>
+      </p:sp>
+      <p:sp>
+        <p:nvSpPr>
+          <p:cNvPr id="13" name="TextBox 12"/>
+          <p:cNvSpPr txBox="1"/>
+          <p:nvPr/>
+        </p:nvSpPr>
+        <p:spPr>
+          <a:xfrm>
+            <a:off x="822960" y="5102352"/>
+            <a:ext cx="10607040" cy="402336"/>
           </a:xfrm>
           <a:prstGeom prst="rect">
             <a:avLst/>
@@ -26991,15 +28197,15 @@
               <a:spcAft>
                 <a:spcPts val="0"/>
               </a:spcAft>
-              <a:defRPr sz="1700" b="1">
-                <a:solidFill>
-                  <a:srgbClr val="2A8B5A"/>
-                </a:solidFill>
-                <a:latin typeface="Noto Sans CJK KR"/>
-              </a:defRPr>
-            </a:pPr>
-            <a:r>
-              <a:t>복구 뒤에는 끝내지 말고, 내 파일과 Complete의 차이를 한 줄씩 설명한 뒤 다시 직접 입력해 봅니다.</a:t>
+              <a:defRPr sz="1800" b="1">
+                <a:solidFill>
+                  <a:srgbClr val="DB7E22"/>
+                </a:solidFill>
+                <a:latin typeface="Noto Sans CJK KR"/>
+              </a:defRPr>
+            </a:pPr>
+            <a:r>
+              <a:t>공통 순서: ① 현재 폴더 ② source ③ 파일 경로 ④ 이름/타입/단위 ⑤ build·source 후 재실행</a:t>
             </a:r>
           </a:p>
         </p:txBody>
@@ -27056,7 +28262,7 @@
               </a:defRPr>
             </a:pPr>
             <a:r>
-              <a:t>미니 실습: 값 하나를 바꾸고 결과를 비교한다</a:t>
+              <a:t>막혔을 때만: Complete를 복구용으로 사용한다</a:t>
             </a:r>
           </a:p>
         </p:txBody>
@@ -27095,7 +28301,7 @@
               </a:defRPr>
             </a:pPr>
             <a:r>
-              <a:t>정상 결과를 만든 뒤에는 한 번에 하나의 값만 바꿉니다.</a:t>
+              <a:t>이 슬라이드가 먼저가 아닙니다. 직접 입력·실행을 시도한 뒤에만 내 파일과 Complete를 비교합니다.</a:t>
             </a:r>
           </a:p>
         </p:txBody>
@@ -27231,31 +28437,70 @@
               </a:defRPr>
             </a:pPr>
             <a:r>
-              <a:t>현재 단계 미니 실습    |    현재 폴더 ~/ros2_curri/my_agv_ws    |    현재 터미널</a:t>
-            </a:r>
-          </a:p>
-        </p:txBody>
-      </p:sp>
-      <p:sp>
-        <p:nvSpPr>
-          <p:cNvPr id="7" name="Rounded Rectangle 6"/>
+              <a:t>현재 단계 복구용 Complete    |    현재 폴더 ~/ros2_curri    |    현재 터미널</a:t>
+            </a:r>
+          </a:p>
+        </p:txBody>
+      </p:sp>
+      <p:sp>
+        <p:nvSpPr>
+          <p:cNvPr id="7" name="TextBox 6"/>
+          <p:cNvSpPr txBox="1"/>
+          <p:nvPr/>
+        </p:nvSpPr>
+        <p:spPr>
+          <a:xfrm>
+            <a:off x="713232" y="1664208"/>
+            <a:ext cx="10698480" cy="402336"/>
+          </a:xfrm>
+          <a:prstGeom prst="rect">
+            <a:avLst/>
+          </a:prstGeom>
+          <a:noFill/>
+        </p:spPr>
+        <p:txBody>
+          <a:bodyPr wrap="square" lIns="73152" rIns="73152" tIns="36576" bIns="36576">
+            <a:spAutoFit/>
+          </a:bodyPr>
+          <a:lstStyle/>
+          <a:p>
+            <a:pPr algn="ctr">
+              <a:spcAft>
+                <a:spcPts val="0"/>
+              </a:spcAft>
+              <a:defRPr sz="1800" b="1">
+                <a:solidFill>
+                  <a:srgbClr val="DB7E22"/>
+                </a:solidFill>
+                <a:latin typeface="Noto Sans CJK KR"/>
+              </a:defRPr>
+            </a:pPr>
+            <a:r>
+              <a:t>권장 순서: ① 내 오류를 확인  ② Complete와 diff  ③ 꼭 필요할 때만 backup 후 복사</a:t>
+            </a:r>
+          </a:p>
+        </p:txBody>
+      </p:sp>
+      <p:sp>
+        <p:nvSpPr>
+          <p:cNvPr id="8" name="Rounded Rectangle 7"/>
           <p:cNvSpPr/>
           <p:nvPr/>
         </p:nvSpPr>
         <p:spPr>
           <a:xfrm>
-            <a:off x="749808" y="1874519"/>
-            <a:ext cx="10652760" cy="1993392"/>
+            <a:off x="676656" y="2423160"/>
+            <a:ext cx="10881360" cy="2606040"/>
           </a:xfrm>
           <a:prstGeom prst="roundRect">
             <a:avLst/>
           </a:prstGeom>
           <a:solidFill>
-            <a:srgbClr val="FFF8EB"/>
+            <a:srgbClr val="1D232D"/>
           </a:solidFill>
           <a:ln>
             <a:solidFill>
-              <a:srgbClr val="ECC680"/>
+              <a:srgbClr val="1D232D"/>
             </a:solidFill>
           </a:ln>
         </p:spPr>
@@ -27274,61 +28519,125 @@
           </a:fontRef>
         </p:style>
         <p:txBody>
-          <a:bodyPr rtlCol="0" anchor="ctr" wrap="square" lIns="73152" rIns="73152" tIns="36576" bIns="36576"/>
+          <a:bodyPr rtlCol="0" anchor="ctr" wrap="square" lIns="109728" rIns="109728" tIns="73152" bIns="73152"/>
+          <a:lstStyle/>
+          <a:p>
+            <a:pPr algn="l">
+              <a:spcAft>
+                <a:spcPts val="0"/>
+              </a:spcAft>
+              <a:defRPr sz="1400" b="0">
+                <a:solidFill>
+                  <a:srgbClr val="FFFFFF"/>
+                </a:solidFill>
+                <a:latin typeface="DejaVu Sans Mono"/>
+              </a:defRPr>
+            </a:pPr>
+            <a:r>
+              <a:t>cd ~/ros2_curri</a:t>
+            </a:r>
+          </a:p>
+          <a:p>
+            <a:pPr algn="l">
+              <a:spcAft>
+                <a:spcPts val="0"/>
+              </a:spcAft>
+              <a:defRPr sz="1400" b="0">
+                <a:solidFill>
+                  <a:srgbClr val="FFFFFF"/>
+                </a:solidFill>
+                <a:latin typeface="DejaVu Sans Mono"/>
+              </a:defRPr>
+            </a:pPr>
+            <a:r>
+              <a:t>diff -ru my_agv_ws/src blocks/E_autonomy_logic/M18_obstacle_perception/complete/agv_ws/src || true</a:t>
+            </a:r>
+          </a:p>
+          <a:p>
+            <a:pPr algn="l">
+              <a:spcAft>
+                <a:spcPts val="0"/>
+              </a:spcAft>
+              <a:defRPr sz="1400" b="0">
+                <a:solidFill>
+                  <a:srgbClr val="FFFFFF"/>
+                </a:solidFill>
+                <a:latin typeface="DejaVu Sans Mono"/>
+              </a:defRPr>
+            </a:pPr>
+            <a:r>
+              <a:t>cp -a my_agv_ws/src my_agv_ws/src_before_M18</a:t>
+            </a:r>
+          </a:p>
+          <a:p>
+            <a:pPr algn="l">
+              <a:spcAft>
+                <a:spcPts val="0"/>
+              </a:spcAft>
+              <a:defRPr sz="1400" b="0">
+                <a:solidFill>
+                  <a:srgbClr val="FFFFFF"/>
+                </a:solidFill>
+                <a:latin typeface="DejaVu Sans Mono"/>
+              </a:defRPr>
+            </a:pPr>
+            <a:r>
+              <a:t>cp -a blocks/E_autonomy_logic/M18_obstacle_perception/complete/agv_ws/src/. my_agv_ws/src/</a:t>
+            </a:r>
+          </a:p>
+          <a:p>
+            <a:pPr algn="l">
+              <a:spcAft>
+                <a:spcPts val="0"/>
+              </a:spcAft>
+              <a:defRPr sz="1400" b="0">
+                <a:solidFill>
+                  <a:srgbClr val="FFFFFF"/>
+                </a:solidFill>
+                <a:latin typeface="DejaVu Sans Mono"/>
+              </a:defRPr>
+            </a:pPr>
+            <a:r>
+              <a:t>cd my_agv_ws &amp;&amp; colcon build --symlink-install &amp;&amp; source install/setup.bash</a:t>
+            </a:r>
+          </a:p>
+        </p:txBody>
+      </p:sp>
+      <p:sp>
+        <p:nvSpPr>
+          <p:cNvPr id="9" name="TextBox 8"/>
+          <p:cNvSpPr txBox="1"/>
+          <p:nvPr/>
+        </p:nvSpPr>
+        <p:spPr>
+          <a:xfrm>
+            <a:off x="786384" y="5413248"/>
+            <a:ext cx="10424160" cy="429768"/>
+          </a:xfrm>
+          <a:prstGeom prst="rect">
+            <a:avLst/>
+          </a:prstGeom>
+          <a:noFill/>
+        </p:spPr>
+        <p:txBody>
+          <a:bodyPr wrap="square" lIns="73152" rIns="73152" tIns="36576" bIns="36576">
+            <a:spAutoFit/>
+          </a:bodyPr>
           <a:lstStyle/>
           <a:p>
             <a:pPr algn="ctr">
               <a:spcAft>
                 <a:spcPts val="0"/>
               </a:spcAft>
-              <a:defRPr sz="2300" b="1">
-                <a:solidFill>
-                  <a:srgbClr val="122C4E"/>
-                </a:solidFill>
-                <a:latin typeface="Noto Sans CJK KR"/>
-              </a:defRPr>
-            </a:pPr>
-            <a:r>
-              <a:t>stop_distance 0.50→0.80 m로 바꾸면 어떤 상황에서 더 일찍 멈추는지 /cmd_vel 로그 기준으로 작성한다.</a:t>
-            </a:r>
-          </a:p>
-        </p:txBody>
-      </p:sp>
-      <p:sp>
-        <p:nvSpPr>
-          <p:cNvPr id="8" name="TextBox 7"/>
-          <p:cNvSpPr txBox="1"/>
-          <p:nvPr/>
-        </p:nvSpPr>
-        <p:spPr>
-          <a:xfrm>
-            <a:off x="877824" y="4590288"/>
-            <a:ext cx="10241280" cy="594360"/>
-          </a:xfrm>
-          <a:prstGeom prst="rect">
-            <a:avLst/>
-          </a:prstGeom>
-          <a:noFill/>
-        </p:spPr>
-        <p:txBody>
-          <a:bodyPr wrap="square" lIns="73152" rIns="73152" tIns="36576" bIns="36576">
-            <a:spAutoFit/>
-          </a:bodyPr>
-          <a:lstStyle/>
-          <a:p>
-            <a:pPr algn="ctr">
-              <a:spcAft>
-                <a:spcPts val="0"/>
-              </a:spcAft>
-              <a:defRPr sz="1900" b="1">
-                <a:solidFill>
-                  <a:srgbClr val="DB7E22"/>
-                </a:solidFill>
-                <a:latin typeface="Noto Sans CJK KR"/>
-              </a:defRPr>
-            </a:pPr>
-            <a:r>
-              <a:t>기록할 것: 바꾼 값(단위) · 기대한 변화 · 실제 출력/화면 · 원래 값으로 되돌린 결과</a:t>
+              <a:defRPr sz="1700" b="1">
+                <a:solidFill>
+                  <a:srgbClr val="2A8B5A"/>
+                </a:solidFill>
+                <a:latin typeface="Noto Sans CJK KR"/>
+              </a:defRPr>
+            </a:pPr>
+            <a:r>
+              <a:t>복구 뒤에는 끝내지 말고, 내 파일과 Complete의 차이를 한 줄씩 설명한 뒤 다시 직접 입력해 봅니다.</a:t>
             </a:r>
           </a:p>
         </p:txBody>
@@ -27385,7 +28694,7 @@
               </a:defRPr>
             </a:pPr>
             <a:r>
-              <a:t>내 프로젝트 체크포인트를 저장하고 다음 모듈로 넘긴다</a:t>
+              <a:t>미니 실습: 값 하나를 바꾸고 결과를 비교한다</a:t>
             </a:r>
           </a:p>
         </p:txBody>
@@ -27424,7 +28733,7 @@
               </a:defRPr>
             </a:pPr>
             <a:r>
-              <a:t>Complete는 복구용 비교 기준이고, 다음 단계는 내가 직접 만든 workspace에서 계속합니다.</a:t>
+              <a:t>정상 결과를 만든 뒤에는 한 번에 하나의 값만 바꿉니다.</a:t>
             </a:r>
           </a:p>
         </p:txBody>
@@ -27560,7 +28869,7 @@
               </a:defRPr>
             </a:pPr>
             <a:r>
-              <a:t>현재 단계 체크포인트    |    현재 폴더 ~/ros2_curri/my_agv_ws    |    현재 터미널</a:t>
+              <a:t>현재 단계 미니 실습    |    현재 폴더 ~/ros2_curri/my_agv_ws    |    현재 터미널</a:t>
             </a:r>
           </a:p>
         </p:txBody>
@@ -27573,18 +28882,18 @@
         </p:nvSpPr>
         <p:spPr>
           <a:xfrm>
-            <a:off x="685800" y="1737360"/>
-            <a:ext cx="10972800" cy="3611880"/>
+            <a:off x="749808" y="1874519"/>
+            <a:ext cx="10652760" cy="1993392"/>
           </a:xfrm>
           <a:prstGeom prst="roundRect">
             <a:avLst/>
           </a:prstGeom>
           <a:solidFill>
-            <a:srgbClr val="F4F7FB"/>
+            <a:srgbClr val="FFF8EB"/>
           </a:solidFill>
           <a:ln>
             <a:solidFill>
-              <a:srgbClr val="D2DCE8"/>
+              <a:srgbClr val="ECC680"/>
             </a:solidFill>
           </a:ln>
         </p:spPr>
@@ -27603,10 +28912,23 @@
           </a:fontRef>
         </p:style>
         <p:txBody>
-          <a:bodyPr rtlCol="0" anchor="ctr"/>
-          <a:lstStyle/>
-          <a:p>
-            <a:pPr algn="ctr"/>
+          <a:bodyPr rtlCol="0" anchor="ctr" wrap="square" lIns="73152" rIns="73152" tIns="36576" bIns="36576"/>
+          <a:lstStyle/>
+          <a:p>
+            <a:pPr algn="ctr">
+              <a:spcAft>
+                <a:spcPts val="0"/>
+              </a:spcAft>
+              <a:defRPr sz="2300" b="1">
+                <a:solidFill>
+                  <a:srgbClr val="122C4E"/>
+                </a:solidFill>
+                <a:latin typeface="Noto Sans CJK KR"/>
+              </a:defRPr>
+            </a:pPr>
+            <a:r>
+              <a:t>stop_distance 0.50→0.80 m로 바꾸면 어떤 상황에서 더 일찍 멈추는지 /cmd_vel 로그 기준으로 작성한다.</a:t>
+            </a:r>
           </a:p>
         </p:txBody>
       </p:sp>
@@ -27618,111 +28940,8 @@
         </p:nvSpPr>
         <p:spPr>
           <a:xfrm>
-            <a:off x="896112" y="1993392"/>
-            <a:ext cx="10332720" cy="2971800"/>
-          </a:xfrm>
-          <a:prstGeom prst="rect">
-            <a:avLst/>
-          </a:prstGeom>
-          <a:noFill/>
-        </p:spPr>
-        <p:txBody>
-          <a:bodyPr wrap="square" lIns="109728" rIns="109728">
-            <a:spAutoFit/>
-          </a:bodyPr>
-          <a:lstStyle/>
-          <a:p>
-            <a:pPr>
-              <a:spcAft>
-                <a:spcPts val="800"/>
-              </a:spcAft>
-              <a:defRPr sz="1800">
-                <a:solidFill>
-                  <a:srgbClr val="122C4E"/>
-                </a:solidFill>
-                <a:latin typeface="Noto Sans CJK KR"/>
-              </a:defRPr>
-            </a:pPr>
-            <a:r>
-              <a:t>• □ 완료 화면: 0.5 m 안 장애물에서 forward cmd_vel이 zero Twist로 바뀌는 조건을 설명한다.</a:t>
-            </a:r>
-          </a:p>
-          <a:p>
-            <a:pPr>
-              <a:spcAft>
-                <a:spcPts val="800"/>
-              </a:spcAft>
-              <a:defRPr sz="1800">
-                <a:solidFill>
-                  <a:srgbClr val="122C4E"/>
-                </a:solidFill>
-                <a:latin typeface="Noto Sans CJK KR"/>
-              </a:defRPr>
-            </a:pPr>
-            <a:r>
-              <a:t>• □ 막혔을 때 비교할 Complete: blocks/E_autonomy_logic/M18_obstacle_perception/complete/</a:t>
-            </a:r>
-          </a:p>
-          <a:p>
-            <a:pPr>
-              <a:spcAft>
-                <a:spcPts val="800"/>
-              </a:spcAft>
-              <a:defRPr sz="1800">
-                <a:solidFill>
-                  <a:srgbClr val="122C4E"/>
-                </a:solidFill>
-                <a:latin typeface="Noto Sans CJK KR"/>
-              </a:defRPr>
-            </a:pPr>
-            <a:r>
-              <a:t>• □ 정상 로그·캡처: logs/validation.log, screenshots/validation_terminal.png</a:t>
-            </a:r>
-          </a:p>
-          <a:p>
-            <a:pPr>
-              <a:spcAft>
-                <a:spcPts val="800"/>
-              </a:spcAft>
-              <a:defRPr sz="1800">
-                <a:solidFill>
-                  <a:srgbClr val="122C4E"/>
-                </a:solidFill>
-                <a:latin typeface="Noto Sans CJK KR"/>
-              </a:defRPr>
-            </a:pPr>
-            <a:r>
-              <a:t>• □ 버전 식별: CHECKSUM_or_TAG.txt의 SHA-256 manifest</a:t>
-            </a:r>
-          </a:p>
-          <a:p>
-            <a:pPr>
-              <a:spcAft>
-                <a:spcPts val="800"/>
-              </a:spcAft>
-              <a:defRPr sz="1800">
-                <a:solidFill>
-                  <a:srgbClr val="122C4E"/>
-                </a:solidFill>
-                <a:latin typeface="Noto Sans CJK KR"/>
-              </a:defRPr>
-            </a:pPr>
-            <a:r>
-              <a:t>• □ 다음 시작 조건: M19 FSM</a:t>
-            </a:r>
-          </a:p>
-        </p:txBody>
-      </p:sp>
-      <p:sp>
-        <p:nvSpPr>
-          <p:cNvPr id="9" name="TextBox 8"/>
-          <p:cNvSpPr txBox="1"/>
-          <p:nvPr/>
-        </p:nvSpPr>
-        <p:spPr>
-          <a:xfrm>
-            <a:off x="868680" y="5596128"/>
-            <a:ext cx="10515600" cy="338328"/>
+            <a:off x="877824" y="4590288"/>
+            <a:ext cx="10241280" cy="594360"/>
           </a:xfrm>
           <a:prstGeom prst="rect">
             <a:avLst/>
@@ -27739,15 +28958,15 @@
               <a:spcAft>
                 <a:spcPts val="0"/>
               </a:spcAft>
-              <a:defRPr sz="1700" b="1">
-                <a:solidFill>
-                  <a:srgbClr val="2A8B5A"/>
-                </a:solidFill>
-                <a:latin typeface="Noto Sans CJK KR"/>
-              </a:defRPr>
-            </a:pPr>
-            <a:r>
-              <a:t>다음 모듈을 시작하기 전, 내 src의 변경사항을 저장하고 현재 완료 조건을 다시 확인합니다.</a:t>
+              <a:defRPr sz="1900" b="1">
+                <a:solidFill>
+                  <a:srgbClr val="DB7E22"/>
+                </a:solidFill>
+                <a:latin typeface="Noto Sans CJK KR"/>
+              </a:defRPr>
+            </a:pPr>
+            <a:r>
+              <a:t>기록할 것: 바꾼 값(단위) · 기대한 변화 · 실제 출력/화면 · 원래 값으로 되돌린 결과</a:t>
             </a:r>
           </a:p>
         </p:txBody>
@@ -27761,6 +28980,425 @@
 </file>
 
 <file path=ppt/slides/slide44.xml><?xml version="1.0" encoding="utf-8"?>
+<p:sld xmlns:a="http://schemas.openxmlformats.org/drawingml/2006/main" xmlns:p="http://schemas.openxmlformats.org/presentationml/2006/main" xmlns:r="http://schemas.openxmlformats.org/officeDocument/2006/relationships">
+  <p:cSld>
+    <p:spTree>
+      <p:nvGrpSpPr>
+        <p:cNvPr id="1" name=""/>
+        <p:cNvGrpSpPr/>
+        <p:nvPr/>
+      </p:nvGrpSpPr>
+      <p:grpSpPr/>
+      <p:sp>
+        <p:nvSpPr>
+          <p:cNvPr id="2" name="TextBox 1"/>
+          <p:cNvSpPr txBox="1"/>
+          <p:nvPr/>
+        </p:nvSpPr>
+        <p:spPr>
+          <a:xfrm>
+            <a:off x="566928" y="347472"/>
+            <a:ext cx="10881360" cy="438912"/>
+          </a:xfrm>
+          <a:prstGeom prst="rect">
+            <a:avLst/>
+          </a:prstGeom>
+          <a:noFill/>
+        </p:spPr>
+        <p:txBody>
+          <a:bodyPr wrap="square" lIns="73152" rIns="73152" tIns="36576" bIns="36576">
+            <a:spAutoFit/>
+          </a:bodyPr>
+          <a:lstStyle/>
+          <a:p>
+            <a:pPr algn="l">
+              <a:spcAft>
+                <a:spcPts val="0"/>
+              </a:spcAft>
+              <a:defRPr sz="3200" b="1">
+                <a:solidFill>
+                  <a:srgbClr val="122C4E"/>
+                </a:solidFill>
+                <a:latin typeface="Noto Sans CJK KR"/>
+              </a:defRPr>
+            </a:pPr>
+            <a:r>
+              <a:t>내 프로젝트 체크포인트를 저장하고 다음 모듈로 넘긴다</a:t>
+            </a:r>
+          </a:p>
+        </p:txBody>
+      </p:sp>
+      <p:sp>
+        <p:nvSpPr>
+          <p:cNvPr id="3" name="TextBox 2"/>
+          <p:cNvSpPr txBox="1"/>
+          <p:nvPr/>
+        </p:nvSpPr>
+        <p:spPr>
+          <a:xfrm>
+            <a:off x="603504" y="859536"/>
+            <a:ext cx="10698480" cy="292608"/>
+          </a:xfrm>
+          <a:prstGeom prst="rect">
+            <a:avLst/>
+          </a:prstGeom>
+          <a:noFill/>
+        </p:spPr>
+        <p:txBody>
+          <a:bodyPr wrap="square" lIns="73152" rIns="73152" tIns="36576" bIns="36576">
+            <a:spAutoFit/>
+          </a:bodyPr>
+          <a:lstStyle/>
+          <a:p>
+            <a:pPr algn="l">
+              <a:spcAft>
+                <a:spcPts val="0"/>
+              </a:spcAft>
+              <a:defRPr sz="1700" b="0">
+                <a:solidFill>
+                  <a:srgbClr val="5C6672"/>
+                </a:solidFill>
+                <a:latin typeface="Noto Sans CJK KR"/>
+              </a:defRPr>
+            </a:pPr>
+            <a:r>
+              <a:t>Complete는 복구용 비교 기준이고, 다음 단계는 내가 직접 만든 workspace에서 계속합니다.</a:t>
+            </a:r>
+          </a:p>
+        </p:txBody>
+      </p:sp>
+      <p:sp>
+        <p:nvSpPr>
+          <p:cNvPr id="4" name="TextBox 3"/>
+          <p:cNvSpPr txBox="1"/>
+          <p:nvPr/>
+        </p:nvSpPr>
+        <p:spPr>
+          <a:xfrm>
+            <a:off x="530352" y="6510528"/>
+            <a:ext cx="7772400" cy="201168"/>
+          </a:xfrm>
+          <a:prstGeom prst="rect">
+            <a:avLst/>
+          </a:prstGeom>
+          <a:noFill/>
+        </p:spPr>
+        <p:txBody>
+          <a:bodyPr wrap="square" lIns="73152" rIns="73152" tIns="36576" bIns="36576">
+            <a:spAutoFit/>
+          </a:bodyPr>
+          <a:lstStyle/>
+          <a:p>
+            <a:pPr algn="l">
+              <a:spcAft>
+                <a:spcPts val="0"/>
+              </a:spcAft>
+              <a:defRPr sz="900" b="0">
+                <a:solidFill>
+                  <a:srgbClr val="5C6672"/>
+                </a:solidFill>
+                <a:latin typeface="Noto Sans CJK KR"/>
+              </a:defRPr>
+            </a:pPr>
+            <a:r>
+              <a:t>ROS 2 기반 AGV End-to-End 개발 커리큘럼 · M18 · Block E</a:t>
+            </a:r>
+          </a:p>
+        </p:txBody>
+      </p:sp>
+      <p:sp>
+        <p:nvSpPr>
+          <p:cNvPr id="5" name="TextBox 4"/>
+          <p:cNvSpPr txBox="1"/>
+          <p:nvPr/>
+        </p:nvSpPr>
+        <p:spPr>
+          <a:xfrm>
+            <a:off x="9144000" y="6510528"/>
+            <a:ext cx="2468880" cy="201168"/>
+          </a:xfrm>
+          <a:prstGeom prst="rect">
+            <a:avLst/>
+          </a:prstGeom>
+          <a:noFill/>
+        </p:spPr>
+        <p:txBody>
+          <a:bodyPr wrap="square" lIns="73152" rIns="73152" tIns="36576" bIns="36576">
+            <a:spAutoFit/>
+          </a:bodyPr>
+          <a:lstStyle/>
+          <a:p>
+            <a:pPr algn="r">
+              <a:spcAft>
+                <a:spcPts val="0"/>
+              </a:spcAft>
+              <a:defRPr sz="1000" b="0">
+                <a:solidFill>
+                  <a:srgbClr val="5C6672"/>
+                </a:solidFill>
+                <a:latin typeface="Noto Sans CJK KR"/>
+              </a:defRPr>
+            </a:pPr>
+            <a:r>
+              <a:t>명령·파일 경로는 슬라이드에서 복사 가능</a:t>
+            </a:r>
+          </a:p>
+        </p:txBody>
+      </p:sp>
+      <p:sp>
+        <p:nvSpPr>
+          <p:cNvPr id="6" name="Rectangle 5"/>
+          <p:cNvSpPr/>
+          <p:nvPr/>
+        </p:nvSpPr>
+        <p:spPr>
+          <a:xfrm>
+            <a:off x="566928" y="1188720"/>
+            <a:ext cx="11064240" cy="347472"/>
+          </a:xfrm>
+          <a:prstGeom prst="rect">
+            <a:avLst/>
+          </a:prstGeom>
+          <a:solidFill>
+            <a:srgbClr val="F4F7FB"/>
+          </a:solidFill>
+          <a:ln>
+            <a:solidFill>
+              <a:srgbClr val="F4F7FB"/>
+            </a:solidFill>
+          </a:ln>
+        </p:spPr>
+        <p:style>
+          <a:lnRef idx="1">
+            <a:schemeClr val="accent1"/>
+          </a:lnRef>
+          <a:fillRef idx="3">
+            <a:schemeClr val="accent1"/>
+          </a:fillRef>
+          <a:effectRef idx="2">
+            <a:schemeClr val="accent1"/>
+          </a:effectRef>
+          <a:fontRef idx="minor">
+            <a:schemeClr val="lt1"/>
+          </a:fontRef>
+        </p:style>
+        <p:txBody>
+          <a:bodyPr rtlCol="0" anchor="ctr" wrap="square" lIns="73152" rIns="73152" tIns="36576" bIns="36576"/>
+          <a:lstStyle/>
+          <a:p>
+            <a:pPr algn="l">
+              <a:spcAft>
+                <a:spcPts val="0"/>
+              </a:spcAft>
+              <a:defRPr sz="1300" b="1">
+                <a:solidFill>
+                  <a:srgbClr val="122C4E"/>
+                </a:solidFill>
+                <a:latin typeface="Noto Sans CJK KR"/>
+              </a:defRPr>
+            </a:pPr>
+            <a:r>
+              <a:t>현재 단계 체크포인트    |    현재 폴더 ~/ros2_curri/my_agv_ws    |    현재 터미널</a:t>
+            </a:r>
+          </a:p>
+        </p:txBody>
+      </p:sp>
+      <p:sp>
+        <p:nvSpPr>
+          <p:cNvPr id="7" name="Rounded Rectangle 6"/>
+          <p:cNvSpPr/>
+          <p:nvPr/>
+        </p:nvSpPr>
+        <p:spPr>
+          <a:xfrm>
+            <a:off x="685800" y="1737360"/>
+            <a:ext cx="10972800" cy="3611880"/>
+          </a:xfrm>
+          <a:prstGeom prst="roundRect">
+            <a:avLst/>
+          </a:prstGeom>
+          <a:solidFill>
+            <a:srgbClr val="F4F7FB"/>
+          </a:solidFill>
+          <a:ln>
+            <a:solidFill>
+              <a:srgbClr val="D2DCE8"/>
+            </a:solidFill>
+          </a:ln>
+        </p:spPr>
+        <p:style>
+          <a:lnRef idx="1">
+            <a:schemeClr val="accent1"/>
+          </a:lnRef>
+          <a:fillRef idx="3">
+            <a:schemeClr val="accent1"/>
+          </a:fillRef>
+          <a:effectRef idx="2">
+            <a:schemeClr val="accent1"/>
+          </a:effectRef>
+          <a:fontRef idx="minor">
+            <a:schemeClr val="lt1"/>
+          </a:fontRef>
+        </p:style>
+        <p:txBody>
+          <a:bodyPr rtlCol="0" anchor="ctr"/>
+          <a:lstStyle/>
+          <a:p>
+            <a:pPr algn="ctr"/>
+          </a:p>
+        </p:txBody>
+      </p:sp>
+      <p:sp>
+        <p:nvSpPr>
+          <p:cNvPr id="8" name="TextBox 7"/>
+          <p:cNvSpPr txBox="1"/>
+          <p:nvPr/>
+        </p:nvSpPr>
+        <p:spPr>
+          <a:xfrm>
+            <a:off x="896112" y="1993392"/>
+            <a:ext cx="10332720" cy="2971800"/>
+          </a:xfrm>
+          <a:prstGeom prst="rect">
+            <a:avLst/>
+          </a:prstGeom>
+          <a:noFill/>
+        </p:spPr>
+        <p:txBody>
+          <a:bodyPr wrap="square" lIns="109728" rIns="109728">
+            <a:spAutoFit/>
+          </a:bodyPr>
+          <a:lstStyle/>
+          <a:p>
+            <a:pPr>
+              <a:spcAft>
+                <a:spcPts val="800"/>
+              </a:spcAft>
+              <a:defRPr sz="1800">
+                <a:solidFill>
+                  <a:srgbClr val="122C4E"/>
+                </a:solidFill>
+                <a:latin typeface="Noto Sans CJK KR"/>
+              </a:defRPr>
+            </a:pPr>
+            <a:r>
+              <a:t>• □ 완료 화면: 0.5 m 안 장애물에서 forward cmd_vel이 zero Twist로 바뀌는 조건을 설명한다.</a:t>
+            </a:r>
+          </a:p>
+          <a:p>
+            <a:pPr>
+              <a:spcAft>
+                <a:spcPts val="800"/>
+              </a:spcAft>
+              <a:defRPr sz="1800">
+                <a:solidFill>
+                  <a:srgbClr val="122C4E"/>
+                </a:solidFill>
+                <a:latin typeface="Noto Sans CJK KR"/>
+              </a:defRPr>
+            </a:pPr>
+            <a:r>
+              <a:t>• □ 막혔을 때 비교할 Complete: blocks/E_autonomy_logic/M18_obstacle_perception/complete/</a:t>
+            </a:r>
+          </a:p>
+          <a:p>
+            <a:pPr>
+              <a:spcAft>
+                <a:spcPts val="800"/>
+              </a:spcAft>
+              <a:defRPr sz="1800">
+                <a:solidFill>
+                  <a:srgbClr val="122C4E"/>
+                </a:solidFill>
+                <a:latin typeface="Noto Sans CJK KR"/>
+              </a:defRPr>
+            </a:pPr>
+            <a:r>
+              <a:t>• □ 정상 로그·캡처: logs/validation.log, screenshots/validation_terminal.png</a:t>
+            </a:r>
+          </a:p>
+          <a:p>
+            <a:pPr>
+              <a:spcAft>
+                <a:spcPts val="800"/>
+              </a:spcAft>
+              <a:defRPr sz="1800">
+                <a:solidFill>
+                  <a:srgbClr val="122C4E"/>
+                </a:solidFill>
+                <a:latin typeface="Noto Sans CJK KR"/>
+              </a:defRPr>
+            </a:pPr>
+            <a:r>
+              <a:t>• □ 버전 식별: CHECKSUM_or_TAG.txt의 SHA-256 manifest</a:t>
+            </a:r>
+          </a:p>
+          <a:p>
+            <a:pPr>
+              <a:spcAft>
+                <a:spcPts val="800"/>
+              </a:spcAft>
+              <a:defRPr sz="1800">
+                <a:solidFill>
+                  <a:srgbClr val="122C4E"/>
+                </a:solidFill>
+                <a:latin typeface="Noto Sans CJK KR"/>
+              </a:defRPr>
+            </a:pPr>
+            <a:r>
+              <a:t>• □ 다음 시작 조건: M19 FSM</a:t>
+            </a:r>
+          </a:p>
+        </p:txBody>
+      </p:sp>
+      <p:sp>
+        <p:nvSpPr>
+          <p:cNvPr id="9" name="TextBox 8"/>
+          <p:cNvSpPr txBox="1"/>
+          <p:nvPr/>
+        </p:nvSpPr>
+        <p:spPr>
+          <a:xfrm>
+            <a:off x="868680" y="5596128"/>
+            <a:ext cx="10515600" cy="338328"/>
+          </a:xfrm>
+          <a:prstGeom prst="rect">
+            <a:avLst/>
+          </a:prstGeom>
+          <a:noFill/>
+        </p:spPr>
+        <p:txBody>
+          <a:bodyPr wrap="square" lIns="73152" rIns="73152" tIns="36576" bIns="36576">
+            <a:spAutoFit/>
+          </a:bodyPr>
+          <a:lstStyle/>
+          <a:p>
+            <a:pPr algn="ctr">
+              <a:spcAft>
+                <a:spcPts val="0"/>
+              </a:spcAft>
+              <a:defRPr sz="1700" b="1">
+                <a:solidFill>
+                  <a:srgbClr val="2A8B5A"/>
+                </a:solidFill>
+                <a:latin typeface="Noto Sans CJK KR"/>
+              </a:defRPr>
+            </a:pPr>
+            <a:r>
+              <a:t>다음 모듈을 시작하기 전, 내 src의 변경사항을 저장하고 현재 완료 조건을 다시 확인합니다.</a:t>
+            </a:r>
+          </a:p>
+        </p:txBody>
+      </p:sp>
+    </p:spTree>
+  </p:cSld>
+  <p:clrMapOvr>
+    <a:masterClrMapping/>
+  </p:clrMapOvr>
+</p:sld>
+</file>
+
+<file path=ppt/slides/slide45.xml><?xml version="1.0" encoding="utf-8"?>
 <p:sld xmlns:a="http://schemas.openxmlformats.org/drawingml/2006/main" xmlns:p="http://schemas.openxmlformats.org/presentationml/2006/main" xmlns:r="http://schemas.openxmlformats.org/officeDocument/2006/relationships">
   <p:cSld>
     <p:spTree>
